--- a/docs/plots/carbo/jx_carbo_linsubhr_ratio_hosp5.pptx
+++ b/docs/plots/carbo/jx_carbo_linsubhr_ratio_hosp5.pptx
@@ -3003,491 +3003,488 @@
           <p:spPr>
             <a:xfrm>
               <a:off x="817517" y="1896563"/>
-              <a:ext cx="7370972" cy="3651735"/>
+              <a:ext cx="7370972" cy="3652166"/>
             </a:xfrm>
             <a:custGeom>
               <a:avLst/>
               <a:pathLst>
-                <a:path w="7370972" h="3651735">
+                <a:path w="7370972" h="3652166">
                   <a:moveTo>
-                    <a:pt x="2553305" y="0"/>
+                    <a:pt x="2625055" y="0"/>
                   </a:moveTo>
                   <a:lnTo>
-                    <a:pt x="2557661" y="29095"/>
-                  </a:lnTo>
-                  <a:lnTo>
-                    <a:pt x="2635295" y="482653"/>
-                  </a:lnTo>
-                  <a:lnTo>
-                    <a:pt x="2712930" y="879440"/>
-                  </a:lnTo>
-                  <a:lnTo>
-                    <a:pt x="2790564" y="1226561"/>
-                  </a:lnTo>
-                  <a:lnTo>
-                    <a:pt x="2868198" y="1530233"/>
-                  </a:lnTo>
-                  <a:lnTo>
-                    <a:pt x="2945832" y="1795894"/>
-                  </a:lnTo>
-                  <a:lnTo>
-                    <a:pt x="3023466" y="2028303"/>
-                  </a:lnTo>
-                  <a:lnTo>
-                    <a:pt x="3101100" y="2231621"/>
-                  </a:lnTo>
-                  <a:lnTo>
-                    <a:pt x="3178734" y="2409490"/>
-                  </a:lnTo>
-                  <a:lnTo>
-                    <a:pt x="3256368" y="2565095"/>
-                  </a:lnTo>
-                  <a:lnTo>
-                    <a:pt x="3334002" y="2701223"/>
-                  </a:lnTo>
-                  <a:lnTo>
-                    <a:pt x="3411636" y="2784981"/>
-                  </a:lnTo>
-                  <a:lnTo>
-                    <a:pt x="3489270" y="2791092"/>
-                  </a:lnTo>
-                  <a:lnTo>
-                    <a:pt x="3566904" y="2797160"/>
-                  </a:lnTo>
-                  <a:lnTo>
-                    <a:pt x="3644538" y="2803185"/>
-                  </a:lnTo>
-                  <a:lnTo>
-                    <a:pt x="3722172" y="2809168"/>
-                  </a:lnTo>
-                  <a:lnTo>
-                    <a:pt x="3799806" y="2815108"/>
-                  </a:lnTo>
-                  <a:lnTo>
-                    <a:pt x="3877440" y="2821007"/>
-                  </a:lnTo>
-                  <a:lnTo>
-                    <a:pt x="3955074" y="2826864"/>
-                  </a:lnTo>
-                  <a:lnTo>
-                    <a:pt x="4032708" y="2832680"/>
-                  </a:lnTo>
-                  <a:lnTo>
-                    <a:pt x="4110342" y="2838455"/>
-                  </a:lnTo>
-                  <a:lnTo>
-                    <a:pt x="4187976" y="2844189"/>
-                  </a:lnTo>
-                  <a:lnTo>
-                    <a:pt x="4265610" y="2849883"/>
-                  </a:lnTo>
-                  <a:lnTo>
-                    <a:pt x="4343244" y="2855537"/>
-                  </a:lnTo>
-                  <a:lnTo>
-                    <a:pt x="4420879" y="2861151"/>
-                  </a:lnTo>
-                  <a:lnTo>
-                    <a:pt x="4498513" y="2866725"/>
-                  </a:lnTo>
-                  <a:lnTo>
-                    <a:pt x="4576147" y="2872260"/>
-                  </a:lnTo>
-                  <a:lnTo>
-                    <a:pt x="4653781" y="2877756"/>
-                  </a:lnTo>
-                  <a:lnTo>
-                    <a:pt x="4731415" y="2883214"/>
-                  </a:lnTo>
-                  <a:lnTo>
-                    <a:pt x="4809049" y="2888633"/>
-                  </a:lnTo>
-                  <a:lnTo>
-                    <a:pt x="4886683" y="2894014"/>
-                  </a:lnTo>
-                  <a:lnTo>
-                    <a:pt x="4964317" y="2899356"/>
-                  </a:lnTo>
-                  <a:lnTo>
-                    <a:pt x="5041951" y="2904662"/>
-                  </a:lnTo>
-                  <a:lnTo>
-                    <a:pt x="5119585" y="2909930"/>
-                  </a:lnTo>
-                  <a:lnTo>
-                    <a:pt x="5197219" y="2915161"/>
-                  </a:lnTo>
-                  <a:lnTo>
-                    <a:pt x="5274853" y="2920355"/>
-                  </a:lnTo>
-                  <a:lnTo>
-                    <a:pt x="5352487" y="2925512"/>
-                  </a:lnTo>
-                  <a:lnTo>
-                    <a:pt x="5430121" y="2930633"/>
-                  </a:lnTo>
-                  <a:lnTo>
-                    <a:pt x="5507755" y="2935718"/>
-                  </a:lnTo>
-                  <a:lnTo>
-                    <a:pt x="5585389" y="2940767"/>
-                  </a:lnTo>
-                  <a:lnTo>
-                    <a:pt x="5663023" y="2945781"/>
-                  </a:lnTo>
-                  <a:lnTo>
-                    <a:pt x="5740657" y="2950759"/>
-                  </a:lnTo>
-                  <a:lnTo>
-                    <a:pt x="5818291" y="2955703"/>
-                  </a:lnTo>
-                  <a:lnTo>
-                    <a:pt x="5895925" y="2960611"/>
-                  </a:lnTo>
-                  <a:lnTo>
-                    <a:pt x="5973559" y="2965485"/>
-                  </a:lnTo>
-                  <a:lnTo>
-                    <a:pt x="6051193" y="2970325"/>
-                  </a:lnTo>
-                  <a:lnTo>
-                    <a:pt x="6128827" y="2975130"/>
-                  </a:lnTo>
-                  <a:lnTo>
-                    <a:pt x="6206462" y="2979902"/>
-                  </a:lnTo>
-                  <a:lnTo>
-                    <a:pt x="6284096" y="2984640"/>
-                  </a:lnTo>
-                  <a:lnTo>
-                    <a:pt x="6361730" y="2989345"/>
-                  </a:lnTo>
-                  <a:lnTo>
-                    <a:pt x="6439364" y="2994016"/>
-                  </a:lnTo>
-                  <a:lnTo>
-                    <a:pt x="6516998" y="2998655"/>
-                  </a:lnTo>
-                  <a:lnTo>
-                    <a:pt x="6594632" y="3003261"/>
-                  </a:lnTo>
-                  <a:lnTo>
-                    <a:pt x="6672266" y="3007834"/>
-                  </a:lnTo>
-                  <a:lnTo>
-                    <a:pt x="6749900" y="3012376"/>
-                  </a:lnTo>
-                  <a:lnTo>
-                    <a:pt x="6827534" y="3016885"/>
-                  </a:lnTo>
-                  <a:lnTo>
-                    <a:pt x="6905168" y="3021362"/>
-                  </a:lnTo>
-                  <a:lnTo>
-                    <a:pt x="6982802" y="3025808"/>
-                  </a:lnTo>
-                  <a:lnTo>
-                    <a:pt x="7060436" y="3030223"/>
-                  </a:lnTo>
-                  <a:lnTo>
-                    <a:pt x="7138070" y="3034607"/>
-                  </a:lnTo>
-                  <a:lnTo>
-                    <a:pt x="7215704" y="3038960"/>
-                  </a:lnTo>
-                  <a:lnTo>
-                    <a:pt x="7293338" y="3043282"/>
-                  </a:lnTo>
-                  <a:lnTo>
-                    <a:pt x="7370972" y="3047573"/>
-                  </a:lnTo>
-                  <a:lnTo>
-                    <a:pt x="7370972" y="3651735"/>
-                  </a:lnTo>
-                  <a:lnTo>
-                    <a:pt x="7293338" y="3651605"/>
-                  </a:lnTo>
-                  <a:lnTo>
-                    <a:pt x="7215704" y="3651456"/>
-                  </a:lnTo>
-                  <a:lnTo>
-                    <a:pt x="7138070" y="3651286"/>
-                  </a:lnTo>
-                  <a:lnTo>
-                    <a:pt x="7060436" y="3651092"/>
-                  </a:lnTo>
-                  <a:lnTo>
-                    <a:pt x="6982802" y="3650870"/>
-                  </a:lnTo>
-                  <a:lnTo>
-                    <a:pt x="6905168" y="3650616"/>
-                  </a:lnTo>
-                  <a:lnTo>
-                    <a:pt x="6827534" y="3650326"/>
-                  </a:lnTo>
-                  <a:lnTo>
-                    <a:pt x="6749900" y="3649995"/>
-                  </a:lnTo>
-                  <a:lnTo>
-                    <a:pt x="6672266" y="3649616"/>
-                  </a:lnTo>
-                  <a:lnTo>
-                    <a:pt x="6594632" y="3649183"/>
-                  </a:lnTo>
-                  <a:lnTo>
-                    <a:pt x="6516998" y="3648687"/>
-                  </a:lnTo>
-                  <a:lnTo>
-                    <a:pt x="6439364" y="3648121"/>
-                  </a:lnTo>
-                  <a:lnTo>
-                    <a:pt x="6361730" y="3647474"/>
-                  </a:lnTo>
-                  <a:lnTo>
-                    <a:pt x="6284096" y="3646735"/>
-                  </a:lnTo>
-                  <a:lnTo>
-                    <a:pt x="6206462" y="3645889"/>
-                  </a:lnTo>
-                  <a:lnTo>
-                    <a:pt x="6128827" y="3644923"/>
-                  </a:lnTo>
-                  <a:lnTo>
-                    <a:pt x="6051193" y="3643818"/>
-                  </a:lnTo>
-                  <a:lnTo>
-                    <a:pt x="5973559" y="3642556"/>
-                  </a:lnTo>
-                  <a:lnTo>
-                    <a:pt x="5895925" y="3641113"/>
-                  </a:lnTo>
-                  <a:lnTo>
-                    <a:pt x="5818291" y="3639463"/>
-                  </a:lnTo>
-                  <a:lnTo>
-                    <a:pt x="5740657" y="3637577"/>
-                  </a:lnTo>
-                  <a:lnTo>
-                    <a:pt x="5663023" y="3635421"/>
-                  </a:lnTo>
-                  <a:lnTo>
-                    <a:pt x="5585389" y="3632957"/>
-                  </a:lnTo>
-                  <a:lnTo>
-                    <a:pt x="5507755" y="3630140"/>
-                  </a:lnTo>
-                  <a:lnTo>
-                    <a:pt x="5430121" y="3626921"/>
-                  </a:lnTo>
-                  <a:lnTo>
-                    <a:pt x="5352487" y="3623240"/>
-                  </a:lnTo>
-                  <a:lnTo>
-                    <a:pt x="5274853" y="3619033"/>
-                  </a:lnTo>
-                  <a:lnTo>
-                    <a:pt x="5197219" y="3614224"/>
-                  </a:lnTo>
-                  <a:lnTo>
-                    <a:pt x="5119585" y="3608728"/>
-                  </a:lnTo>
-                  <a:lnTo>
-                    <a:pt x="5041951" y="3602444"/>
-                  </a:lnTo>
-                  <a:lnTo>
-                    <a:pt x="4964317" y="3595262"/>
-                  </a:lnTo>
-                  <a:lnTo>
-                    <a:pt x="4886683" y="3587052"/>
-                  </a:lnTo>
-                  <a:lnTo>
-                    <a:pt x="4809049" y="3577667"/>
-                  </a:lnTo>
-                  <a:lnTo>
-                    <a:pt x="4731415" y="3566939"/>
-                  </a:lnTo>
-                  <a:lnTo>
-                    <a:pt x="4653781" y="3554677"/>
-                  </a:lnTo>
-                  <a:lnTo>
-                    <a:pt x="4576147" y="3540660"/>
-                  </a:lnTo>
-                  <a:lnTo>
-                    <a:pt x="4498513" y="3524637"/>
-                  </a:lnTo>
-                  <a:lnTo>
-                    <a:pt x="4420879" y="3506323"/>
-                  </a:lnTo>
-                  <a:lnTo>
-                    <a:pt x="4343244" y="3485387"/>
-                  </a:lnTo>
-                  <a:lnTo>
-                    <a:pt x="4265610" y="3461456"/>
-                  </a:lnTo>
-                  <a:lnTo>
-                    <a:pt x="4187976" y="3434102"/>
-                  </a:lnTo>
-                  <a:lnTo>
-                    <a:pt x="4110342" y="3402833"/>
-                  </a:lnTo>
-                  <a:lnTo>
-                    <a:pt x="4032708" y="3367090"/>
-                  </a:lnTo>
-                  <a:lnTo>
-                    <a:pt x="3955074" y="3326234"/>
-                  </a:lnTo>
-                  <a:lnTo>
-                    <a:pt x="3877440" y="3279531"/>
-                  </a:lnTo>
-                  <a:lnTo>
-                    <a:pt x="3799806" y="3226147"/>
-                  </a:lnTo>
-                  <a:lnTo>
-                    <a:pt x="3722172" y="3165124"/>
-                  </a:lnTo>
-                  <a:lnTo>
-                    <a:pt x="3644538" y="3095371"/>
-                  </a:lnTo>
-                  <a:lnTo>
-                    <a:pt x="3566904" y="3015637"/>
-                  </a:lnTo>
-                  <a:lnTo>
-                    <a:pt x="3489270" y="2924495"/>
-                  </a:lnTo>
-                  <a:lnTo>
-                    <a:pt x="3411636" y="2820312"/>
-                  </a:lnTo>
-                  <a:lnTo>
-                    <a:pt x="3334002" y="2778827"/>
-                  </a:lnTo>
-                  <a:lnTo>
-                    <a:pt x="3256368" y="2772629"/>
-                  </a:lnTo>
-                  <a:lnTo>
-                    <a:pt x="3178734" y="2766388"/>
-                  </a:lnTo>
-                  <a:lnTo>
-                    <a:pt x="3101100" y="2760101"/>
-                  </a:lnTo>
-                  <a:lnTo>
-                    <a:pt x="3023466" y="2753771"/>
-                  </a:lnTo>
-                  <a:lnTo>
-                    <a:pt x="2945832" y="2747395"/>
-                  </a:lnTo>
-                  <a:lnTo>
-                    <a:pt x="2868198" y="2740974"/>
-                  </a:lnTo>
-                  <a:lnTo>
-                    <a:pt x="2790564" y="2734508"/>
-                  </a:lnTo>
-                  <a:lnTo>
-                    <a:pt x="2712930" y="2727996"/>
-                  </a:lnTo>
-                  <a:lnTo>
-                    <a:pt x="2635295" y="2721438"/>
-                  </a:lnTo>
-                  <a:lnTo>
-                    <a:pt x="2557661" y="2714833"/>
-                  </a:lnTo>
-                  <a:lnTo>
-                    <a:pt x="2480027" y="2708181"/>
-                  </a:lnTo>
-                  <a:lnTo>
-                    <a:pt x="2402393" y="2701482"/>
-                  </a:lnTo>
-                  <a:lnTo>
-                    <a:pt x="2324759" y="2694736"/>
-                  </a:lnTo>
-                  <a:lnTo>
-                    <a:pt x="2247125" y="2687941"/>
-                  </a:lnTo>
-                  <a:lnTo>
-                    <a:pt x="2169491" y="2681099"/>
-                  </a:lnTo>
-                  <a:lnTo>
-                    <a:pt x="2091857" y="2674208"/>
-                  </a:lnTo>
-                  <a:lnTo>
-                    <a:pt x="2014223" y="2667268"/>
-                  </a:lnTo>
-                  <a:lnTo>
-                    <a:pt x="1936589" y="2660279"/>
-                  </a:lnTo>
-                  <a:lnTo>
-                    <a:pt x="1858955" y="2653240"/>
-                  </a:lnTo>
-                  <a:lnTo>
-                    <a:pt x="1781321" y="2646151"/>
-                  </a:lnTo>
-                  <a:lnTo>
-                    <a:pt x="1703687" y="2639013"/>
-                  </a:lnTo>
-                  <a:lnTo>
-                    <a:pt x="1626053" y="2631823"/>
-                  </a:lnTo>
-                  <a:lnTo>
-                    <a:pt x="1548419" y="2624583"/>
-                  </a:lnTo>
-                  <a:lnTo>
-                    <a:pt x="1470785" y="2617291"/>
-                  </a:lnTo>
-                  <a:lnTo>
-                    <a:pt x="1393151" y="2609947"/>
-                  </a:lnTo>
-                  <a:lnTo>
-                    <a:pt x="1315517" y="2602551"/>
-                  </a:lnTo>
-                  <a:lnTo>
-                    <a:pt x="1237883" y="2595103"/>
-                  </a:lnTo>
-                  <a:lnTo>
-                    <a:pt x="1160249" y="2587602"/>
-                  </a:lnTo>
-                  <a:lnTo>
-                    <a:pt x="1082615" y="2580048"/>
-                  </a:lnTo>
-                  <a:lnTo>
-                    <a:pt x="1004981" y="2572440"/>
-                  </a:lnTo>
-                  <a:lnTo>
-                    <a:pt x="927346" y="2564779"/>
-                  </a:lnTo>
-                  <a:lnTo>
-                    <a:pt x="849712" y="2557063"/>
-                  </a:lnTo>
-                  <a:lnTo>
-                    <a:pt x="772078" y="2549292"/>
-                  </a:lnTo>
-                  <a:lnTo>
-                    <a:pt x="694444" y="2541466"/>
-                  </a:lnTo>
-                  <a:lnTo>
-                    <a:pt x="616810" y="2533585"/>
-                  </a:lnTo>
-                  <a:lnTo>
-                    <a:pt x="539176" y="2525647"/>
-                  </a:lnTo>
-                  <a:lnTo>
-                    <a:pt x="461542" y="2517654"/>
-                  </a:lnTo>
-                  <a:lnTo>
-                    <a:pt x="383908" y="2509603"/>
-                  </a:lnTo>
-                  <a:lnTo>
-                    <a:pt x="306274" y="2501496"/>
-                  </a:lnTo>
-                  <a:lnTo>
-                    <a:pt x="228640" y="2493331"/>
-                  </a:lnTo>
-                  <a:lnTo>
-                    <a:pt x="151006" y="2485108"/>
-                  </a:lnTo>
-                  <a:lnTo>
-                    <a:pt x="73372" y="2476827"/>
-                  </a:lnTo>
-                  <a:lnTo>
-                    <a:pt x="0" y="2468945"/>
+                    <a:pt x="2635295" y="74334"/>
+                  </a:lnTo>
+                  <a:lnTo>
+                    <a:pt x="2712930" y="561201"/>
+                  </a:lnTo>
+                  <a:lnTo>
+                    <a:pt x="2790564" y="981825"/>
+                  </a:lnTo>
+                  <a:lnTo>
+                    <a:pt x="2868198" y="1345218"/>
+                  </a:lnTo>
+                  <a:lnTo>
+                    <a:pt x="2945832" y="1659168"/>
+                  </a:lnTo>
+                  <a:lnTo>
+                    <a:pt x="3023466" y="1930401"/>
+                  </a:lnTo>
+                  <a:lnTo>
+                    <a:pt x="3101100" y="2164731"/>
+                  </a:lnTo>
+                  <a:lnTo>
+                    <a:pt x="3178734" y="2367177"/>
+                  </a:lnTo>
+                  <a:lnTo>
+                    <a:pt x="3256368" y="2542078"/>
+                  </a:lnTo>
+                  <a:lnTo>
+                    <a:pt x="3334002" y="2693182"/>
+                  </a:lnTo>
+                  <a:lnTo>
+                    <a:pt x="3411636" y="2781124"/>
+                  </a:lnTo>
+                  <a:lnTo>
+                    <a:pt x="3489270" y="2775487"/>
+                  </a:lnTo>
+                  <a:lnTo>
+                    <a:pt x="3566904" y="2769813"/>
+                  </a:lnTo>
+                  <a:lnTo>
+                    <a:pt x="3644538" y="2764103"/>
+                  </a:lnTo>
+                  <a:lnTo>
+                    <a:pt x="3722172" y="2758356"/>
+                  </a:lnTo>
+                  <a:lnTo>
+                    <a:pt x="3799806" y="2752572"/>
+                  </a:lnTo>
+                  <a:lnTo>
+                    <a:pt x="3877440" y="2746750"/>
+                  </a:lnTo>
+                  <a:lnTo>
+                    <a:pt x="3955074" y="2740891"/>
+                  </a:lnTo>
+                  <a:lnTo>
+                    <a:pt x="4032708" y="2734994"/>
+                  </a:lnTo>
+                  <a:lnTo>
+                    <a:pt x="4110342" y="2729058"/>
+                  </a:lnTo>
+                  <a:lnTo>
+                    <a:pt x="4187976" y="2723085"/>
+                  </a:lnTo>
+                  <a:lnTo>
+                    <a:pt x="4265610" y="2717072"/>
+                  </a:lnTo>
+                  <a:lnTo>
+                    <a:pt x="4343244" y="2711021"/>
+                  </a:lnTo>
+                  <a:lnTo>
+                    <a:pt x="4420879" y="2704931"/>
+                  </a:lnTo>
+                  <a:lnTo>
+                    <a:pt x="4498513" y="2698801"/>
+                  </a:lnTo>
+                  <a:lnTo>
+                    <a:pt x="4576147" y="2692631"/>
+                  </a:lnTo>
+                  <a:lnTo>
+                    <a:pt x="4653781" y="2686422"/>
+                  </a:lnTo>
+                  <a:lnTo>
+                    <a:pt x="4731415" y="2680172"/>
+                  </a:lnTo>
+                  <a:lnTo>
+                    <a:pt x="4809049" y="2673882"/>
+                  </a:lnTo>
+                  <a:lnTo>
+                    <a:pt x="4886683" y="2667552"/>
+                  </a:lnTo>
+                  <a:lnTo>
+                    <a:pt x="4964317" y="2661180"/>
+                  </a:lnTo>
+                  <a:lnTo>
+                    <a:pt x="5041951" y="2654767"/>
+                  </a:lnTo>
+                  <a:lnTo>
+                    <a:pt x="5119585" y="2648313"/>
+                  </a:lnTo>
+                  <a:lnTo>
+                    <a:pt x="5197219" y="2641817"/>
+                  </a:lnTo>
+                  <a:lnTo>
+                    <a:pt x="5274853" y="2635279"/>
+                  </a:lnTo>
+                  <a:lnTo>
+                    <a:pt x="5352487" y="2628699"/>
+                  </a:lnTo>
+                  <a:lnTo>
+                    <a:pt x="5430121" y="2622076"/>
+                  </a:lnTo>
+                  <a:lnTo>
+                    <a:pt x="5507755" y="2615410"/>
+                  </a:lnTo>
+                  <a:lnTo>
+                    <a:pt x="5585389" y="2608701"/>
+                  </a:lnTo>
+                  <a:lnTo>
+                    <a:pt x="5663023" y="2601949"/>
+                  </a:lnTo>
+                  <a:lnTo>
+                    <a:pt x="5740657" y="2595153"/>
+                  </a:lnTo>
+                  <a:lnTo>
+                    <a:pt x="5818291" y="2588313"/>
+                  </a:lnTo>
+                  <a:lnTo>
+                    <a:pt x="5895925" y="2581429"/>
+                  </a:lnTo>
+                  <a:lnTo>
+                    <a:pt x="5973559" y="2574501"/>
+                  </a:lnTo>
+                  <a:lnTo>
+                    <a:pt x="6051193" y="2567527"/>
+                  </a:lnTo>
+                  <a:lnTo>
+                    <a:pt x="6128827" y="2560509"/>
+                  </a:lnTo>
+                  <a:lnTo>
+                    <a:pt x="6206462" y="2553445"/>
+                  </a:lnTo>
+                  <a:lnTo>
+                    <a:pt x="6284096" y="2546335"/>
+                  </a:lnTo>
+                  <a:lnTo>
+                    <a:pt x="6361730" y="2539180"/>
+                  </a:lnTo>
+                  <a:lnTo>
+                    <a:pt x="6439364" y="2531978"/>
+                  </a:lnTo>
+                  <a:lnTo>
+                    <a:pt x="6516998" y="2524729"/>
+                  </a:lnTo>
+                  <a:lnTo>
+                    <a:pt x="6594632" y="2517434"/>
+                  </a:lnTo>
+                  <a:lnTo>
+                    <a:pt x="6672266" y="2510091"/>
+                  </a:lnTo>
+                  <a:lnTo>
+                    <a:pt x="6749900" y="2502701"/>
+                  </a:lnTo>
+                  <a:lnTo>
+                    <a:pt x="6827534" y="2495264"/>
+                  </a:lnTo>
+                  <a:lnTo>
+                    <a:pt x="6905168" y="2487778"/>
+                  </a:lnTo>
+                  <a:lnTo>
+                    <a:pt x="6982802" y="2480243"/>
+                  </a:lnTo>
+                  <a:lnTo>
+                    <a:pt x="7060436" y="2472660"/>
+                  </a:lnTo>
+                  <a:lnTo>
+                    <a:pt x="7138070" y="2465028"/>
+                  </a:lnTo>
+                  <a:lnTo>
+                    <a:pt x="7215704" y="2457346"/>
+                  </a:lnTo>
+                  <a:lnTo>
+                    <a:pt x="7293338" y="2449615"/>
+                  </a:lnTo>
+                  <a:lnTo>
+                    <a:pt x="7370972" y="2441834"/>
+                  </a:lnTo>
+                  <a:lnTo>
+                    <a:pt x="7370972" y="3652166"/>
+                  </a:lnTo>
+                  <a:lnTo>
+                    <a:pt x="7293338" y="3652090"/>
+                  </a:lnTo>
+                  <a:lnTo>
+                    <a:pt x="7215704" y="3652003"/>
+                  </a:lnTo>
+                  <a:lnTo>
+                    <a:pt x="7138070" y="3651902"/>
+                  </a:lnTo>
+                  <a:lnTo>
+                    <a:pt x="7060436" y="3651786"/>
+                  </a:lnTo>
+                  <a:lnTo>
+                    <a:pt x="6982802" y="3651651"/>
+                  </a:lnTo>
+                  <a:lnTo>
+                    <a:pt x="6905168" y="3651494"/>
+                  </a:lnTo>
+                  <a:lnTo>
+                    <a:pt x="6827534" y="3651314"/>
+                  </a:lnTo>
+                  <a:lnTo>
+                    <a:pt x="6749900" y="3651104"/>
+                  </a:lnTo>
+                  <a:lnTo>
+                    <a:pt x="6672266" y="3650862"/>
+                  </a:lnTo>
+                  <a:lnTo>
+                    <a:pt x="6594632" y="3650581"/>
+                  </a:lnTo>
+                  <a:lnTo>
+                    <a:pt x="6516998" y="3650256"/>
+                  </a:lnTo>
+                  <a:lnTo>
+                    <a:pt x="6439364" y="3649880"/>
+                  </a:lnTo>
+                  <a:lnTo>
+                    <a:pt x="6361730" y="3649445"/>
+                  </a:lnTo>
+                  <a:lnTo>
+                    <a:pt x="6284096" y="3648942"/>
+                  </a:lnTo>
+                  <a:lnTo>
+                    <a:pt x="6206462" y="3648359"/>
+                  </a:lnTo>
+                  <a:lnTo>
+                    <a:pt x="6128827" y="3647684"/>
+                  </a:lnTo>
+                  <a:lnTo>
+                    <a:pt x="6051193" y="3646903"/>
+                  </a:lnTo>
+                  <a:lnTo>
+                    <a:pt x="5973559" y="3645999"/>
+                  </a:lnTo>
+                  <a:lnTo>
+                    <a:pt x="5895925" y="3644952"/>
+                  </a:lnTo>
+                  <a:lnTo>
+                    <a:pt x="5818291" y="3643741"/>
+                  </a:lnTo>
+                  <a:lnTo>
+                    <a:pt x="5740657" y="3642339"/>
+                  </a:lnTo>
+                  <a:lnTo>
+                    <a:pt x="5663023" y="3640716"/>
+                  </a:lnTo>
+                  <a:lnTo>
+                    <a:pt x="5585389" y="3638838"/>
+                  </a:lnTo>
+                  <a:lnTo>
+                    <a:pt x="5507755" y="3636664"/>
+                  </a:lnTo>
+                  <a:lnTo>
+                    <a:pt x="5430121" y="3634147"/>
+                  </a:lnTo>
+                  <a:lnTo>
+                    <a:pt x="5352487" y="3631235"/>
+                  </a:lnTo>
+                  <a:lnTo>
+                    <a:pt x="5274853" y="3627863"/>
+                  </a:lnTo>
+                  <a:lnTo>
+                    <a:pt x="5197219" y="3623960"/>
+                  </a:lnTo>
+                  <a:lnTo>
+                    <a:pt x="5119585" y="3619443"/>
+                  </a:lnTo>
+                  <a:lnTo>
+                    <a:pt x="5041951" y="3614214"/>
+                  </a:lnTo>
+                  <a:lnTo>
+                    <a:pt x="4964317" y="3608162"/>
+                  </a:lnTo>
+                  <a:lnTo>
+                    <a:pt x="4886683" y="3601157"/>
+                  </a:lnTo>
+                  <a:lnTo>
+                    <a:pt x="4809049" y="3593048"/>
+                  </a:lnTo>
+                  <a:lnTo>
+                    <a:pt x="4731415" y="3583663"/>
+                  </a:lnTo>
+                  <a:lnTo>
+                    <a:pt x="4653781" y="3572799"/>
+                  </a:lnTo>
+                  <a:lnTo>
+                    <a:pt x="4576147" y="3560225"/>
+                  </a:lnTo>
+                  <a:lnTo>
+                    <a:pt x="4498513" y="3545670"/>
+                  </a:lnTo>
+                  <a:lnTo>
+                    <a:pt x="4420879" y="3528823"/>
+                  </a:lnTo>
+                  <a:lnTo>
+                    <a:pt x="4343244" y="3509322"/>
+                  </a:lnTo>
+                  <a:lnTo>
+                    <a:pt x="4265610" y="3486751"/>
+                  </a:lnTo>
+                  <a:lnTo>
+                    <a:pt x="4187976" y="3460625"/>
+                  </a:lnTo>
+                  <a:lnTo>
+                    <a:pt x="4110342" y="3430384"/>
+                  </a:lnTo>
+                  <a:lnTo>
+                    <a:pt x="4032708" y="3395381"/>
+                  </a:lnTo>
+                  <a:lnTo>
+                    <a:pt x="3955074" y="3354865"/>
+                  </a:lnTo>
+                  <a:lnTo>
+                    <a:pt x="3877440" y="3307968"/>
+                  </a:lnTo>
+                  <a:lnTo>
+                    <a:pt x="3799806" y="3253686"/>
+                  </a:lnTo>
+                  <a:lnTo>
+                    <a:pt x="3722172" y="3190854"/>
+                  </a:lnTo>
+                  <a:lnTo>
+                    <a:pt x="3644538" y="3118128"/>
+                  </a:lnTo>
+                  <a:lnTo>
+                    <a:pt x="3566904" y="3033948"/>
+                  </a:lnTo>
+                  <a:lnTo>
+                    <a:pt x="3489270" y="2936510"/>
+                  </a:lnTo>
+                  <a:lnTo>
+                    <a:pt x="3411636" y="2823727"/>
+                  </a:lnTo>
+                  <a:lnTo>
+                    <a:pt x="3334002" y="2786725"/>
+                  </a:lnTo>
+                  <a:lnTo>
+                    <a:pt x="3256368" y="2792289"/>
+                  </a:lnTo>
+                  <a:lnTo>
+                    <a:pt x="3178734" y="2797818"/>
+                  </a:lnTo>
+                  <a:lnTo>
+                    <a:pt x="3101100" y="2803312"/>
+                  </a:lnTo>
+                  <a:lnTo>
+                    <a:pt x="3023466" y="2808770"/>
+                  </a:lnTo>
+                  <a:lnTo>
+                    <a:pt x="2945832" y="2814193"/>
+                  </a:lnTo>
+                  <a:lnTo>
+                    <a:pt x="2868198" y="2819581"/>
+                  </a:lnTo>
+                  <a:lnTo>
+                    <a:pt x="2790564" y="2824935"/>
+                  </a:lnTo>
+                  <a:lnTo>
+                    <a:pt x="2712930" y="2830254"/>
+                  </a:lnTo>
+                  <a:lnTo>
+                    <a:pt x="2635295" y="2835539"/>
+                  </a:lnTo>
+                  <a:lnTo>
+                    <a:pt x="2557661" y="2840790"/>
+                  </a:lnTo>
+                  <a:lnTo>
+                    <a:pt x="2480027" y="2846008"/>
+                  </a:lnTo>
+                  <a:lnTo>
+                    <a:pt x="2402393" y="2851192"/>
+                  </a:lnTo>
+                  <a:lnTo>
+                    <a:pt x="2324759" y="2856342"/>
+                  </a:lnTo>
+                  <a:lnTo>
+                    <a:pt x="2247125" y="2861459"/>
+                  </a:lnTo>
+                  <a:lnTo>
+                    <a:pt x="2169491" y="2866544"/>
+                  </a:lnTo>
+                  <a:lnTo>
+                    <a:pt x="2091857" y="2871596"/>
+                  </a:lnTo>
+                  <a:lnTo>
+                    <a:pt x="2014223" y="2876615"/>
+                  </a:lnTo>
+                  <a:lnTo>
+                    <a:pt x="1936589" y="2881602"/>
+                  </a:lnTo>
+                  <a:lnTo>
+                    <a:pt x="1858955" y="2886557"/>
+                  </a:lnTo>
+                  <a:lnTo>
+                    <a:pt x="1781321" y="2891480"/>
+                  </a:lnTo>
+                  <a:lnTo>
+                    <a:pt x="1703687" y="2896372"/>
+                  </a:lnTo>
+                  <a:lnTo>
+                    <a:pt x="1626053" y="2901232"/>
+                  </a:lnTo>
+                  <a:lnTo>
+                    <a:pt x="1548419" y="2906061"/>
+                  </a:lnTo>
+                  <a:lnTo>
+                    <a:pt x="1470785" y="2910859"/>
+                  </a:lnTo>
+                  <a:lnTo>
+                    <a:pt x="1393151" y="2915626"/>
+                  </a:lnTo>
+                  <a:lnTo>
+                    <a:pt x="1315517" y="2920362"/>
+                  </a:lnTo>
+                  <a:lnTo>
+                    <a:pt x="1237883" y="2925068"/>
+                  </a:lnTo>
+                  <a:lnTo>
+                    <a:pt x="1160249" y="2929744"/>
+                  </a:lnTo>
+                  <a:lnTo>
+                    <a:pt x="1082615" y="2934390"/>
+                  </a:lnTo>
+                  <a:lnTo>
+                    <a:pt x="1004981" y="2939005"/>
+                  </a:lnTo>
+                  <a:lnTo>
+                    <a:pt x="927346" y="2943592"/>
+                  </a:lnTo>
+                  <a:lnTo>
+                    <a:pt x="849712" y="2948148"/>
+                  </a:lnTo>
+                  <a:lnTo>
+                    <a:pt x="772078" y="2952676"/>
+                  </a:lnTo>
+                  <a:lnTo>
+                    <a:pt x="694444" y="2957174"/>
+                  </a:lnTo>
+                  <a:lnTo>
+                    <a:pt x="616810" y="2961643"/>
+                  </a:lnTo>
+                  <a:lnTo>
+                    <a:pt x="539176" y="2966084"/>
+                  </a:lnTo>
+                  <a:lnTo>
+                    <a:pt x="461542" y="2970496"/>
+                  </a:lnTo>
+                  <a:lnTo>
+                    <a:pt x="383908" y="2974880"/>
+                  </a:lnTo>
+                  <a:lnTo>
+                    <a:pt x="306274" y="2979236"/>
+                  </a:lnTo>
+                  <a:lnTo>
+                    <a:pt x="228640" y="2983563"/>
+                  </a:lnTo>
+                  <a:lnTo>
+                    <a:pt x="151006" y="2987863"/>
+                  </a:lnTo>
+                  <a:lnTo>
+                    <a:pt x="73372" y="2992135"/>
+                  </a:lnTo>
+                  <a:lnTo>
+                    <a:pt x="0" y="2996147"/>
                   </a:lnTo>
                   <a:close/>
                 </a:path>
@@ -3513,204 +3510,201 @@
           </p:nvSpPr>
           <p:spPr>
             <a:xfrm>
-              <a:off x="3370823" y="1896563"/>
-              <a:ext cx="4817667" cy="3047573"/>
+              <a:off x="3442573" y="1896563"/>
+              <a:ext cx="4745917" cy="2781124"/>
             </a:xfrm>
             <a:custGeom>
               <a:avLst/>
               <a:pathLst>
-                <a:path w="4817667" h="3047573">
+                <a:path w="4745917" h="2781124">
                   <a:moveTo>
                     <a:pt x="0" y="0"/>
                   </a:moveTo>
                   <a:lnTo>
-                    <a:pt x="4356" y="29095"/>
-                  </a:lnTo>
-                  <a:lnTo>
-                    <a:pt x="81990" y="482653"/>
-                  </a:lnTo>
-                  <a:lnTo>
-                    <a:pt x="159624" y="879440"/>
-                  </a:lnTo>
-                  <a:lnTo>
-                    <a:pt x="237258" y="1226561"/>
-                  </a:lnTo>
-                  <a:lnTo>
-                    <a:pt x="314892" y="1530233"/>
-                  </a:lnTo>
-                  <a:lnTo>
-                    <a:pt x="392526" y="1795894"/>
-                  </a:lnTo>
-                  <a:lnTo>
-                    <a:pt x="470161" y="2028303"/>
-                  </a:lnTo>
-                  <a:lnTo>
-                    <a:pt x="547795" y="2231621"/>
-                  </a:lnTo>
-                  <a:lnTo>
-                    <a:pt x="625429" y="2409490"/>
-                  </a:lnTo>
-                  <a:lnTo>
-                    <a:pt x="703063" y="2565095"/>
-                  </a:lnTo>
-                  <a:lnTo>
-                    <a:pt x="780697" y="2701223"/>
-                  </a:lnTo>
-                  <a:lnTo>
-                    <a:pt x="858331" y="2784981"/>
-                  </a:lnTo>
-                  <a:lnTo>
-                    <a:pt x="935965" y="2791092"/>
-                  </a:lnTo>
-                  <a:lnTo>
-                    <a:pt x="1013599" y="2797160"/>
-                  </a:lnTo>
-                  <a:lnTo>
-                    <a:pt x="1091233" y="2803185"/>
-                  </a:lnTo>
-                  <a:lnTo>
-                    <a:pt x="1168867" y="2809168"/>
-                  </a:lnTo>
-                  <a:lnTo>
-                    <a:pt x="1246501" y="2815108"/>
-                  </a:lnTo>
-                  <a:lnTo>
-                    <a:pt x="1324135" y="2821007"/>
-                  </a:lnTo>
-                  <a:lnTo>
-                    <a:pt x="1401769" y="2826864"/>
-                  </a:lnTo>
-                  <a:lnTo>
-                    <a:pt x="1479403" y="2832680"/>
-                  </a:lnTo>
-                  <a:lnTo>
-                    <a:pt x="1557037" y="2838455"/>
-                  </a:lnTo>
-                  <a:lnTo>
-                    <a:pt x="1634671" y="2844189"/>
-                  </a:lnTo>
-                  <a:lnTo>
-                    <a:pt x="1712305" y="2849883"/>
-                  </a:lnTo>
-                  <a:lnTo>
-                    <a:pt x="1789939" y="2855537"/>
-                  </a:lnTo>
-                  <a:lnTo>
-                    <a:pt x="1867573" y="2861151"/>
-                  </a:lnTo>
-                  <a:lnTo>
-                    <a:pt x="1945207" y="2866725"/>
-                  </a:lnTo>
-                  <a:lnTo>
-                    <a:pt x="2022841" y="2872260"/>
-                  </a:lnTo>
-                  <a:lnTo>
-                    <a:pt x="2100475" y="2877756"/>
-                  </a:lnTo>
-                  <a:lnTo>
-                    <a:pt x="2178110" y="2883214"/>
-                  </a:lnTo>
-                  <a:lnTo>
-                    <a:pt x="2255744" y="2888633"/>
-                  </a:lnTo>
-                  <a:lnTo>
-                    <a:pt x="2333378" y="2894014"/>
-                  </a:lnTo>
-                  <a:lnTo>
-                    <a:pt x="2411012" y="2899356"/>
-                  </a:lnTo>
-                  <a:lnTo>
-                    <a:pt x="2488646" y="2904662"/>
-                  </a:lnTo>
-                  <a:lnTo>
-                    <a:pt x="2566280" y="2909930"/>
-                  </a:lnTo>
-                  <a:lnTo>
-                    <a:pt x="2643914" y="2915161"/>
-                  </a:lnTo>
-                  <a:lnTo>
-                    <a:pt x="2721548" y="2920355"/>
-                  </a:lnTo>
-                  <a:lnTo>
-                    <a:pt x="2799182" y="2925512"/>
-                  </a:lnTo>
-                  <a:lnTo>
-                    <a:pt x="2876816" y="2930633"/>
-                  </a:lnTo>
-                  <a:lnTo>
-                    <a:pt x="2954450" y="2935718"/>
-                  </a:lnTo>
-                  <a:lnTo>
-                    <a:pt x="3032084" y="2940767"/>
-                  </a:lnTo>
-                  <a:lnTo>
-                    <a:pt x="3109718" y="2945781"/>
-                  </a:lnTo>
-                  <a:lnTo>
-                    <a:pt x="3187352" y="2950759"/>
-                  </a:lnTo>
-                  <a:lnTo>
-                    <a:pt x="3264986" y="2955703"/>
-                  </a:lnTo>
-                  <a:lnTo>
-                    <a:pt x="3342620" y="2960611"/>
-                  </a:lnTo>
-                  <a:lnTo>
-                    <a:pt x="3420254" y="2965485"/>
-                  </a:lnTo>
-                  <a:lnTo>
-                    <a:pt x="3497888" y="2970325"/>
-                  </a:lnTo>
-                  <a:lnTo>
-                    <a:pt x="3575522" y="2975130"/>
-                  </a:lnTo>
-                  <a:lnTo>
-                    <a:pt x="3653156" y="2979902"/>
-                  </a:lnTo>
-                  <a:lnTo>
-                    <a:pt x="3730790" y="2984640"/>
-                  </a:lnTo>
-                  <a:lnTo>
-                    <a:pt x="3808424" y="2989345"/>
-                  </a:lnTo>
-                  <a:lnTo>
-                    <a:pt x="3886058" y="2994016"/>
-                  </a:lnTo>
-                  <a:lnTo>
-                    <a:pt x="3963693" y="2998655"/>
-                  </a:lnTo>
-                  <a:lnTo>
-                    <a:pt x="4041327" y="3003261"/>
-                  </a:lnTo>
-                  <a:lnTo>
-                    <a:pt x="4118961" y="3007834"/>
-                  </a:lnTo>
-                  <a:lnTo>
-                    <a:pt x="4196595" y="3012376"/>
-                  </a:lnTo>
-                  <a:lnTo>
-                    <a:pt x="4274229" y="3016885"/>
-                  </a:lnTo>
-                  <a:lnTo>
-                    <a:pt x="4351863" y="3021362"/>
-                  </a:lnTo>
-                  <a:lnTo>
-                    <a:pt x="4429497" y="3025808"/>
-                  </a:lnTo>
-                  <a:lnTo>
-                    <a:pt x="4507131" y="3030223"/>
-                  </a:lnTo>
-                  <a:lnTo>
-                    <a:pt x="4584765" y="3034607"/>
-                  </a:lnTo>
-                  <a:lnTo>
-                    <a:pt x="4662399" y="3038960"/>
-                  </a:lnTo>
-                  <a:lnTo>
-                    <a:pt x="4740033" y="3043282"/>
-                  </a:lnTo>
-                  <a:lnTo>
-                    <a:pt x="4817667" y="3047573"/>
+                    <a:pt x="10240" y="74334"/>
+                  </a:lnTo>
+                  <a:lnTo>
+                    <a:pt x="87874" y="561201"/>
+                  </a:lnTo>
+                  <a:lnTo>
+                    <a:pt x="165508" y="981825"/>
+                  </a:lnTo>
+                  <a:lnTo>
+                    <a:pt x="243142" y="1345218"/>
+                  </a:lnTo>
+                  <a:lnTo>
+                    <a:pt x="320776" y="1659168"/>
+                  </a:lnTo>
+                  <a:lnTo>
+                    <a:pt x="398410" y="1930401"/>
+                  </a:lnTo>
+                  <a:lnTo>
+                    <a:pt x="476044" y="2164731"/>
+                  </a:lnTo>
+                  <a:lnTo>
+                    <a:pt x="553678" y="2367177"/>
+                  </a:lnTo>
+                  <a:lnTo>
+                    <a:pt x="631312" y="2542078"/>
+                  </a:lnTo>
+                  <a:lnTo>
+                    <a:pt x="708946" y="2693182"/>
+                  </a:lnTo>
+                  <a:lnTo>
+                    <a:pt x="786580" y="2781124"/>
+                  </a:lnTo>
+                  <a:lnTo>
+                    <a:pt x="864214" y="2775487"/>
+                  </a:lnTo>
+                  <a:lnTo>
+                    <a:pt x="941848" y="2769813"/>
+                  </a:lnTo>
+                  <a:lnTo>
+                    <a:pt x="1019483" y="2764103"/>
+                  </a:lnTo>
+                  <a:lnTo>
+                    <a:pt x="1097117" y="2758356"/>
+                  </a:lnTo>
+                  <a:lnTo>
+                    <a:pt x="1174751" y="2752572"/>
+                  </a:lnTo>
+                  <a:lnTo>
+                    <a:pt x="1252385" y="2746750"/>
+                  </a:lnTo>
+                  <a:lnTo>
+                    <a:pt x="1330019" y="2740891"/>
+                  </a:lnTo>
+                  <a:lnTo>
+                    <a:pt x="1407653" y="2734994"/>
+                  </a:lnTo>
+                  <a:lnTo>
+                    <a:pt x="1485287" y="2729058"/>
+                  </a:lnTo>
+                  <a:lnTo>
+                    <a:pt x="1562921" y="2723085"/>
+                  </a:lnTo>
+                  <a:lnTo>
+                    <a:pt x="1640555" y="2717072"/>
+                  </a:lnTo>
+                  <a:lnTo>
+                    <a:pt x="1718189" y="2711021"/>
+                  </a:lnTo>
+                  <a:lnTo>
+                    <a:pt x="1795823" y="2704931"/>
+                  </a:lnTo>
+                  <a:lnTo>
+                    <a:pt x="1873457" y="2698801"/>
+                  </a:lnTo>
+                  <a:lnTo>
+                    <a:pt x="1951091" y="2692631"/>
+                  </a:lnTo>
+                  <a:lnTo>
+                    <a:pt x="2028725" y="2686422"/>
+                  </a:lnTo>
+                  <a:lnTo>
+                    <a:pt x="2106359" y="2680172"/>
+                  </a:lnTo>
+                  <a:lnTo>
+                    <a:pt x="2183993" y="2673882"/>
+                  </a:lnTo>
+                  <a:lnTo>
+                    <a:pt x="2261627" y="2667552"/>
+                  </a:lnTo>
+                  <a:lnTo>
+                    <a:pt x="2339261" y="2661180"/>
+                  </a:lnTo>
+                  <a:lnTo>
+                    <a:pt x="2416895" y="2654767"/>
+                  </a:lnTo>
+                  <a:lnTo>
+                    <a:pt x="2494529" y="2648313"/>
+                  </a:lnTo>
+                  <a:lnTo>
+                    <a:pt x="2572163" y="2641817"/>
+                  </a:lnTo>
+                  <a:lnTo>
+                    <a:pt x="2649797" y="2635279"/>
+                  </a:lnTo>
+                  <a:lnTo>
+                    <a:pt x="2727432" y="2628699"/>
+                  </a:lnTo>
+                  <a:lnTo>
+                    <a:pt x="2805066" y="2622076"/>
+                  </a:lnTo>
+                  <a:lnTo>
+                    <a:pt x="2882700" y="2615410"/>
+                  </a:lnTo>
+                  <a:lnTo>
+                    <a:pt x="2960334" y="2608701"/>
+                  </a:lnTo>
+                  <a:lnTo>
+                    <a:pt x="3037968" y="2601949"/>
+                  </a:lnTo>
+                  <a:lnTo>
+                    <a:pt x="3115602" y="2595153"/>
+                  </a:lnTo>
+                  <a:lnTo>
+                    <a:pt x="3193236" y="2588313"/>
+                  </a:lnTo>
+                  <a:lnTo>
+                    <a:pt x="3270870" y="2581429"/>
+                  </a:lnTo>
+                  <a:lnTo>
+                    <a:pt x="3348504" y="2574501"/>
+                  </a:lnTo>
+                  <a:lnTo>
+                    <a:pt x="3426138" y="2567527"/>
+                  </a:lnTo>
+                  <a:lnTo>
+                    <a:pt x="3503772" y="2560509"/>
+                  </a:lnTo>
+                  <a:lnTo>
+                    <a:pt x="3581406" y="2553445"/>
+                  </a:lnTo>
+                  <a:lnTo>
+                    <a:pt x="3659040" y="2546335"/>
+                  </a:lnTo>
+                  <a:lnTo>
+                    <a:pt x="3736674" y="2539180"/>
+                  </a:lnTo>
+                  <a:lnTo>
+                    <a:pt x="3814308" y="2531978"/>
+                  </a:lnTo>
+                  <a:lnTo>
+                    <a:pt x="3891942" y="2524729"/>
+                  </a:lnTo>
+                  <a:lnTo>
+                    <a:pt x="3969576" y="2517434"/>
+                  </a:lnTo>
+                  <a:lnTo>
+                    <a:pt x="4047210" y="2510091"/>
+                  </a:lnTo>
+                  <a:lnTo>
+                    <a:pt x="4124844" y="2502701"/>
+                  </a:lnTo>
+                  <a:lnTo>
+                    <a:pt x="4202478" y="2495264"/>
+                  </a:lnTo>
+                  <a:lnTo>
+                    <a:pt x="4280112" y="2487778"/>
+                  </a:lnTo>
+                  <a:lnTo>
+                    <a:pt x="4357746" y="2480243"/>
+                  </a:lnTo>
+                  <a:lnTo>
+                    <a:pt x="4435380" y="2472660"/>
+                  </a:lnTo>
+                  <a:lnTo>
+                    <a:pt x="4513015" y="2465028"/>
+                  </a:lnTo>
+                  <a:lnTo>
+                    <a:pt x="4590649" y="2457346"/>
+                  </a:lnTo>
+                  <a:lnTo>
+                    <a:pt x="4668283" y="2449615"/>
+                  </a:lnTo>
+                  <a:lnTo>
+                    <a:pt x="4745917" y="2441834"/>
                   </a:lnTo>
                 </a:path>
               </a:pathLst>
@@ -3730,300 +3724,300 @@
           </p:nvSpPr>
           <p:spPr>
             <a:xfrm>
-              <a:off x="817517" y="4365508"/>
-              <a:ext cx="7370972" cy="1182789"/>
+              <a:off x="817517" y="4683288"/>
+              <a:ext cx="7370972" cy="865440"/>
             </a:xfrm>
             <a:custGeom>
               <a:avLst/>
               <a:pathLst>
-                <a:path w="7370972" h="1182789">
+                <a:path w="7370972" h="865440">
                   <a:moveTo>
-                    <a:pt x="7370972" y="1182789"/>
+                    <a:pt x="7370972" y="865440"/>
                   </a:moveTo>
                   <a:lnTo>
-                    <a:pt x="7293338" y="1182659"/>
-                  </a:lnTo>
-                  <a:lnTo>
-                    <a:pt x="7215704" y="1182511"/>
-                  </a:lnTo>
-                  <a:lnTo>
-                    <a:pt x="7138070" y="1182341"/>
-                  </a:lnTo>
-                  <a:lnTo>
-                    <a:pt x="7060436" y="1182146"/>
-                  </a:lnTo>
-                  <a:lnTo>
-                    <a:pt x="6982802" y="1181924"/>
-                  </a:lnTo>
-                  <a:lnTo>
-                    <a:pt x="6905168" y="1181671"/>
-                  </a:lnTo>
-                  <a:lnTo>
-                    <a:pt x="6827534" y="1181381"/>
-                  </a:lnTo>
-                  <a:lnTo>
-                    <a:pt x="6749900" y="1181049"/>
-                  </a:lnTo>
-                  <a:lnTo>
-                    <a:pt x="6672266" y="1180670"/>
-                  </a:lnTo>
-                  <a:lnTo>
-                    <a:pt x="6594632" y="1180237"/>
-                  </a:lnTo>
-                  <a:lnTo>
-                    <a:pt x="6516998" y="1179742"/>
-                  </a:lnTo>
-                  <a:lnTo>
-                    <a:pt x="6439364" y="1179176"/>
-                  </a:lnTo>
-                  <a:lnTo>
-                    <a:pt x="6361730" y="1178529"/>
-                  </a:lnTo>
-                  <a:lnTo>
-                    <a:pt x="6284096" y="1177789"/>
-                  </a:lnTo>
-                  <a:lnTo>
-                    <a:pt x="6206462" y="1176944"/>
-                  </a:lnTo>
-                  <a:lnTo>
-                    <a:pt x="6128827" y="1175978"/>
-                  </a:lnTo>
-                  <a:lnTo>
-                    <a:pt x="6051193" y="1174873"/>
-                  </a:lnTo>
-                  <a:lnTo>
-                    <a:pt x="5973559" y="1173610"/>
-                  </a:lnTo>
-                  <a:lnTo>
-                    <a:pt x="5895925" y="1172167"/>
-                  </a:lnTo>
-                  <a:lnTo>
-                    <a:pt x="5818291" y="1170517"/>
-                  </a:lnTo>
-                  <a:lnTo>
-                    <a:pt x="5740657" y="1168631"/>
-                  </a:lnTo>
-                  <a:lnTo>
-                    <a:pt x="5663023" y="1166476"/>
-                  </a:lnTo>
-                  <a:lnTo>
-                    <a:pt x="5585389" y="1164012"/>
-                  </a:lnTo>
-                  <a:lnTo>
-                    <a:pt x="5507755" y="1161195"/>
-                  </a:lnTo>
-                  <a:lnTo>
-                    <a:pt x="5430121" y="1157975"/>
-                  </a:lnTo>
-                  <a:lnTo>
-                    <a:pt x="5352487" y="1154295"/>
-                  </a:lnTo>
-                  <a:lnTo>
-                    <a:pt x="5274853" y="1150088"/>
-                  </a:lnTo>
-                  <a:lnTo>
-                    <a:pt x="5197219" y="1145279"/>
-                  </a:lnTo>
-                  <a:lnTo>
-                    <a:pt x="5119585" y="1139782"/>
-                  </a:lnTo>
-                  <a:lnTo>
-                    <a:pt x="5041951" y="1133499"/>
-                  </a:lnTo>
-                  <a:lnTo>
-                    <a:pt x="4964317" y="1126316"/>
-                  </a:lnTo>
-                  <a:lnTo>
-                    <a:pt x="4886683" y="1118106"/>
-                  </a:lnTo>
-                  <a:lnTo>
-                    <a:pt x="4809049" y="1108721"/>
-                  </a:lnTo>
-                  <a:lnTo>
-                    <a:pt x="4731415" y="1097994"/>
-                  </a:lnTo>
-                  <a:lnTo>
-                    <a:pt x="4653781" y="1085731"/>
-                  </a:lnTo>
-                  <a:lnTo>
-                    <a:pt x="4576147" y="1071714"/>
-                  </a:lnTo>
-                  <a:lnTo>
-                    <a:pt x="4498513" y="1055692"/>
-                  </a:lnTo>
-                  <a:lnTo>
-                    <a:pt x="4420879" y="1037377"/>
-                  </a:lnTo>
-                  <a:lnTo>
-                    <a:pt x="4343244" y="1016442"/>
-                  </a:lnTo>
-                  <a:lnTo>
-                    <a:pt x="4265610" y="992511"/>
-                  </a:lnTo>
-                  <a:lnTo>
-                    <a:pt x="4187976" y="965156"/>
-                  </a:lnTo>
-                  <a:lnTo>
-                    <a:pt x="4110342" y="933887"/>
-                  </a:lnTo>
-                  <a:lnTo>
-                    <a:pt x="4032708" y="898145"/>
-                  </a:lnTo>
-                  <a:lnTo>
-                    <a:pt x="3955074" y="857288"/>
-                  </a:lnTo>
-                  <a:lnTo>
-                    <a:pt x="3877440" y="810586"/>
-                  </a:lnTo>
-                  <a:lnTo>
-                    <a:pt x="3799806" y="757201"/>
-                  </a:lnTo>
-                  <a:lnTo>
-                    <a:pt x="3722172" y="696179"/>
-                  </a:lnTo>
-                  <a:lnTo>
-                    <a:pt x="3644538" y="626425"/>
-                  </a:lnTo>
-                  <a:lnTo>
-                    <a:pt x="3566904" y="546691"/>
-                  </a:lnTo>
-                  <a:lnTo>
-                    <a:pt x="3489270" y="455549"/>
-                  </a:lnTo>
-                  <a:lnTo>
-                    <a:pt x="3411636" y="351367"/>
-                  </a:lnTo>
-                  <a:lnTo>
-                    <a:pt x="3334002" y="309882"/>
-                  </a:lnTo>
-                  <a:lnTo>
-                    <a:pt x="3256368" y="303684"/>
-                  </a:lnTo>
-                  <a:lnTo>
-                    <a:pt x="3178734" y="297442"/>
-                  </a:lnTo>
-                  <a:lnTo>
-                    <a:pt x="3101100" y="291156"/>
-                  </a:lnTo>
-                  <a:lnTo>
-                    <a:pt x="3023466" y="284825"/>
-                  </a:lnTo>
-                  <a:lnTo>
-                    <a:pt x="2945832" y="278450"/>
-                  </a:lnTo>
-                  <a:lnTo>
-                    <a:pt x="2868198" y="272029"/>
-                  </a:lnTo>
-                  <a:lnTo>
-                    <a:pt x="2790564" y="265563"/>
-                  </a:lnTo>
-                  <a:lnTo>
-                    <a:pt x="2712930" y="259050"/>
-                  </a:lnTo>
-                  <a:lnTo>
-                    <a:pt x="2635295" y="252492"/>
-                  </a:lnTo>
-                  <a:lnTo>
-                    <a:pt x="2557661" y="245887"/>
-                  </a:lnTo>
-                  <a:lnTo>
-                    <a:pt x="2480027" y="239235"/>
-                  </a:lnTo>
-                  <a:lnTo>
-                    <a:pt x="2402393" y="232537"/>
-                  </a:lnTo>
-                  <a:lnTo>
-                    <a:pt x="2324759" y="225790"/>
-                  </a:lnTo>
-                  <a:lnTo>
-                    <a:pt x="2247125" y="218996"/>
-                  </a:lnTo>
-                  <a:lnTo>
-                    <a:pt x="2169491" y="212153"/>
-                  </a:lnTo>
-                  <a:lnTo>
-                    <a:pt x="2091857" y="205262"/>
-                  </a:lnTo>
-                  <a:lnTo>
-                    <a:pt x="2014223" y="198322"/>
-                  </a:lnTo>
-                  <a:lnTo>
-                    <a:pt x="1936589" y="191333"/>
-                  </a:lnTo>
-                  <a:lnTo>
-                    <a:pt x="1858955" y="184295"/>
-                  </a:lnTo>
-                  <a:lnTo>
-                    <a:pt x="1781321" y="177206"/>
-                  </a:lnTo>
-                  <a:lnTo>
-                    <a:pt x="1703687" y="170067"/>
-                  </a:lnTo>
-                  <a:lnTo>
-                    <a:pt x="1626053" y="162878"/>
-                  </a:lnTo>
-                  <a:lnTo>
-                    <a:pt x="1548419" y="155637"/>
-                  </a:lnTo>
-                  <a:lnTo>
-                    <a:pt x="1470785" y="148345"/>
-                  </a:lnTo>
-                  <a:lnTo>
-                    <a:pt x="1393151" y="141002"/>
-                  </a:lnTo>
-                  <a:lnTo>
-                    <a:pt x="1315517" y="133606"/>
-                  </a:lnTo>
-                  <a:lnTo>
-                    <a:pt x="1237883" y="126158"/>
-                  </a:lnTo>
-                  <a:lnTo>
-                    <a:pt x="1160249" y="118657"/>
-                  </a:lnTo>
-                  <a:lnTo>
-                    <a:pt x="1082615" y="111103"/>
-                  </a:lnTo>
-                  <a:lnTo>
-                    <a:pt x="1004981" y="103495"/>
-                  </a:lnTo>
-                  <a:lnTo>
-                    <a:pt x="927346" y="95833"/>
-                  </a:lnTo>
-                  <a:lnTo>
-                    <a:pt x="849712" y="88117"/>
-                  </a:lnTo>
-                  <a:lnTo>
-                    <a:pt x="772078" y="80346"/>
-                  </a:lnTo>
-                  <a:lnTo>
-                    <a:pt x="694444" y="72520"/>
-                  </a:lnTo>
-                  <a:lnTo>
-                    <a:pt x="616810" y="64639"/>
-                  </a:lnTo>
-                  <a:lnTo>
-                    <a:pt x="539176" y="56702"/>
-                  </a:lnTo>
-                  <a:lnTo>
-                    <a:pt x="461542" y="48708"/>
-                  </a:lnTo>
-                  <a:lnTo>
-                    <a:pt x="383908" y="40658"/>
-                  </a:lnTo>
-                  <a:lnTo>
-                    <a:pt x="306274" y="32550"/>
-                  </a:lnTo>
-                  <a:lnTo>
-                    <a:pt x="228640" y="24386"/>
-                  </a:lnTo>
-                  <a:lnTo>
-                    <a:pt x="151006" y="16163"/>
-                  </a:lnTo>
-                  <a:lnTo>
-                    <a:pt x="73372" y="7882"/>
-                  </a:lnTo>
-                  <a:lnTo>
-                    <a:pt x="0" y="0"/>
+                    <a:pt x="7293338" y="865365"/>
+                  </a:lnTo>
+                  <a:lnTo>
+                    <a:pt x="7215704" y="865278"/>
+                  </a:lnTo>
+                  <a:lnTo>
+                    <a:pt x="7138070" y="865177"/>
+                  </a:lnTo>
+                  <a:lnTo>
+                    <a:pt x="7060436" y="865061"/>
+                  </a:lnTo>
+                  <a:lnTo>
+                    <a:pt x="6982802" y="864926"/>
+                  </a:lnTo>
+                  <a:lnTo>
+                    <a:pt x="6905168" y="864769"/>
+                  </a:lnTo>
+                  <a:lnTo>
+                    <a:pt x="6827534" y="864588"/>
+                  </a:lnTo>
+                  <a:lnTo>
+                    <a:pt x="6749900" y="864379"/>
+                  </a:lnTo>
+                  <a:lnTo>
+                    <a:pt x="6672266" y="864137"/>
+                  </a:lnTo>
+                  <a:lnTo>
+                    <a:pt x="6594632" y="863856"/>
+                  </a:lnTo>
+                  <a:lnTo>
+                    <a:pt x="6516998" y="863531"/>
+                  </a:lnTo>
+                  <a:lnTo>
+                    <a:pt x="6439364" y="863155"/>
+                  </a:lnTo>
+                  <a:lnTo>
+                    <a:pt x="6361730" y="862720"/>
+                  </a:lnTo>
+                  <a:lnTo>
+                    <a:pt x="6284096" y="862216"/>
+                  </a:lnTo>
+                  <a:lnTo>
+                    <a:pt x="6206462" y="861634"/>
+                  </a:lnTo>
+                  <a:lnTo>
+                    <a:pt x="6128827" y="860959"/>
+                  </a:lnTo>
+                  <a:lnTo>
+                    <a:pt x="6051193" y="860178"/>
+                  </a:lnTo>
+                  <a:lnTo>
+                    <a:pt x="5973559" y="859274"/>
+                  </a:lnTo>
+                  <a:lnTo>
+                    <a:pt x="5895925" y="858227"/>
+                  </a:lnTo>
+                  <a:lnTo>
+                    <a:pt x="5818291" y="857016"/>
+                  </a:lnTo>
+                  <a:lnTo>
+                    <a:pt x="5740657" y="855614"/>
+                  </a:lnTo>
+                  <a:lnTo>
+                    <a:pt x="5663023" y="853991"/>
+                  </a:lnTo>
+                  <a:lnTo>
+                    <a:pt x="5585389" y="852113"/>
+                  </a:lnTo>
+                  <a:lnTo>
+                    <a:pt x="5507755" y="849939"/>
+                  </a:lnTo>
+                  <a:lnTo>
+                    <a:pt x="5430121" y="847422"/>
+                  </a:lnTo>
+                  <a:lnTo>
+                    <a:pt x="5352487" y="844509"/>
+                  </a:lnTo>
+                  <a:lnTo>
+                    <a:pt x="5274853" y="841138"/>
+                  </a:lnTo>
+                  <a:lnTo>
+                    <a:pt x="5197219" y="837235"/>
+                  </a:lnTo>
+                  <a:lnTo>
+                    <a:pt x="5119585" y="832718"/>
+                  </a:lnTo>
+                  <a:lnTo>
+                    <a:pt x="5041951" y="827489"/>
+                  </a:lnTo>
+                  <a:lnTo>
+                    <a:pt x="4964317" y="821437"/>
+                  </a:lnTo>
+                  <a:lnTo>
+                    <a:pt x="4886683" y="814432"/>
+                  </a:lnTo>
+                  <a:lnTo>
+                    <a:pt x="4809049" y="806323"/>
+                  </a:lnTo>
+                  <a:lnTo>
+                    <a:pt x="4731415" y="796938"/>
+                  </a:lnTo>
+                  <a:lnTo>
+                    <a:pt x="4653781" y="786074"/>
+                  </a:lnTo>
+                  <a:lnTo>
+                    <a:pt x="4576147" y="773499"/>
+                  </a:lnTo>
+                  <a:lnTo>
+                    <a:pt x="4498513" y="758945"/>
+                  </a:lnTo>
+                  <a:lnTo>
+                    <a:pt x="4420879" y="742097"/>
+                  </a:lnTo>
+                  <a:lnTo>
+                    <a:pt x="4343244" y="722597"/>
+                  </a:lnTo>
+                  <a:lnTo>
+                    <a:pt x="4265610" y="700026"/>
+                  </a:lnTo>
+                  <a:lnTo>
+                    <a:pt x="4187976" y="673900"/>
+                  </a:lnTo>
+                  <a:lnTo>
+                    <a:pt x="4110342" y="643659"/>
+                  </a:lnTo>
+                  <a:lnTo>
+                    <a:pt x="4032708" y="608655"/>
+                  </a:lnTo>
+                  <a:lnTo>
+                    <a:pt x="3955074" y="568140"/>
+                  </a:lnTo>
+                  <a:lnTo>
+                    <a:pt x="3877440" y="521243"/>
+                  </a:lnTo>
+                  <a:lnTo>
+                    <a:pt x="3799806" y="466960"/>
+                  </a:lnTo>
+                  <a:lnTo>
+                    <a:pt x="3722172" y="404129"/>
+                  </a:lnTo>
+                  <a:lnTo>
+                    <a:pt x="3644538" y="331403"/>
+                  </a:lnTo>
+                  <a:lnTo>
+                    <a:pt x="3566904" y="247222"/>
+                  </a:lnTo>
+                  <a:lnTo>
+                    <a:pt x="3489270" y="149785"/>
+                  </a:lnTo>
+                  <a:lnTo>
+                    <a:pt x="3411636" y="37002"/>
+                  </a:lnTo>
+                  <a:lnTo>
+                    <a:pt x="3334002" y="0"/>
+                  </a:lnTo>
+                  <a:lnTo>
+                    <a:pt x="3256368" y="5564"/>
+                  </a:lnTo>
+                  <a:lnTo>
+                    <a:pt x="3178734" y="11093"/>
+                  </a:lnTo>
+                  <a:lnTo>
+                    <a:pt x="3101100" y="16587"/>
+                  </a:lnTo>
+                  <a:lnTo>
+                    <a:pt x="3023466" y="22045"/>
+                  </a:lnTo>
+                  <a:lnTo>
+                    <a:pt x="2945832" y="27468"/>
+                  </a:lnTo>
+                  <a:lnTo>
+                    <a:pt x="2868198" y="32856"/>
+                  </a:lnTo>
+                  <a:lnTo>
+                    <a:pt x="2790564" y="38210"/>
+                  </a:lnTo>
+                  <a:lnTo>
+                    <a:pt x="2712930" y="43529"/>
+                  </a:lnTo>
+                  <a:lnTo>
+                    <a:pt x="2635295" y="48814"/>
+                  </a:lnTo>
+                  <a:lnTo>
+                    <a:pt x="2557661" y="54065"/>
+                  </a:lnTo>
+                  <a:lnTo>
+                    <a:pt x="2480027" y="59283"/>
+                  </a:lnTo>
+                  <a:lnTo>
+                    <a:pt x="2402393" y="64466"/>
+                  </a:lnTo>
+                  <a:lnTo>
+                    <a:pt x="2324759" y="69617"/>
+                  </a:lnTo>
+                  <a:lnTo>
+                    <a:pt x="2247125" y="74734"/>
+                  </a:lnTo>
+                  <a:lnTo>
+                    <a:pt x="2169491" y="79819"/>
+                  </a:lnTo>
+                  <a:lnTo>
+                    <a:pt x="2091857" y="84871"/>
+                  </a:lnTo>
+                  <a:lnTo>
+                    <a:pt x="2014223" y="89890"/>
+                  </a:lnTo>
+                  <a:lnTo>
+                    <a:pt x="1936589" y="94877"/>
+                  </a:lnTo>
+                  <a:lnTo>
+                    <a:pt x="1858955" y="99832"/>
+                  </a:lnTo>
+                  <a:lnTo>
+                    <a:pt x="1781321" y="104755"/>
+                  </a:lnTo>
+                  <a:lnTo>
+                    <a:pt x="1703687" y="109647"/>
+                  </a:lnTo>
+                  <a:lnTo>
+                    <a:pt x="1626053" y="114507"/>
+                  </a:lnTo>
+                  <a:lnTo>
+                    <a:pt x="1548419" y="119336"/>
+                  </a:lnTo>
+                  <a:lnTo>
+                    <a:pt x="1470785" y="124134"/>
+                  </a:lnTo>
+                  <a:lnTo>
+                    <a:pt x="1393151" y="128901"/>
+                  </a:lnTo>
+                  <a:lnTo>
+                    <a:pt x="1315517" y="133637"/>
+                  </a:lnTo>
+                  <a:lnTo>
+                    <a:pt x="1237883" y="138343"/>
+                  </a:lnTo>
+                  <a:lnTo>
+                    <a:pt x="1160249" y="143019"/>
+                  </a:lnTo>
+                  <a:lnTo>
+                    <a:pt x="1082615" y="147664"/>
+                  </a:lnTo>
+                  <a:lnTo>
+                    <a:pt x="1004981" y="152280"/>
+                  </a:lnTo>
+                  <a:lnTo>
+                    <a:pt x="927346" y="156866"/>
+                  </a:lnTo>
+                  <a:lnTo>
+                    <a:pt x="849712" y="161423"/>
+                  </a:lnTo>
+                  <a:lnTo>
+                    <a:pt x="772078" y="165951"/>
+                  </a:lnTo>
+                  <a:lnTo>
+                    <a:pt x="694444" y="170449"/>
+                  </a:lnTo>
+                  <a:lnTo>
+                    <a:pt x="616810" y="174918"/>
+                  </a:lnTo>
+                  <a:lnTo>
+                    <a:pt x="539176" y="179359"/>
+                  </a:lnTo>
+                  <a:lnTo>
+                    <a:pt x="461542" y="183771"/>
+                  </a:lnTo>
+                  <a:lnTo>
+                    <a:pt x="383908" y="188155"/>
+                  </a:lnTo>
+                  <a:lnTo>
+                    <a:pt x="306274" y="192510"/>
+                  </a:lnTo>
+                  <a:lnTo>
+                    <a:pt x="228640" y="196838"/>
+                  </a:lnTo>
+                  <a:lnTo>
+                    <a:pt x="151006" y="201138"/>
+                  </a:lnTo>
+                  <a:lnTo>
+                    <a:pt x="73372" y="205410"/>
+                  </a:lnTo>
+                  <a:lnTo>
+                    <a:pt x="0" y="209422"/>
                   </a:lnTo>
                 </a:path>
               </a:pathLst>
@@ -4043,231 +4037,231 @@
           </p:nvSpPr>
           <p:spPr>
             <a:xfrm>
-              <a:off x="2621608" y="1896563"/>
-              <a:ext cx="5566882" cy="3629195"/>
+              <a:off x="2610200" y="1896563"/>
+              <a:ext cx="5578289" cy="3628593"/>
             </a:xfrm>
             <a:custGeom>
               <a:avLst/>
               <a:pathLst>
-                <a:path w="5566882" h="3629195">
+                <a:path w="5578289" h="3628593">
                   <a:moveTo>
                     <a:pt x="0" y="0"/>
                   </a:moveTo>
                   <a:lnTo>
-                    <a:pt x="54865" y="179040"/>
-                  </a:lnTo>
-                  <a:lnTo>
-                    <a:pt x="132499" y="415161"/>
-                  </a:lnTo>
-                  <a:lnTo>
-                    <a:pt x="210133" y="635232"/>
-                  </a:lnTo>
-                  <a:lnTo>
-                    <a:pt x="287767" y="840343"/>
-                  </a:lnTo>
-                  <a:lnTo>
-                    <a:pt x="365401" y="1031512"/>
-                  </a:lnTo>
-                  <a:lnTo>
-                    <a:pt x="443035" y="1209685"/>
-                  </a:lnTo>
-                  <a:lnTo>
-                    <a:pt x="520669" y="1375748"/>
-                  </a:lnTo>
-                  <a:lnTo>
-                    <a:pt x="598303" y="1530521"/>
-                  </a:lnTo>
-                  <a:lnTo>
-                    <a:pt x="675937" y="1674775"/>
-                  </a:lnTo>
-                  <a:lnTo>
-                    <a:pt x="753571" y="1809222"/>
-                  </a:lnTo>
-                  <a:lnTo>
-                    <a:pt x="831205" y="1934530"/>
-                  </a:lnTo>
-                  <a:lnTo>
-                    <a:pt x="908839" y="2051320"/>
-                  </a:lnTo>
-                  <a:lnTo>
-                    <a:pt x="986473" y="2160172"/>
-                  </a:lnTo>
-                  <a:lnTo>
-                    <a:pt x="1064107" y="2261624"/>
-                  </a:lnTo>
-                  <a:lnTo>
-                    <a:pt x="1141741" y="2356179"/>
-                  </a:lnTo>
-                  <a:lnTo>
-                    <a:pt x="1219375" y="2444308"/>
-                  </a:lnTo>
-                  <a:lnTo>
-                    <a:pt x="1297009" y="2526445"/>
-                  </a:lnTo>
-                  <a:lnTo>
-                    <a:pt x="1374643" y="2603000"/>
-                  </a:lnTo>
-                  <a:lnTo>
-                    <a:pt x="1452277" y="2674350"/>
-                  </a:lnTo>
-                  <a:lnTo>
-                    <a:pt x="1529911" y="2740850"/>
-                  </a:lnTo>
-                  <a:lnTo>
-                    <a:pt x="1607545" y="2802830"/>
-                  </a:lnTo>
-                  <a:lnTo>
-                    <a:pt x="1685180" y="2860597"/>
-                  </a:lnTo>
-                  <a:lnTo>
-                    <a:pt x="1762814" y="2914437"/>
-                  </a:lnTo>
-                  <a:lnTo>
-                    <a:pt x="1840448" y="2964617"/>
-                  </a:lnTo>
-                  <a:lnTo>
-                    <a:pt x="1918082" y="3011386"/>
-                  </a:lnTo>
-                  <a:lnTo>
-                    <a:pt x="1995716" y="3054976"/>
-                  </a:lnTo>
-                  <a:lnTo>
-                    <a:pt x="2073350" y="3095603"/>
-                  </a:lnTo>
-                  <a:lnTo>
-                    <a:pt x="2150984" y="3133469"/>
-                  </a:lnTo>
-                  <a:lnTo>
-                    <a:pt x="2228618" y="3168760"/>
-                  </a:lnTo>
-                  <a:lnTo>
-                    <a:pt x="2306252" y="3201652"/>
-                  </a:lnTo>
-                  <a:lnTo>
-                    <a:pt x="2383886" y="3232309"/>
-                  </a:lnTo>
-                  <a:lnTo>
-                    <a:pt x="2461520" y="3260881"/>
-                  </a:lnTo>
-                  <a:lnTo>
-                    <a:pt x="2539154" y="3287512"/>
-                  </a:lnTo>
-                  <a:lnTo>
-                    <a:pt x="2616788" y="3312332"/>
-                  </a:lnTo>
-                  <a:lnTo>
-                    <a:pt x="2694422" y="3335465"/>
-                  </a:lnTo>
-                  <a:lnTo>
-                    <a:pt x="2772056" y="3357025"/>
-                  </a:lnTo>
-                  <a:lnTo>
-                    <a:pt x="2849690" y="3377120"/>
-                  </a:lnTo>
-                  <a:lnTo>
-                    <a:pt x="2927324" y="3395849"/>
-                  </a:lnTo>
-                  <a:lnTo>
-                    <a:pt x="3004958" y="3413305"/>
-                  </a:lnTo>
-                  <a:lnTo>
-                    <a:pt x="3082592" y="3429574"/>
-                  </a:lnTo>
-                  <a:lnTo>
-                    <a:pt x="3160226" y="3444738"/>
-                  </a:lnTo>
-                  <a:lnTo>
-                    <a:pt x="3237860" y="3458870"/>
-                  </a:lnTo>
-                  <a:lnTo>
-                    <a:pt x="3315494" y="3472042"/>
-                  </a:lnTo>
-                  <a:lnTo>
-                    <a:pt x="3393129" y="3484319"/>
-                  </a:lnTo>
-                  <a:lnTo>
-                    <a:pt x="3470763" y="3495761"/>
-                  </a:lnTo>
-                  <a:lnTo>
-                    <a:pt x="3548397" y="3506425"/>
-                  </a:lnTo>
-                  <a:lnTo>
-                    <a:pt x="3626031" y="3516364"/>
-                  </a:lnTo>
-                  <a:lnTo>
-                    <a:pt x="3703665" y="3525628"/>
-                  </a:lnTo>
-                  <a:lnTo>
-                    <a:pt x="3781299" y="3534262"/>
-                  </a:lnTo>
-                  <a:lnTo>
-                    <a:pt x="3858933" y="3542309"/>
-                  </a:lnTo>
-                  <a:lnTo>
-                    <a:pt x="3936567" y="3549809"/>
-                  </a:lnTo>
-                  <a:lnTo>
-                    <a:pt x="4014201" y="3556799"/>
-                  </a:lnTo>
-                  <a:lnTo>
-                    <a:pt x="4091835" y="3563314"/>
-                  </a:lnTo>
-                  <a:lnTo>
-                    <a:pt x="4169469" y="3569387"/>
-                  </a:lnTo>
-                  <a:lnTo>
-                    <a:pt x="4247103" y="3575046"/>
-                  </a:lnTo>
-                  <a:lnTo>
-                    <a:pt x="4324737" y="3580321"/>
-                  </a:lnTo>
-                  <a:lnTo>
-                    <a:pt x="4402371" y="3585237"/>
-                  </a:lnTo>
-                  <a:lnTo>
-                    <a:pt x="4480005" y="3589819"/>
-                  </a:lnTo>
-                  <a:lnTo>
-                    <a:pt x="4557639" y="3594089"/>
-                  </a:lnTo>
-                  <a:lnTo>
-                    <a:pt x="4635273" y="3598070"/>
-                  </a:lnTo>
-                  <a:lnTo>
-                    <a:pt x="4712907" y="3601779"/>
-                  </a:lnTo>
-                  <a:lnTo>
-                    <a:pt x="4790541" y="3605237"/>
-                  </a:lnTo>
-                  <a:lnTo>
-                    <a:pt x="4868175" y="3608459"/>
-                  </a:lnTo>
-                  <a:lnTo>
-                    <a:pt x="4945809" y="3611463"/>
-                  </a:lnTo>
-                  <a:lnTo>
-                    <a:pt x="5023443" y="3614262"/>
-                  </a:lnTo>
-                  <a:lnTo>
-                    <a:pt x="5101078" y="3616871"/>
-                  </a:lnTo>
-                  <a:lnTo>
-                    <a:pt x="5178712" y="3619303"/>
-                  </a:lnTo>
-                  <a:lnTo>
-                    <a:pt x="5256346" y="3621569"/>
-                  </a:lnTo>
-                  <a:lnTo>
-                    <a:pt x="5333980" y="3623681"/>
-                  </a:lnTo>
-                  <a:lnTo>
-                    <a:pt x="5411614" y="3625650"/>
-                  </a:lnTo>
-                  <a:lnTo>
-                    <a:pt x="5489248" y="3627485"/>
-                  </a:lnTo>
-                  <a:lnTo>
-                    <a:pt x="5566882" y="3629195"/>
+                    <a:pt x="66272" y="212620"/>
+                  </a:lnTo>
+                  <a:lnTo>
+                    <a:pt x="143906" y="444875"/>
+                  </a:lnTo>
+                  <a:lnTo>
+                    <a:pt x="221540" y="661449"/>
+                  </a:lnTo>
+                  <a:lnTo>
+                    <a:pt x="299174" y="863401"/>
+                  </a:lnTo>
+                  <a:lnTo>
+                    <a:pt x="376808" y="1051718"/>
+                  </a:lnTo>
+                  <a:lnTo>
+                    <a:pt x="454442" y="1227321"/>
+                  </a:lnTo>
+                  <a:lnTo>
+                    <a:pt x="532076" y="1391068"/>
+                  </a:lnTo>
+                  <a:lnTo>
+                    <a:pt x="609711" y="1543759"/>
+                  </a:lnTo>
+                  <a:lnTo>
+                    <a:pt x="687345" y="1686142"/>
+                  </a:lnTo>
+                  <a:lnTo>
+                    <a:pt x="764979" y="1818911"/>
+                  </a:lnTo>
+                  <a:lnTo>
+                    <a:pt x="842613" y="1942716"/>
+                  </a:lnTo>
+                  <a:lnTo>
+                    <a:pt x="920247" y="2058163"/>
+                  </a:lnTo>
+                  <a:lnTo>
+                    <a:pt x="997881" y="2165815"/>
+                  </a:lnTo>
+                  <a:lnTo>
+                    <a:pt x="1075515" y="2266199"/>
+                  </a:lnTo>
+                  <a:lnTo>
+                    <a:pt x="1153149" y="2359805"/>
+                  </a:lnTo>
+                  <a:lnTo>
+                    <a:pt x="1230783" y="2447092"/>
+                  </a:lnTo>
+                  <a:lnTo>
+                    <a:pt x="1308417" y="2528485"/>
+                  </a:lnTo>
+                  <a:lnTo>
+                    <a:pt x="1386051" y="2604384"/>
+                  </a:lnTo>
+                  <a:lnTo>
+                    <a:pt x="1463685" y="2675157"/>
+                  </a:lnTo>
+                  <a:lnTo>
+                    <a:pt x="1541319" y="2741153"/>
+                  </a:lnTo>
+                  <a:lnTo>
+                    <a:pt x="1618953" y="2802693"/>
+                  </a:lnTo>
+                  <a:lnTo>
+                    <a:pt x="1696587" y="2860077"/>
+                  </a:lnTo>
+                  <a:lnTo>
+                    <a:pt x="1774221" y="2913588"/>
+                  </a:lnTo>
+                  <a:lnTo>
+                    <a:pt x="1851855" y="2963486"/>
+                  </a:lnTo>
+                  <a:lnTo>
+                    <a:pt x="1929489" y="3010014"/>
+                  </a:lnTo>
+                  <a:lnTo>
+                    <a:pt x="2007123" y="3053402"/>
+                  </a:lnTo>
+                  <a:lnTo>
+                    <a:pt x="2084757" y="3093860"/>
+                  </a:lnTo>
+                  <a:lnTo>
+                    <a:pt x="2162391" y="3131586"/>
+                  </a:lnTo>
+                  <a:lnTo>
+                    <a:pt x="2240025" y="3166766"/>
+                  </a:lnTo>
+                  <a:lnTo>
+                    <a:pt x="2317660" y="3199570"/>
+                  </a:lnTo>
+                  <a:lnTo>
+                    <a:pt x="2395294" y="3230160"/>
+                  </a:lnTo>
+                  <a:lnTo>
+                    <a:pt x="2472928" y="3258684"/>
+                  </a:lnTo>
+                  <a:lnTo>
+                    <a:pt x="2550562" y="3285282"/>
+                  </a:lnTo>
+                  <a:lnTo>
+                    <a:pt x="2628196" y="3310085"/>
+                  </a:lnTo>
+                  <a:lnTo>
+                    <a:pt x="2705830" y="3333213"/>
+                  </a:lnTo>
+                  <a:lnTo>
+                    <a:pt x="2783464" y="3354779"/>
+                  </a:lnTo>
+                  <a:lnTo>
+                    <a:pt x="2861098" y="3374890"/>
+                  </a:lnTo>
+                  <a:lnTo>
+                    <a:pt x="2938732" y="3393642"/>
+                  </a:lnTo>
+                  <a:lnTo>
+                    <a:pt x="3016366" y="3411129"/>
+                  </a:lnTo>
+                  <a:lnTo>
+                    <a:pt x="3094000" y="3427435"/>
+                  </a:lnTo>
+                  <a:lnTo>
+                    <a:pt x="3171634" y="3442640"/>
+                  </a:lnTo>
+                  <a:lnTo>
+                    <a:pt x="3249268" y="3456818"/>
+                  </a:lnTo>
+                  <a:lnTo>
+                    <a:pt x="3326902" y="3470040"/>
+                  </a:lnTo>
+                  <a:lnTo>
+                    <a:pt x="3404536" y="3482368"/>
+                  </a:lnTo>
+                  <a:lnTo>
+                    <a:pt x="3482170" y="3493864"/>
+                  </a:lnTo>
+                  <a:lnTo>
+                    <a:pt x="3559804" y="3504584"/>
+                  </a:lnTo>
+                  <a:lnTo>
+                    <a:pt x="3637438" y="3514581"/>
+                  </a:lnTo>
+                  <a:lnTo>
+                    <a:pt x="3715072" y="3523902"/>
+                  </a:lnTo>
+                  <a:lnTo>
+                    <a:pt x="3792706" y="3532594"/>
+                  </a:lnTo>
+                  <a:lnTo>
+                    <a:pt x="3870340" y="3540699"/>
+                  </a:lnTo>
+                  <a:lnTo>
+                    <a:pt x="3947974" y="3548257"/>
+                  </a:lnTo>
+                  <a:lnTo>
+                    <a:pt x="4025609" y="3555305"/>
+                  </a:lnTo>
+                  <a:lnTo>
+                    <a:pt x="4103243" y="3561877"/>
+                  </a:lnTo>
+                  <a:lnTo>
+                    <a:pt x="4180877" y="3568005"/>
+                  </a:lnTo>
+                  <a:lnTo>
+                    <a:pt x="4258511" y="3573719"/>
+                  </a:lnTo>
+                  <a:lnTo>
+                    <a:pt x="4336145" y="3579048"/>
+                  </a:lnTo>
+                  <a:lnTo>
+                    <a:pt x="4413779" y="3584017"/>
+                  </a:lnTo>
+                  <a:lnTo>
+                    <a:pt x="4491413" y="3588650"/>
+                  </a:lnTo>
+                  <a:lnTo>
+                    <a:pt x="4569047" y="3592971"/>
+                  </a:lnTo>
+                  <a:lnTo>
+                    <a:pt x="4646681" y="3596999"/>
+                  </a:lnTo>
+                  <a:lnTo>
+                    <a:pt x="4724315" y="3600756"/>
+                  </a:lnTo>
+                  <a:lnTo>
+                    <a:pt x="4801949" y="3604259"/>
+                  </a:lnTo>
+                  <a:lnTo>
+                    <a:pt x="4879583" y="3607526"/>
+                  </a:lnTo>
+                  <a:lnTo>
+                    <a:pt x="4957217" y="3610572"/>
+                  </a:lnTo>
+                  <a:lnTo>
+                    <a:pt x="5034851" y="3613413"/>
+                  </a:lnTo>
+                  <a:lnTo>
+                    <a:pt x="5112485" y="3616061"/>
+                  </a:lnTo>
+                  <a:lnTo>
+                    <a:pt x="5190119" y="3618531"/>
+                  </a:lnTo>
+                  <a:lnTo>
+                    <a:pt x="5267753" y="3620834"/>
+                  </a:lnTo>
+                  <a:lnTo>
+                    <a:pt x="5345387" y="3622982"/>
+                  </a:lnTo>
+                  <a:lnTo>
+                    <a:pt x="5423021" y="3624985"/>
+                  </a:lnTo>
+                  <a:lnTo>
+                    <a:pt x="5500655" y="3626852"/>
+                  </a:lnTo>
+                  <a:lnTo>
+                    <a:pt x="5578289" y="3628593"/>
                   </a:lnTo>
                 </a:path>
               </a:pathLst>

--- a/docs/plots/carbo/jx_carbo_linsubhr_ratio_hosp5.pptx
+++ b/docs/plots/carbo/jx_carbo_linsubhr_ratio_hosp5.pptx
@@ -3003,488 +3003,491 @@
           <p:spPr>
             <a:xfrm>
               <a:off x="817517" y="1896563"/>
-              <a:ext cx="7370972" cy="3652166"/>
+              <a:ext cx="7370972" cy="3651350"/>
             </a:xfrm>
             <a:custGeom>
               <a:avLst/>
               <a:pathLst>
-                <a:path w="7370972" h="3652166">
+                <a:path w="7370972" h="3651350">
                   <a:moveTo>
-                    <a:pt x="2625055" y="0"/>
+                    <a:pt x="2509004" y="0"/>
                   </a:moveTo>
                   <a:lnTo>
-                    <a:pt x="2635295" y="74334"/>
-                  </a:lnTo>
-                  <a:lnTo>
-                    <a:pt x="2712930" y="561201"/>
-                  </a:lnTo>
-                  <a:lnTo>
-                    <a:pt x="2790564" y="981825"/>
-                  </a:lnTo>
-                  <a:lnTo>
-                    <a:pt x="2868198" y="1345218"/>
-                  </a:lnTo>
-                  <a:lnTo>
-                    <a:pt x="2945832" y="1659168"/>
-                  </a:lnTo>
-                  <a:lnTo>
-                    <a:pt x="3023466" y="1930401"/>
-                  </a:lnTo>
-                  <a:lnTo>
-                    <a:pt x="3101100" y="2164731"/>
-                  </a:lnTo>
-                  <a:lnTo>
-                    <a:pt x="3178734" y="2367177"/>
-                  </a:lnTo>
-                  <a:lnTo>
-                    <a:pt x="3256368" y="2542078"/>
-                  </a:lnTo>
-                  <a:lnTo>
-                    <a:pt x="3334002" y="2693182"/>
-                  </a:lnTo>
-                  <a:lnTo>
-                    <a:pt x="3411636" y="2781124"/>
-                  </a:lnTo>
-                  <a:lnTo>
-                    <a:pt x="3489270" y="2775487"/>
-                  </a:lnTo>
-                  <a:lnTo>
-                    <a:pt x="3566904" y="2769813"/>
-                  </a:lnTo>
-                  <a:lnTo>
-                    <a:pt x="3644538" y="2764103"/>
-                  </a:lnTo>
-                  <a:lnTo>
-                    <a:pt x="3722172" y="2758356"/>
-                  </a:lnTo>
-                  <a:lnTo>
-                    <a:pt x="3799806" y="2752572"/>
-                  </a:lnTo>
-                  <a:lnTo>
-                    <a:pt x="3877440" y="2746750"/>
-                  </a:lnTo>
-                  <a:lnTo>
-                    <a:pt x="3955074" y="2740891"/>
-                  </a:lnTo>
-                  <a:lnTo>
-                    <a:pt x="4032708" y="2734994"/>
-                  </a:lnTo>
-                  <a:lnTo>
-                    <a:pt x="4110342" y="2729058"/>
-                  </a:lnTo>
-                  <a:lnTo>
-                    <a:pt x="4187976" y="2723085"/>
-                  </a:lnTo>
-                  <a:lnTo>
-                    <a:pt x="4265610" y="2717072"/>
-                  </a:lnTo>
-                  <a:lnTo>
-                    <a:pt x="4343244" y="2711021"/>
-                  </a:lnTo>
-                  <a:lnTo>
-                    <a:pt x="4420879" y="2704931"/>
-                  </a:lnTo>
-                  <a:lnTo>
-                    <a:pt x="4498513" y="2698801"/>
-                  </a:lnTo>
-                  <a:lnTo>
-                    <a:pt x="4576147" y="2692631"/>
-                  </a:lnTo>
-                  <a:lnTo>
-                    <a:pt x="4653781" y="2686422"/>
-                  </a:lnTo>
-                  <a:lnTo>
-                    <a:pt x="4731415" y="2680172"/>
-                  </a:lnTo>
-                  <a:lnTo>
-                    <a:pt x="4809049" y="2673882"/>
-                  </a:lnTo>
-                  <a:lnTo>
-                    <a:pt x="4886683" y="2667552"/>
-                  </a:lnTo>
-                  <a:lnTo>
-                    <a:pt x="4964317" y="2661180"/>
-                  </a:lnTo>
-                  <a:lnTo>
-                    <a:pt x="5041951" y="2654767"/>
-                  </a:lnTo>
-                  <a:lnTo>
-                    <a:pt x="5119585" y="2648313"/>
-                  </a:lnTo>
-                  <a:lnTo>
-                    <a:pt x="5197219" y="2641817"/>
-                  </a:lnTo>
-                  <a:lnTo>
-                    <a:pt x="5274853" y="2635279"/>
-                  </a:lnTo>
-                  <a:lnTo>
-                    <a:pt x="5352487" y="2628699"/>
-                  </a:lnTo>
-                  <a:lnTo>
-                    <a:pt x="5430121" y="2622076"/>
-                  </a:lnTo>
-                  <a:lnTo>
-                    <a:pt x="5507755" y="2615410"/>
-                  </a:lnTo>
-                  <a:lnTo>
-                    <a:pt x="5585389" y="2608701"/>
-                  </a:lnTo>
-                  <a:lnTo>
-                    <a:pt x="5663023" y="2601949"/>
-                  </a:lnTo>
-                  <a:lnTo>
-                    <a:pt x="5740657" y="2595153"/>
-                  </a:lnTo>
-                  <a:lnTo>
-                    <a:pt x="5818291" y="2588313"/>
-                  </a:lnTo>
-                  <a:lnTo>
-                    <a:pt x="5895925" y="2581429"/>
-                  </a:lnTo>
-                  <a:lnTo>
-                    <a:pt x="5973559" y="2574501"/>
-                  </a:lnTo>
-                  <a:lnTo>
-                    <a:pt x="6051193" y="2567527"/>
-                  </a:lnTo>
-                  <a:lnTo>
-                    <a:pt x="6128827" y="2560509"/>
-                  </a:lnTo>
-                  <a:lnTo>
-                    <a:pt x="6206462" y="2553445"/>
-                  </a:lnTo>
-                  <a:lnTo>
-                    <a:pt x="6284096" y="2546335"/>
-                  </a:lnTo>
-                  <a:lnTo>
-                    <a:pt x="6361730" y="2539180"/>
-                  </a:lnTo>
-                  <a:lnTo>
-                    <a:pt x="6439364" y="2531978"/>
-                  </a:lnTo>
-                  <a:lnTo>
-                    <a:pt x="6516998" y="2524729"/>
-                  </a:lnTo>
-                  <a:lnTo>
-                    <a:pt x="6594632" y="2517434"/>
-                  </a:lnTo>
-                  <a:lnTo>
-                    <a:pt x="6672266" y="2510091"/>
-                  </a:lnTo>
-                  <a:lnTo>
-                    <a:pt x="6749900" y="2502701"/>
-                  </a:lnTo>
-                  <a:lnTo>
-                    <a:pt x="6827534" y="2495264"/>
-                  </a:lnTo>
-                  <a:lnTo>
-                    <a:pt x="6905168" y="2487778"/>
-                  </a:lnTo>
-                  <a:lnTo>
-                    <a:pt x="6982802" y="2480243"/>
-                  </a:lnTo>
-                  <a:lnTo>
-                    <a:pt x="7060436" y="2472660"/>
-                  </a:lnTo>
-                  <a:lnTo>
-                    <a:pt x="7138070" y="2465028"/>
-                  </a:lnTo>
-                  <a:lnTo>
-                    <a:pt x="7215704" y="2457346"/>
-                  </a:lnTo>
-                  <a:lnTo>
-                    <a:pt x="7293338" y="2449615"/>
-                  </a:lnTo>
-                  <a:lnTo>
-                    <a:pt x="7370972" y="2441834"/>
-                  </a:lnTo>
-                  <a:lnTo>
-                    <a:pt x="7370972" y="3652166"/>
-                  </a:lnTo>
-                  <a:lnTo>
-                    <a:pt x="7293338" y="3652090"/>
-                  </a:lnTo>
-                  <a:lnTo>
-                    <a:pt x="7215704" y="3652003"/>
-                  </a:lnTo>
-                  <a:lnTo>
-                    <a:pt x="7138070" y="3651902"/>
-                  </a:lnTo>
-                  <a:lnTo>
-                    <a:pt x="7060436" y="3651786"/>
-                  </a:lnTo>
-                  <a:lnTo>
-                    <a:pt x="6982802" y="3651651"/>
-                  </a:lnTo>
-                  <a:lnTo>
-                    <a:pt x="6905168" y="3651494"/>
-                  </a:lnTo>
-                  <a:lnTo>
-                    <a:pt x="6827534" y="3651314"/>
-                  </a:lnTo>
-                  <a:lnTo>
-                    <a:pt x="6749900" y="3651104"/>
-                  </a:lnTo>
-                  <a:lnTo>
-                    <a:pt x="6672266" y="3650862"/>
-                  </a:lnTo>
-                  <a:lnTo>
-                    <a:pt x="6594632" y="3650581"/>
-                  </a:lnTo>
-                  <a:lnTo>
-                    <a:pt x="6516998" y="3650256"/>
-                  </a:lnTo>
-                  <a:lnTo>
-                    <a:pt x="6439364" y="3649880"/>
-                  </a:lnTo>
-                  <a:lnTo>
-                    <a:pt x="6361730" y="3649445"/>
-                  </a:lnTo>
-                  <a:lnTo>
-                    <a:pt x="6284096" y="3648942"/>
-                  </a:lnTo>
-                  <a:lnTo>
-                    <a:pt x="6206462" y="3648359"/>
-                  </a:lnTo>
-                  <a:lnTo>
-                    <a:pt x="6128827" y="3647684"/>
-                  </a:lnTo>
-                  <a:lnTo>
-                    <a:pt x="6051193" y="3646903"/>
-                  </a:lnTo>
-                  <a:lnTo>
-                    <a:pt x="5973559" y="3645999"/>
-                  </a:lnTo>
-                  <a:lnTo>
-                    <a:pt x="5895925" y="3644952"/>
-                  </a:lnTo>
-                  <a:lnTo>
-                    <a:pt x="5818291" y="3643741"/>
-                  </a:lnTo>
-                  <a:lnTo>
-                    <a:pt x="5740657" y="3642339"/>
-                  </a:lnTo>
-                  <a:lnTo>
-                    <a:pt x="5663023" y="3640716"/>
-                  </a:lnTo>
-                  <a:lnTo>
-                    <a:pt x="5585389" y="3638838"/>
-                  </a:lnTo>
-                  <a:lnTo>
-                    <a:pt x="5507755" y="3636664"/>
-                  </a:lnTo>
-                  <a:lnTo>
-                    <a:pt x="5430121" y="3634147"/>
-                  </a:lnTo>
-                  <a:lnTo>
-                    <a:pt x="5352487" y="3631235"/>
-                  </a:lnTo>
-                  <a:lnTo>
-                    <a:pt x="5274853" y="3627863"/>
-                  </a:lnTo>
-                  <a:lnTo>
-                    <a:pt x="5197219" y="3623960"/>
-                  </a:lnTo>
-                  <a:lnTo>
-                    <a:pt x="5119585" y="3619443"/>
-                  </a:lnTo>
-                  <a:lnTo>
-                    <a:pt x="5041951" y="3614214"/>
-                  </a:lnTo>
-                  <a:lnTo>
-                    <a:pt x="4964317" y="3608162"/>
-                  </a:lnTo>
-                  <a:lnTo>
-                    <a:pt x="4886683" y="3601157"/>
-                  </a:lnTo>
-                  <a:lnTo>
-                    <a:pt x="4809049" y="3593048"/>
-                  </a:lnTo>
-                  <a:lnTo>
-                    <a:pt x="4731415" y="3583663"/>
-                  </a:lnTo>
-                  <a:lnTo>
-                    <a:pt x="4653781" y="3572799"/>
-                  </a:lnTo>
-                  <a:lnTo>
-                    <a:pt x="4576147" y="3560225"/>
-                  </a:lnTo>
-                  <a:lnTo>
-                    <a:pt x="4498513" y="3545670"/>
-                  </a:lnTo>
-                  <a:lnTo>
-                    <a:pt x="4420879" y="3528823"/>
-                  </a:lnTo>
-                  <a:lnTo>
-                    <a:pt x="4343244" y="3509322"/>
-                  </a:lnTo>
-                  <a:lnTo>
-                    <a:pt x="4265610" y="3486751"/>
-                  </a:lnTo>
-                  <a:lnTo>
-                    <a:pt x="4187976" y="3460625"/>
-                  </a:lnTo>
-                  <a:lnTo>
-                    <a:pt x="4110342" y="3430384"/>
-                  </a:lnTo>
-                  <a:lnTo>
-                    <a:pt x="4032708" y="3395381"/>
-                  </a:lnTo>
-                  <a:lnTo>
-                    <a:pt x="3955074" y="3354865"/>
-                  </a:lnTo>
-                  <a:lnTo>
-                    <a:pt x="3877440" y="3307968"/>
-                  </a:lnTo>
-                  <a:lnTo>
-                    <a:pt x="3799806" y="3253686"/>
-                  </a:lnTo>
-                  <a:lnTo>
-                    <a:pt x="3722172" y="3190854"/>
-                  </a:lnTo>
-                  <a:lnTo>
-                    <a:pt x="3644538" y="3118128"/>
-                  </a:lnTo>
-                  <a:lnTo>
-                    <a:pt x="3566904" y="3033948"/>
-                  </a:lnTo>
-                  <a:lnTo>
-                    <a:pt x="3489270" y="2936510"/>
-                  </a:lnTo>
-                  <a:lnTo>
-                    <a:pt x="3411636" y="2823727"/>
-                  </a:lnTo>
-                  <a:lnTo>
-                    <a:pt x="3334002" y="2786725"/>
-                  </a:lnTo>
-                  <a:lnTo>
-                    <a:pt x="3256368" y="2792289"/>
-                  </a:lnTo>
-                  <a:lnTo>
-                    <a:pt x="3178734" y="2797818"/>
-                  </a:lnTo>
-                  <a:lnTo>
-                    <a:pt x="3101100" y="2803312"/>
-                  </a:lnTo>
-                  <a:lnTo>
-                    <a:pt x="3023466" y="2808770"/>
-                  </a:lnTo>
-                  <a:lnTo>
-                    <a:pt x="2945832" y="2814193"/>
-                  </a:lnTo>
-                  <a:lnTo>
-                    <a:pt x="2868198" y="2819581"/>
-                  </a:lnTo>
-                  <a:lnTo>
-                    <a:pt x="2790564" y="2824935"/>
-                  </a:lnTo>
-                  <a:lnTo>
-                    <a:pt x="2712930" y="2830254"/>
-                  </a:lnTo>
-                  <a:lnTo>
-                    <a:pt x="2635295" y="2835539"/>
-                  </a:lnTo>
-                  <a:lnTo>
-                    <a:pt x="2557661" y="2840790"/>
-                  </a:lnTo>
-                  <a:lnTo>
-                    <a:pt x="2480027" y="2846008"/>
-                  </a:lnTo>
-                  <a:lnTo>
-                    <a:pt x="2402393" y="2851192"/>
-                  </a:lnTo>
-                  <a:lnTo>
-                    <a:pt x="2324759" y="2856342"/>
-                  </a:lnTo>
-                  <a:lnTo>
-                    <a:pt x="2247125" y="2861459"/>
-                  </a:lnTo>
-                  <a:lnTo>
-                    <a:pt x="2169491" y="2866544"/>
-                  </a:lnTo>
-                  <a:lnTo>
-                    <a:pt x="2091857" y="2871596"/>
-                  </a:lnTo>
-                  <a:lnTo>
-                    <a:pt x="2014223" y="2876615"/>
-                  </a:lnTo>
-                  <a:lnTo>
-                    <a:pt x="1936589" y="2881602"/>
-                  </a:lnTo>
-                  <a:lnTo>
-                    <a:pt x="1858955" y="2886557"/>
-                  </a:lnTo>
-                  <a:lnTo>
-                    <a:pt x="1781321" y="2891480"/>
-                  </a:lnTo>
-                  <a:lnTo>
-                    <a:pt x="1703687" y="2896372"/>
-                  </a:lnTo>
-                  <a:lnTo>
-                    <a:pt x="1626053" y="2901232"/>
-                  </a:lnTo>
-                  <a:lnTo>
-                    <a:pt x="1548419" y="2906061"/>
-                  </a:lnTo>
-                  <a:lnTo>
-                    <a:pt x="1470785" y="2910859"/>
-                  </a:lnTo>
-                  <a:lnTo>
-                    <a:pt x="1393151" y="2915626"/>
-                  </a:lnTo>
-                  <a:lnTo>
-                    <a:pt x="1315517" y="2920362"/>
-                  </a:lnTo>
-                  <a:lnTo>
-                    <a:pt x="1237883" y="2925068"/>
-                  </a:lnTo>
-                  <a:lnTo>
-                    <a:pt x="1160249" y="2929744"/>
-                  </a:lnTo>
-                  <a:lnTo>
-                    <a:pt x="1082615" y="2934390"/>
-                  </a:lnTo>
-                  <a:lnTo>
-                    <a:pt x="1004981" y="2939005"/>
-                  </a:lnTo>
-                  <a:lnTo>
-                    <a:pt x="927346" y="2943592"/>
-                  </a:lnTo>
-                  <a:lnTo>
-                    <a:pt x="849712" y="2948148"/>
-                  </a:lnTo>
-                  <a:lnTo>
-                    <a:pt x="772078" y="2952676"/>
-                  </a:lnTo>
-                  <a:lnTo>
-                    <a:pt x="694444" y="2957174"/>
-                  </a:lnTo>
-                  <a:lnTo>
-                    <a:pt x="616810" y="2961643"/>
-                  </a:lnTo>
-                  <a:lnTo>
-                    <a:pt x="539176" y="2966084"/>
-                  </a:lnTo>
-                  <a:lnTo>
-                    <a:pt x="461542" y="2970496"/>
-                  </a:lnTo>
-                  <a:lnTo>
-                    <a:pt x="383908" y="2974880"/>
-                  </a:lnTo>
-                  <a:lnTo>
-                    <a:pt x="306274" y="2979236"/>
-                  </a:lnTo>
-                  <a:lnTo>
-                    <a:pt x="228640" y="2983563"/>
-                  </a:lnTo>
-                  <a:lnTo>
-                    <a:pt x="151006" y="2987863"/>
-                  </a:lnTo>
-                  <a:lnTo>
-                    <a:pt x="73372" y="2992135"/>
-                  </a:lnTo>
-                  <a:lnTo>
-                    <a:pt x="0" y="2996147"/>
+                    <a:pt x="2557661" y="285426"/>
+                  </a:lnTo>
+                  <a:lnTo>
+                    <a:pt x="2635295" y="686578"/>
+                  </a:lnTo>
+                  <a:lnTo>
+                    <a:pt x="2712930" y="1039939"/>
+                  </a:lnTo>
+                  <a:lnTo>
+                    <a:pt x="2790564" y="1351203"/>
+                  </a:lnTo>
+                  <a:lnTo>
+                    <a:pt x="2868198" y="1625384"/>
+                  </a:lnTo>
+                  <a:lnTo>
+                    <a:pt x="2945832" y="1866901"/>
+                  </a:lnTo>
+                  <a:lnTo>
+                    <a:pt x="3023466" y="2079644"/>
+                  </a:lnTo>
+                  <a:lnTo>
+                    <a:pt x="3101100" y="2267043"/>
+                  </a:lnTo>
+                  <a:lnTo>
+                    <a:pt x="3178734" y="2432116"/>
+                  </a:lnTo>
+                  <a:lnTo>
+                    <a:pt x="3256368" y="2577523"/>
+                  </a:lnTo>
+                  <a:lnTo>
+                    <a:pt x="3334002" y="2705607"/>
+                  </a:lnTo>
+                  <a:lnTo>
+                    <a:pt x="3411636" y="2782636"/>
+                  </a:lnTo>
+                  <a:lnTo>
+                    <a:pt x="3489270" y="2781629"/>
+                  </a:lnTo>
+                  <a:lnTo>
+                    <a:pt x="3566904" y="2780622"/>
+                  </a:lnTo>
+                  <a:lnTo>
+                    <a:pt x="3644538" y="2779613"/>
+                  </a:lnTo>
+                  <a:lnTo>
+                    <a:pt x="3722172" y="2778603"/>
+                  </a:lnTo>
+                  <a:lnTo>
+                    <a:pt x="3799806" y="2777591"/>
+                  </a:lnTo>
+                  <a:lnTo>
+                    <a:pt x="3877440" y="2776579"/>
+                  </a:lnTo>
+                  <a:lnTo>
+                    <a:pt x="3955074" y="2775565"/>
+                  </a:lnTo>
+                  <a:lnTo>
+                    <a:pt x="4032708" y="2774551"/>
+                  </a:lnTo>
+                  <a:lnTo>
+                    <a:pt x="4110342" y="2773535"/>
+                  </a:lnTo>
+                  <a:lnTo>
+                    <a:pt x="4187976" y="2772517"/>
+                  </a:lnTo>
+                  <a:lnTo>
+                    <a:pt x="4265610" y="2771499"/>
+                  </a:lnTo>
+                  <a:lnTo>
+                    <a:pt x="4343244" y="2770480"/>
+                  </a:lnTo>
+                  <a:lnTo>
+                    <a:pt x="4420879" y="2769459"/>
+                  </a:lnTo>
+                  <a:lnTo>
+                    <a:pt x="4498513" y="2768437"/>
+                  </a:lnTo>
+                  <a:lnTo>
+                    <a:pt x="4576147" y="2767414"/>
+                  </a:lnTo>
+                  <a:lnTo>
+                    <a:pt x="4653781" y="2766390"/>
+                  </a:lnTo>
+                  <a:lnTo>
+                    <a:pt x="4731415" y="2765365"/>
+                  </a:lnTo>
+                  <a:lnTo>
+                    <a:pt x="4809049" y="2764338"/>
+                  </a:lnTo>
+                  <a:lnTo>
+                    <a:pt x="4886683" y="2763310"/>
+                  </a:lnTo>
+                  <a:lnTo>
+                    <a:pt x="4964317" y="2762281"/>
+                  </a:lnTo>
+                  <a:lnTo>
+                    <a:pt x="5041951" y="2761251"/>
+                  </a:lnTo>
+                  <a:lnTo>
+                    <a:pt x="5119585" y="2760220"/>
+                  </a:lnTo>
+                  <a:lnTo>
+                    <a:pt x="5197219" y="2759187"/>
+                  </a:lnTo>
+                  <a:lnTo>
+                    <a:pt x="5274853" y="2758153"/>
+                  </a:lnTo>
+                  <a:lnTo>
+                    <a:pt x="5352487" y="2757119"/>
+                  </a:lnTo>
+                  <a:lnTo>
+                    <a:pt x="5430121" y="2756082"/>
+                  </a:lnTo>
+                  <a:lnTo>
+                    <a:pt x="5507755" y="2755045"/>
+                  </a:lnTo>
+                  <a:lnTo>
+                    <a:pt x="5585389" y="2754007"/>
+                  </a:lnTo>
+                  <a:lnTo>
+                    <a:pt x="5663023" y="2752967"/>
+                  </a:lnTo>
+                  <a:lnTo>
+                    <a:pt x="5740657" y="2751926"/>
+                  </a:lnTo>
+                  <a:lnTo>
+                    <a:pt x="5818291" y="2750884"/>
+                  </a:lnTo>
+                  <a:lnTo>
+                    <a:pt x="5895925" y="2749840"/>
+                  </a:lnTo>
+                  <a:lnTo>
+                    <a:pt x="5973559" y="2748796"/>
+                  </a:lnTo>
+                  <a:lnTo>
+                    <a:pt x="6051193" y="2747750"/>
+                  </a:lnTo>
+                  <a:lnTo>
+                    <a:pt x="6128827" y="2746703"/>
+                  </a:lnTo>
+                  <a:lnTo>
+                    <a:pt x="6206462" y="2745655"/>
+                  </a:lnTo>
+                  <a:lnTo>
+                    <a:pt x="6284096" y="2744606"/>
+                  </a:lnTo>
+                  <a:lnTo>
+                    <a:pt x="6361730" y="2743555"/>
+                  </a:lnTo>
+                  <a:lnTo>
+                    <a:pt x="6439364" y="2742503"/>
+                  </a:lnTo>
+                  <a:lnTo>
+                    <a:pt x="6516998" y="2741450"/>
+                  </a:lnTo>
+                  <a:lnTo>
+                    <a:pt x="6594632" y="2740396"/>
+                  </a:lnTo>
+                  <a:lnTo>
+                    <a:pt x="6672266" y="2739340"/>
+                  </a:lnTo>
+                  <a:lnTo>
+                    <a:pt x="6749900" y="2738284"/>
+                  </a:lnTo>
+                  <a:lnTo>
+                    <a:pt x="6827534" y="2737226"/>
+                  </a:lnTo>
+                  <a:lnTo>
+                    <a:pt x="6905168" y="2736167"/>
+                  </a:lnTo>
+                  <a:lnTo>
+                    <a:pt x="6982802" y="2735106"/>
+                  </a:lnTo>
+                  <a:lnTo>
+                    <a:pt x="7060436" y="2734045"/>
+                  </a:lnTo>
+                  <a:lnTo>
+                    <a:pt x="7138070" y="2732982"/>
+                  </a:lnTo>
+                  <a:lnTo>
+                    <a:pt x="7215704" y="2731918"/>
+                  </a:lnTo>
+                  <a:lnTo>
+                    <a:pt x="7293338" y="2730853"/>
+                  </a:lnTo>
+                  <a:lnTo>
+                    <a:pt x="7370972" y="2729786"/>
+                  </a:lnTo>
+                  <a:lnTo>
+                    <a:pt x="7370972" y="3651350"/>
+                  </a:lnTo>
+                  <a:lnTo>
+                    <a:pt x="7293338" y="3651175"/>
+                  </a:lnTo>
+                  <a:lnTo>
+                    <a:pt x="7215704" y="3650977"/>
+                  </a:lnTo>
+                  <a:lnTo>
+                    <a:pt x="7138070" y="3650751"/>
+                  </a:lnTo>
+                  <a:lnTo>
+                    <a:pt x="7060436" y="3650495"/>
+                  </a:lnTo>
+                  <a:lnTo>
+                    <a:pt x="6982802" y="3650205"/>
+                  </a:lnTo>
+                  <a:lnTo>
+                    <a:pt x="6905168" y="3649875"/>
+                  </a:lnTo>
+                  <a:lnTo>
+                    <a:pt x="6827534" y="3649501"/>
+                  </a:lnTo>
+                  <a:lnTo>
+                    <a:pt x="6749900" y="3649076"/>
+                  </a:lnTo>
+                  <a:lnTo>
+                    <a:pt x="6672266" y="3648593"/>
+                  </a:lnTo>
+                  <a:lnTo>
+                    <a:pt x="6594632" y="3648045"/>
+                  </a:lnTo>
+                  <a:lnTo>
+                    <a:pt x="6516998" y="3647423"/>
+                  </a:lnTo>
+                  <a:lnTo>
+                    <a:pt x="6439364" y="3646717"/>
+                  </a:lnTo>
+                  <a:lnTo>
+                    <a:pt x="6361730" y="3645916"/>
+                  </a:lnTo>
+                  <a:lnTo>
+                    <a:pt x="6284096" y="3645006"/>
+                  </a:lnTo>
+                  <a:lnTo>
+                    <a:pt x="6206462" y="3643973"/>
+                  </a:lnTo>
+                  <a:lnTo>
+                    <a:pt x="6128827" y="3642801"/>
+                  </a:lnTo>
+                  <a:lnTo>
+                    <a:pt x="6051193" y="3641469"/>
+                  </a:lnTo>
+                  <a:lnTo>
+                    <a:pt x="5973559" y="3639958"/>
+                  </a:lnTo>
+                  <a:lnTo>
+                    <a:pt x="5895925" y="3638243"/>
+                  </a:lnTo>
+                  <a:lnTo>
+                    <a:pt x="5818291" y="3636295"/>
+                  </a:lnTo>
+                  <a:lnTo>
+                    <a:pt x="5740657" y="3634084"/>
+                  </a:lnTo>
+                  <a:lnTo>
+                    <a:pt x="5663023" y="3631574"/>
+                  </a:lnTo>
+                  <a:lnTo>
+                    <a:pt x="5585389" y="3628724"/>
+                  </a:lnTo>
+                  <a:lnTo>
+                    <a:pt x="5507755" y="3625489"/>
+                  </a:lnTo>
+                  <a:lnTo>
+                    <a:pt x="5430121" y="3621817"/>
+                  </a:lnTo>
+                  <a:lnTo>
+                    <a:pt x="5352487" y="3617648"/>
+                  </a:lnTo>
+                  <a:lnTo>
+                    <a:pt x="5274853" y="3612914"/>
+                  </a:lnTo>
+                  <a:lnTo>
+                    <a:pt x="5197219" y="3607541"/>
+                  </a:lnTo>
+                  <a:lnTo>
+                    <a:pt x="5119585" y="3601441"/>
+                  </a:lnTo>
+                  <a:lnTo>
+                    <a:pt x="5041951" y="3594516"/>
+                  </a:lnTo>
+                  <a:lnTo>
+                    <a:pt x="4964317" y="3586655"/>
+                  </a:lnTo>
+                  <a:lnTo>
+                    <a:pt x="4886683" y="3577730"/>
+                  </a:lnTo>
+                  <a:lnTo>
+                    <a:pt x="4809049" y="3567598"/>
+                  </a:lnTo>
+                  <a:lnTo>
+                    <a:pt x="4731415" y="3556096"/>
+                  </a:lnTo>
+                  <a:lnTo>
+                    <a:pt x="4653781" y="3543039"/>
+                  </a:lnTo>
+                  <a:lnTo>
+                    <a:pt x="4576147" y="3528215"/>
+                  </a:lnTo>
+                  <a:lnTo>
+                    <a:pt x="4498513" y="3511386"/>
+                  </a:lnTo>
+                  <a:lnTo>
+                    <a:pt x="4420879" y="3492282"/>
+                  </a:lnTo>
+                  <a:lnTo>
+                    <a:pt x="4343244" y="3470593"/>
+                  </a:lnTo>
+                  <a:lnTo>
+                    <a:pt x="4265610" y="3445971"/>
+                  </a:lnTo>
+                  <a:lnTo>
+                    <a:pt x="4187976" y="3418020"/>
+                  </a:lnTo>
+                  <a:lnTo>
+                    <a:pt x="4110342" y="3386287"/>
+                  </a:lnTo>
+                  <a:lnTo>
+                    <a:pt x="4032708" y="3350264"/>
+                  </a:lnTo>
+                  <a:lnTo>
+                    <a:pt x="3955074" y="3309368"/>
+                  </a:lnTo>
+                  <a:lnTo>
+                    <a:pt x="3877440" y="3262941"/>
+                  </a:lnTo>
+                  <a:lnTo>
+                    <a:pt x="3799806" y="3210234"/>
+                  </a:lnTo>
+                  <a:lnTo>
+                    <a:pt x="3722172" y="3150400"/>
+                  </a:lnTo>
+                  <a:lnTo>
+                    <a:pt x="3644538" y="3082473"/>
+                  </a:lnTo>
+                  <a:lnTo>
+                    <a:pt x="3566904" y="3005359"/>
+                  </a:lnTo>
+                  <a:lnTo>
+                    <a:pt x="3489270" y="2917815"/>
+                  </a:lnTo>
+                  <a:lnTo>
+                    <a:pt x="3411636" y="2818432"/>
+                  </a:lnTo>
+                  <a:lnTo>
+                    <a:pt x="3334002" y="2783642"/>
+                  </a:lnTo>
+                  <a:lnTo>
+                    <a:pt x="3256368" y="2784646"/>
+                  </a:lnTo>
+                  <a:lnTo>
+                    <a:pt x="3178734" y="2785649"/>
+                  </a:lnTo>
+                  <a:lnTo>
+                    <a:pt x="3101100" y="2786651"/>
+                  </a:lnTo>
+                  <a:lnTo>
+                    <a:pt x="3023466" y="2787652"/>
+                  </a:lnTo>
+                  <a:lnTo>
+                    <a:pt x="2945832" y="2788651"/>
+                  </a:lnTo>
+                  <a:lnTo>
+                    <a:pt x="2868198" y="2789650"/>
+                  </a:lnTo>
+                  <a:lnTo>
+                    <a:pt x="2790564" y="2790647"/>
+                  </a:lnTo>
+                  <a:lnTo>
+                    <a:pt x="2712930" y="2791643"/>
+                  </a:lnTo>
+                  <a:lnTo>
+                    <a:pt x="2635295" y="2792638"/>
+                  </a:lnTo>
+                  <a:lnTo>
+                    <a:pt x="2557661" y="2793632"/>
+                  </a:lnTo>
+                  <a:lnTo>
+                    <a:pt x="2480027" y="2794625"/>
+                  </a:lnTo>
+                  <a:lnTo>
+                    <a:pt x="2402393" y="2795617"/>
+                  </a:lnTo>
+                  <a:lnTo>
+                    <a:pt x="2324759" y="2796607"/>
+                  </a:lnTo>
+                  <a:lnTo>
+                    <a:pt x="2247125" y="2797596"/>
+                  </a:lnTo>
+                  <a:lnTo>
+                    <a:pt x="2169491" y="2798584"/>
+                  </a:lnTo>
+                  <a:lnTo>
+                    <a:pt x="2091857" y="2799571"/>
+                  </a:lnTo>
+                  <a:lnTo>
+                    <a:pt x="2014223" y="2800557"/>
+                  </a:lnTo>
+                  <a:lnTo>
+                    <a:pt x="1936589" y="2801542"/>
+                  </a:lnTo>
+                  <a:lnTo>
+                    <a:pt x="1858955" y="2802526"/>
+                  </a:lnTo>
+                  <a:lnTo>
+                    <a:pt x="1781321" y="2803508"/>
+                  </a:lnTo>
+                  <a:lnTo>
+                    <a:pt x="1703687" y="2804489"/>
+                  </a:lnTo>
+                  <a:lnTo>
+                    <a:pt x="1626053" y="2805470"/>
+                  </a:lnTo>
+                  <a:lnTo>
+                    <a:pt x="1548419" y="2806449"/>
+                  </a:lnTo>
+                  <a:lnTo>
+                    <a:pt x="1470785" y="2807427"/>
+                  </a:lnTo>
+                  <a:lnTo>
+                    <a:pt x="1393151" y="2808403"/>
+                  </a:lnTo>
+                  <a:lnTo>
+                    <a:pt x="1315517" y="2809379"/>
+                  </a:lnTo>
+                  <a:lnTo>
+                    <a:pt x="1237883" y="2810354"/>
+                  </a:lnTo>
+                  <a:lnTo>
+                    <a:pt x="1160249" y="2811327"/>
+                  </a:lnTo>
+                  <a:lnTo>
+                    <a:pt x="1082615" y="2812299"/>
+                  </a:lnTo>
+                  <a:lnTo>
+                    <a:pt x="1004981" y="2813270"/>
+                  </a:lnTo>
+                  <a:lnTo>
+                    <a:pt x="927346" y="2814240"/>
+                  </a:lnTo>
+                  <a:lnTo>
+                    <a:pt x="849712" y="2815209"/>
+                  </a:lnTo>
+                  <a:lnTo>
+                    <a:pt x="772078" y="2816177"/>
+                  </a:lnTo>
+                  <a:lnTo>
+                    <a:pt x="694444" y="2817144"/>
+                  </a:lnTo>
+                  <a:lnTo>
+                    <a:pt x="616810" y="2818109"/>
+                  </a:lnTo>
+                  <a:lnTo>
+                    <a:pt x="539176" y="2819074"/>
+                  </a:lnTo>
+                  <a:lnTo>
+                    <a:pt x="461542" y="2820037"/>
+                  </a:lnTo>
+                  <a:lnTo>
+                    <a:pt x="383908" y="2820999"/>
+                  </a:lnTo>
+                  <a:lnTo>
+                    <a:pt x="306274" y="2821960"/>
+                  </a:lnTo>
+                  <a:lnTo>
+                    <a:pt x="228640" y="2822920"/>
+                  </a:lnTo>
+                  <a:lnTo>
+                    <a:pt x="151006" y="2823879"/>
+                  </a:lnTo>
+                  <a:lnTo>
+                    <a:pt x="73372" y="2824837"/>
+                  </a:lnTo>
+                  <a:lnTo>
+                    <a:pt x="0" y="2825741"/>
                   </a:lnTo>
                   <a:close/>
                 </a:path>
@@ -3510,201 +3513,204 @@
           </p:nvSpPr>
           <p:spPr>
             <a:xfrm>
-              <a:off x="3442573" y="1896563"/>
-              <a:ext cx="4745917" cy="2781124"/>
+              <a:off x="3326522" y="1896563"/>
+              <a:ext cx="4861968" cy="2782636"/>
             </a:xfrm>
             <a:custGeom>
               <a:avLst/>
               <a:pathLst>
-                <a:path w="4745917" h="2781124">
+                <a:path w="4861968" h="2782636">
                   <a:moveTo>
                     <a:pt x="0" y="0"/>
                   </a:moveTo>
                   <a:lnTo>
-                    <a:pt x="10240" y="74334"/>
-                  </a:lnTo>
-                  <a:lnTo>
-                    <a:pt x="87874" y="561201"/>
-                  </a:lnTo>
-                  <a:lnTo>
-                    <a:pt x="165508" y="981825"/>
-                  </a:lnTo>
-                  <a:lnTo>
-                    <a:pt x="243142" y="1345218"/>
-                  </a:lnTo>
-                  <a:lnTo>
-                    <a:pt x="320776" y="1659168"/>
-                  </a:lnTo>
-                  <a:lnTo>
-                    <a:pt x="398410" y="1930401"/>
-                  </a:lnTo>
-                  <a:lnTo>
-                    <a:pt x="476044" y="2164731"/>
-                  </a:lnTo>
-                  <a:lnTo>
-                    <a:pt x="553678" y="2367177"/>
-                  </a:lnTo>
-                  <a:lnTo>
-                    <a:pt x="631312" y="2542078"/>
-                  </a:lnTo>
-                  <a:lnTo>
-                    <a:pt x="708946" y="2693182"/>
-                  </a:lnTo>
-                  <a:lnTo>
-                    <a:pt x="786580" y="2781124"/>
-                  </a:lnTo>
-                  <a:lnTo>
-                    <a:pt x="864214" y="2775487"/>
-                  </a:lnTo>
-                  <a:lnTo>
-                    <a:pt x="941848" y="2769813"/>
-                  </a:lnTo>
-                  <a:lnTo>
-                    <a:pt x="1019483" y="2764103"/>
-                  </a:lnTo>
-                  <a:lnTo>
-                    <a:pt x="1097117" y="2758356"/>
-                  </a:lnTo>
-                  <a:lnTo>
-                    <a:pt x="1174751" y="2752572"/>
-                  </a:lnTo>
-                  <a:lnTo>
-                    <a:pt x="1252385" y="2746750"/>
-                  </a:lnTo>
-                  <a:lnTo>
-                    <a:pt x="1330019" y="2740891"/>
-                  </a:lnTo>
-                  <a:lnTo>
-                    <a:pt x="1407653" y="2734994"/>
-                  </a:lnTo>
-                  <a:lnTo>
-                    <a:pt x="1485287" y="2729058"/>
-                  </a:lnTo>
-                  <a:lnTo>
-                    <a:pt x="1562921" y="2723085"/>
-                  </a:lnTo>
-                  <a:lnTo>
-                    <a:pt x="1640555" y="2717072"/>
-                  </a:lnTo>
-                  <a:lnTo>
-                    <a:pt x="1718189" y="2711021"/>
-                  </a:lnTo>
-                  <a:lnTo>
-                    <a:pt x="1795823" y="2704931"/>
-                  </a:lnTo>
-                  <a:lnTo>
-                    <a:pt x="1873457" y="2698801"/>
-                  </a:lnTo>
-                  <a:lnTo>
-                    <a:pt x="1951091" y="2692631"/>
-                  </a:lnTo>
-                  <a:lnTo>
-                    <a:pt x="2028725" y="2686422"/>
-                  </a:lnTo>
-                  <a:lnTo>
-                    <a:pt x="2106359" y="2680172"/>
-                  </a:lnTo>
-                  <a:lnTo>
-                    <a:pt x="2183993" y="2673882"/>
-                  </a:lnTo>
-                  <a:lnTo>
-                    <a:pt x="2261627" y="2667552"/>
-                  </a:lnTo>
-                  <a:lnTo>
-                    <a:pt x="2339261" y="2661180"/>
-                  </a:lnTo>
-                  <a:lnTo>
-                    <a:pt x="2416895" y="2654767"/>
-                  </a:lnTo>
-                  <a:lnTo>
-                    <a:pt x="2494529" y="2648313"/>
-                  </a:lnTo>
-                  <a:lnTo>
-                    <a:pt x="2572163" y="2641817"/>
-                  </a:lnTo>
-                  <a:lnTo>
-                    <a:pt x="2649797" y="2635279"/>
-                  </a:lnTo>
-                  <a:lnTo>
-                    <a:pt x="2727432" y="2628699"/>
-                  </a:lnTo>
-                  <a:lnTo>
-                    <a:pt x="2805066" y="2622076"/>
-                  </a:lnTo>
-                  <a:lnTo>
-                    <a:pt x="2882700" y="2615410"/>
-                  </a:lnTo>
-                  <a:lnTo>
-                    <a:pt x="2960334" y="2608701"/>
-                  </a:lnTo>
-                  <a:lnTo>
-                    <a:pt x="3037968" y="2601949"/>
-                  </a:lnTo>
-                  <a:lnTo>
-                    <a:pt x="3115602" y="2595153"/>
-                  </a:lnTo>
-                  <a:lnTo>
-                    <a:pt x="3193236" y="2588313"/>
-                  </a:lnTo>
-                  <a:lnTo>
-                    <a:pt x="3270870" y="2581429"/>
-                  </a:lnTo>
-                  <a:lnTo>
-                    <a:pt x="3348504" y="2574501"/>
-                  </a:lnTo>
-                  <a:lnTo>
-                    <a:pt x="3426138" y="2567527"/>
-                  </a:lnTo>
-                  <a:lnTo>
-                    <a:pt x="3503772" y="2560509"/>
-                  </a:lnTo>
-                  <a:lnTo>
-                    <a:pt x="3581406" y="2553445"/>
-                  </a:lnTo>
-                  <a:lnTo>
-                    <a:pt x="3659040" y="2546335"/>
-                  </a:lnTo>
-                  <a:lnTo>
-                    <a:pt x="3736674" y="2539180"/>
-                  </a:lnTo>
-                  <a:lnTo>
-                    <a:pt x="3814308" y="2531978"/>
-                  </a:lnTo>
-                  <a:lnTo>
-                    <a:pt x="3891942" y="2524729"/>
-                  </a:lnTo>
-                  <a:lnTo>
-                    <a:pt x="3969576" y="2517434"/>
-                  </a:lnTo>
-                  <a:lnTo>
-                    <a:pt x="4047210" y="2510091"/>
-                  </a:lnTo>
-                  <a:lnTo>
-                    <a:pt x="4124844" y="2502701"/>
-                  </a:lnTo>
-                  <a:lnTo>
-                    <a:pt x="4202478" y="2495264"/>
-                  </a:lnTo>
-                  <a:lnTo>
-                    <a:pt x="4280112" y="2487778"/>
-                  </a:lnTo>
-                  <a:lnTo>
-                    <a:pt x="4357746" y="2480243"/>
-                  </a:lnTo>
-                  <a:lnTo>
-                    <a:pt x="4435380" y="2472660"/>
-                  </a:lnTo>
-                  <a:lnTo>
-                    <a:pt x="4513015" y="2465028"/>
-                  </a:lnTo>
-                  <a:lnTo>
-                    <a:pt x="4590649" y="2457346"/>
-                  </a:lnTo>
-                  <a:lnTo>
-                    <a:pt x="4668283" y="2449615"/>
-                  </a:lnTo>
-                  <a:lnTo>
-                    <a:pt x="4745917" y="2441834"/>
+                    <a:pt x="48657" y="285426"/>
+                  </a:lnTo>
+                  <a:lnTo>
+                    <a:pt x="126291" y="686578"/>
+                  </a:lnTo>
+                  <a:lnTo>
+                    <a:pt x="203925" y="1039939"/>
+                  </a:lnTo>
+                  <a:lnTo>
+                    <a:pt x="281559" y="1351203"/>
+                  </a:lnTo>
+                  <a:lnTo>
+                    <a:pt x="359193" y="1625384"/>
+                  </a:lnTo>
+                  <a:lnTo>
+                    <a:pt x="436827" y="1866901"/>
+                  </a:lnTo>
+                  <a:lnTo>
+                    <a:pt x="514461" y="2079644"/>
+                  </a:lnTo>
+                  <a:lnTo>
+                    <a:pt x="592095" y="2267043"/>
+                  </a:lnTo>
+                  <a:lnTo>
+                    <a:pt x="669729" y="2432116"/>
+                  </a:lnTo>
+                  <a:lnTo>
+                    <a:pt x="747363" y="2577523"/>
+                  </a:lnTo>
+                  <a:lnTo>
+                    <a:pt x="824997" y="2705607"/>
+                  </a:lnTo>
+                  <a:lnTo>
+                    <a:pt x="902631" y="2782636"/>
+                  </a:lnTo>
+                  <a:lnTo>
+                    <a:pt x="980265" y="2781629"/>
+                  </a:lnTo>
+                  <a:lnTo>
+                    <a:pt x="1057899" y="2780622"/>
+                  </a:lnTo>
+                  <a:lnTo>
+                    <a:pt x="1135533" y="2779613"/>
+                  </a:lnTo>
+                  <a:lnTo>
+                    <a:pt x="1213167" y="2778603"/>
+                  </a:lnTo>
+                  <a:lnTo>
+                    <a:pt x="1290801" y="2777591"/>
+                  </a:lnTo>
+                  <a:lnTo>
+                    <a:pt x="1368435" y="2776579"/>
+                  </a:lnTo>
+                  <a:lnTo>
+                    <a:pt x="1446070" y="2775565"/>
+                  </a:lnTo>
+                  <a:lnTo>
+                    <a:pt x="1523704" y="2774551"/>
+                  </a:lnTo>
+                  <a:lnTo>
+                    <a:pt x="1601338" y="2773535"/>
+                  </a:lnTo>
+                  <a:lnTo>
+                    <a:pt x="1678972" y="2772517"/>
+                  </a:lnTo>
+                  <a:lnTo>
+                    <a:pt x="1756606" y="2771499"/>
+                  </a:lnTo>
+                  <a:lnTo>
+                    <a:pt x="1834240" y="2770480"/>
+                  </a:lnTo>
+                  <a:lnTo>
+                    <a:pt x="1911874" y="2769459"/>
+                  </a:lnTo>
+                  <a:lnTo>
+                    <a:pt x="1989508" y="2768437"/>
+                  </a:lnTo>
+                  <a:lnTo>
+                    <a:pt x="2067142" y="2767414"/>
+                  </a:lnTo>
+                  <a:lnTo>
+                    <a:pt x="2144776" y="2766390"/>
+                  </a:lnTo>
+                  <a:lnTo>
+                    <a:pt x="2222410" y="2765365"/>
+                  </a:lnTo>
+                  <a:lnTo>
+                    <a:pt x="2300044" y="2764338"/>
+                  </a:lnTo>
+                  <a:lnTo>
+                    <a:pt x="2377678" y="2763310"/>
+                  </a:lnTo>
+                  <a:lnTo>
+                    <a:pt x="2455312" y="2762281"/>
+                  </a:lnTo>
+                  <a:lnTo>
+                    <a:pt x="2532946" y="2761251"/>
+                  </a:lnTo>
+                  <a:lnTo>
+                    <a:pt x="2610580" y="2760220"/>
+                  </a:lnTo>
+                  <a:lnTo>
+                    <a:pt x="2688214" y="2759187"/>
+                  </a:lnTo>
+                  <a:lnTo>
+                    <a:pt x="2765848" y="2758153"/>
+                  </a:lnTo>
+                  <a:lnTo>
+                    <a:pt x="2843482" y="2757119"/>
+                  </a:lnTo>
+                  <a:lnTo>
+                    <a:pt x="2921116" y="2756082"/>
+                  </a:lnTo>
+                  <a:lnTo>
+                    <a:pt x="2998750" y="2755045"/>
+                  </a:lnTo>
+                  <a:lnTo>
+                    <a:pt x="3076384" y="2754007"/>
+                  </a:lnTo>
+                  <a:lnTo>
+                    <a:pt x="3154019" y="2752967"/>
+                  </a:lnTo>
+                  <a:lnTo>
+                    <a:pt x="3231653" y="2751926"/>
+                  </a:lnTo>
+                  <a:lnTo>
+                    <a:pt x="3309287" y="2750884"/>
+                  </a:lnTo>
+                  <a:lnTo>
+                    <a:pt x="3386921" y="2749840"/>
+                  </a:lnTo>
+                  <a:lnTo>
+                    <a:pt x="3464555" y="2748796"/>
+                  </a:lnTo>
+                  <a:lnTo>
+                    <a:pt x="3542189" y="2747750"/>
+                  </a:lnTo>
+                  <a:lnTo>
+                    <a:pt x="3619823" y="2746703"/>
+                  </a:lnTo>
+                  <a:lnTo>
+                    <a:pt x="3697457" y="2745655"/>
+                  </a:lnTo>
+                  <a:lnTo>
+                    <a:pt x="3775091" y="2744606"/>
+                  </a:lnTo>
+                  <a:lnTo>
+                    <a:pt x="3852725" y="2743555"/>
+                  </a:lnTo>
+                  <a:lnTo>
+                    <a:pt x="3930359" y="2742503"/>
+                  </a:lnTo>
+                  <a:lnTo>
+                    <a:pt x="4007993" y="2741450"/>
+                  </a:lnTo>
+                  <a:lnTo>
+                    <a:pt x="4085627" y="2740396"/>
+                  </a:lnTo>
+                  <a:lnTo>
+                    <a:pt x="4163261" y="2739340"/>
+                  </a:lnTo>
+                  <a:lnTo>
+                    <a:pt x="4240895" y="2738284"/>
+                  </a:lnTo>
+                  <a:lnTo>
+                    <a:pt x="4318529" y="2737226"/>
+                  </a:lnTo>
+                  <a:lnTo>
+                    <a:pt x="4396163" y="2736167"/>
+                  </a:lnTo>
+                  <a:lnTo>
+                    <a:pt x="4473797" y="2735106"/>
+                  </a:lnTo>
+                  <a:lnTo>
+                    <a:pt x="4551431" y="2734045"/>
+                  </a:lnTo>
+                  <a:lnTo>
+                    <a:pt x="4629065" y="2732982"/>
+                  </a:lnTo>
+                  <a:lnTo>
+                    <a:pt x="4706699" y="2731918"/>
+                  </a:lnTo>
+                  <a:lnTo>
+                    <a:pt x="4784333" y="2730853"/>
+                  </a:lnTo>
+                  <a:lnTo>
+                    <a:pt x="4861968" y="2729786"/>
                   </a:lnTo>
                 </a:path>
               </a:pathLst>
@@ -3724,300 +3730,300 @@
           </p:nvSpPr>
           <p:spPr>
             <a:xfrm>
-              <a:off x="817517" y="4683288"/>
-              <a:ext cx="7370972" cy="865440"/>
+              <a:off x="817517" y="4680205"/>
+              <a:ext cx="7370972" cy="867708"/>
             </a:xfrm>
             <a:custGeom>
               <a:avLst/>
               <a:pathLst>
-                <a:path w="7370972" h="865440">
+                <a:path w="7370972" h="867708">
                   <a:moveTo>
-                    <a:pt x="7370972" y="865440"/>
+                    <a:pt x="7370972" y="867708"/>
                   </a:moveTo>
                   <a:lnTo>
-                    <a:pt x="7293338" y="865365"/>
-                  </a:lnTo>
-                  <a:lnTo>
-                    <a:pt x="7215704" y="865278"/>
-                  </a:lnTo>
-                  <a:lnTo>
-                    <a:pt x="7138070" y="865177"/>
-                  </a:lnTo>
-                  <a:lnTo>
-                    <a:pt x="7060436" y="865061"/>
-                  </a:lnTo>
-                  <a:lnTo>
-                    <a:pt x="6982802" y="864926"/>
-                  </a:lnTo>
-                  <a:lnTo>
-                    <a:pt x="6905168" y="864769"/>
-                  </a:lnTo>
-                  <a:lnTo>
-                    <a:pt x="6827534" y="864588"/>
-                  </a:lnTo>
-                  <a:lnTo>
-                    <a:pt x="6749900" y="864379"/>
-                  </a:lnTo>
-                  <a:lnTo>
-                    <a:pt x="6672266" y="864137"/>
-                  </a:lnTo>
-                  <a:lnTo>
-                    <a:pt x="6594632" y="863856"/>
-                  </a:lnTo>
-                  <a:lnTo>
-                    <a:pt x="6516998" y="863531"/>
-                  </a:lnTo>
-                  <a:lnTo>
-                    <a:pt x="6439364" y="863155"/>
-                  </a:lnTo>
-                  <a:lnTo>
-                    <a:pt x="6361730" y="862720"/>
-                  </a:lnTo>
-                  <a:lnTo>
-                    <a:pt x="6284096" y="862216"/>
-                  </a:lnTo>
-                  <a:lnTo>
-                    <a:pt x="6206462" y="861634"/>
-                  </a:lnTo>
-                  <a:lnTo>
-                    <a:pt x="6128827" y="860959"/>
-                  </a:lnTo>
-                  <a:lnTo>
-                    <a:pt x="6051193" y="860178"/>
-                  </a:lnTo>
-                  <a:lnTo>
-                    <a:pt x="5973559" y="859274"/>
-                  </a:lnTo>
-                  <a:lnTo>
-                    <a:pt x="5895925" y="858227"/>
-                  </a:lnTo>
-                  <a:lnTo>
-                    <a:pt x="5818291" y="857016"/>
-                  </a:lnTo>
-                  <a:lnTo>
-                    <a:pt x="5740657" y="855614"/>
-                  </a:lnTo>
-                  <a:lnTo>
-                    <a:pt x="5663023" y="853991"/>
-                  </a:lnTo>
-                  <a:lnTo>
-                    <a:pt x="5585389" y="852113"/>
-                  </a:lnTo>
-                  <a:lnTo>
-                    <a:pt x="5507755" y="849939"/>
-                  </a:lnTo>
-                  <a:lnTo>
-                    <a:pt x="5430121" y="847422"/>
-                  </a:lnTo>
-                  <a:lnTo>
-                    <a:pt x="5352487" y="844509"/>
-                  </a:lnTo>
-                  <a:lnTo>
-                    <a:pt x="5274853" y="841138"/>
-                  </a:lnTo>
-                  <a:lnTo>
-                    <a:pt x="5197219" y="837235"/>
-                  </a:lnTo>
-                  <a:lnTo>
-                    <a:pt x="5119585" y="832718"/>
-                  </a:lnTo>
-                  <a:lnTo>
-                    <a:pt x="5041951" y="827489"/>
-                  </a:lnTo>
-                  <a:lnTo>
-                    <a:pt x="4964317" y="821437"/>
-                  </a:lnTo>
-                  <a:lnTo>
-                    <a:pt x="4886683" y="814432"/>
-                  </a:lnTo>
-                  <a:lnTo>
-                    <a:pt x="4809049" y="806323"/>
-                  </a:lnTo>
-                  <a:lnTo>
-                    <a:pt x="4731415" y="796938"/>
-                  </a:lnTo>
-                  <a:lnTo>
-                    <a:pt x="4653781" y="786074"/>
-                  </a:lnTo>
-                  <a:lnTo>
-                    <a:pt x="4576147" y="773499"/>
-                  </a:lnTo>
-                  <a:lnTo>
-                    <a:pt x="4498513" y="758945"/>
-                  </a:lnTo>
-                  <a:lnTo>
-                    <a:pt x="4420879" y="742097"/>
-                  </a:lnTo>
-                  <a:lnTo>
-                    <a:pt x="4343244" y="722597"/>
-                  </a:lnTo>
-                  <a:lnTo>
-                    <a:pt x="4265610" y="700026"/>
-                  </a:lnTo>
-                  <a:lnTo>
-                    <a:pt x="4187976" y="673900"/>
-                  </a:lnTo>
-                  <a:lnTo>
-                    <a:pt x="4110342" y="643659"/>
-                  </a:lnTo>
-                  <a:lnTo>
-                    <a:pt x="4032708" y="608655"/>
-                  </a:lnTo>
-                  <a:lnTo>
-                    <a:pt x="3955074" y="568140"/>
-                  </a:lnTo>
-                  <a:lnTo>
-                    <a:pt x="3877440" y="521243"/>
-                  </a:lnTo>
-                  <a:lnTo>
-                    <a:pt x="3799806" y="466960"/>
-                  </a:lnTo>
-                  <a:lnTo>
-                    <a:pt x="3722172" y="404129"/>
-                  </a:lnTo>
-                  <a:lnTo>
-                    <a:pt x="3644538" y="331403"/>
-                  </a:lnTo>
-                  <a:lnTo>
-                    <a:pt x="3566904" y="247222"/>
-                  </a:lnTo>
-                  <a:lnTo>
-                    <a:pt x="3489270" y="149785"/>
-                  </a:lnTo>
-                  <a:lnTo>
-                    <a:pt x="3411636" y="37002"/>
+                    <a:pt x="7293338" y="867533"/>
+                  </a:lnTo>
+                  <a:lnTo>
+                    <a:pt x="7215704" y="867335"/>
+                  </a:lnTo>
+                  <a:lnTo>
+                    <a:pt x="7138070" y="867109"/>
+                  </a:lnTo>
+                  <a:lnTo>
+                    <a:pt x="7060436" y="866853"/>
+                  </a:lnTo>
+                  <a:lnTo>
+                    <a:pt x="6982802" y="866563"/>
+                  </a:lnTo>
+                  <a:lnTo>
+                    <a:pt x="6905168" y="866233"/>
+                  </a:lnTo>
+                  <a:lnTo>
+                    <a:pt x="6827534" y="865859"/>
+                  </a:lnTo>
+                  <a:lnTo>
+                    <a:pt x="6749900" y="865434"/>
+                  </a:lnTo>
+                  <a:lnTo>
+                    <a:pt x="6672266" y="864951"/>
+                  </a:lnTo>
+                  <a:lnTo>
+                    <a:pt x="6594632" y="864403"/>
+                  </a:lnTo>
+                  <a:lnTo>
+                    <a:pt x="6516998" y="863781"/>
+                  </a:lnTo>
+                  <a:lnTo>
+                    <a:pt x="6439364" y="863075"/>
+                  </a:lnTo>
+                  <a:lnTo>
+                    <a:pt x="6361730" y="862274"/>
+                  </a:lnTo>
+                  <a:lnTo>
+                    <a:pt x="6284096" y="861364"/>
+                  </a:lnTo>
+                  <a:lnTo>
+                    <a:pt x="6206462" y="860331"/>
+                  </a:lnTo>
+                  <a:lnTo>
+                    <a:pt x="6128827" y="859159"/>
+                  </a:lnTo>
+                  <a:lnTo>
+                    <a:pt x="6051193" y="857827"/>
+                  </a:lnTo>
+                  <a:lnTo>
+                    <a:pt x="5973559" y="856316"/>
+                  </a:lnTo>
+                  <a:lnTo>
+                    <a:pt x="5895925" y="854601"/>
+                  </a:lnTo>
+                  <a:lnTo>
+                    <a:pt x="5818291" y="852653"/>
+                  </a:lnTo>
+                  <a:lnTo>
+                    <a:pt x="5740657" y="850442"/>
+                  </a:lnTo>
+                  <a:lnTo>
+                    <a:pt x="5663023" y="847932"/>
+                  </a:lnTo>
+                  <a:lnTo>
+                    <a:pt x="5585389" y="845082"/>
+                  </a:lnTo>
+                  <a:lnTo>
+                    <a:pt x="5507755" y="841847"/>
+                  </a:lnTo>
+                  <a:lnTo>
+                    <a:pt x="5430121" y="838175"/>
+                  </a:lnTo>
+                  <a:lnTo>
+                    <a:pt x="5352487" y="834006"/>
+                  </a:lnTo>
+                  <a:lnTo>
+                    <a:pt x="5274853" y="829272"/>
+                  </a:lnTo>
+                  <a:lnTo>
+                    <a:pt x="5197219" y="823899"/>
+                  </a:lnTo>
+                  <a:lnTo>
+                    <a:pt x="5119585" y="817799"/>
+                  </a:lnTo>
+                  <a:lnTo>
+                    <a:pt x="5041951" y="810874"/>
+                  </a:lnTo>
+                  <a:lnTo>
+                    <a:pt x="4964317" y="803013"/>
+                  </a:lnTo>
+                  <a:lnTo>
+                    <a:pt x="4886683" y="794088"/>
+                  </a:lnTo>
+                  <a:lnTo>
+                    <a:pt x="4809049" y="783956"/>
+                  </a:lnTo>
+                  <a:lnTo>
+                    <a:pt x="4731415" y="772454"/>
+                  </a:lnTo>
+                  <a:lnTo>
+                    <a:pt x="4653781" y="759397"/>
+                  </a:lnTo>
+                  <a:lnTo>
+                    <a:pt x="4576147" y="744573"/>
+                  </a:lnTo>
+                  <a:lnTo>
+                    <a:pt x="4498513" y="727744"/>
+                  </a:lnTo>
+                  <a:lnTo>
+                    <a:pt x="4420879" y="708640"/>
+                  </a:lnTo>
+                  <a:lnTo>
+                    <a:pt x="4343244" y="686951"/>
+                  </a:lnTo>
+                  <a:lnTo>
+                    <a:pt x="4265610" y="662329"/>
+                  </a:lnTo>
+                  <a:lnTo>
+                    <a:pt x="4187976" y="634378"/>
+                  </a:lnTo>
+                  <a:lnTo>
+                    <a:pt x="4110342" y="602645"/>
+                  </a:lnTo>
+                  <a:lnTo>
+                    <a:pt x="4032708" y="566622"/>
+                  </a:lnTo>
+                  <a:lnTo>
+                    <a:pt x="3955074" y="525726"/>
+                  </a:lnTo>
+                  <a:lnTo>
+                    <a:pt x="3877440" y="479298"/>
+                  </a:lnTo>
+                  <a:lnTo>
+                    <a:pt x="3799806" y="426592"/>
+                  </a:lnTo>
+                  <a:lnTo>
+                    <a:pt x="3722172" y="366758"/>
+                  </a:lnTo>
+                  <a:lnTo>
+                    <a:pt x="3644538" y="298831"/>
+                  </a:lnTo>
+                  <a:lnTo>
+                    <a:pt x="3566904" y="221717"/>
+                  </a:lnTo>
+                  <a:lnTo>
+                    <a:pt x="3489270" y="134173"/>
+                  </a:lnTo>
+                  <a:lnTo>
+                    <a:pt x="3411636" y="34790"/>
                   </a:lnTo>
                   <a:lnTo>
                     <a:pt x="3334002" y="0"/>
                   </a:lnTo>
                   <a:lnTo>
-                    <a:pt x="3256368" y="5564"/>
-                  </a:lnTo>
-                  <a:lnTo>
-                    <a:pt x="3178734" y="11093"/>
-                  </a:lnTo>
-                  <a:lnTo>
-                    <a:pt x="3101100" y="16587"/>
-                  </a:lnTo>
-                  <a:lnTo>
-                    <a:pt x="3023466" y="22045"/>
-                  </a:lnTo>
-                  <a:lnTo>
-                    <a:pt x="2945832" y="27468"/>
-                  </a:lnTo>
-                  <a:lnTo>
-                    <a:pt x="2868198" y="32856"/>
-                  </a:lnTo>
-                  <a:lnTo>
-                    <a:pt x="2790564" y="38210"/>
-                  </a:lnTo>
-                  <a:lnTo>
-                    <a:pt x="2712930" y="43529"/>
-                  </a:lnTo>
-                  <a:lnTo>
-                    <a:pt x="2635295" y="48814"/>
-                  </a:lnTo>
-                  <a:lnTo>
-                    <a:pt x="2557661" y="54065"/>
-                  </a:lnTo>
-                  <a:lnTo>
-                    <a:pt x="2480027" y="59283"/>
-                  </a:lnTo>
-                  <a:lnTo>
-                    <a:pt x="2402393" y="64466"/>
-                  </a:lnTo>
-                  <a:lnTo>
-                    <a:pt x="2324759" y="69617"/>
-                  </a:lnTo>
-                  <a:lnTo>
-                    <a:pt x="2247125" y="74734"/>
-                  </a:lnTo>
-                  <a:lnTo>
-                    <a:pt x="2169491" y="79819"/>
-                  </a:lnTo>
-                  <a:lnTo>
-                    <a:pt x="2091857" y="84871"/>
-                  </a:lnTo>
-                  <a:lnTo>
-                    <a:pt x="2014223" y="89890"/>
-                  </a:lnTo>
-                  <a:lnTo>
-                    <a:pt x="1936589" y="94877"/>
-                  </a:lnTo>
-                  <a:lnTo>
-                    <a:pt x="1858955" y="99832"/>
-                  </a:lnTo>
-                  <a:lnTo>
-                    <a:pt x="1781321" y="104755"/>
-                  </a:lnTo>
-                  <a:lnTo>
-                    <a:pt x="1703687" y="109647"/>
-                  </a:lnTo>
-                  <a:lnTo>
-                    <a:pt x="1626053" y="114507"/>
-                  </a:lnTo>
-                  <a:lnTo>
-                    <a:pt x="1548419" y="119336"/>
-                  </a:lnTo>
-                  <a:lnTo>
-                    <a:pt x="1470785" y="124134"/>
-                  </a:lnTo>
-                  <a:lnTo>
-                    <a:pt x="1393151" y="128901"/>
-                  </a:lnTo>
-                  <a:lnTo>
-                    <a:pt x="1315517" y="133637"/>
-                  </a:lnTo>
-                  <a:lnTo>
-                    <a:pt x="1237883" y="138343"/>
-                  </a:lnTo>
-                  <a:lnTo>
-                    <a:pt x="1160249" y="143019"/>
-                  </a:lnTo>
-                  <a:lnTo>
-                    <a:pt x="1082615" y="147664"/>
-                  </a:lnTo>
-                  <a:lnTo>
-                    <a:pt x="1004981" y="152280"/>
-                  </a:lnTo>
-                  <a:lnTo>
-                    <a:pt x="927346" y="156866"/>
-                  </a:lnTo>
-                  <a:lnTo>
-                    <a:pt x="849712" y="161423"/>
-                  </a:lnTo>
-                  <a:lnTo>
-                    <a:pt x="772078" y="165951"/>
-                  </a:lnTo>
-                  <a:lnTo>
-                    <a:pt x="694444" y="170449"/>
-                  </a:lnTo>
-                  <a:lnTo>
-                    <a:pt x="616810" y="174918"/>
-                  </a:lnTo>
-                  <a:lnTo>
-                    <a:pt x="539176" y="179359"/>
-                  </a:lnTo>
-                  <a:lnTo>
-                    <a:pt x="461542" y="183771"/>
-                  </a:lnTo>
-                  <a:lnTo>
-                    <a:pt x="383908" y="188155"/>
-                  </a:lnTo>
-                  <a:lnTo>
-                    <a:pt x="306274" y="192510"/>
-                  </a:lnTo>
-                  <a:lnTo>
-                    <a:pt x="228640" y="196838"/>
-                  </a:lnTo>
-                  <a:lnTo>
-                    <a:pt x="151006" y="201138"/>
-                  </a:lnTo>
-                  <a:lnTo>
-                    <a:pt x="73372" y="205410"/>
-                  </a:lnTo>
-                  <a:lnTo>
-                    <a:pt x="0" y="209422"/>
+                    <a:pt x="3256368" y="1004"/>
+                  </a:lnTo>
+                  <a:lnTo>
+                    <a:pt x="3178734" y="2007"/>
+                  </a:lnTo>
+                  <a:lnTo>
+                    <a:pt x="3101100" y="3009"/>
+                  </a:lnTo>
+                  <a:lnTo>
+                    <a:pt x="3023466" y="4010"/>
+                  </a:lnTo>
+                  <a:lnTo>
+                    <a:pt x="2945832" y="5009"/>
+                  </a:lnTo>
+                  <a:lnTo>
+                    <a:pt x="2868198" y="6008"/>
+                  </a:lnTo>
+                  <a:lnTo>
+                    <a:pt x="2790564" y="7005"/>
+                  </a:lnTo>
+                  <a:lnTo>
+                    <a:pt x="2712930" y="8001"/>
+                  </a:lnTo>
+                  <a:lnTo>
+                    <a:pt x="2635295" y="8996"/>
+                  </a:lnTo>
+                  <a:lnTo>
+                    <a:pt x="2557661" y="9990"/>
+                  </a:lnTo>
+                  <a:lnTo>
+                    <a:pt x="2480027" y="10983"/>
+                  </a:lnTo>
+                  <a:lnTo>
+                    <a:pt x="2402393" y="11975"/>
+                  </a:lnTo>
+                  <a:lnTo>
+                    <a:pt x="2324759" y="12965"/>
+                  </a:lnTo>
+                  <a:lnTo>
+                    <a:pt x="2247125" y="13954"/>
+                  </a:lnTo>
+                  <a:lnTo>
+                    <a:pt x="2169491" y="14942"/>
+                  </a:lnTo>
+                  <a:lnTo>
+                    <a:pt x="2091857" y="15929"/>
+                  </a:lnTo>
+                  <a:lnTo>
+                    <a:pt x="2014223" y="16915"/>
+                  </a:lnTo>
+                  <a:lnTo>
+                    <a:pt x="1936589" y="17900"/>
+                  </a:lnTo>
+                  <a:lnTo>
+                    <a:pt x="1858955" y="18884"/>
+                  </a:lnTo>
+                  <a:lnTo>
+                    <a:pt x="1781321" y="19866"/>
+                  </a:lnTo>
+                  <a:lnTo>
+                    <a:pt x="1703687" y="20847"/>
+                  </a:lnTo>
+                  <a:lnTo>
+                    <a:pt x="1626053" y="21828"/>
+                  </a:lnTo>
+                  <a:lnTo>
+                    <a:pt x="1548419" y="22807"/>
+                  </a:lnTo>
+                  <a:lnTo>
+                    <a:pt x="1470785" y="23785"/>
+                  </a:lnTo>
+                  <a:lnTo>
+                    <a:pt x="1393151" y="24761"/>
+                  </a:lnTo>
+                  <a:lnTo>
+                    <a:pt x="1315517" y="25737"/>
+                  </a:lnTo>
+                  <a:lnTo>
+                    <a:pt x="1237883" y="26711"/>
+                  </a:lnTo>
+                  <a:lnTo>
+                    <a:pt x="1160249" y="27685"/>
+                  </a:lnTo>
+                  <a:lnTo>
+                    <a:pt x="1082615" y="28657"/>
+                  </a:lnTo>
+                  <a:lnTo>
+                    <a:pt x="1004981" y="29628"/>
+                  </a:lnTo>
+                  <a:lnTo>
+                    <a:pt x="927346" y="30598"/>
+                  </a:lnTo>
+                  <a:lnTo>
+                    <a:pt x="849712" y="31567"/>
+                  </a:lnTo>
+                  <a:lnTo>
+                    <a:pt x="772078" y="32535"/>
+                  </a:lnTo>
+                  <a:lnTo>
+                    <a:pt x="694444" y="33502"/>
+                  </a:lnTo>
+                  <a:lnTo>
+                    <a:pt x="616810" y="34467"/>
+                  </a:lnTo>
+                  <a:lnTo>
+                    <a:pt x="539176" y="35432"/>
+                  </a:lnTo>
+                  <a:lnTo>
+                    <a:pt x="461542" y="36395"/>
+                  </a:lnTo>
+                  <a:lnTo>
+                    <a:pt x="383908" y="37357"/>
+                  </a:lnTo>
+                  <a:lnTo>
+                    <a:pt x="306274" y="38318"/>
+                  </a:lnTo>
+                  <a:lnTo>
+                    <a:pt x="228640" y="39278"/>
+                  </a:lnTo>
+                  <a:lnTo>
+                    <a:pt x="151006" y="40237"/>
+                  </a:lnTo>
+                  <a:lnTo>
+                    <a:pt x="73372" y="41195"/>
+                  </a:lnTo>
+                  <a:lnTo>
+                    <a:pt x="0" y="42099"/>
                   </a:lnTo>
                 </a:path>
               </a:pathLst>
@@ -4037,231 +4043,240 @@
           </p:nvSpPr>
           <p:spPr>
             <a:xfrm>
-              <a:off x="2610200" y="1896563"/>
-              <a:ext cx="5578289" cy="3628593"/>
+              <a:off x="2431264" y="1896563"/>
+              <a:ext cx="5757226" cy="3618097"/>
             </a:xfrm>
             <a:custGeom>
               <a:avLst/>
               <a:pathLst>
-                <a:path w="5578289" h="3628593">
+                <a:path w="5757226" h="3618097">
                   <a:moveTo>
                     <a:pt x="0" y="0"/>
                   </a:moveTo>
                   <a:lnTo>
-                    <a:pt x="66272" y="212620"/>
-                  </a:lnTo>
-                  <a:lnTo>
-                    <a:pt x="143906" y="444875"/>
-                  </a:lnTo>
-                  <a:lnTo>
-                    <a:pt x="221540" y="661449"/>
-                  </a:lnTo>
-                  <a:lnTo>
-                    <a:pt x="299174" y="863401"/>
-                  </a:lnTo>
-                  <a:lnTo>
-                    <a:pt x="376808" y="1051718"/>
-                  </a:lnTo>
-                  <a:lnTo>
-                    <a:pt x="454442" y="1227321"/>
-                  </a:lnTo>
-                  <a:lnTo>
-                    <a:pt x="532076" y="1391068"/>
-                  </a:lnTo>
-                  <a:lnTo>
-                    <a:pt x="609711" y="1543759"/>
-                  </a:lnTo>
-                  <a:lnTo>
-                    <a:pt x="687345" y="1686142"/>
-                  </a:lnTo>
-                  <a:lnTo>
-                    <a:pt x="764979" y="1818911"/>
-                  </a:lnTo>
-                  <a:lnTo>
-                    <a:pt x="842613" y="1942716"/>
-                  </a:lnTo>
-                  <a:lnTo>
-                    <a:pt x="920247" y="2058163"/>
-                  </a:lnTo>
-                  <a:lnTo>
-                    <a:pt x="997881" y="2165815"/>
-                  </a:lnTo>
-                  <a:lnTo>
-                    <a:pt x="1075515" y="2266199"/>
-                  </a:lnTo>
-                  <a:lnTo>
-                    <a:pt x="1153149" y="2359805"/>
-                  </a:lnTo>
-                  <a:lnTo>
-                    <a:pt x="1230783" y="2447092"/>
-                  </a:lnTo>
-                  <a:lnTo>
-                    <a:pt x="1308417" y="2528485"/>
-                  </a:lnTo>
-                  <a:lnTo>
-                    <a:pt x="1386051" y="2604384"/>
-                  </a:lnTo>
-                  <a:lnTo>
-                    <a:pt x="1463685" y="2675157"/>
-                  </a:lnTo>
-                  <a:lnTo>
-                    <a:pt x="1541319" y="2741153"/>
-                  </a:lnTo>
-                  <a:lnTo>
-                    <a:pt x="1618953" y="2802693"/>
-                  </a:lnTo>
-                  <a:lnTo>
-                    <a:pt x="1696587" y="2860077"/>
-                  </a:lnTo>
-                  <a:lnTo>
-                    <a:pt x="1774221" y="2913588"/>
-                  </a:lnTo>
-                  <a:lnTo>
-                    <a:pt x="1851855" y="2963486"/>
-                  </a:lnTo>
-                  <a:lnTo>
-                    <a:pt x="1929489" y="3010014"/>
-                  </a:lnTo>
-                  <a:lnTo>
-                    <a:pt x="2007123" y="3053402"/>
-                  </a:lnTo>
-                  <a:lnTo>
-                    <a:pt x="2084757" y="3093860"/>
-                  </a:lnTo>
-                  <a:lnTo>
-                    <a:pt x="2162391" y="3131586"/>
-                  </a:lnTo>
-                  <a:lnTo>
-                    <a:pt x="2240025" y="3166766"/>
-                  </a:lnTo>
-                  <a:lnTo>
-                    <a:pt x="2317660" y="3199570"/>
-                  </a:lnTo>
-                  <a:lnTo>
-                    <a:pt x="2395294" y="3230160"/>
-                  </a:lnTo>
-                  <a:lnTo>
-                    <a:pt x="2472928" y="3258684"/>
-                  </a:lnTo>
-                  <a:lnTo>
-                    <a:pt x="2550562" y="3285282"/>
-                  </a:lnTo>
-                  <a:lnTo>
-                    <a:pt x="2628196" y="3310085"/>
-                  </a:lnTo>
-                  <a:lnTo>
-                    <a:pt x="2705830" y="3333213"/>
-                  </a:lnTo>
-                  <a:lnTo>
-                    <a:pt x="2783464" y="3354779"/>
-                  </a:lnTo>
-                  <a:lnTo>
-                    <a:pt x="2861098" y="3374890"/>
-                  </a:lnTo>
-                  <a:lnTo>
-                    <a:pt x="2938732" y="3393642"/>
-                  </a:lnTo>
-                  <a:lnTo>
-                    <a:pt x="3016366" y="3411129"/>
-                  </a:lnTo>
-                  <a:lnTo>
-                    <a:pt x="3094000" y="3427435"/>
-                  </a:lnTo>
-                  <a:lnTo>
-                    <a:pt x="3171634" y="3442640"/>
-                  </a:lnTo>
-                  <a:lnTo>
-                    <a:pt x="3249268" y="3456818"/>
-                  </a:lnTo>
-                  <a:lnTo>
-                    <a:pt x="3326902" y="3470040"/>
-                  </a:lnTo>
-                  <a:lnTo>
-                    <a:pt x="3404536" y="3482368"/>
-                  </a:lnTo>
-                  <a:lnTo>
-                    <a:pt x="3482170" y="3493864"/>
-                  </a:lnTo>
-                  <a:lnTo>
-                    <a:pt x="3559804" y="3504584"/>
-                  </a:lnTo>
-                  <a:lnTo>
-                    <a:pt x="3637438" y="3514581"/>
-                  </a:lnTo>
-                  <a:lnTo>
-                    <a:pt x="3715072" y="3523902"/>
-                  </a:lnTo>
-                  <a:lnTo>
-                    <a:pt x="3792706" y="3532594"/>
-                  </a:lnTo>
-                  <a:lnTo>
-                    <a:pt x="3870340" y="3540699"/>
-                  </a:lnTo>
-                  <a:lnTo>
-                    <a:pt x="3947974" y="3548257"/>
-                  </a:lnTo>
-                  <a:lnTo>
-                    <a:pt x="4025609" y="3555305"/>
-                  </a:lnTo>
-                  <a:lnTo>
-                    <a:pt x="4103243" y="3561877"/>
-                  </a:lnTo>
-                  <a:lnTo>
-                    <a:pt x="4180877" y="3568005"/>
-                  </a:lnTo>
-                  <a:lnTo>
-                    <a:pt x="4258511" y="3573719"/>
-                  </a:lnTo>
-                  <a:lnTo>
-                    <a:pt x="4336145" y="3579048"/>
-                  </a:lnTo>
-                  <a:lnTo>
-                    <a:pt x="4413779" y="3584017"/>
-                  </a:lnTo>
-                  <a:lnTo>
-                    <a:pt x="4491413" y="3588650"/>
-                  </a:lnTo>
-                  <a:lnTo>
-                    <a:pt x="4569047" y="3592971"/>
-                  </a:lnTo>
-                  <a:lnTo>
-                    <a:pt x="4646681" y="3596999"/>
-                  </a:lnTo>
-                  <a:lnTo>
-                    <a:pt x="4724315" y="3600756"/>
-                  </a:lnTo>
-                  <a:lnTo>
-                    <a:pt x="4801949" y="3604259"/>
-                  </a:lnTo>
-                  <a:lnTo>
-                    <a:pt x="4879583" y="3607526"/>
-                  </a:lnTo>
-                  <a:lnTo>
-                    <a:pt x="4957217" y="3610572"/>
-                  </a:lnTo>
-                  <a:lnTo>
-                    <a:pt x="5034851" y="3613413"/>
-                  </a:lnTo>
-                  <a:lnTo>
-                    <a:pt x="5112485" y="3616061"/>
-                  </a:lnTo>
-                  <a:lnTo>
-                    <a:pt x="5190119" y="3618531"/>
-                  </a:lnTo>
-                  <a:lnTo>
-                    <a:pt x="5267753" y="3620834"/>
-                  </a:lnTo>
-                  <a:lnTo>
-                    <a:pt x="5345387" y="3622982"/>
-                  </a:lnTo>
-                  <a:lnTo>
-                    <a:pt x="5423021" y="3624985"/>
-                  </a:lnTo>
-                  <a:lnTo>
-                    <a:pt x="5500655" y="3626852"/>
-                  </a:lnTo>
-                  <a:lnTo>
-                    <a:pt x="5578289" y="3628593"/>
+                    <a:pt x="12306" y="37176"/>
+                  </a:lnTo>
+                  <a:lnTo>
+                    <a:pt x="89940" y="257404"/>
+                  </a:lnTo>
+                  <a:lnTo>
+                    <a:pt x="167574" y="464218"/>
+                  </a:lnTo>
+                  <a:lnTo>
+                    <a:pt x="245209" y="658434"/>
+                  </a:lnTo>
+                  <a:lnTo>
+                    <a:pt x="322843" y="840820"/>
+                  </a:lnTo>
+                  <a:lnTo>
+                    <a:pt x="400477" y="1012097"/>
+                  </a:lnTo>
+                  <a:lnTo>
+                    <a:pt x="478111" y="1172940"/>
+                  </a:lnTo>
+                  <a:lnTo>
+                    <a:pt x="555745" y="1323986"/>
+                  </a:lnTo>
+                  <a:lnTo>
+                    <a:pt x="633379" y="1465831"/>
+                  </a:lnTo>
+                  <a:lnTo>
+                    <a:pt x="711013" y="1599036"/>
+                  </a:lnTo>
+                  <a:lnTo>
+                    <a:pt x="788647" y="1724128"/>
+                  </a:lnTo>
+                  <a:lnTo>
+                    <a:pt x="866281" y="1841599"/>
+                  </a:lnTo>
+                  <a:lnTo>
+                    <a:pt x="943915" y="1951915"/>
+                  </a:lnTo>
+                  <a:lnTo>
+                    <a:pt x="1021549" y="2055511"/>
+                  </a:lnTo>
+                  <a:lnTo>
+                    <a:pt x="1099183" y="2152797"/>
+                  </a:lnTo>
+                  <a:lnTo>
+                    <a:pt x="1176817" y="2244157"/>
+                  </a:lnTo>
+                  <a:lnTo>
+                    <a:pt x="1254451" y="2329952"/>
+                  </a:lnTo>
+                  <a:lnTo>
+                    <a:pt x="1332085" y="2410521"/>
+                  </a:lnTo>
+                  <a:lnTo>
+                    <a:pt x="1409719" y="2486182"/>
+                  </a:lnTo>
+                  <a:lnTo>
+                    <a:pt x="1487353" y="2557235"/>
+                  </a:lnTo>
+                  <a:lnTo>
+                    <a:pt x="1564987" y="2623959"/>
+                  </a:lnTo>
+                  <a:lnTo>
+                    <a:pt x="1642621" y="2686620"/>
+                  </a:lnTo>
+                  <a:lnTo>
+                    <a:pt x="1720255" y="2745463"/>
+                  </a:lnTo>
+                  <a:lnTo>
+                    <a:pt x="1797889" y="2800722"/>
+                  </a:lnTo>
+                  <a:lnTo>
+                    <a:pt x="1875523" y="2852615"/>
+                  </a:lnTo>
+                  <a:lnTo>
+                    <a:pt x="1953158" y="2901347"/>
+                  </a:lnTo>
+                  <a:lnTo>
+                    <a:pt x="2030792" y="2947111"/>
+                  </a:lnTo>
+                  <a:lnTo>
+                    <a:pt x="2108426" y="2990087"/>
+                  </a:lnTo>
+                  <a:lnTo>
+                    <a:pt x="2186060" y="3030445"/>
+                  </a:lnTo>
+                  <a:lnTo>
+                    <a:pt x="2263694" y="3068345"/>
+                  </a:lnTo>
+                  <a:lnTo>
+                    <a:pt x="2341328" y="3103936"/>
+                  </a:lnTo>
+                  <a:lnTo>
+                    <a:pt x="2418962" y="3137359"/>
+                  </a:lnTo>
+                  <a:lnTo>
+                    <a:pt x="2496596" y="3168747"/>
+                  </a:lnTo>
+                  <a:lnTo>
+                    <a:pt x="2574230" y="3198222"/>
+                  </a:lnTo>
+                  <a:lnTo>
+                    <a:pt x="2651864" y="3225903"/>
+                  </a:lnTo>
+                  <a:lnTo>
+                    <a:pt x="2729498" y="3251897"/>
+                  </a:lnTo>
+                  <a:lnTo>
+                    <a:pt x="2807132" y="3276307"/>
+                  </a:lnTo>
+                  <a:lnTo>
+                    <a:pt x="2884766" y="3299231"/>
+                  </a:lnTo>
+                  <a:lnTo>
+                    <a:pt x="2962400" y="3320758"/>
+                  </a:lnTo>
+                  <a:lnTo>
+                    <a:pt x="3040034" y="3340974"/>
+                  </a:lnTo>
+                  <a:lnTo>
+                    <a:pt x="3117668" y="3359959"/>
+                  </a:lnTo>
+                  <a:lnTo>
+                    <a:pt x="3195302" y="3377787"/>
+                  </a:lnTo>
+                  <a:lnTo>
+                    <a:pt x="3272936" y="3394530"/>
+                  </a:lnTo>
+                  <a:lnTo>
+                    <a:pt x="3350570" y="3410252"/>
+                  </a:lnTo>
+                  <a:lnTo>
+                    <a:pt x="3428204" y="3425017"/>
+                  </a:lnTo>
+                  <a:lnTo>
+                    <a:pt x="3505838" y="3438882"/>
+                  </a:lnTo>
+                  <a:lnTo>
+                    <a:pt x="3583472" y="3451903"/>
+                  </a:lnTo>
+                  <a:lnTo>
+                    <a:pt x="3661107" y="3464131"/>
+                  </a:lnTo>
+                  <a:lnTo>
+                    <a:pt x="3738741" y="3475614"/>
+                  </a:lnTo>
+                  <a:lnTo>
+                    <a:pt x="3816375" y="3486397"/>
+                  </a:lnTo>
+                  <a:lnTo>
+                    <a:pt x="3894009" y="3496523"/>
+                  </a:lnTo>
+                  <a:lnTo>
+                    <a:pt x="3971643" y="3506033"/>
+                  </a:lnTo>
+                  <a:lnTo>
+                    <a:pt x="4049277" y="3514964"/>
+                  </a:lnTo>
+                  <a:lnTo>
+                    <a:pt x="4126911" y="3523350"/>
+                  </a:lnTo>
+                  <a:lnTo>
+                    <a:pt x="4204545" y="3531226"/>
+                  </a:lnTo>
+                  <a:lnTo>
+                    <a:pt x="4282179" y="3538622"/>
+                  </a:lnTo>
+                  <a:lnTo>
+                    <a:pt x="4359813" y="3545567"/>
+                  </a:lnTo>
+                  <a:lnTo>
+                    <a:pt x="4437447" y="3552089"/>
+                  </a:lnTo>
+                  <a:lnTo>
+                    <a:pt x="4515081" y="3558214"/>
+                  </a:lnTo>
+                  <a:lnTo>
+                    <a:pt x="4592715" y="3563966"/>
+                  </a:lnTo>
+                  <a:lnTo>
+                    <a:pt x="4670349" y="3569368"/>
+                  </a:lnTo>
+                  <a:lnTo>
+                    <a:pt x="4747983" y="3574440"/>
+                  </a:lnTo>
+                  <a:lnTo>
+                    <a:pt x="4825617" y="3579204"/>
+                  </a:lnTo>
+                  <a:lnTo>
+                    <a:pt x="4903251" y="3583677"/>
+                  </a:lnTo>
+                  <a:lnTo>
+                    <a:pt x="4980885" y="3587878"/>
+                  </a:lnTo>
+                  <a:lnTo>
+                    <a:pt x="5058519" y="3591823"/>
+                  </a:lnTo>
+                  <a:lnTo>
+                    <a:pt x="5136153" y="3595528"/>
+                  </a:lnTo>
+                  <a:lnTo>
+                    <a:pt x="5213787" y="3599007"/>
+                  </a:lnTo>
+                  <a:lnTo>
+                    <a:pt x="5291421" y="3602274"/>
+                  </a:lnTo>
+                  <a:lnTo>
+                    <a:pt x="5369055" y="3605342"/>
+                  </a:lnTo>
+                  <a:lnTo>
+                    <a:pt x="5446690" y="3608224"/>
+                  </a:lnTo>
+                  <a:lnTo>
+                    <a:pt x="5524324" y="3610929"/>
+                  </a:lnTo>
+                  <a:lnTo>
+                    <a:pt x="5601958" y="3613470"/>
+                  </a:lnTo>
+                  <a:lnTo>
+                    <a:pt x="5679592" y="3615856"/>
+                  </a:lnTo>
+                  <a:lnTo>
+                    <a:pt x="5757226" y="3618097"/>
                   </a:lnTo>
                 </a:path>
               </a:pathLst>

--- a/docs/plots/carbo/jx_carbo_linsubhr_ratio_hosp5.pptx
+++ b/docs/plots/carbo/jx_carbo_linsubhr_ratio_hosp5.pptx
@@ -3003,491 +3003,488 @@
           <p:spPr>
             <a:xfrm>
               <a:off x="817517" y="1896563"/>
-              <a:ext cx="7370972" cy="3651350"/>
+              <a:ext cx="7370972" cy="3652166"/>
             </a:xfrm>
             <a:custGeom>
               <a:avLst/>
               <a:pathLst>
-                <a:path w="7370972" h="3651350">
+                <a:path w="7370972" h="3652166">
                   <a:moveTo>
-                    <a:pt x="2509004" y="0"/>
+                    <a:pt x="2625055" y="0"/>
                   </a:moveTo>
                   <a:lnTo>
-                    <a:pt x="2557661" y="285426"/>
-                  </a:lnTo>
-                  <a:lnTo>
-                    <a:pt x="2635295" y="686578"/>
-                  </a:lnTo>
-                  <a:lnTo>
-                    <a:pt x="2712930" y="1039939"/>
-                  </a:lnTo>
-                  <a:lnTo>
-                    <a:pt x="2790564" y="1351203"/>
-                  </a:lnTo>
-                  <a:lnTo>
-                    <a:pt x="2868198" y="1625384"/>
-                  </a:lnTo>
-                  <a:lnTo>
-                    <a:pt x="2945832" y="1866901"/>
-                  </a:lnTo>
-                  <a:lnTo>
-                    <a:pt x="3023466" y="2079644"/>
-                  </a:lnTo>
-                  <a:lnTo>
-                    <a:pt x="3101100" y="2267043"/>
-                  </a:lnTo>
-                  <a:lnTo>
-                    <a:pt x="3178734" y="2432116"/>
-                  </a:lnTo>
-                  <a:lnTo>
-                    <a:pt x="3256368" y="2577523"/>
-                  </a:lnTo>
-                  <a:lnTo>
-                    <a:pt x="3334002" y="2705607"/>
-                  </a:lnTo>
-                  <a:lnTo>
-                    <a:pt x="3411636" y="2782636"/>
-                  </a:lnTo>
-                  <a:lnTo>
-                    <a:pt x="3489270" y="2781629"/>
-                  </a:lnTo>
-                  <a:lnTo>
-                    <a:pt x="3566904" y="2780622"/>
-                  </a:lnTo>
-                  <a:lnTo>
-                    <a:pt x="3644538" y="2779613"/>
-                  </a:lnTo>
-                  <a:lnTo>
-                    <a:pt x="3722172" y="2778603"/>
-                  </a:lnTo>
-                  <a:lnTo>
-                    <a:pt x="3799806" y="2777591"/>
-                  </a:lnTo>
-                  <a:lnTo>
-                    <a:pt x="3877440" y="2776579"/>
-                  </a:lnTo>
-                  <a:lnTo>
-                    <a:pt x="3955074" y="2775565"/>
-                  </a:lnTo>
-                  <a:lnTo>
-                    <a:pt x="4032708" y="2774551"/>
-                  </a:lnTo>
-                  <a:lnTo>
-                    <a:pt x="4110342" y="2773535"/>
-                  </a:lnTo>
-                  <a:lnTo>
-                    <a:pt x="4187976" y="2772517"/>
-                  </a:lnTo>
-                  <a:lnTo>
-                    <a:pt x="4265610" y="2771499"/>
-                  </a:lnTo>
-                  <a:lnTo>
-                    <a:pt x="4343244" y="2770480"/>
-                  </a:lnTo>
-                  <a:lnTo>
-                    <a:pt x="4420879" y="2769459"/>
-                  </a:lnTo>
-                  <a:lnTo>
-                    <a:pt x="4498513" y="2768437"/>
-                  </a:lnTo>
-                  <a:lnTo>
-                    <a:pt x="4576147" y="2767414"/>
-                  </a:lnTo>
-                  <a:lnTo>
-                    <a:pt x="4653781" y="2766390"/>
-                  </a:lnTo>
-                  <a:lnTo>
-                    <a:pt x="4731415" y="2765365"/>
-                  </a:lnTo>
-                  <a:lnTo>
-                    <a:pt x="4809049" y="2764338"/>
-                  </a:lnTo>
-                  <a:lnTo>
-                    <a:pt x="4886683" y="2763310"/>
-                  </a:lnTo>
-                  <a:lnTo>
-                    <a:pt x="4964317" y="2762281"/>
-                  </a:lnTo>
-                  <a:lnTo>
-                    <a:pt x="5041951" y="2761251"/>
-                  </a:lnTo>
-                  <a:lnTo>
-                    <a:pt x="5119585" y="2760220"/>
-                  </a:lnTo>
-                  <a:lnTo>
-                    <a:pt x="5197219" y="2759187"/>
-                  </a:lnTo>
-                  <a:lnTo>
-                    <a:pt x="5274853" y="2758153"/>
-                  </a:lnTo>
-                  <a:lnTo>
-                    <a:pt x="5352487" y="2757119"/>
-                  </a:lnTo>
-                  <a:lnTo>
-                    <a:pt x="5430121" y="2756082"/>
-                  </a:lnTo>
-                  <a:lnTo>
-                    <a:pt x="5507755" y="2755045"/>
-                  </a:lnTo>
-                  <a:lnTo>
-                    <a:pt x="5585389" y="2754007"/>
-                  </a:lnTo>
-                  <a:lnTo>
-                    <a:pt x="5663023" y="2752967"/>
-                  </a:lnTo>
-                  <a:lnTo>
-                    <a:pt x="5740657" y="2751926"/>
-                  </a:lnTo>
-                  <a:lnTo>
-                    <a:pt x="5818291" y="2750884"/>
-                  </a:lnTo>
-                  <a:lnTo>
-                    <a:pt x="5895925" y="2749840"/>
-                  </a:lnTo>
-                  <a:lnTo>
-                    <a:pt x="5973559" y="2748796"/>
-                  </a:lnTo>
-                  <a:lnTo>
-                    <a:pt x="6051193" y="2747750"/>
-                  </a:lnTo>
-                  <a:lnTo>
-                    <a:pt x="6128827" y="2746703"/>
-                  </a:lnTo>
-                  <a:lnTo>
-                    <a:pt x="6206462" y="2745655"/>
-                  </a:lnTo>
-                  <a:lnTo>
-                    <a:pt x="6284096" y="2744606"/>
-                  </a:lnTo>
-                  <a:lnTo>
-                    <a:pt x="6361730" y="2743555"/>
-                  </a:lnTo>
-                  <a:lnTo>
-                    <a:pt x="6439364" y="2742503"/>
-                  </a:lnTo>
-                  <a:lnTo>
-                    <a:pt x="6516998" y="2741450"/>
-                  </a:lnTo>
-                  <a:lnTo>
-                    <a:pt x="6594632" y="2740396"/>
-                  </a:lnTo>
-                  <a:lnTo>
-                    <a:pt x="6672266" y="2739340"/>
-                  </a:lnTo>
-                  <a:lnTo>
-                    <a:pt x="6749900" y="2738284"/>
-                  </a:lnTo>
-                  <a:lnTo>
-                    <a:pt x="6827534" y="2737226"/>
-                  </a:lnTo>
-                  <a:lnTo>
-                    <a:pt x="6905168" y="2736167"/>
-                  </a:lnTo>
-                  <a:lnTo>
-                    <a:pt x="6982802" y="2735106"/>
-                  </a:lnTo>
-                  <a:lnTo>
-                    <a:pt x="7060436" y="2734045"/>
-                  </a:lnTo>
-                  <a:lnTo>
-                    <a:pt x="7138070" y="2732982"/>
-                  </a:lnTo>
-                  <a:lnTo>
-                    <a:pt x="7215704" y="2731918"/>
-                  </a:lnTo>
-                  <a:lnTo>
-                    <a:pt x="7293338" y="2730853"/>
-                  </a:lnTo>
-                  <a:lnTo>
-                    <a:pt x="7370972" y="2729786"/>
-                  </a:lnTo>
-                  <a:lnTo>
-                    <a:pt x="7370972" y="3651350"/>
-                  </a:lnTo>
-                  <a:lnTo>
-                    <a:pt x="7293338" y="3651175"/>
-                  </a:lnTo>
-                  <a:lnTo>
-                    <a:pt x="7215704" y="3650977"/>
-                  </a:lnTo>
-                  <a:lnTo>
-                    <a:pt x="7138070" y="3650751"/>
-                  </a:lnTo>
-                  <a:lnTo>
-                    <a:pt x="7060436" y="3650495"/>
-                  </a:lnTo>
-                  <a:lnTo>
-                    <a:pt x="6982802" y="3650205"/>
-                  </a:lnTo>
-                  <a:lnTo>
-                    <a:pt x="6905168" y="3649875"/>
-                  </a:lnTo>
-                  <a:lnTo>
-                    <a:pt x="6827534" y="3649501"/>
-                  </a:lnTo>
-                  <a:lnTo>
-                    <a:pt x="6749900" y="3649076"/>
-                  </a:lnTo>
-                  <a:lnTo>
-                    <a:pt x="6672266" y="3648593"/>
-                  </a:lnTo>
-                  <a:lnTo>
-                    <a:pt x="6594632" y="3648045"/>
-                  </a:lnTo>
-                  <a:lnTo>
-                    <a:pt x="6516998" y="3647423"/>
-                  </a:lnTo>
-                  <a:lnTo>
-                    <a:pt x="6439364" y="3646717"/>
-                  </a:lnTo>
-                  <a:lnTo>
-                    <a:pt x="6361730" y="3645916"/>
-                  </a:lnTo>
-                  <a:lnTo>
-                    <a:pt x="6284096" y="3645006"/>
-                  </a:lnTo>
-                  <a:lnTo>
-                    <a:pt x="6206462" y="3643973"/>
-                  </a:lnTo>
-                  <a:lnTo>
-                    <a:pt x="6128827" y="3642801"/>
-                  </a:lnTo>
-                  <a:lnTo>
-                    <a:pt x="6051193" y="3641469"/>
-                  </a:lnTo>
-                  <a:lnTo>
-                    <a:pt x="5973559" y="3639958"/>
-                  </a:lnTo>
-                  <a:lnTo>
-                    <a:pt x="5895925" y="3638243"/>
-                  </a:lnTo>
-                  <a:lnTo>
-                    <a:pt x="5818291" y="3636295"/>
-                  </a:lnTo>
-                  <a:lnTo>
-                    <a:pt x="5740657" y="3634084"/>
-                  </a:lnTo>
-                  <a:lnTo>
-                    <a:pt x="5663023" y="3631574"/>
-                  </a:lnTo>
-                  <a:lnTo>
-                    <a:pt x="5585389" y="3628724"/>
-                  </a:lnTo>
-                  <a:lnTo>
-                    <a:pt x="5507755" y="3625489"/>
-                  </a:lnTo>
-                  <a:lnTo>
-                    <a:pt x="5430121" y="3621817"/>
-                  </a:lnTo>
-                  <a:lnTo>
-                    <a:pt x="5352487" y="3617648"/>
-                  </a:lnTo>
-                  <a:lnTo>
-                    <a:pt x="5274853" y="3612914"/>
-                  </a:lnTo>
-                  <a:lnTo>
-                    <a:pt x="5197219" y="3607541"/>
-                  </a:lnTo>
-                  <a:lnTo>
-                    <a:pt x="5119585" y="3601441"/>
-                  </a:lnTo>
-                  <a:lnTo>
-                    <a:pt x="5041951" y="3594516"/>
-                  </a:lnTo>
-                  <a:lnTo>
-                    <a:pt x="4964317" y="3586655"/>
-                  </a:lnTo>
-                  <a:lnTo>
-                    <a:pt x="4886683" y="3577730"/>
-                  </a:lnTo>
-                  <a:lnTo>
-                    <a:pt x="4809049" y="3567598"/>
-                  </a:lnTo>
-                  <a:lnTo>
-                    <a:pt x="4731415" y="3556096"/>
-                  </a:lnTo>
-                  <a:lnTo>
-                    <a:pt x="4653781" y="3543039"/>
-                  </a:lnTo>
-                  <a:lnTo>
-                    <a:pt x="4576147" y="3528215"/>
-                  </a:lnTo>
-                  <a:lnTo>
-                    <a:pt x="4498513" y="3511386"/>
-                  </a:lnTo>
-                  <a:lnTo>
-                    <a:pt x="4420879" y="3492282"/>
-                  </a:lnTo>
-                  <a:lnTo>
-                    <a:pt x="4343244" y="3470593"/>
-                  </a:lnTo>
-                  <a:lnTo>
-                    <a:pt x="4265610" y="3445971"/>
-                  </a:lnTo>
-                  <a:lnTo>
-                    <a:pt x="4187976" y="3418020"/>
-                  </a:lnTo>
-                  <a:lnTo>
-                    <a:pt x="4110342" y="3386287"/>
-                  </a:lnTo>
-                  <a:lnTo>
-                    <a:pt x="4032708" y="3350264"/>
-                  </a:lnTo>
-                  <a:lnTo>
-                    <a:pt x="3955074" y="3309368"/>
-                  </a:lnTo>
-                  <a:lnTo>
-                    <a:pt x="3877440" y="3262941"/>
-                  </a:lnTo>
-                  <a:lnTo>
-                    <a:pt x="3799806" y="3210234"/>
-                  </a:lnTo>
-                  <a:lnTo>
-                    <a:pt x="3722172" y="3150400"/>
-                  </a:lnTo>
-                  <a:lnTo>
-                    <a:pt x="3644538" y="3082473"/>
-                  </a:lnTo>
-                  <a:lnTo>
-                    <a:pt x="3566904" y="3005359"/>
-                  </a:lnTo>
-                  <a:lnTo>
-                    <a:pt x="3489270" y="2917815"/>
-                  </a:lnTo>
-                  <a:lnTo>
-                    <a:pt x="3411636" y="2818432"/>
-                  </a:lnTo>
-                  <a:lnTo>
-                    <a:pt x="3334002" y="2783642"/>
-                  </a:lnTo>
-                  <a:lnTo>
-                    <a:pt x="3256368" y="2784646"/>
-                  </a:lnTo>
-                  <a:lnTo>
-                    <a:pt x="3178734" y="2785649"/>
-                  </a:lnTo>
-                  <a:lnTo>
-                    <a:pt x="3101100" y="2786651"/>
-                  </a:lnTo>
-                  <a:lnTo>
-                    <a:pt x="3023466" y="2787652"/>
-                  </a:lnTo>
-                  <a:lnTo>
-                    <a:pt x="2945832" y="2788651"/>
-                  </a:lnTo>
-                  <a:lnTo>
-                    <a:pt x="2868198" y="2789650"/>
-                  </a:lnTo>
-                  <a:lnTo>
-                    <a:pt x="2790564" y="2790647"/>
-                  </a:lnTo>
-                  <a:lnTo>
-                    <a:pt x="2712930" y="2791643"/>
-                  </a:lnTo>
-                  <a:lnTo>
-                    <a:pt x="2635295" y="2792638"/>
-                  </a:lnTo>
-                  <a:lnTo>
-                    <a:pt x="2557661" y="2793632"/>
-                  </a:lnTo>
-                  <a:lnTo>
-                    <a:pt x="2480027" y="2794625"/>
-                  </a:lnTo>
-                  <a:lnTo>
-                    <a:pt x="2402393" y="2795617"/>
-                  </a:lnTo>
-                  <a:lnTo>
-                    <a:pt x="2324759" y="2796607"/>
-                  </a:lnTo>
-                  <a:lnTo>
-                    <a:pt x="2247125" y="2797596"/>
-                  </a:lnTo>
-                  <a:lnTo>
-                    <a:pt x="2169491" y="2798584"/>
-                  </a:lnTo>
-                  <a:lnTo>
-                    <a:pt x="2091857" y="2799571"/>
-                  </a:lnTo>
-                  <a:lnTo>
-                    <a:pt x="2014223" y="2800557"/>
-                  </a:lnTo>
-                  <a:lnTo>
-                    <a:pt x="1936589" y="2801542"/>
-                  </a:lnTo>
-                  <a:lnTo>
-                    <a:pt x="1858955" y="2802526"/>
-                  </a:lnTo>
-                  <a:lnTo>
-                    <a:pt x="1781321" y="2803508"/>
-                  </a:lnTo>
-                  <a:lnTo>
-                    <a:pt x="1703687" y="2804489"/>
-                  </a:lnTo>
-                  <a:lnTo>
-                    <a:pt x="1626053" y="2805470"/>
-                  </a:lnTo>
-                  <a:lnTo>
-                    <a:pt x="1548419" y="2806449"/>
-                  </a:lnTo>
-                  <a:lnTo>
-                    <a:pt x="1470785" y="2807427"/>
-                  </a:lnTo>
-                  <a:lnTo>
-                    <a:pt x="1393151" y="2808403"/>
-                  </a:lnTo>
-                  <a:lnTo>
-                    <a:pt x="1315517" y="2809379"/>
-                  </a:lnTo>
-                  <a:lnTo>
-                    <a:pt x="1237883" y="2810354"/>
-                  </a:lnTo>
-                  <a:lnTo>
-                    <a:pt x="1160249" y="2811327"/>
-                  </a:lnTo>
-                  <a:lnTo>
-                    <a:pt x="1082615" y="2812299"/>
-                  </a:lnTo>
-                  <a:lnTo>
-                    <a:pt x="1004981" y="2813270"/>
-                  </a:lnTo>
-                  <a:lnTo>
-                    <a:pt x="927346" y="2814240"/>
-                  </a:lnTo>
-                  <a:lnTo>
-                    <a:pt x="849712" y="2815209"/>
-                  </a:lnTo>
-                  <a:lnTo>
-                    <a:pt x="772078" y="2816177"/>
-                  </a:lnTo>
-                  <a:lnTo>
-                    <a:pt x="694444" y="2817144"/>
-                  </a:lnTo>
-                  <a:lnTo>
-                    <a:pt x="616810" y="2818109"/>
-                  </a:lnTo>
-                  <a:lnTo>
-                    <a:pt x="539176" y="2819074"/>
-                  </a:lnTo>
-                  <a:lnTo>
-                    <a:pt x="461542" y="2820037"/>
-                  </a:lnTo>
-                  <a:lnTo>
-                    <a:pt x="383908" y="2820999"/>
-                  </a:lnTo>
-                  <a:lnTo>
-                    <a:pt x="306274" y="2821960"/>
-                  </a:lnTo>
-                  <a:lnTo>
-                    <a:pt x="228640" y="2822920"/>
-                  </a:lnTo>
-                  <a:lnTo>
-                    <a:pt x="151006" y="2823879"/>
-                  </a:lnTo>
-                  <a:lnTo>
-                    <a:pt x="73372" y="2824837"/>
-                  </a:lnTo>
-                  <a:lnTo>
-                    <a:pt x="0" y="2825741"/>
+                    <a:pt x="2635295" y="74334"/>
+                  </a:lnTo>
+                  <a:lnTo>
+                    <a:pt x="2712930" y="561201"/>
+                  </a:lnTo>
+                  <a:lnTo>
+                    <a:pt x="2790564" y="981825"/>
+                  </a:lnTo>
+                  <a:lnTo>
+                    <a:pt x="2868198" y="1345218"/>
+                  </a:lnTo>
+                  <a:lnTo>
+                    <a:pt x="2945832" y="1659168"/>
+                  </a:lnTo>
+                  <a:lnTo>
+                    <a:pt x="3023466" y="1930401"/>
+                  </a:lnTo>
+                  <a:lnTo>
+                    <a:pt x="3101100" y="2164731"/>
+                  </a:lnTo>
+                  <a:lnTo>
+                    <a:pt x="3178734" y="2367177"/>
+                  </a:lnTo>
+                  <a:lnTo>
+                    <a:pt x="3256368" y="2542078"/>
+                  </a:lnTo>
+                  <a:lnTo>
+                    <a:pt x="3334002" y="2693182"/>
+                  </a:lnTo>
+                  <a:lnTo>
+                    <a:pt x="3411636" y="2781124"/>
+                  </a:lnTo>
+                  <a:lnTo>
+                    <a:pt x="3489270" y="2775487"/>
+                  </a:lnTo>
+                  <a:lnTo>
+                    <a:pt x="3566904" y="2769813"/>
+                  </a:lnTo>
+                  <a:lnTo>
+                    <a:pt x="3644538" y="2764103"/>
+                  </a:lnTo>
+                  <a:lnTo>
+                    <a:pt x="3722172" y="2758356"/>
+                  </a:lnTo>
+                  <a:lnTo>
+                    <a:pt x="3799806" y="2752572"/>
+                  </a:lnTo>
+                  <a:lnTo>
+                    <a:pt x="3877440" y="2746750"/>
+                  </a:lnTo>
+                  <a:lnTo>
+                    <a:pt x="3955074" y="2740891"/>
+                  </a:lnTo>
+                  <a:lnTo>
+                    <a:pt x="4032708" y="2734994"/>
+                  </a:lnTo>
+                  <a:lnTo>
+                    <a:pt x="4110342" y="2729058"/>
+                  </a:lnTo>
+                  <a:lnTo>
+                    <a:pt x="4187976" y="2723085"/>
+                  </a:lnTo>
+                  <a:lnTo>
+                    <a:pt x="4265610" y="2717072"/>
+                  </a:lnTo>
+                  <a:lnTo>
+                    <a:pt x="4343244" y="2711021"/>
+                  </a:lnTo>
+                  <a:lnTo>
+                    <a:pt x="4420879" y="2704931"/>
+                  </a:lnTo>
+                  <a:lnTo>
+                    <a:pt x="4498513" y="2698801"/>
+                  </a:lnTo>
+                  <a:lnTo>
+                    <a:pt x="4576147" y="2692631"/>
+                  </a:lnTo>
+                  <a:lnTo>
+                    <a:pt x="4653781" y="2686422"/>
+                  </a:lnTo>
+                  <a:lnTo>
+                    <a:pt x="4731415" y="2680172"/>
+                  </a:lnTo>
+                  <a:lnTo>
+                    <a:pt x="4809049" y="2673882"/>
+                  </a:lnTo>
+                  <a:lnTo>
+                    <a:pt x="4886683" y="2667552"/>
+                  </a:lnTo>
+                  <a:lnTo>
+                    <a:pt x="4964317" y="2661180"/>
+                  </a:lnTo>
+                  <a:lnTo>
+                    <a:pt x="5041951" y="2654767"/>
+                  </a:lnTo>
+                  <a:lnTo>
+                    <a:pt x="5119585" y="2648313"/>
+                  </a:lnTo>
+                  <a:lnTo>
+                    <a:pt x="5197219" y="2641817"/>
+                  </a:lnTo>
+                  <a:lnTo>
+                    <a:pt x="5274853" y="2635279"/>
+                  </a:lnTo>
+                  <a:lnTo>
+                    <a:pt x="5352487" y="2628699"/>
+                  </a:lnTo>
+                  <a:lnTo>
+                    <a:pt x="5430121" y="2622076"/>
+                  </a:lnTo>
+                  <a:lnTo>
+                    <a:pt x="5507755" y="2615410"/>
+                  </a:lnTo>
+                  <a:lnTo>
+                    <a:pt x="5585389" y="2608701"/>
+                  </a:lnTo>
+                  <a:lnTo>
+                    <a:pt x="5663023" y="2601949"/>
+                  </a:lnTo>
+                  <a:lnTo>
+                    <a:pt x="5740657" y="2595153"/>
+                  </a:lnTo>
+                  <a:lnTo>
+                    <a:pt x="5818291" y="2588313"/>
+                  </a:lnTo>
+                  <a:lnTo>
+                    <a:pt x="5895925" y="2581429"/>
+                  </a:lnTo>
+                  <a:lnTo>
+                    <a:pt x="5973559" y="2574501"/>
+                  </a:lnTo>
+                  <a:lnTo>
+                    <a:pt x="6051193" y="2567527"/>
+                  </a:lnTo>
+                  <a:lnTo>
+                    <a:pt x="6128827" y="2560509"/>
+                  </a:lnTo>
+                  <a:lnTo>
+                    <a:pt x="6206462" y="2553445"/>
+                  </a:lnTo>
+                  <a:lnTo>
+                    <a:pt x="6284096" y="2546335"/>
+                  </a:lnTo>
+                  <a:lnTo>
+                    <a:pt x="6361730" y="2539180"/>
+                  </a:lnTo>
+                  <a:lnTo>
+                    <a:pt x="6439364" y="2531978"/>
+                  </a:lnTo>
+                  <a:lnTo>
+                    <a:pt x="6516998" y="2524729"/>
+                  </a:lnTo>
+                  <a:lnTo>
+                    <a:pt x="6594632" y="2517434"/>
+                  </a:lnTo>
+                  <a:lnTo>
+                    <a:pt x="6672266" y="2510091"/>
+                  </a:lnTo>
+                  <a:lnTo>
+                    <a:pt x="6749900" y="2502701"/>
+                  </a:lnTo>
+                  <a:lnTo>
+                    <a:pt x="6827534" y="2495264"/>
+                  </a:lnTo>
+                  <a:lnTo>
+                    <a:pt x="6905168" y="2487778"/>
+                  </a:lnTo>
+                  <a:lnTo>
+                    <a:pt x="6982802" y="2480243"/>
+                  </a:lnTo>
+                  <a:lnTo>
+                    <a:pt x="7060436" y="2472660"/>
+                  </a:lnTo>
+                  <a:lnTo>
+                    <a:pt x="7138070" y="2465028"/>
+                  </a:lnTo>
+                  <a:lnTo>
+                    <a:pt x="7215704" y="2457346"/>
+                  </a:lnTo>
+                  <a:lnTo>
+                    <a:pt x="7293338" y="2449615"/>
+                  </a:lnTo>
+                  <a:lnTo>
+                    <a:pt x="7370972" y="2441834"/>
+                  </a:lnTo>
+                  <a:lnTo>
+                    <a:pt x="7370972" y="3652166"/>
+                  </a:lnTo>
+                  <a:lnTo>
+                    <a:pt x="7293338" y="3652090"/>
+                  </a:lnTo>
+                  <a:lnTo>
+                    <a:pt x="7215704" y="3652003"/>
+                  </a:lnTo>
+                  <a:lnTo>
+                    <a:pt x="7138070" y="3651902"/>
+                  </a:lnTo>
+                  <a:lnTo>
+                    <a:pt x="7060436" y="3651786"/>
+                  </a:lnTo>
+                  <a:lnTo>
+                    <a:pt x="6982802" y="3651651"/>
+                  </a:lnTo>
+                  <a:lnTo>
+                    <a:pt x="6905168" y="3651494"/>
+                  </a:lnTo>
+                  <a:lnTo>
+                    <a:pt x="6827534" y="3651314"/>
+                  </a:lnTo>
+                  <a:lnTo>
+                    <a:pt x="6749900" y="3651104"/>
+                  </a:lnTo>
+                  <a:lnTo>
+                    <a:pt x="6672266" y="3650862"/>
+                  </a:lnTo>
+                  <a:lnTo>
+                    <a:pt x="6594632" y="3650581"/>
+                  </a:lnTo>
+                  <a:lnTo>
+                    <a:pt x="6516998" y="3650256"/>
+                  </a:lnTo>
+                  <a:lnTo>
+                    <a:pt x="6439364" y="3649880"/>
+                  </a:lnTo>
+                  <a:lnTo>
+                    <a:pt x="6361730" y="3649445"/>
+                  </a:lnTo>
+                  <a:lnTo>
+                    <a:pt x="6284096" y="3648942"/>
+                  </a:lnTo>
+                  <a:lnTo>
+                    <a:pt x="6206462" y="3648359"/>
+                  </a:lnTo>
+                  <a:lnTo>
+                    <a:pt x="6128827" y="3647684"/>
+                  </a:lnTo>
+                  <a:lnTo>
+                    <a:pt x="6051193" y="3646903"/>
+                  </a:lnTo>
+                  <a:lnTo>
+                    <a:pt x="5973559" y="3645999"/>
+                  </a:lnTo>
+                  <a:lnTo>
+                    <a:pt x="5895925" y="3644952"/>
+                  </a:lnTo>
+                  <a:lnTo>
+                    <a:pt x="5818291" y="3643741"/>
+                  </a:lnTo>
+                  <a:lnTo>
+                    <a:pt x="5740657" y="3642339"/>
+                  </a:lnTo>
+                  <a:lnTo>
+                    <a:pt x="5663023" y="3640716"/>
+                  </a:lnTo>
+                  <a:lnTo>
+                    <a:pt x="5585389" y="3638838"/>
+                  </a:lnTo>
+                  <a:lnTo>
+                    <a:pt x="5507755" y="3636664"/>
+                  </a:lnTo>
+                  <a:lnTo>
+                    <a:pt x="5430121" y="3634147"/>
+                  </a:lnTo>
+                  <a:lnTo>
+                    <a:pt x="5352487" y="3631235"/>
+                  </a:lnTo>
+                  <a:lnTo>
+                    <a:pt x="5274853" y="3627863"/>
+                  </a:lnTo>
+                  <a:lnTo>
+                    <a:pt x="5197219" y="3623960"/>
+                  </a:lnTo>
+                  <a:lnTo>
+                    <a:pt x="5119585" y="3619443"/>
+                  </a:lnTo>
+                  <a:lnTo>
+                    <a:pt x="5041951" y="3614214"/>
+                  </a:lnTo>
+                  <a:lnTo>
+                    <a:pt x="4964317" y="3608162"/>
+                  </a:lnTo>
+                  <a:lnTo>
+                    <a:pt x="4886683" y="3601157"/>
+                  </a:lnTo>
+                  <a:lnTo>
+                    <a:pt x="4809049" y="3593048"/>
+                  </a:lnTo>
+                  <a:lnTo>
+                    <a:pt x="4731415" y="3583663"/>
+                  </a:lnTo>
+                  <a:lnTo>
+                    <a:pt x="4653781" y="3572799"/>
+                  </a:lnTo>
+                  <a:lnTo>
+                    <a:pt x="4576147" y="3560225"/>
+                  </a:lnTo>
+                  <a:lnTo>
+                    <a:pt x="4498513" y="3545670"/>
+                  </a:lnTo>
+                  <a:lnTo>
+                    <a:pt x="4420879" y="3528823"/>
+                  </a:lnTo>
+                  <a:lnTo>
+                    <a:pt x="4343244" y="3509322"/>
+                  </a:lnTo>
+                  <a:lnTo>
+                    <a:pt x="4265610" y="3486751"/>
+                  </a:lnTo>
+                  <a:lnTo>
+                    <a:pt x="4187976" y="3460625"/>
+                  </a:lnTo>
+                  <a:lnTo>
+                    <a:pt x="4110342" y="3430384"/>
+                  </a:lnTo>
+                  <a:lnTo>
+                    <a:pt x="4032708" y="3395381"/>
+                  </a:lnTo>
+                  <a:lnTo>
+                    <a:pt x="3955074" y="3354865"/>
+                  </a:lnTo>
+                  <a:lnTo>
+                    <a:pt x="3877440" y="3307968"/>
+                  </a:lnTo>
+                  <a:lnTo>
+                    <a:pt x="3799806" y="3253686"/>
+                  </a:lnTo>
+                  <a:lnTo>
+                    <a:pt x="3722172" y="3190854"/>
+                  </a:lnTo>
+                  <a:lnTo>
+                    <a:pt x="3644538" y="3118128"/>
+                  </a:lnTo>
+                  <a:lnTo>
+                    <a:pt x="3566904" y="3033948"/>
+                  </a:lnTo>
+                  <a:lnTo>
+                    <a:pt x="3489270" y="2936510"/>
+                  </a:lnTo>
+                  <a:lnTo>
+                    <a:pt x="3411636" y="2823727"/>
+                  </a:lnTo>
+                  <a:lnTo>
+                    <a:pt x="3334002" y="2786725"/>
+                  </a:lnTo>
+                  <a:lnTo>
+                    <a:pt x="3256368" y="2792289"/>
+                  </a:lnTo>
+                  <a:lnTo>
+                    <a:pt x="3178734" y="2797818"/>
+                  </a:lnTo>
+                  <a:lnTo>
+                    <a:pt x="3101100" y="2803312"/>
+                  </a:lnTo>
+                  <a:lnTo>
+                    <a:pt x="3023466" y="2808770"/>
+                  </a:lnTo>
+                  <a:lnTo>
+                    <a:pt x="2945832" y="2814193"/>
+                  </a:lnTo>
+                  <a:lnTo>
+                    <a:pt x="2868198" y="2819581"/>
+                  </a:lnTo>
+                  <a:lnTo>
+                    <a:pt x="2790564" y="2824935"/>
+                  </a:lnTo>
+                  <a:lnTo>
+                    <a:pt x="2712930" y="2830254"/>
+                  </a:lnTo>
+                  <a:lnTo>
+                    <a:pt x="2635295" y="2835539"/>
+                  </a:lnTo>
+                  <a:lnTo>
+                    <a:pt x="2557661" y="2840790"/>
+                  </a:lnTo>
+                  <a:lnTo>
+                    <a:pt x="2480027" y="2846008"/>
+                  </a:lnTo>
+                  <a:lnTo>
+                    <a:pt x="2402393" y="2851192"/>
+                  </a:lnTo>
+                  <a:lnTo>
+                    <a:pt x="2324759" y="2856342"/>
+                  </a:lnTo>
+                  <a:lnTo>
+                    <a:pt x="2247125" y="2861459"/>
+                  </a:lnTo>
+                  <a:lnTo>
+                    <a:pt x="2169491" y="2866544"/>
+                  </a:lnTo>
+                  <a:lnTo>
+                    <a:pt x="2091857" y="2871596"/>
+                  </a:lnTo>
+                  <a:lnTo>
+                    <a:pt x="2014223" y="2876615"/>
+                  </a:lnTo>
+                  <a:lnTo>
+                    <a:pt x="1936589" y="2881602"/>
+                  </a:lnTo>
+                  <a:lnTo>
+                    <a:pt x="1858955" y="2886557"/>
+                  </a:lnTo>
+                  <a:lnTo>
+                    <a:pt x="1781321" y="2891480"/>
+                  </a:lnTo>
+                  <a:lnTo>
+                    <a:pt x="1703687" y="2896372"/>
+                  </a:lnTo>
+                  <a:lnTo>
+                    <a:pt x="1626053" y="2901232"/>
+                  </a:lnTo>
+                  <a:lnTo>
+                    <a:pt x="1548419" y="2906061"/>
+                  </a:lnTo>
+                  <a:lnTo>
+                    <a:pt x="1470785" y="2910859"/>
+                  </a:lnTo>
+                  <a:lnTo>
+                    <a:pt x="1393151" y="2915626"/>
+                  </a:lnTo>
+                  <a:lnTo>
+                    <a:pt x="1315517" y="2920362"/>
+                  </a:lnTo>
+                  <a:lnTo>
+                    <a:pt x="1237883" y="2925068"/>
+                  </a:lnTo>
+                  <a:lnTo>
+                    <a:pt x="1160249" y="2929744"/>
+                  </a:lnTo>
+                  <a:lnTo>
+                    <a:pt x="1082615" y="2934390"/>
+                  </a:lnTo>
+                  <a:lnTo>
+                    <a:pt x="1004981" y="2939005"/>
+                  </a:lnTo>
+                  <a:lnTo>
+                    <a:pt x="927346" y="2943592"/>
+                  </a:lnTo>
+                  <a:lnTo>
+                    <a:pt x="849712" y="2948148"/>
+                  </a:lnTo>
+                  <a:lnTo>
+                    <a:pt x="772078" y="2952676"/>
+                  </a:lnTo>
+                  <a:lnTo>
+                    <a:pt x="694444" y="2957174"/>
+                  </a:lnTo>
+                  <a:lnTo>
+                    <a:pt x="616810" y="2961643"/>
+                  </a:lnTo>
+                  <a:lnTo>
+                    <a:pt x="539176" y="2966084"/>
+                  </a:lnTo>
+                  <a:lnTo>
+                    <a:pt x="461542" y="2970496"/>
+                  </a:lnTo>
+                  <a:lnTo>
+                    <a:pt x="383908" y="2974880"/>
+                  </a:lnTo>
+                  <a:lnTo>
+                    <a:pt x="306274" y="2979236"/>
+                  </a:lnTo>
+                  <a:lnTo>
+                    <a:pt x="228640" y="2983563"/>
+                  </a:lnTo>
+                  <a:lnTo>
+                    <a:pt x="151006" y="2987863"/>
+                  </a:lnTo>
+                  <a:lnTo>
+                    <a:pt x="73372" y="2992135"/>
+                  </a:lnTo>
+                  <a:lnTo>
+                    <a:pt x="0" y="2996147"/>
                   </a:lnTo>
                   <a:close/>
                 </a:path>
@@ -3513,204 +3510,201 @@
           </p:nvSpPr>
           <p:spPr>
             <a:xfrm>
-              <a:off x="3326522" y="1896563"/>
-              <a:ext cx="4861968" cy="2782636"/>
+              <a:off x="3442573" y="1896563"/>
+              <a:ext cx="4745917" cy="2781124"/>
             </a:xfrm>
             <a:custGeom>
               <a:avLst/>
               <a:pathLst>
-                <a:path w="4861968" h="2782636">
+                <a:path w="4745917" h="2781124">
                   <a:moveTo>
                     <a:pt x="0" y="0"/>
                   </a:moveTo>
                   <a:lnTo>
-                    <a:pt x="48657" y="285426"/>
-                  </a:lnTo>
-                  <a:lnTo>
-                    <a:pt x="126291" y="686578"/>
-                  </a:lnTo>
-                  <a:lnTo>
-                    <a:pt x="203925" y="1039939"/>
-                  </a:lnTo>
-                  <a:lnTo>
-                    <a:pt x="281559" y="1351203"/>
-                  </a:lnTo>
-                  <a:lnTo>
-                    <a:pt x="359193" y="1625384"/>
-                  </a:lnTo>
-                  <a:lnTo>
-                    <a:pt x="436827" y="1866901"/>
-                  </a:lnTo>
-                  <a:lnTo>
-                    <a:pt x="514461" y="2079644"/>
-                  </a:lnTo>
-                  <a:lnTo>
-                    <a:pt x="592095" y="2267043"/>
-                  </a:lnTo>
-                  <a:lnTo>
-                    <a:pt x="669729" y="2432116"/>
-                  </a:lnTo>
-                  <a:lnTo>
-                    <a:pt x="747363" y="2577523"/>
-                  </a:lnTo>
-                  <a:lnTo>
-                    <a:pt x="824997" y="2705607"/>
-                  </a:lnTo>
-                  <a:lnTo>
-                    <a:pt x="902631" y="2782636"/>
-                  </a:lnTo>
-                  <a:lnTo>
-                    <a:pt x="980265" y="2781629"/>
-                  </a:lnTo>
-                  <a:lnTo>
-                    <a:pt x="1057899" y="2780622"/>
-                  </a:lnTo>
-                  <a:lnTo>
-                    <a:pt x="1135533" y="2779613"/>
-                  </a:lnTo>
-                  <a:lnTo>
-                    <a:pt x="1213167" y="2778603"/>
-                  </a:lnTo>
-                  <a:lnTo>
-                    <a:pt x="1290801" y="2777591"/>
-                  </a:lnTo>
-                  <a:lnTo>
-                    <a:pt x="1368435" y="2776579"/>
-                  </a:lnTo>
-                  <a:lnTo>
-                    <a:pt x="1446070" y="2775565"/>
-                  </a:lnTo>
-                  <a:lnTo>
-                    <a:pt x="1523704" y="2774551"/>
-                  </a:lnTo>
-                  <a:lnTo>
-                    <a:pt x="1601338" y="2773535"/>
-                  </a:lnTo>
-                  <a:lnTo>
-                    <a:pt x="1678972" y="2772517"/>
-                  </a:lnTo>
-                  <a:lnTo>
-                    <a:pt x="1756606" y="2771499"/>
-                  </a:lnTo>
-                  <a:lnTo>
-                    <a:pt x="1834240" y="2770480"/>
-                  </a:lnTo>
-                  <a:lnTo>
-                    <a:pt x="1911874" y="2769459"/>
-                  </a:lnTo>
-                  <a:lnTo>
-                    <a:pt x="1989508" y="2768437"/>
-                  </a:lnTo>
-                  <a:lnTo>
-                    <a:pt x="2067142" y="2767414"/>
-                  </a:lnTo>
-                  <a:lnTo>
-                    <a:pt x="2144776" y="2766390"/>
-                  </a:lnTo>
-                  <a:lnTo>
-                    <a:pt x="2222410" y="2765365"/>
-                  </a:lnTo>
-                  <a:lnTo>
-                    <a:pt x="2300044" y="2764338"/>
-                  </a:lnTo>
-                  <a:lnTo>
-                    <a:pt x="2377678" y="2763310"/>
-                  </a:lnTo>
-                  <a:lnTo>
-                    <a:pt x="2455312" y="2762281"/>
-                  </a:lnTo>
-                  <a:lnTo>
-                    <a:pt x="2532946" y="2761251"/>
-                  </a:lnTo>
-                  <a:lnTo>
-                    <a:pt x="2610580" y="2760220"/>
-                  </a:lnTo>
-                  <a:lnTo>
-                    <a:pt x="2688214" y="2759187"/>
-                  </a:lnTo>
-                  <a:lnTo>
-                    <a:pt x="2765848" y="2758153"/>
-                  </a:lnTo>
-                  <a:lnTo>
-                    <a:pt x="2843482" y="2757119"/>
-                  </a:lnTo>
-                  <a:lnTo>
-                    <a:pt x="2921116" y="2756082"/>
-                  </a:lnTo>
-                  <a:lnTo>
-                    <a:pt x="2998750" y="2755045"/>
-                  </a:lnTo>
-                  <a:lnTo>
-                    <a:pt x="3076384" y="2754007"/>
-                  </a:lnTo>
-                  <a:lnTo>
-                    <a:pt x="3154019" y="2752967"/>
-                  </a:lnTo>
-                  <a:lnTo>
-                    <a:pt x="3231653" y="2751926"/>
-                  </a:lnTo>
-                  <a:lnTo>
-                    <a:pt x="3309287" y="2750884"/>
-                  </a:lnTo>
-                  <a:lnTo>
-                    <a:pt x="3386921" y="2749840"/>
-                  </a:lnTo>
-                  <a:lnTo>
-                    <a:pt x="3464555" y="2748796"/>
-                  </a:lnTo>
-                  <a:lnTo>
-                    <a:pt x="3542189" y="2747750"/>
-                  </a:lnTo>
-                  <a:lnTo>
-                    <a:pt x="3619823" y="2746703"/>
-                  </a:lnTo>
-                  <a:lnTo>
-                    <a:pt x="3697457" y="2745655"/>
-                  </a:lnTo>
-                  <a:lnTo>
-                    <a:pt x="3775091" y="2744606"/>
-                  </a:lnTo>
-                  <a:lnTo>
-                    <a:pt x="3852725" y="2743555"/>
-                  </a:lnTo>
-                  <a:lnTo>
-                    <a:pt x="3930359" y="2742503"/>
-                  </a:lnTo>
-                  <a:lnTo>
-                    <a:pt x="4007993" y="2741450"/>
-                  </a:lnTo>
-                  <a:lnTo>
-                    <a:pt x="4085627" y="2740396"/>
-                  </a:lnTo>
-                  <a:lnTo>
-                    <a:pt x="4163261" y="2739340"/>
-                  </a:lnTo>
-                  <a:lnTo>
-                    <a:pt x="4240895" y="2738284"/>
-                  </a:lnTo>
-                  <a:lnTo>
-                    <a:pt x="4318529" y="2737226"/>
-                  </a:lnTo>
-                  <a:lnTo>
-                    <a:pt x="4396163" y="2736167"/>
-                  </a:lnTo>
-                  <a:lnTo>
-                    <a:pt x="4473797" y="2735106"/>
-                  </a:lnTo>
-                  <a:lnTo>
-                    <a:pt x="4551431" y="2734045"/>
-                  </a:lnTo>
-                  <a:lnTo>
-                    <a:pt x="4629065" y="2732982"/>
-                  </a:lnTo>
-                  <a:lnTo>
-                    <a:pt x="4706699" y="2731918"/>
-                  </a:lnTo>
-                  <a:lnTo>
-                    <a:pt x="4784333" y="2730853"/>
-                  </a:lnTo>
-                  <a:lnTo>
-                    <a:pt x="4861968" y="2729786"/>
+                    <a:pt x="10240" y="74334"/>
+                  </a:lnTo>
+                  <a:lnTo>
+                    <a:pt x="87874" y="561201"/>
+                  </a:lnTo>
+                  <a:lnTo>
+                    <a:pt x="165508" y="981825"/>
+                  </a:lnTo>
+                  <a:lnTo>
+                    <a:pt x="243142" y="1345218"/>
+                  </a:lnTo>
+                  <a:lnTo>
+                    <a:pt x="320776" y="1659168"/>
+                  </a:lnTo>
+                  <a:lnTo>
+                    <a:pt x="398410" y="1930401"/>
+                  </a:lnTo>
+                  <a:lnTo>
+                    <a:pt x="476044" y="2164731"/>
+                  </a:lnTo>
+                  <a:lnTo>
+                    <a:pt x="553678" y="2367177"/>
+                  </a:lnTo>
+                  <a:lnTo>
+                    <a:pt x="631312" y="2542078"/>
+                  </a:lnTo>
+                  <a:lnTo>
+                    <a:pt x="708946" y="2693182"/>
+                  </a:lnTo>
+                  <a:lnTo>
+                    <a:pt x="786580" y="2781124"/>
+                  </a:lnTo>
+                  <a:lnTo>
+                    <a:pt x="864214" y="2775487"/>
+                  </a:lnTo>
+                  <a:lnTo>
+                    <a:pt x="941848" y="2769813"/>
+                  </a:lnTo>
+                  <a:lnTo>
+                    <a:pt x="1019483" y="2764103"/>
+                  </a:lnTo>
+                  <a:lnTo>
+                    <a:pt x="1097117" y="2758356"/>
+                  </a:lnTo>
+                  <a:lnTo>
+                    <a:pt x="1174751" y="2752572"/>
+                  </a:lnTo>
+                  <a:lnTo>
+                    <a:pt x="1252385" y="2746750"/>
+                  </a:lnTo>
+                  <a:lnTo>
+                    <a:pt x="1330019" y="2740891"/>
+                  </a:lnTo>
+                  <a:lnTo>
+                    <a:pt x="1407653" y="2734994"/>
+                  </a:lnTo>
+                  <a:lnTo>
+                    <a:pt x="1485287" y="2729058"/>
+                  </a:lnTo>
+                  <a:lnTo>
+                    <a:pt x="1562921" y="2723085"/>
+                  </a:lnTo>
+                  <a:lnTo>
+                    <a:pt x="1640555" y="2717072"/>
+                  </a:lnTo>
+                  <a:lnTo>
+                    <a:pt x="1718189" y="2711021"/>
+                  </a:lnTo>
+                  <a:lnTo>
+                    <a:pt x="1795823" y="2704931"/>
+                  </a:lnTo>
+                  <a:lnTo>
+                    <a:pt x="1873457" y="2698801"/>
+                  </a:lnTo>
+                  <a:lnTo>
+                    <a:pt x="1951091" y="2692631"/>
+                  </a:lnTo>
+                  <a:lnTo>
+                    <a:pt x="2028725" y="2686422"/>
+                  </a:lnTo>
+                  <a:lnTo>
+                    <a:pt x="2106359" y="2680172"/>
+                  </a:lnTo>
+                  <a:lnTo>
+                    <a:pt x="2183993" y="2673882"/>
+                  </a:lnTo>
+                  <a:lnTo>
+                    <a:pt x="2261627" y="2667552"/>
+                  </a:lnTo>
+                  <a:lnTo>
+                    <a:pt x="2339261" y="2661180"/>
+                  </a:lnTo>
+                  <a:lnTo>
+                    <a:pt x="2416895" y="2654767"/>
+                  </a:lnTo>
+                  <a:lnTo>
+                    <a:pt x="2494529" y="2648313"/>
+                  </a:lnTo>
+                  <a:lnTo>
+                    <a:pt x="2572163" y="2641817"/>
+                  </a:lnTo>
+                  <a:lnTo>
+                    <a:pt x="2649797" y="2635279"/>
+                  </a:lnTo>
+                  <a:lnTo>
+                    <a:pt x="2727432" y="2628699"/>
+                  </a:lnTo>
+                  <a:lnTo>
+                    <a:pt x="2805066" y="2622076"/>
+                  </a:lnTo>
+                  <a:lnTo>
+                    <a:pt x="2882700" y="2615410"/>
+                  </a:lnTo>
+                  <a:lnTo>
+                    <a:pt x="2960334" y="2608701"/>
+                  </a:lnTo>
+                  <a:lnTo>
+                    <a:pt x="3037968" y="2601949"/>
+                  </a:lnTo>
+                  <a:lnTo>
+                    <a:pt x="3115602" y="2595153"/>
+                  </a:lnTo>
+                  <a:lnTo>
+                    <a:pt x="3193236" y="2588313"/>
+                  </a:lnTo>
+                  <a:lnTo>
+                    <a:pt x="3270870" y="2581429"/>
+                  </a:lnTo>
+                  <a:lnTo>
+                    <a:pt x="3348504" y="2574501"/>
+                  </a:lnTo>
+                  <a:lnTo>
+                    <a:pt x="3426138" y="2567527"/>
+                  </a:lnTo>
+                  <a:lnTo>
+                    <a:pt x="3503772" y="2560509"/>
+                  </a:lnTo>
+                  <a:lnTo>
+                    <a:pt x="3581406" y="2553445"/>
+                  </a:lnTo>
+                  <a:lnTo>
+                    <a:pt x="3659040" y="2546335"/>
+                  </a:lnTo>
+                  <a:lnTo>
+                    <a:pt x="3736674" y="2539180"/>
+                  </a:lnTo>
+                  <a:lnTo>
+                    <a:pt x="3814308" y="2531978"/>
+                  </a:lnTo>
+                  <a:lnTo>
+                    <a:pt x="3891942" y="2524729"/>
+                  </a:lnTo>
+                  <a:lnTo>
+                    <a:pt x="3969576" y="2517434"/>
+                  </a:lnTo>
+                  <a:lnTo>
+                    <a:pt x="4047210" y="2510091"/>
+                  </a:lnTo>
+                  <a:lnTo>
+                    <a:pt x="4124844" y="2502701"/>
+                  </a:lnTo>
+                  <a:lnTo>
+                    <a:pt x="4202478" y="2495264"/>
+                  </a:lnTo>
+                  <a:lnTo>
+                    <a:pt x="4280112" y="2487778"/>
+                  </a:lnTo>
+                  <a:lnTo>
+                    <a:pt x="4357746" y="2480243"/>
+                  </a:lnTo>
+                  <a:lnTo>
+                    <a:pt x="4435380" y="2472660"/>
+                  </a:lnTo>
+                  <a:lnTo>
+                    <a:pt x="4513015" y="2465028"/>
+                  </a:lnTo>
+                  <a:lnTo>
+                    <a:pt x="4590649" y="2457346"/>
+                  </a:lnTo>
+                  <a:lnTo>
+                    <a:pt x="4668283" y="2449615"/>
+                  </a:lnTo>
+                  <a:lnTo>
+                    <a:pt x="4745917" y="2441834"/>
                   </a:lnTo>
                 </a:path>
               </a:pathLst>
@@ -3730,300 +3724,300 @@
           </p:nvSpPr>
           <p:spPr>
             <a:xfrm>
-              <a:off x="817517" y="4680205"/>
-              <a:ext cx="7370972" cy="867708"/>
+              <a:off x="817517" y="4683288"/>
+              <a:ext cx="7370972" cy="865440"/>
             </a:xfrm>
             <a:custGeom>
               <a:avLst/>
               <a:pathLst>
-                <a:path w="7370972" h="867708">
+                <a:path w="7370972" h="865440">
                   <a:moveTo>
-                    <a:pt x="7370972" y="867708"/>
+                    <a:pt x="7370972" y="865440"/>
                   </a:moveTo>
                   <a:lnTo>
-                    <a:pt x="7293338" y="867533"/>
-                  </a:lnTo>
-                  <a:lnTo>
-                    <a:pt x="7215704" y="867335"/>
-                  </a:lnTo>
-                  <a:lnTo>
-                    <a:pt x="7138070" y="867109"/>
-                  </a:lnTo>
-                  <a:lnTo>
-                    <a:pt x="7060436" y="866853"/>
-                  </a:lnTo>
-                  <a:lnTo>
-                    <a:pt x="6982802" y="866563"/>
-                  </a:lnTo>
-                  <a:lnTo>
-                    <a:pt x="6905168" y="866233"/>
-                  </a:lnTo>
-                  <a:lnTo>
-                    <a:pt x="6827534" y="865859"/>
-                  </a:lnTo>
-                  <a:lnTo>
-                    <a:pt x="6749900" y="865434"/>
-                  </a:lnTo>
-                  <a:lnTo>
-                    <a:pt x="6672266" y="864951"/>
-                  </a:lnTo>
-                  <a:lnTo>
-                    <a:pt x="6594632" y="864403"/>
-                  </a:lnTo>
-                  <a:lnTo>
-                    <a:pt x="6516998" y="863781"/>
-                  </a:lnTo>
-                  <a:lnTo>
-                    <a:pt x="6439364" y="863075"/>
-                  </a:lnTo>
-                  <a:lnTo>
-                    <a:pt x="6361730" y="862274"/>
-                  </a:lnTo>
-                  <a:lnTo>
-                    <a:pt x="6284096" y="861364"/>
-                  </a:lnTo>
-                  <a:lnTo>
-                    <a:pt x="6206462" y="860331"/>
-                  </a:lnTo>
-                  <a:lnTo>
-                    <a:pt x="6128827" y="859159"/>
-                  </a:lnTo>
-                  <a:lnTo>
-                    <a:pt x="6051193" y="857827"/>
-                  </a:lnTo>
-                  <a:lnTo>
-                    <a:pt x="5973559" y="856316"/>
-                  </a:lnTo>
-                  <a:lnTo>
-                    <a:pt x="5895925" y="854601"/>
-                  </a:lnTo>
-                  <a:lnTo>
-                    <a:pt x="5818291" y="852653"/>
-                  </a:lnTo>
-                  <a:lnTo>
-                    <a:pt x="5740657" y="850442"/>
-                  </a:lnTo>
-                  <a:lnTo>
-                    <a:pt x="5663023" y="847932"/>
-                  </a:lnTo>
-                  <a:lnTo>
-                    <a:pt x="5585389" y="845082"/>
-                  </a:lnTo>
-                  <a:lnTo>
-                    <a:pt x="5507755" y="841847"/>
-                  </a:lnTo>
-                  <a:lnTo>
-                    <a:pt x="5430121" y="838175"/>
-                  </a:lnTo>
-                  <a:lnTo>
-                    <a:pt x="5352487" y="834006"/>
-                  </a:lnTo>
-                  <a:lnTo>
-                    <a:pt x="5274853" y="829272"/>
-                  </a:lnTo>
-                  <a:lnTo>
-                    <a:pt x="5197219" y="823899"/>
-                  </a:lnTo>
-                  <a:lnTo>
-                    <a:pt x="5119585" y="817799"/>
-                  </a:lnTo>
-                  <a:lnTo>
-                    <a:pt x="5041951" y="810874"/>
-                  </a:lnTo>
-                  <a:lnTo>
-                    <a:pt x="4964317" y="803013"/>
-                  </a:lnTo>
-                  <a:lnTo>
-                    <a:pt x="4886683" y="794088"/>
-                  </a:lnTo>
-                  <a:lnTo>
-                    <a:pt x="4809049" y="783956"/>
-                  </a:lnTo>
-                  <a:lnTo>
-                    <a:pt x="4731415" y="772454"/>
-                  </a:lnTo>
-                  <a:lnTo>
-                    <a:pt x="4653781" y="759397"/>
-                  </a:lnTo>
-                  <a:lnTo>
-                    <a:pt x="4576147" y="744573"/>
-                  </a:lnTo>
-                  <a:lnTo>
-                    <a:pt x="4498513" y="727744"/>
-                  </a:lnTo>
-                  <a:lnTo>
-                    <a:pt x="4420879" y="708640"/>
-                  </a:lnTo>
-                  <a:lnTo>
-                    <a:pt x="4343244" y="686951"/>
-                  </a:lnTo>
-                  <a:lnTo>
-                    <a:pt x="4265610" y="662329"/>
-                  </a:lnTo>
-                  <a:lnTo>
-                    <a:pt x="4187976" y="634378"/>
-                  </a:lnTo>
-                  <a:lnTo>
-                    <a:pt x="4110342" y="602645"/>
-                  </a:lnTo>
-                  <a:lnTo>
-                    <a:pt x="4032708" y="566622"/>
-                  </a:lnTo>
-                  <a:lnTo>
-                    <a:pt x="3955074" y="525726"/>
-                  </a:lnTo>
-                  <a:lnTo>
-                    <a:pt x="3877440" y="479298"/>
-                  </a:lnTo>
-                  <a:lnTo>
-                    <a:pt x="3799806" y="426592"/>
-                  </a:lnTo>
-                  <a:lnTo>
-                    <a:pt x="3722172" y="366758"/>
-                  </a:lnTo>
-                  <a:lnTo>
-                    <a:pt x="3644538" y="298831"/>
-                  </a:lnTo>
-                  <a:lnTo>
-                    <a:pt x="3566904" y="221717"/>
-                  </a:lnTo>
-                  <a:lnTo>
-                    <a:pt x="3489270" y="134173"/>
-                  </a:lnTo>
-                  <a:lnTo>
-                    <a:pt x="3411636" y="34790"/>
+                    <a:pt x="7293338" y="865365"/>
+                  </a:lnTo>
+                  <a:lnTo>
+                    <a:pt x="7215704" y="865278"/>
+                  </a:lnTo>
+                  <a:lnTo>
+                    <a:pt x="7138070" y="865177"/>
+                  </a:lnTo>
+                  <a:lnTo>
+                    <a:pt x="7060436" y="865061"/>
+                  </a:lnTo>
+                  <a:lnTo>
+                    <a:pt x="6982802" y="864926"/>
+                  </a:lnTo>
+                  <a:lnTo>
+                    <a:pt x="6905168" y="864769"/>
+                  </a:lnTo>
+                  <a:lnTo>
+                    <a:pt x="6827534" y="864588"/>
+                  </a:lnTo>
+                  <a:lnTo>
+                    <a:pt x="6749900" y="864379"/>
+                  </a:lnTo>
+                  <a:lnTo>
+                    <a:pt x="6672266" y="864137"/>
+                  </a:lnTo>
+                  <a:lnTo>
+                    <a:pt x="6594632" y="863856"/>
+                  </a:lnTo>
+                  <a:lnTo>
+                    <a:pt x="6516998" y="863531"/>
+                  </a:lnTo>
+                  <a:lnTo>
+                    <a:pt x="6439364" y="863155"/>
+                  </a:lnTo>
+                  <a:lnTo>
+                    <a:pt x="6361730" y="862720"/>
+                  </a:lnTo>
+                  <a:lnTo>
+                    <a:pt x="6284096" y="862216"/>
+                  </a:lnTo>
+                  <a:lnTo>
+                    <a:pt x="6206462" y="861634"/>
+                  </a:lnTo>
+                  <a:lnTo>
+                    <a:pt x="6128827" y="860959"/>
+                  </a:lnTo>
+                  <a:lnTo>
+                    <a:pt x="6051193" y="860178"/>
+                  </a:lnTo>
+                  <a:lnTo>
+                    <a:pt x="5973559" y="859274"/>
+                  </a:lnTo>
+                  <a:lnTo>
+                    <a:pt x="5895925" y="858227"/>
+                  </a:lnTo>
+                  <a:lnTo>
+                    <a:pt x="5818291" y="857016"/>
+                  </a:lnTo>
+                  <a:lnTo>
+                    <a:pt x="5740657" y="855614"/>
+                  </a:lnTo>
+                  <a:lnTo>
+                    <a:pt x="5663023" y="853991"/>
+                  </a:lnTo>
+                  <a:lnTo>
+                    <a:pt x="5585389" y="852113"/>
+                  </a:lnTo>
+                  <a:lnTo>
+                    <a:pt x="5507755" y="849939"/>
+                  </a:lnTo>
+                  <a:lnTo>
+                    <a:pt x="5430121" y="847422"/>
+                  </a:lnTo>
+                  <a:lnTo>
+                    <a:pt x="5352487" y="844509"/>
+                  </a:lnTo>
+                  <a:lnTo>
+                    <a:pt x="5274853" y="841138"/>
+                  </a:lnTo>
+                  <a:lnTo>
+                    <a:pt x="5197219" y="837235"/>
+                  </a:lnTo>
+                  <a:lnTo>
+                    <a:pt x="5119585" y="832718"/>
+                  </a:lnTo>
+                  <a:lnTo>
+                    <a:pt x="5041951" y="827489"/>
+                  </a:lnTo>
+                  <a:lnTo>
+                    <a:pt x="4964317" y="821437"/>
+                  </a:lnTo>
+                  <a:lnTo>
+                    <a:pt x="4886683" y="814432"/>
+                  </a:lnTo>
+                  <a:lnTo>
+                    <a:pt x="4809049" y="806323"/>
+                  </a:lnTo>
+                  <a:lnTo>
+                    <a:pt x="4731415" y="796938"/>
+                  </a:lnTo>
+                  <a:lnTo>
+                    <a:pt x="4653781" y="786074"/>
+                  </a:lnTo>
+                  <a:lnTo>
+                    <a:pt x="4576147" y="773499"/>
+                  </a:lnTo>
+                  <a:lnTo>
+                    <a:pt x="4498513" y="758945"/>
+                  </a:lnTo>
+                  <a:lnTo>
+                    <a:pt x="4420879" y="742097"/>
+                  </a:lnTo>
+                  <a:lnTo>
+                    <a:pt x="4343244" y="722597"/>
+                  </a:lnTo>
+                  <a:lnTo>
+                    <a:pt x="4265610" y="700026"/>
+                  </a:lnTo>
+                  <a:lnTo>
+                    <a:pt x="4187976" y="673900"/>
+                  </a:lnTo>
+                  <a:lnTo>
+                    <a:pt x="4110342" y="643659"/>
+                  </a:lnTo>
+                  <a:lnTo>
+                    <a:pt x="4032708" y="608655"/>
+                  </a:lnTo>
+                  <a:lnTo>
+                    <a:pt x="3955074" y="568140"/>
+                  </a:lnTo>
+                  <a:lnTo>
+                    <a:pt x="3877440" y="521243"/>
+                  </a:lnTo>
+                  <a:lnTo>
+                    <a:pt x="3799806" y="466960"/>
+                  </a:lnTo>
+                  <a:lnTo>
+                    <a:pt x="3722172" y="404129"/>
+                  </a:lnTo>
+                  <a:lnTo>
+                    <a:pt x="3644538" y="331403"/>
+                  </a:lnTo>
+                  <a:lnTo>
+                    <a:pt x="3566904" y="247222"/>
+                  </a:lnTo>
+                  <a:lnTo>
+                    <a:pt x="3489270" y="149785"/>
+                  </a:lnTo>
+                  <a:lnTo>
+                    <a:pt x="3411636" y="37002"/>
                   </a:lnTo>
                   <a:lnTo>
                     <a:pt x="3334002" y="0"/>
                   </a:lnTo>
                   <a:lnTo>
-                    <a:pt x="3256368" y="1004"/>
-                  </a:lnTo>
-                  <a:lnTo>
-                    <a:pt x="3178734" y="2007"/>
-                  </a:lnTo>
-                  <a:lnTo>
-                    <a:pt x="3101100" y="3009"/>
-                  </a:lnTo>
-                  <a:lnTo>
-                    <a:pt x="3023466" y="4010"/>
-                  </a:lnTo>
-                  <a:lnTo>
-                    <a:pt x="2945832" y="5009"/>
-                  </a:lnTo>
-                  <a:lnTo>
-                    <a:pt x="2868198" y="6008"/>
-                  </a:lnTo>
-                  <a:lnTo>
-                    <a:pt x="2790564" y="7005"/>
-                  </a:lnTo>
-                  <a:lnTo>
-                    <a:pt x="2712930" y="8001"/>
-                  </a:lnTo>
-                  <a:lnTo>
-                    <a:pt x="2635295" y="8996"/>
-                  </a:lnTo>
-                  <a:lnTo>
-                    <a:pt x="2557661" y="9990"/>
-                  </a:lnTo>
-                  <a:lnTo>
-                    <a:pt x="2480027" y="10983"/>
-                  </a:lnTo>
-                  <a:lnTo>
-                    <a:pt x="2402393" y="11975"/>
-                  </a:lnTo>
-                  <a:lnTo>
-                    <a:pt x="2324759" y="12965"/>
-                  </a:lnTo>
-                  <a:lnTo>
-                    <a:pt x="2247125" y="13954"/>
-                  </a:lnTo>
-                  <a:lnTo>
-                    <a:pt x="2169491" y="14942"/>
-                  </a:lnTo>
-                  <a:lnTo>
-                    <a:pt x="2091857" y="15929"/>
-                  </a:lnTo>
-                  <a:lnTo>
-                    <a:pt x="2014223" y="16915"/>
-                  </a:lnTo>
-                  <a:lnTo>
-                    <a:pt x="1936589" y="17900"/>
-                  </a:lnTo>
-                  <a:lnTo>
-                    <a:pt x="1858955" y="18884"/>
-                  </a:lnTo>
-                  <a:lnTo>
-                    <a:pt x="1781321" y="19866"/>
-                  </a:lnTo>
-                  <a:lnTo>
-                    <a:pt x="1703687" y="20847"/>
-                  </a:lnTo>
-                  <a:lnTo>
-                    <a:pt x="1626053" y="21828"/>
-                  </a:lnTo>
-                  <a:lnTo>
-                    <a:pt x="1548419" y="22807"/>
-                  </a:lnTo>
-                  <a:lnTo>
-                    <a:pt x="1470785" y="23785"/>
-                  </a:lnTo>
-                  <a:lnTo>
-                    <a:pt x="1393151" y="24761"/>
-                  </a:lnTo>
-                  <a:lnTo>
-                    <a:pt x="1315517" y="25737"/>
-                  </a:lnTo>
-                  <a:lnTo>
-                    <a:pt x="1237883" y="26711"/>
-                  </a:lnTo>
-                  <a:lnTo>
-                    <a:pt x="1160249" y="27685"/>
-                  </a:lnTo>
-                  <a:lnTo>
-                    <a:pt x="1082615" y="28657"/>
-                  </a:lnTo>
-                  <a:lnTo>
-                    <a:pt x="1004981" y="29628"/>
-                  </a:lnTo>
-                  <a:lnTo>
-                    <a:pt x="927346" y="30598"/>
-                  </a:lnTo>
-                  <a:lnTo>
-                    <a:pt x="849712" y="31567"/>
-                  </a:lnTo>
-                  <a:lnTo>
-                    <a:pt x="772078" y="32535"/>
-                  </a:lnTo>
-                  <a:lnTo>
-                    <a:pt x="694444" y="33502"/>
-                  </a:lnTo>
-                  <a:lnTo>
-                    <a:pt x="616810" y="34467"/>
-                  </a:lnTo>
-                  <a:lnTo>
-                    <a:pt x="539176" y="35432"/>
-                  </a:lnTo>
-                  <a:lnTo>
-                    <a:pt x="461542" y="36395"/>
-                  </a:lnTo>
-                  <a:lnTo>
-                    <a:pt x="383908" y="37357"/>
-                  </a:lnTo>
-                  <a:lnTo>
-                    <a:pt x="306274" y="38318"/>
-                  </a:lnTo>
-                  <a:lnTo>
-                    <a:pt x="228640" y="39278"/>
-                  </a:lnTo>
-                  <a:lnTo>
-                    <a:pt x="151006" y="40237"/>
-                  </a:lnTo>
-                  <a:lnTo>
-                    <a:pt x="73372" y="41195"/>
-                  </a:lnTo>
-                  <a:lnTo>
-                    <a:pt x="0" y="42099"/>
+                    <a:pt x="3256368" y="5564"/>
+                  </a:lnTo>
+                  <a:lnTo>
+                    <a:pt x="3178734" y="11093"/>
+                  </a:lnTo>
+                  <a:lnTo>
+                    <a:pt x="3101100" y="16587"/>
+                  </a:lnTo>
+                  <a:lnTo>
+                    <a:pt x="3023466" y="22045"/>
+                  </a:lnTo>
+                  <a:lnTo>
+                    <a:pt x="2945832" y="27468"/>
+                  </a:lnTo>
+                  <a:lnTo>
+                    <a:pt x="2868198" y="32856"/>
+                  </a:lnTo>
+                  <a:lnTo>
+                    <a:pt x="2790564" y="38210"/>
+                  </a:lnTo>
+                  <a:lnTo>
+                    <a:pt x="2712930" y="43529"/>
+                  </a:lnTo>
+                  <a:lnTo>
+                    <a:pt x="2635295" y="48814"/>
+                  </a:lnTo>
+                  <a:lnTo>
+                    <a:pt x="2557661" y="54065"/>
+                  </a:lnTo>
+                  <a:lnTo>
+                    <a:pt x="2480027" y="59283"/>
+                  </a:lnTo>
+                  <a:lnTo>
+                    <a:pt x="2402393" y="64466"/>
+                  </a:lnTo>
+                  <a:lnTo>
+                    <a:pt x="2324759" y="69617"/>
+                  </a:lnTo>
+                  <a:lnTo>
+                    <a:pt x="2247125" y="74734"/>
+                  </a:lnTo>
+                  <a:lnTo>
+                    <a:pt x="2169491" y="79819"/>
+                  </a:lnTo>
+                  <a:lnTo>
+                    <a:pt x="2091857" y="84871"/>
+                  </a:lnTo>
+                  <a:lnTo>
+                    <a:pt x="2014223" y="89890"/>
+                  </a:lnTo>
+                  <a:lnTo>
+                    <a:pt x="1936589" y="94877"/>
+                  </a:lnTo>
+                  <a:lnTo>
+                    <a:pt x="1858955" y="99832"/>
+                  </a:lnTo>
+                  <a:lnTo>
+                    <a:pt x="1781321" y="104755"/>
+                  </a:lnTo>
+                  <a:lnTo>
+                    <a:pt x="1703687" y="109647"/>
+                  </a:lnTo>
+                  <a:lnTo>
+                    <a:pt x="1626053" y="114507"/>
+                  </a:lnTo>
+                  <a:lnTo>
+                    <a:pt x="1548419" y="119336"/>
+                  </a:lnTo>
+                  <a:lnTo>
+                    <a:pt x="1470785" y="124134"/>
+                  </a:lnTo>
+                  <a:lnTo>
+                    <a:pt x="1393151" y="128901"/>
+                  </a:lnTo>
+                  <a:lnTo>
+                    <a:pt x="1315517" y="133637"/>
+                  </a:lnTo>
+                  <a:lnTo>
+                    <a:pt x="1237883" y="138343"/>
+                  </a:lnTo>
+                  <a:lnTo>
+                    <a:pt x="1160249" y="143019"/>
+                  </a:lnTo>
+                  <a:lnTo>
+                    <a:pt x="1082615" y="147664"/>
+                  </a:lnTo>
+                  <a:lnTo>
+                    <a:pt x="1004981" y="152280"/>
+                  </a:lnTo>
+                  <a:lnTo>
+                    <a:pt x="927346" y="156866"/>
+                  </a:lnTo>
+                  <a:lnTo>
+                    <a:pt x="849712" y="161423"/>
+                  </a:lnTo>
+                  <a:lnTo>
+                    <a:pt x="772078" y="165951"/>
+                  </a:lnTo>
+                  <a:lnTo>
+                    <a:pt x="694444" y="170449"/>
+                  </a:lnTo>
+                  <a:lnTo>
+                    <a:pt x="616810" y="174918"/>
+                  </a:lnTo>
+                  <a:lnTo>
+                    <a:pt x="539176" y="179359"/>
+                  </a:lnTo>
+                  <a:lnTo>
+                    <a:pt x="461542" y="183771"/>
+                  </a:lnTo>
+                  <a:lnTo>
+                    <a:pt x="383908" y="188155"/>
+                  </a:lnTo>
+                  <a:lnTo>
+                    <a:pt x="306274" y="192510"/>
+                  </a:lnTo>
+                  <a:lnTo>
+                    <a:pt x="228640" y="196838"/>
+                  </a:lnTo>
+                  <a:lnTo>
+                    <a:pt x="151006" y="201138"/>
+                  </a:lnTo>
+                  <a:lnTo>
+                    <a:pt x="73372" y="205410"/>
+                  </a:lnTo>
+                  <a:lnTo>
+                    <a:pt x="0" y="209422"/>
                   </a:lnTo>
                 </a:path>
               </a:pathLst>
@@ -4043,240 +4037,231 @@
           </p:nvSpPr>
           <p:spPr>
             <a:xfrm>
-              <a:off x="2431264" y="1896563"/>
-              <a:ext cx="5757226" cy="3618097"/>
+              <a:off x="2610200" y="1896563"/>
+              <a:ext cx="5578289" cy="3628593"/>
             </a:xfrm>
             <a:custGeom>
               <a:avLst/>
               <a:pathLst>
-                <a:path w="5757226" h="3618097">
+                <a:path w="5578289" h="3628593">
                   <a:moveTo>
                     <a:pt x="0" y="0"/>
                   </a:moveTo>
                   <a:lnTo>
-                    <a:pt x="12306" y="37176"/>
-                  </a:lnTo>
-                  <a:lnTo>
-                    <a:pt x="89940" y="257404"/>
-                  </a:lnTo>
-                  <a:lnTo>
-                    <a:pt x="167574" y="464218"/>
-                  </a:lnTo>
-                  <a:lnTo>
-                    <a:pt x="245209" y="658434"/>
-                  </a:lnTo>
-                  <a:lnTo>
-                    <a:pt x="322843" y="840820"/>
-                  </a:lnTo>
-                  <a:lnTo>
-                    <a:pt x="400477" y="1012097"/>
-                  </a:lnTo>
-                  <a:lnTo>
-                    <a:pt x="478111" y="1172940"/>
-                  </a:lnTo>
-                  <a:lnTo>
-                    <a:pt x="555745" y="1323986"/>
-                  </a:lnTo>
-                  <a:lnTo>
-                    <a:pt x="633379" y="1465831"/>
-                  </a:lnTo>
-                  <a:lnTo>
-                    <a:pt x="711013" y="1599036"/>
-                  </a:lnTo>
-                  <a:lnTo>
-                    <a:pt x="788647" y="1724128"/>
-                  </a:lnTo>
-                  <a:lnTo>
-                    <a:pt x="866281" y="1841599"/>
-                  </a:lnTo>
-                  <a:lnTo>
-                    <a:pt x="943915" y="1951915"/>
-                  </a:lnTo>
-                  <a:lnTo>
-                    <a:pt x="1021549" y="2055511"/>
-                  </a:lnTo>
-                  <a:lnTo>
-                    <a:pt x="1099183" y="2152797"/>
-                  </a:lnTo>
-                  <a:lnTo>
-                    <a:pt x="1176817" y="2244157"/>
-                  </a:lnTo>
-                  <a:lnTo>
-                    <a:pt x="1254451" y="2329952"/>
-                  </a:lnTo>
-                  <a:lnTo>
-                    <a:pt x="1332085" y="2410521"/>
-                  </a:lnTo>
-                  <a:lnTo>
-                    <a:pt x="1409719" y="2486182"/>
-                  </a:lnTo>
-                  <a:lnTo>
-                    <a:pt x="1487353" y="2557235"/>
-                  </a:lnTo>
-                  <a:lnTo>
-                    <a:pt x="1564987" y="2623959"/>
-                  </a:lnTo>
-                  <a:lnTo>
-                    <a:pt x="1642621" y="2686620"/>
-                  </a:lnTo>
-                  <a:lnTo>
-                    <a:pt x="1720255" y="2745463"/>
-                  </a:lnTo>
-                  <a:lnTo>
-                    <a:pt x="1797889" y="2800722"/>
-                  </a:lnTo>
-                  <a:lnTo>
-                    <a:pt x="1875523" y="2852615"/>
-                  </a:lnTo>
-                  <a:lnTo>
-                    <a:pt x="1953158" y="2901347"/>
-                  </a:lnTo>
-                  <a:lnTo>
-                    <a:pt x="2030792" y="2947111"/>
-                  </a:lnTo>
-                  <a:lnTo>
-                    <a:pt x="2108426" y="2990087"/>
-                  </a:lnTo>
-                  <a:lnTo>
-                    <a:pt x="2186060" y="3030445"/>
-                  </a:lnTo>
-                  <a:lnTo>
-                    <a:pt x="2263694" y="3068345"/>
-                  </a:lnTo>
-                  <a:lnTo>
-                    <a:pt x="2341328" y="3103936"/>
-                  </a:lnTo>
-                  <a:lnTo>
-                    <a:pt x="2418962" y="3137359"/>
-                  </a:lnTo>
-                  <a:lnTo>
-                    <a:pt x="2496596" y="3168747"/>
-                  </a:lnTo>
-                  <a:lnTo>
-                    <a:pt x="2574230" y="3198222"/>
-                  </a:lnTo>
-                  <a:lnTo>
-                    <a:pt x="2651864" y="3225903"/>
-                  </a:lnTo>
-                  <a:lnTo>
-                    <a:pt x="2729498" y="3251897"/>
-                  </a:lnTo>
-                  <a:lnTo>
-                    <a:pt x="2807132" y="3276307"/>
-                  </a:lnTo>
-                  <a:lnTo>
-                    <a:pt x="2884766" y="3299231"/>
-                  </a:lnTo>
-                  <a:lnTo>
-                    <a:pt x="2962400" y="3320758"/>
-                  </a:lnTo>
-                  <a:lnTo>
-                    <a:pt x="3040034" y="3340974"/>
-                  </a:lnTo>
-                  <a:lnTo>
-                    <a:pt x="3117668" y="3359959"/>
-                  </a:lnTo>
-                  <a:lnTo>
-                    <a:pt x="3195302" y="3377787"/>
-                  </a:lnTo>
-                  <a:lnTo>
-                    <a:pt x="3272936" y="3394530"/>
-                  </a:lnTo>
-                  <a:lnTo>
-                    <a:pt x="3350570" y="3410252"/>
-                  </a:lnTo>
-                  <a:lnTo>
-                    <a:pt x="3428204" y="3425017"/>
-                  </a:lnTo>
-                  <a:lnTo>
-                    <a:pt x="3505838" y="3438882"/>
-                  </a:lnTo>
-                  <a:lnTo>
-                    <a:pt x="3583472" y="3451903"/>
-                  </a:lnTo>
-                  <a:lnTo>
-                    <a:pt x="3661107" y="3464131"/>
-                  </a:lnTo>
-                  <a:lnTo>
-                    <a:pt x="3738741" y="3475614"/>
-                  </a:lnTo>
-                  <a:lnTo>
-                    <a:pt x="3816375" y="3486397"/>
-                  </a:lnTo>
-                  <a:lnTo>
-                    <a:pt x="3894009" y="3496523"/>
-                  </a:lnTo>
-                  <a:lnTo>
-                    <a:pt x="3971643" y="3506033"/>
-                  </a:lnTo>
-                  <a:lnTo>
-                    <a:pt x="4049277" y="3514964"/>
-                  </a:lnTo>
-                  <a:lnTo>
-                    <a:pt x="4126911" y="3523350"/>
-                  </a:lnTo>
-                  <a:lnTo>
-                    <a:pt x="4204545" y="3531226"/>
-                  </a:lnTo>
-                  <a:lnTo>
-                    <a:pt x="4282179" y="3538622"/>
-                  </a:lnTo>
-                  <a:lnTo>
-                    <a:pt x="4359813" y="3545567"/>
-                  </a:lnTo>
-                  <a:lnTo>
-                    <a:pt x="4437447" y="3552089"/>
-                  </a:lnTo>
-                  <a:lnTo>
-                    <a:pt x="4515081" y="3558214"/>
-                  </a:lnTo>
-                  <a:lnTo>
-                    <a:pt x="4592715" y="3563966"/>
-                  </a:lnTo>
-                  <a:lnTo>
-                    <a:pt x="4670349" y="3569368"/>
-                  </a:lnTo>
-                  <a:lnTo>
-                    <a:pt x="4747983" y="3574440"/>
-                  </a:lnTo>
-                  <a:lnTo>
-                    <a:pt x="4825617" y="3579204"/>
-                  </a:lnTo>
-                  <a:lnTo>
-                    <a:pt x="4903251" y="3583677"/>
-                  </a:lnTo>
-                  <a:lnTo>
-                    <a:pt x="4980885" y="3587878"/>
-                  </a:lnTo>
-                  <a:lnTo>
-                    <a:pt x="5058519" y="3591823"/>
-                  </a:lnTo>
-                  <a:lnTo>
-                    <a:pt x="5136153" y="3595528"/>
-                  </a:lnTo>
-                  <a:lnTo>
-                    <a:pt x="5213787" y="3599007"/>
-                  </a:lnTo>
-                  <a:lnTo>
-                    <a:pt x="5291421" y="3602274"/>
-                  </a:lnTo>
-                  <a:lnTo>
-                    <a:pt x="5369055" y="3605342"/>
-                  </a:lnTo>
-                  <a:lnTo>
-                    <a:pt x="5446690" y="3608224"/>
-                  </a:lnTo>
-                  <a:lnTo>
-                    <a:pt x="5524324" y="3610929"/>
-                  </a:lnTo>
-                  <a:lnTo>
-                    <a:pt x="5601958" y="3613470"/>
-                  </a:lnTo>
-                  <a:lnTo>
-                    <a:pt x="5679592" y="3615856"/>
-                  </a:lnTo>
-                  <a:lnTo>
-                    <a:pt x="5757226" y="3618097"/>
+                    <a:pt x="66272" y="212620"/>
+                  </a:lnTo>
+                  <a:lnTo>
+                    <a:pt x="143906" y="444875"/>
+                  </a:lnTo>
+                  <a:lnTo>
+                    <a:pt x="221540" y="661449"/>
+                  </a:lnTo>
+                  <a:lnTo>
+                    <a:pt x="299174" y="863401"/>
+                  </a:lnTo>
+                  <a:lnTo>
+                    <a:pt x="376808" y="1051718"/>
+                  </a:lnTo>
+                  <a:lnTo>
+                    <a:pt x="454442" y="1227321"/>
+                  </a:lnTo>
+                  <a:lnTo>
+                    <a:pt x="532076" y="1391068"/>
+                  </a:lnTo>
+                  <a:lnTo>
+                    <a:pt x="609711" y="1543759"/>
+                  </a:lnTo>
+                  <a:lnTo>
+                    <a:pt x="687345" y="1686142"/>
+                  </a:lnTo>
+                  <a:lnTo>
+                    <a:pt x="764979" y="1818911"/>
+                  </a:lnTo>
+                  <a:lnTo>
+                    <a:pt x="842613" y="1942716"/>
+                  </a:lnTo>
+                  <a:lnTo>
+                    <a:pt x="920247" y="2058163"/>
+                  </a:lnTo>
+                  <a:lnTo>
+                    <a:pt x="997881" y="2165815"/>
+                  </a:lnTo>
+                  <a:lnTo>
+                    <a:pt x="1075515" y="2266199"/>
+                  </a:lnTo>
+                  <a:lnTo>
+                    <a:pt x="1153149" y="2359805"/>
+                  </a:lnTo>
+                  <a:lnTo>
+                    <a:pt x="1230783" y="2447092"/>
+                  </a:lnTo>
+                  <a:lnTo>
+                    <a:pt x="1308417" y="2528485"/>
+                  </a:lnTo>
+                  <a:lnTo>
+                    <a:pt x="1386051" y="2604384"/>
+                  </a:lnTo>
+                  <a:lnTo>
+                    <a:pt x="1463685" y="2675157"/>
+                  </a:lnTo>
+                  <a:lnTo>
+                    <a:pt x="1541319" y="2741153"/>
+                  </a:lnTo>
+                  <a:lnTo>
+                    <a:pt x="1618953" y="2802693"/>
+                  </a:lnTo>
+                  <a:lnTo>
+                    <a:pt x="1696587" y="2860077"/>
+                  </a:lnTo>
+                  <a:lnTo>
+                    <a:pt x="1774221" y="2913588"/>
+                  </a:lnTo>
+                  <a:lnTo>
+                    <a:pt x="1851855" y="2963486"/>
+                  </a:lnTo>
+                  <a:lnTo>
+                    <a:pt x="1929489" y="3010014"/>
+                  </a:lnTo>
+                  <a:lnTo>
+                    <a:pt x="2007123" y="3053402"/>
+                  </a:lnTo>
+                  <a:lnTo>
+                    <a:pt x="2084757" y="3093860"/>
+                  </a:lnTo>
+                  <a:lnTo>
+                    <a:pt x="2162391" y="3131586"/>
+                  </a:lnTo>
+                  <a:lnTo>
+                    <a:pt x="2240025" y="3166766"/>
+                  </a:lnTo>
+                  <a:lnTo>
+                    <a:pt x="2317660" y="3199570"/>
+                  </a:lnTo>
+                  <a:lnTo>
+                    <a:pt x="2395294" y="3230160"/>
+                  </a:lnTo>
+                  <a:lnTo>
+                    <a:pt x="2472928" y="3258684"/>
+                  </a:lnTo>
+                  <a:lnTo>
+                    <a:pt x="2550562" y="3285282"/>
+                  </a:lnTo>
+                  <a:lnTo>
+                    <a:pt x="2628196" y="3310085"/>
+                  </a:lnTo>
+                  <a:lnTo>
+                    <a:pt x="2705830" y="3333213"/>
+                  </a:lnTo>
+                  <a:lnTo>
+                    <a:pt x="2783464" y="3354779"/>
+                  </a:lnTo>
+                  <a:lnTo>
+                    <a:pt x="2861098" y="3374890"/>
+                  </a:lnTo>
+                  <a:lnTo>
+                    <a:pt x="2938732" y="3393642"/>
+                  </a:lnTo>
+                  <a:lnTo>
+                    <a:pt x="3016366" y="3411129"/>
+                  </a:lnTo>
+                  <a:lnTo>
+                    <a:pt x="3094000" y="3427435"/>
+                  </a:lnTo>
+                  <a:lnTo>
+                    <a:pt x="3171634" y="3442640"/>
+                  </a:lnTo>
+                  <a:lnTo>
+                    <a:pt x="3249268" y="3456818"/>
+                  </a:lnTo>
+                  <a:lnTo>
+                    <a:pt x="3326902" y="3470040"/>
+                  </a:lnTo>
+                  <a:lnTo>
+                    <a:pt x="3404536" y="3482368"/>
+                  </a:lnTo>
+                  <a:lnTo>
+                    <a:pt x="3482170" y="3493864"/>
+                  </a:lnTo>
+                  <a:lnTo>
+                    <a:pt x="3559804" y="3504584"/>
+                  </a:lnTo>
+                  <a:lnTo>
+                    <a:pt x="3637438" y="3514581"/>
+                  </a:lnTo>
+                  <a:lnTo>
+                    <a:pt x="3715072" y="3523902"/>
+                  </a:lnTo>
+                  <a:lnTo>
+                    <a:pt x="3792706" y="3532594"/>
+                  </a:lnTo>
+                  <a:lnTo>
+                    <a:pt x="3870340" y="3540699"/>
+                  </a:lnTo>
+                  <a:lnTo>
+                    <a:pt x="3947974" y="3548257"/>
+                  </a:lnTo>
+                  <a:lnTo>
+                    <a:pt x="4025609" y="3555305"/>
+                  </a:lnTo>
+                  <a:lnTo>
+                    <a:pt x="4103243" y="3561877"/>
+                  </a:lnTo>
+                  <a:lnTo>
+                    <a:pt x="4180877" y="3568005"/>
+                  </a:lnTo>
+                  <a:lnTo>
+                    <a:pt x="4258511" y="3573719"/>
+                  </a:lnTo>
+                  <a:lnTo>
+                    <a:pt x="4336145" y="3579048"/>
+                  </a:lnTo>
+                  <a:lnTo>
+                    <a:pt x="4413779" y="3584017"/>
+                  </a:lnTo>
+                  <a:lnTo>
+                    <a:pt x="4491413" y="3588650"/>
+                  </a:lnTo>
+                  <a:lnTo>
+                    <a:pt x="4569047" y="3592971"/>
+                  </a:lnTo>
+                  <a:lnTo>
+                    <a:pt x="4646681" y="3596999"/>
+                  </a:lnTo>
+                  <a:lnTo>
+                    <a:pt x="4724315" y="3600756"/>
+                  </a:lnTo>
+                  <a:lnTo>
+                    <a:pt x="4801949" y="3604259"/>
+                  </a:lnTo>
+                  <a:lnTo>
+                    <a:pt x="4879583" y="3607526"/>
+                  </a:lnTo>
+                  <a:lnTo>
+                    <a:pt x="4957217" y="3610572"/>
+                  </a:lnTo>
+                  <a:lnTo>
+                    <a:pt x="5034851" y="3613413"/>
+                  </a:lnTo>
+                  <a:lnTo>
+                    <a:pt x="5112485" y="3616061"/>
+                  </a:lnTo>
+                  <a:lnTo>
+                    <a:pt x="5190119" y="3618531"/>
+                  </a:lnTo>
+                  <a:lnTo>
+                    <a:pt x="5267753" y="3620834"/>
+                  </a:lnTo>
+                  <a:lnTo>
+                    <a:pt x="5345387" y="3622982"/>
+                  </a:lnTo>
+                  <a:lnTo>
+                    <a:pt x="5423021" y="3624985"/>
+                  </a:lnTo>
+                  <a:lnTo>
+                    <a:pt x="5500655" y="3626852"/>
+                  </a:lnTo>
+                  <a:lnTo>
+                    <a:pt x="5578289" y="3628593"/>
                   </a:lnTo>
                 </a:path>
               </a:pathLst>

--- a/docs/plots/carbo/jx_carbo_linsubhr_ratio_hosp5.pptx
+++ b/docs/plots/carbo/jx_carbo_linsubhr_ratio_hosp5.pptx
@@ -3175,7 +3175,7 @@
                     <a:pt x="6749900" y="2502701"/>
                   </a:lnTo>
                   <a:lnTo>
-                    <a:pt x="6827534" y="2495264"/>
+                    <a:pt x="6827534" y="2495263"/>
                   </a:lnTo>
                   <a:lnTo>
                     <a:pt x="6905168" y="2487778"/>
@@ -3445,7 +3445,7 @@
                     <a:pt x="1082615" y="2934390"/>
                   </a:lnTo>
                   <a:lnTo>
-                    <a:pt x="1004981" y="2939005"/>
+                    <a:pt x="1004981" y="2939006"/>
                   </a:lnTo>
                   <a:lnTo>
                     <a:pt x="927346" y="2943592"/>
@@ -3626,7 +3626,7 @@
                     <a:pt x="2649797" y="2635279"/>
                   </a:lnTo>
                   <a:lnTo>
-                    <a:pt x="2727432" y="2628699"/>
+                    <a:pt x="2727431" y="2628699"/>
                   </a:lnTo>
                   <a:lnTo>
                     <a:pt x="2805066" y="2622076"/>
@@ -3683,7 +3683,7 @@
                     <a:pt x="4124844" y="2502701"/>
                   </a:lnTo>
                   <a:lnTo>
-                    <a:pt x="4202478" y="2495264"/>
+                    <a:pt x="4202478" y="2495263"/>
                   </a:lnTo>
                   <a:lnTo>
                     <a:pt x="4280112" y="2487778"/>
@@ -3975,7 +3975,7 @@
                     <a:pt x="1160249" y="143019"/>
                   </a:lnTo>
                   <a:lnTo>
-                    <a:pt x="1082615" y="147664"/>
+                    <a:pt x="1082615" y="147665"/>
                   </a:lnTo>
                   <a:lnTo>
                     <a:pt x="1004981" y="152280"/>

--- a/docs/plots/carbo/jx_carbo_linsubhr_ratio_hosp5.pptx
+++ b/docs/plots/carbo/jx_carbo_linsubhr_ratio_hosp5.pptx
@@ -2271,7 +2271,7 @@
           </p:nvSpPr>
           <p:spPr>
             <a:xfrm>
-              <a:off x="817517" y="5114368"/>
+              <a:off x="817517" y="5142518"/>
               <a:ext cx="7799693" cy="0"/>
             </a:xfrm>
             <a:custGeom>
@@ -2314,7 +2314,7 @@
           </p:nvSpPr>
           <p:spPr>
             <a:xfrm>
-              <a:off x="817517" y="4244691"/>
+              <a:off x="817517" y="4313054"/>
               <a:ext cx="7799693" cy="0"/>
             </a:xfrm>
             <a:custGeom>
@@ -2357,7 +2357,7 @@
           </p:nvSpPr>
           <p:spPr>
             <a:xfrm>
-              <a:off x="817517" y="3375014"/>
+              <a:off x="817517" y="3483591"/>
               <a:ext cx="7799693" cy="0"/>
             </a:xfrm>
             <a:custGeom>
@@ -2400,7 +2400,7 @@
           </p:nvSpPr>
           <p:spPr>
             <a:xfrm>
-              <a:off x="817517" y="2505337"/>
+              <a:off x="817517" y="2654127"/>
               <a:ext cx="7799693" cy="0"/>
             </a:xfrm>
             <a:custGeom>
@@ -2443,15 +2443,15 @@
           </p:nvSpPr>
           <p:spPr>
             <a:xfrm>
-              <a:off x="1615213" y="1896563"/>
-              <a:ext cx="0" cy="3826579"/>
+              <a:off x="1615213" y="2073503"/>
+              <a:ext cx="0" cy="3649639"/>
             </a:xfrm>
             <a:custGeom>
               <a:avLst/>
               <a:pathLst>
-                <a:path w="0" h="3826579">
+                <a:path w="0" h="3649639">
                   <a:moveTo>
-                    <a:pt x="0" y="3826579"/>
+                    <a:pt x="0" y="3649639"/>
                   </a:moveTo>
                   <a:lnTo>
                     <a:pt x="0" y="0"/>
@@ -2486,15 +2486,15 @@
           </p:nvSpPr>
           <p:spPr>
             <a:xfrm>
-              <a:off x="3387871" y="1896563"/>
-              <a:ext cx="0" cy="3826579"/>
+              <a:off x="3387871" y="2073503"/>
+              <a:ext cx="0" cy="3649639"/>
             </a:xfrm>
             <a:custGeom>
               <a:avLst/>
               <a:pathLst>
-                <a:path w="0" h="3826579">
+                <a:path w="0" h="3649639">
                   <a:moveTo>
-                    <a:pt x="0" y="3826579"/>
+                    <a:pt x="0" y="3649639"/>
                   </a:moveTo>
                   <a:lnTo>
                     <a:pt x="0" y="0"/>
@@ -2529,15 +2529,15 @@
           </p:nvSpPr>
           <p:spPr>
             <a:xfrm>
-              <a:off x="5160528" y="1896563"/>
-              <a:ext cx="0" cy="3826579"/>
+              <a:off x="5160528" y="2073503"/>
+              <a:ext cx="0" cy="3649639"/>
             </a:xfrm>
             <a:custGeom>
               <a:avLst/>
               <a:pathLst>
-                <a:path w="0" h="3826579">
+                <a:path w="0" h="3649639">
                   <a:moveTo>
-                    <a:pt x="0" y="3826579"/>
+                    <a:pt x="0" y="3649639"/>
                   </a:moveTo>
                   <a:lnTo>
                     <a:pt x="0" y="0"/>
@@ -2572,15 +2572,15 @@
           </p:nvSpPr>
           <p:spPr>
             <a:xfrm>
-              <a:off x="6933186" y="1896563"/>
-              <a:ext cx="0" cy="3826579"/>
+              <a:off x="6933186" y="2073503"/>
+              <a:ext cx="0" cy="3649639"/>
             </a:xfrm>
             <a:custGeom>
               <a:avLst/>
               <a:pathLst>
-                <a:path w="0" h="3826579">
+                <a:path w="0" h="3649639">
                   <a:moveTo>
-                    <a:pt x="0" y="3826579"/>
+                    <a:pt x="0" y="3649639"/>
                   </a:moveTo>
                   <a:lnTo>
                     <a:pt x="0" y="0"/>
@@ -2615,7 +2615,7 @@
           </p:nvSpPr>
           <p:spPr>
             <a:xfrm>
-              <a:off x="817517" y="5549207"/>
+              <a:off x="817517" y="5557249"/>
               <a:ext cx="7799693" cy="0"/>
             </a:xfrm>
             <a:custGeom>
@@ -2658,7 +2658,7 @@
           </p:nvSpPr>
           <p:spPr>
             <a:xfrm>
-              <a:off x="817517" y="4679530"/>
+              <a:off x="817517" y="4727786"/>
               <a:ext cx="7799693" cy="0"/>
             </a:xfrm>
             <a:custGeom>
@@ -2701,7 +2701,7 @@
           </p:nvSpPr>
           <p:spPr>
             <a:xfrm>
-              <a:off x="817517" y="3809853"/>
+              <a:off x="817517" y="3898322"/>
               <a:ext cx="7799693" cy="0"/>
             </a:xfrm>
             <a:custGeom>
@@ -2744,7 +2744,7 @@
           </p:nvSpPr>
           <p:spPr>
             <a:xfrm>
-              <a:off x="817517" y="2940175"/>
+              <a:off x="817517" y="3068859"/>
               <a:ext cx="7799693" cy="0"/>
             </a:xfrm>
             <a:custGeom>
@@ -2787,7 +2787,7 @@
           </p:nvSpPr>
           <p:spPr>
             <a:xfrm>
-              <a:off x="817517" y="2070498"/>
+              <a:off x="817517" y="2239395"/>
               <a:ext cx="7799693" cy="0"/>
             </a:xfrm>
             <a:custGeom>
@@ -2830,15 +2830,15 @@
           </p:nvSpPr>
           <p:spPr>
             <a:xfrm>
-              <a:off x="2501542" y="1896563"/>
-              <a:ext cx="0" cy="3826579"/>
+              <a:off x="2501542" y="2073503"/>
+              <a:ext cx="0" cy="3649639"/>
             </a:xfrm>
             <a:custGeom>
               <a:avLst/>
               <a:pathLst>
-                <a:path w="0" h="3826579">
+                <a:path w="0" h="3649639">
                   <a:moveTo>
-                    <a:pt x="0" y="3826579"/>
+                    <a:pt x="0" y="3649639"/>
                   </a:moveTo>
                   <a:lnTo>
                     <a:pt x="0" y="0"/>
@@ -2873,15 +2873,15 @@
           </p:nvSpPr>
           <p:spPr>
             <a:xfrm>
-              <a:off x="4274200" y="1896563"/>
-              <a:ext cx="0" cy="3826579"/>
+              <a:off x="4274200" y="2073503"/>
+              <a:ext cx="0" cy="3649639"/>
             </a:xfrm>
             <a:custGeom>
               <a:avLst/>
               <a:pathLst>
-                <a:path w="0" h="3826579">
+                <a:path w="0" h="3649639">
                   <a:moveTo>
-                    <a:pt x="0" y="3826579"/>
+                    <a:pt x="0" y="3649639"/>
                   </a:moveTo>
                   <a:lnTo>
                     <a:pt x="0" y="0"/>
@@ -2916,15 +2916,15 @@
           </p:nvSpPr>
           <p:spPr>
             <a:xfrm>
-              <a:off x="6046857" y="1896563"/>
-              <a:ext cx="0" cy="3826579"/>
+              <a:off x="6046857" y="2073503"/>
+              <a:ext cx="0" cy="3649639"/>
             </a:xfrm>
             <a:custGeom>
               <a:avLst/>
               <a:pathLst>
-                <a:path w="0" h="3826579">
+                <a:path w="0" h="3649639">
                   <a:moveTo>
-                    <a:pt x="0" y="3826579"/>
+                    <a:pt x="0" y="3649639"/>
                   </a:moveTo>
                   <a:lnTo>
                     <a:pt x="0" y="0"/>
@@ -2959,15 +2959,15 @@
           </p:nvSpPr>
           <p:spPr>
             <a:xfrm>
-              <a:off x="7819515" y="1896563"/>
-              <a:ext cx="0" cy="3826579"/>
+              <a:off x="7819515" y="2073503"/>
+              <a:ext cx="0" cy="3649639"/>
             </a:xfrm>
             <a:custGeom>
               <a:avLst/>
               <a:pathLst>
-                <a:path w="0" h="3826579">
+                <a:path w="0" h="3649639">
                   <a:moveTo>
-                    <a:pt x="0" y="3826579"/>
+                    <a:pt x="0" y="3649639"/>
                   </a:moveTo>
                   <a:lnTo>
                     <a:pt x="0" y="0"/>
@@ -3002,489 +3002,489 @@
           </p:nvSpPr>
           <p:spPr>
             <a:xfrm>
-              <a:off x="817517" y="1896563"/>
-              <a:ext cx="7370972" cy="3652166"/>
+              <a:off x="817517" y="2073503"/>
+              <a:ext cx="7370972" cy="3483291"/>
             </a:xfrm>
             <a:custGeom>
               <a:avLst/>
               <a:pathLst>
-                <a:path w="7370972" h="3652166">
+                <a:path w="7370972" h="3483291">
                   <a:moveTo>
                     <a:pt x="2625055" y="0"/>
                   </a:moveTo>
                   <a:lnTo>
-                    <a:pt x="2635295" y="74334"/>
-                  </a:lnTo>
-                  <a:lnTo>
-                    <a:pt x="2712930" y="561201"/>
-                  </a:lnTo>
-                  <a:lnTo>
-                    <a:pt x="2790564" y="981825"/>
-                  </a:lnTo>
-                  <a:lnTo>
-                    <a:pt x="2868198" y="1345218"/>
-                  </a:lnTo>
-                  <a:lnTo>
-                    <a:pt x="2945832" y="1659168"/>
-                  </a:lnTo>
-                  <a:lnTo>
-                    <a:pt x="3023466" y="1930401"/>
-                  </a:lnTo>
-                  <a:lnTo>
-                    <a:pt x="3101100" y="2164731"/>
-                  </a:lnTo>
-                  <a:lnTo>
-                    <a:pt x="3178734" y="2367177"/>
-                  </a:lnTo>
-                  <a:lnTo>
-                    <a:pt x="3256368" y="2542078"/>
-                  </a:lnTo>
-                  <a:lnTo>
-                    <a:pt x="3334002" y="2693182"/>
-                  </a:lnTo>
-                  <a:lnTo>
-                    <a:pt x="3411636" y="2781124"/>
-                  </a:lnTo>
-                  <a:lnTo>
-                    <a:pt x="3489270" y="2775487"/>
-                  </a:lnTo>
-                  <a:lnTo>
-                    <a:pt x="3566904" y="2769813"/>
-                  </a:lnTo>
-                  <a:lnTo>
-                    <a:pt x="3644538" y="2764103"/>
-                  </a:lnTo>
-                  <a:lnTo>
-                    <a:pt x="3722172" y="2758356"/>
-                  </a:lnTo>
-                  <a:lnTo>
-                    <a:pt x="3799806" y="2752572"/>
-                  </a:lnTo>
-                  <a:lnTo>
-                    <a:pt x="3877440" y="2746750"/>
-                  </a:lnTo>
-                  <a:lnTo>
-                    <a:pt x="3955074" y="2740891"/>
-                  </a:lnTo>
-                  <a:lnTo>
-                    <a:pt x="4032708" y="2734994"/>
-                  </a:lnTo>
-                  <a:lnTo>
-                    <a:pt x="4110342" y="2729058"/>
-                  </a:lnTo>
-                  <a:lnTo>
-                    <a:pt x="4187976" y="2723085"/>
-                  </a:lnTo>
-                  <a:lnTo>
-                    <a:pt x="4265610" y="2717072"/>
-                  </a:lnTo>
-                  <a:lnTo>
-                    <a:pt x="4343244" y="2711021"/>
-                  </a:lnTo>
-                  <a:lnTo>
-                    <a:pt x="4420879" y="2704931"/>
-                  </a:lnTo>
-                  <a:lnTo>
-                    <a:pt x="4498513" y="2698801"/>
-                  </a:lnTo>
-                  <a:lnTo>
-                    <a:pt x="4576147" y="2692631"/>
-                  </a:lnTo>
-                  <a:lnTo>
-                    <a:pt x="4653781" y="2686422"/>
-                  </a:lnTo>
-                  <a:lnTo>
-                    <a:pt x="4731415" y="2680172"/>
-                  </a:lnTo>
-                  <a:lnTo>
-                    <a:pt x="4809049" y="2673882"/>
-                  </a:lnTo>
-                  <a:lnTo>
-                    <a:pt x="4886683" y="2667552"/>
-                  </a:lnTo>
-                  <a:lnTo>
-                    <a:pt x="4964317" y="2661180"/>
-                  </a:lnTo>
-                  <a:lnTo>
-                    <a:pt x="5041951" y="2654767"/>
-                  </a:lnTo>
-                  <a:lnTo>
-                    <a:pt x="5119585" y="2648313"/>
-                  </a:lnTo>
-                  <a:lnTo>
-                    <a:pt x="5197219" y="2641817"/>
-                  </a:lnTo>
-                  <a:lnTo>
-                    <a:pt x="5274853" y="2635279"/>
-                  </a:lnTo>
-                  <a:lnTo>
-                    <a:pt x="5352487" y="2628699"/>
-                  </a:lnTo>
-                  <a:lnTo>
-                    <a:pt x="5430121" y="2622076"/>
-                  </a:lnTo>
-                  <a:lnTo>
-                    <a:pt x="5507755" y="2615410"/>
-                  </a:lnTo>
-                  <a:lnTo>
-                    <a:pt x="5585389" y="2608701"/>
-                  </a:lnTo>
-                  <a:lnTo>
-                    <a:pt x="5663023" y="2601949"/>
-                  </a:lnTo>
-                  <a:lnTo>
-                    <a:pt x="5740657" y="2595153"/>
-                  </a:lnTo>
-                  <a:lnTo>
-                    <a:pt x="5818291" y="2588313"/>
-                  </a:lnTo>
-                  <a:lnTo>
-                    <a:pt x="5895925" y="2581429"/>
-                  </a:lnTo>
-                  <a:lnTo>
-                    <a:pt x="5973559" y="2574501"/>
-                  </a:lnTo>
-                  <a:lnTo>
-                    <a:pt x="6051193" y="2567527"/>
-                  </a:lnTo>
-                  <a:lnTo>
-                    <a:pt x="6128827" y="2560509"/>
-                  </a:lnTo>
-                  <a:lnTo>
-                    <a:pt x="6206462" y="2553445"/>
-                  </a:lnTo>
-                  <a:lnTo>
-                    <a:pt x="6284096" y="2546335"/>
-                  </a:lnTo>
-                  <a:lnTo>
-                    <a:pt x="6361730" y="2539180"/>
-                  </a:lnTo>
-                  <a:lnTo>
-                    <a:pt x="6439364" y="2531978"/>
-                  </a:lnTo>
-                  <a:lnTo>
-                    <a:pt x="6516998" y="2524729"/>
-                  </a:lnTo>
-                  <a:lnTo>
-                    <a:pt x="6594632" y="2517434"/>
-                  </a:lnTo>
-                  <a:lnTo>
-                    <a:pt x="6672266" y="2510091"/>
-                  </a:lnTo>
-                  <a:lnTo>
-                    <a:pt x="6749900" y="2502701"/>
-                  </a:lnTo>
-                  <a:lnTo>
-                    <a:pt x="6827534" y="2495263"/>
-                  </a:lnTo>
-                  <a:lnTo>
-                    <a:pt x="6905168" y="2487778"/>
-                  </a:lnTo>
-                  <a:lnTo>
-                    <a:pt x="6982802" y="2480243"/>
-                  </a:lnTo>
-                  <a:lnTo>
-                    <a:pt x="7060436" y="2472660"/>
-                  </a:lnTo>
-                  <a:lnTo>
-                    <a:pt x="7138070" y="2465028"/>
-                  </a:lnTo>
-                  <a:lnTo>
-                    <a:pt x="7215704" y="2457346"/>
-                  </a:lnTo>
-                  <a:lnTo>
-                    <a:pt x="7293338" y="2449615"/>
-                  </a:lnTo>
-                  <a:lnTo>
-                    <a:pt x="7370972" y="2441834"/>
-                  </a:lnTo>
-                  <a:lnTo>
-                    <a:pt x="7370972" y="3652166"/>
-                  </a:lnTo>
-                  <a:lnTo>
-                    <a:pt x="7293338" y="3652090"/>
-                  </a:lnTo>
-                  <a:lnTo>
-                    <a:pt x="7215704" y="3652003"/>
-                  </a:lnTo>
-                  <a:lnTo>
-                    <a:pt x="7138070" y="3651902"/>
-                  </a:lnTo>
-                  <a:lnTo>
-                    <a:pt x="7060436" y="3651786"/>
-                  </a:lnTo>
-                  <a:lnTo>
-                    <a:pt x="6982802" y="3651651"/>
-                  </a:lnTo>
-                  <a:lnTo>
-                    <a:pt x="6905168" y="3651494"/>
-                  </a:lnTo>
-                  <a:lnTo>
-                    <a:pt x="6827534" y="3651314"/>
-                  </a:lnTo>
-                  <a:lnTo>
-                    <a:pt x="6749900" y="3651104"/>
-                  </a:lnTo>
-                  <a:lnTo>
-                    <a:pt x="6672266" y="3650862"/>
-                  </a:lnTo>
-                  <a:lnTo>
-                    <a:pt x="6594632" y="3650581"/>
-                  </a:lnTo>
-                  <a:lnTo>
-                    <a:pt x="6516998" y="3650256"/>
-                  </a:lnTo>
-                  <a:lnTo>
-                    <a:pt x="6439364" y="3649880"/>
-                  </a:lnTo>
-                  <a:lnTo>
-                    <a:pt x="6361730" y="3649445"/>
-                  </a:lnTo>
-                  <a:lnTo>
-                    <a:pt x="6284096" y="3648942"/>
-                  </a:lnTo>
-                  <a:lnTo>
-                    <a:pt x="6206462" y="3648359"/>
-                  </a:lnTo>
-                  <a:lnTo>
-                    <a:pt x="6128827" y="3647684"/>
-                  </a:lnTo>
-                  <a:lnTo>
-                    <a:pt x="6051193" y="3646903"/>
-                  </a:lnTo>
-                  <a:lnTo>
-                    <a:pt x="5973559" y="3645999"/>
-                  </a:lnTo>
-                  <a:lnTo>
-                    <a:pt x="5895925" y="3644952"/>
-                  </a:lnTo>
-                  <a:lnTo>
-                    <a:pt x="5818291" y="3643741"/>
-                  </a:lnTo>
-                  <a:lnTo>
-                    <a:pt x="5740657" y="3642339"/>
-                  </a:lnTo>
-                  <a:lnTo>
-                    <a:pt x="5663023" y="3640716"/>
-                  </a:lnTo>
-                  <a:lnTo>
-                    <a:pt x="5585389" y="3638838"/>
-                  </a:lnTo>
-                  <a:lnTo>
-                    <a:pt x="5507755" y="3636664"/>
-                  </a:lnTo>
-                  <a:lnTo>
-                    <a:pt x="5430121" y="3634147"/>
-                  </a:lnTo>
-                  <a:lnTo>
-                    <a:pt x="5352487" y="3631235"/>
-                  </a:lnTo>
-                  <a:lnTo>
-                    <a:pt x="5274853" y="3627863"/>
-                  </a:lnTo>
-                  <a:lnTo>
-                    <a:pt x="5197219" y="3623960"/>
-                  </a:lnTo>
-                  <a:lnTo>
-                    <a:pt x="5119585" y="3619443"/>
-                  </a:lnTo>
-                  <a:lnTo>
-                    <a:pt x="5041951" y="3614214"/>
-                  </a:lnTo>
-                  <a:lnTo>
-                    <a:pt x="4964317" y="3608162"/>
-                  </a:lnTo>
-                  <a:lnTo>
-                    <a:pt x="4886683" y="3601157"/>
-                  </a:lnTo>
-                  <a:lnTo>
-                    <a:pt x="4809049" y="3593048"/>
-                  </a:lnTo>
-                  <a:lnTo>
-                    <a:pt x="4731415" y="3583663"/>
-                  </a:lnTo>
-                  <a:lnTo>
-                    <a:pt x="4653781" y="3572799"/>
-                  </a:lnTo>
-                  <a:lnTo>
-                    <a:pt x="4576147" y="3560225"/>
-                  </a:lnTo>
-                  <a:lnTo>
-                    <a:pt x="4498513" y="3545670"/>
-                  </a:lnTo>
-                  <a:lnTo>
-                    <a:pt x="4420879" y="3528823"/>
-                  </a:lnTo>
-                  <a:lnTo>
-                    <a:pt x="4343244" y="3509322"/>
-                  </a:lnTo>
-                  <a:lnTo>
-                    <a:pt x="4265610" y="3486751"/>
-                  </a:lnTo>
-                  <a:lnTo>
-                    <a:pt x="4187976" y="3460625"/>
-                  </a:lnTo>
-                  <a:lnTo>
-                    <a:pt x="4110342" y="3430384"/>
-                  </a:lnTo>
-                  <a:lnTo>
-                    <a:pt x="4032708" y="3395381"/>
-                  </a:lnTo>
-                  <a:lnTo>
-                    <a:pt x="3955074" y="3354865"/>
-                  </a:lnTo>
-                  <a:lnTo>
-                    <a:pt x="3877440" y="3307968"/>
-                  </a:lnTo>
-                  <a:lnTo>
-                    <a:pt x="3799806" y="3253686"/>
-                  </a:lnTo>
-                  <a:lnTo>
-                    <a:pt x="3722172" y="3190854"/>
-                  </a:lnTo>
-                  <a:lnTo>
-                    <a:pt x="3644538" y="3118128"/>
-                  </a:lnTo>
-                  <a:lnTo>
-                    <a:pt x="3566904" y="3033948"/>
-                  </a:lnTo>
-                  <a:lnTo>
-                    <a:pt x="3489270" y="2936510"/>
-                  </a:lnTo>
-                  <a:lnTo>
-                    <a:pt x="3411636" y="2823727"/>
-                  </a:lnTo>
-                  <a:lnTo>
-                    <a:pt x="3334002" y="2786725"/>
-                  </a:lnTo>
-                  <a:lnTo>
-                    <a:pt x="3256368" y="2792289"/>
-                  </a:lnTo>
-                  <a:lnTo>
-                    <a:pt x="3178734" y="2797818"/>
-                  </a:lnTo>
-                  <a:lnTo>
-                    <a:pt x="3101100" y="2803312"/>
-                  </a:lnTo>
-                  <a:lnTo>
-                    <a:pt x="3023466" y="2808770"/>
-                  </a:lnTo>
-                  <a:lnTo>
-                    <a:pt x="2945832" y="2814193"/>
-                  </a:lnTo>
-                  <a:lnTo>
-                    <a:pt x="2868198" y="2819581"/>
-                  </a:lnTo>
-                  <a:lnTo>
-                    <a:pt x="2790564" y="2824935"/>
-                  </a:lnTo>
-                  <a:lnTo>
-                    <a:pt x="2712930" y="2830254"/>
-                  </a:lnTo>
-                  <a:lnTo>
-                    <a:pt x="2635295" y="2835539"/>
-                  </a:lnTo>
-                  <a:lnTo>
-                    <a:pt x="2557661" y="2840790"/>
-                  </a:lnTo>
-                  <a:lnTo>
-                    <a:pt x="2480027" y="2846008"/>
-                  </a:lnTo>
-                  <a:lnTo>
-                    <a:pt x="2402393" y="2851192"/>
-                  </a:lnTo>
-                  <a:lnTo>
-                    <a:pt x="2324759" y="2856342"/>
-                  </a:lnTo>
-                  <a:lnTo>
-                    <a:pt x="2247125" y="2861459"/>
-                  </a:lnTo>
-                  <a:lnTo>
-                    <a:pt x="2169491" y="2866544"/>
-                  </a:lnTo>
-                  <a:lnTo>
-                    <a:pt x="2091857" y="2871596"/>
-                  </a:lnTo>
-                  <a:lnTo>
-                    <a:pt x="2014223" y="2876615"/>
-                  </a:lnTo>
-                  <a:lnTo>
-                    <a:pt x="1936589" y="2881602"/>
-                  </a:lnTo>
-                  <a:lnTo>
-                    <a:pt x="1858955" y="2886557"/>
-                  </a:lnTo>
-                  <a:lnTo>
-                    <a:pt x="1781321" y="2891480"/>
-                  </a:lnTo>
-                  <a:lnTo>
-                    <a:pt x="1703687" y="2896372"/>
-                  </a:lnTo>
-                  <a:lnTo>
-                    <a:pt x="1626053" y="2901232"/>
-                  </a:lnTo>
-                  <a:lnTo>
-                    <a:pt x="1548419" y="2906061"/>
-                  </a:lnTo>
-                  <a:lnTo>
-                    <a:pt x="1470785" y="2910859"/>
-                  </a:lnTo>
-                  <a:lnTo>
-                    <a:pt x="1393151" y="2915626"/>
-                  </a:lnTo>
-                  <a:lnTo>
-                    <a:pt x="1315517" y="2920362"/>
-                  </a:lnTo>
-                  <a:lnTo>
-                    <a:pt x="1237883" y="2925068"/>
-                  </a:lnTo>
-                  <a:lnTo>
-                    <a:pt x="1160249" y="2929744"/>
-                  </a:lnTo>
-                  <a:lnTo>
-                    <a:pt x="1082615" y="2934390"/>
-                  </a:lnTo>
-                  <a:lnTo>
-                    <a:pt x="1004981" y="2939006"/>
-                  </a:lnTo>
-                  <a:lnTo>
-                    <a:pt x="927346" y="2943592"/>
-                  </a:lnTo>
-                  <a:lnTo>
-                    <a:pt x="849712" y="2948148"/>
-                  </a:lnTo>
-                  <a:lnTo>
-                    <a:pt x="772078" y="2952676"/>
-                  </a:lnTo>
-                  <a:lnTo>
-                    <a:pt x="694444" y="2957174"/>
-                  </a:lnTo>
-                  <a:lnTo>
-                    <a:pt x="616810" y="2961643"/>
-                  </a:lnTo>
-                  <a:lnTo>
-                    <a:pt x="539176" y="2966084"/>
-                  </a:lnTo>
-                  <a:lnTo>
-                    <a:pt x="461542" y="2970496"/>
-                  </a:lnTo>
-                  <a:lnTo>
-                    <a:pt x="383908" y="2974880"/>
-                  </a:lnTo>
-                  <a:lnTo>
-                    <a:pt x="306274" y="2979236"/>
-                  </a:lnTo>
-                  <a:lnTo>
-                    <a:pt x="228640" y="2983563"/>
-                  </a:lnTo>
-                  <a:lnTo>
-                    <a:pt x="151006" y="2987863"/>
-                  </a:lnTo>
-                  <a:lnTo>
-                    <a:pt x="73372" y="2992135"/>
-                  </a:lnTo>
-                  <a:lnTo>
-                    <a:pt x="0" y="2996147"/>
+                    <a:pt x="2635295" y="70897"/>
+                  </a:lnTo>
+                  <a:lnTo>
+                    <a:pt x="2712930" y="535252"/>
+                  </a:lnTo>
+                  <a:lnTo>
+                    <a:pt x="2790564" y="936426"/>
+                  </a:lnTo>
+                  <a:lnTo>
+                    <a:pt x="2868198" y="1283016"/>
+                  </a:lnTo>
+                  <a:lnTo>
+                    <a:pt x="2945832" y="1582448"/>
+                  </a:lnTo>
+                  <a:lnTo>
+                    <a:pt x="3023466" y="1841140"/>
+                  </a:lnTo>
+                  <a:lnTo>
+                    <a:pt x="3101100" y="2064634"/>
+                  </a:lnTo>
+                  <a:lnTo>
+                    <a:pt x="3178734" y="2257720"/>
+                  </a:lnTo>
+                  <a:lnTo>
+                    <a:pt x="3256368" y="2424534"/>
+                  </a:lnTo>
+                  <a:lnTo>
+                    <a:pt x="3334002" y="2568651"/>
+                  </a:lnTo>
+                  <a:lnTo>
+                    <a:pt x="3411636" y="2652526"/>
+                  </a:lnTo>
+                  <a:lnTo>
+                    <a:pt x="3489270" y="2647149"/>
+                  </a:lnTo>
+                  <a:lnTo>
+                    <a:pt x="3566904" y="2641738"/>
+                  </a:lnTo>
+                  <a:lnTo>
+                    <a:pt x="3644538" y="2636292"/>
+                  </a:lnTo>
+                  <a:lnTo>
+                    <a:pt x="3722172" y="2630811"/>
+                  </a:lnTo>
+                  <a:lnTo>
+                    <a:pt x="3799806" y="2625294"/>
+                  </a:lnTo>
+                  <a:lnTo>
+                    <a:pt x="3877440" y="2619742"/>
+                  </a:lnTo>
+                  <a:lnTo>
+                    <a:pt x="3955074" y="2614153"/>
+                  </a:lnTo>
+                  <a:lnTo>
+                    <a:pt x="4032708" y="2608529"/>
+                  </a:lnTo>
+                  <a:lnTo>
+                    <a:pt x="4110342" y="2602868"/>
+                  </a:lnTo>
+                  <a:lnTo>
+                    <a:pt x="4187976" y="2597170"/>
+                  </a:lnTo>
+                  <a:lnTo>
+                    <a:pt x="4265610" y="2591436"/>
+                  </a:lnTo>
+                  <a:lnTo>
+                    <a:pt x="4343244" y="2585664"/>
+                  </a:lnTo>
+                  <a:lnTo>
+                    <a:pt x="4420879" y="2579856"/>
+                  </a:lnTo>
+                  <a:lnTo>
+                    <a:pt x="4498513" y="2574009"/>
+                  </a:lnTo>
+                  <a:lnTo>
+                    <a:pt x="4576147" y="2568125"/>
+                  </a:lnTo>
+                  <a:lnTo>
+                    <a:pt x="4653781" y="2562203"/>
+                  </a:lnTo>
+                  <a:lnTo>
+                    <a:pt x="4731415" y="2556242"/>
+                  </a:lnTo>
+                  <a:lnTo>
+                    <a:pt x="4809049" y="2550243"/>
+                  </a:lnTo>
+                  <a:lnTo>
+                    <a:pt x="4886683" y="2544205"/>
+                  </a:lnTo>
+                  <a:lnTo>
+                    <a:pt x="4964317" y="2538128"/>
+                  </a:lnTo>
+                  <a:lnTo>
+                    <a:pt x="5041951" y="2532012"/>
+                  </a:lnTo>
+                  <a:lnTo>
+                    <a:pt x="5119585" y="2525856"/>
+                  </a:lnTo>
+                  <a:lnTo>
+                    <a:pt x="5197219" y="2519661"/>
+                  </a:lnTo>
+                  <a:lnTo>
+                    <a:pt x="5274853" y="2513425"/>
+                  </a:lnTo>
+                  <a:lnTo>
+                    <a:pt x="5352487" y="2507149"/>
+                  </a:lnTo>
+                  <a:lnTo>
+                    <a:pt x="5430121" y="2500832"/>
+                  </a:lnTo>
+                  <a:lnTo>
+                    <a:pt x="5507755" y="2494475"/>
+                  </a:lnTo>
+                  <a:lnTo>
+                    <a:pt x="5585389" y="2488076"/>
+                  </a:lnTo>
+                  <a:lnTo>
+                    <a:pt x="5663023" y="2481636"/>
+                  </a:lnTo>
+                  <a:lnTo>
+                    <a:pt x="5740657" y="2475154"/>
+                  </a:lnTo>
+                  <a:lnTo>
+                    <a:pt x="5818291" y="2468631"/>
+                  </a:lnTo>
+                  <a:lnTo>
+                    <a:pt x="5895925" y="2462065"/>
+                  </a:lnTo>
+                  <a:lnTo>
+                    <a:pt x="5973559" y="2455457"/>
+                  </a:lnTo>
+                  <a:lnTo>
+                    <a:pt x="6051193" y="2448806"/>
+                  </a:lnTo>
+                  <a:lnTo>
+                    <a:pt x="6128827" y="2442112"/>
+                  </a:lnTo>
+                  <a:lnTo>
+                    <a:pt x="6206462" y="2435374"/>
+                  </a:lnTo>
+                  <a:lnTo>
+                    <a:pt x="6284096" y="2428594"/>
+                  </a:lnTo>
+                  <a:lnTo>
+                    <a:pt x="6361730" y="2421769"/>
+                  </a:lnTo>
+                  <a:lnTo>
+                    <a:pt x="6439364" y="2414900"/>
+                  </a:lnTo>
+                  <a:lnTo>
+                    <a:pt x="6516998" y="2407987"/>
+                  </a:lnTo>
+                  <a:lnTo>
+                    <a:pt x="6594632" y="2401029"/>
+                  </a:lnTo>
+                  <a:lnTo>
+                    <a:pt x="6672266" y="2394026"/>
+                  </a:lnTo>
+                  <a:lnTo>
+                    <a:pt x="6749900" y="2386977"/>
+                  </a:lnTo>
+                  <a:lnTo>
+                    <a:pt x="6827534" y="2379883"/>
+                  </a:lnTo>
+                  <a:lnTo>
+                    <a:pt x="6905168" y="2372744"/>
+                  </a:lnTo>
+                  <a:lnTo>
+                    <a:pt x="6982802" y="2365558"/>
+                  </a:lnTo>
+                  <a:lnTo>
+                    <a:pt x="7060436" y="2358325"/>
+                  </a:lnTo>
+                  <a:lnTo>
+                    <a:pt x="7138070" y="2351046"/>
+                  </a:lnTo>
+                  <a:lnTo>
+                    <a:pt x="7215704" y="2343720"/>
+                  </a:lnTo>
+                  <a:lnTo>
+                    <a:pt x="7293338" y="2336346"/>
+                  </a:lnTo>
+                  <a:lnTo>
+                    <a:pt x="7370972" y="2328925"/>
+                  </a:lnTo>
+                  <a:lnTo>
+                    <a:pt x="7370972" y="3483291"/>
+                  </a:lnTo>
+                  <a:lnTo>
+                    <a:pt x="7293338" y="3483219"/>
+                  </a:lnTo>
+                  <a:lnTo>
+                    <a:pt x="7215704" y="3483136"/>
+                  </a:lnTo>
+                  <a:lnTo>
+                    <a:pt x="7138070" y="3483040"/>
+                  </a:lnTo>
+                  <a:lnTo>
+                    <a:pt x="7060436" y="3482929"/>
+                  </a:lnTo>
+                  <a:lnTo>
+                    <a:pt x="6982802" y="3482800"/>
+                  </a:lnTo>
+                  <a:lnTo>
+                    <a:pt x="6905168" y="3482651"/>
+                  </a:lnTo>
+                  <a:lnTo>
+                    <a:pt x="6827534" y="3482478"/>
+                  </a:lnTo>
+                  <a:lnTo>
+                    <a:pt x="6749900" y="3482278"/>
+                  </a:lnTo>
+                  <a:lnTo>
+                    <a:pt x="6672266" y="3482047"/>
+                  </a:lnTo>
+                  <a:lnTo>
+                    <a:pt x="6594632" y="3481780"/>
+                  </a:lnTo>
+                  <a:lnTo>
+                    <a:pt x="6516998" y="3481470"/>
+                  </a:lnTo>
+                  <a:lnTo>
+                    <a:pt x="6439364" y="3481111"/>
+                  </a:lnTo>
+                  <a:lnTo>
+                    <a:pt x="6361730" y="3480696"/>
+                  </a:lnTo>
+                  <a:lnTo>
+                    <a:pt x="6284096" y="3480216"/>
+                  </a:lnTo>
+                  <a:lnTo>
+                    <a:pt x="6206462" y="3479660"/>
+                  </a:lnTo>
+                  <a:lnTo>
+                    <a:pt x="6128827" y="3479016"/>
+                  </a:lnTo>
+                  <a:lnTo>
+                    <a:pt x="6051193" y="3478271"/>
+                  </a:lnTo>
+                  <a:lnTo>
+                    <a:pt x="5973559" y="3477409"/>
+                  </a:lnTo>
+                  <a:lnTo>
+                    <a:pt x="5895925" y="3476411"/>
+                  </a:lnTo>
+                  <a:lnTo>
+                    <a:pt x="5818291" y="3475256"/>
+                  </a:lnTo>
+                  <a:lnTo>
+                    <a:pt x="5740657" y="3473919"/>
+                  </a:lnTo>
+                  <a:lnTo>
+                    <a:pt x="5663023" y="3472371"/>
+                  </a:lnTo>
+                  <a:lnTo>
+                    <a:pt x="5585389" y="3470580"/>
+                  </a:lnTo>
+                  <a:lnTo>
+                    <a:pt x="5507755" y="3468506"/>
+                  </a:lnTo>
+                  <a:lnTo>
+                    <a:pt x="5430121" y="3466106"/>
+                  </a:lnTo>
+                  <a:lnTo>
+                    <a:pt x="5352487" y="3463328"/>
+                  </a:lnTo>
+                  <a:lnTo>
+                    <a:pt x="5274853" y="3460112"/>
+                  </a:lnTo>
+                  <a:lnTo>
+                    <a:pt x="5197219" y="3456390"/>
+                  </a:lnTo>
+                  <a:lnTo>
+                    <a:pt x="5119585" y="3452081"/>
+                  </a:lnTo>
+                  <a:lnTo>
+                    <a:pt x="5041951" y="3447094"/>
+                  </a:lnTo>
+                  <a:lnTo>
+                    <a:pt x="4964317" y="3441322"/>
+                  </a:lnTo>
+                  <a:lnTo>
+                    <a:pt x="4886683" y="3434641"/>
+                  </a:lnTo>
+                  <a:lnTo>
+                    <a:pt x="4809049" y="3426907"/>
+                  </a:lnTo>
+                  <a:lnTo>
+                    <a:pt x="4731415" y="3417956"/>
+                  </a:lnTo>
+                  <a:lnTo>
+                    <a:pt x="4653781" y="3407594"/>
+                  </a:lnTo>
+                  <a:lnTo>
+                    <a:pt x="4576147" y="3395601"/>
+                  </a:lnTo>
+                  <a:lnTo>
+                    <a:pt x="4498513" y="3381719"/>
+                  </a:lnTo>
+                  <a:lnTo>
+                    <a:pt x="4420879" y="3365651"/>
+                  </a:lnTo>
+                  <a:lnTo>
+                    <a:pt x="4343244" y="3347053"/>
+                  </a:lnTo>
+                  <a:lnTo>
+                    <a:pt x="4265610" y="3325525"/>
+                  </a:lnTo>
+                  <a:lnTo>
+                    <a:pt x="4187976" y="3300607"/>
+                  </a:lnTo>
+                  <a:lnTo>
+                    <a:pt x="4110342" y="3271764"/>
+                  </a:lnTo>
+                  <a:lnTo>
+                    <a:pt x="4032708" y="3238380"/>
+                  </a:lnTo>
+                  <a:lnTo>
+                    <a:pt x="3955074" y="3199737"/>
+                  </a:lnTo>
+                  <a:lnTo>
+                    <a:pt x="3877440" y="3155009"/>
+                  </a:lnTo>
+                  <a:lnTo>
+                    <a:pt x="3799806" y="3103236"/>
+                  </a:lnTo>
+                  <a:lnTo>
+                    <a:pt x="3722172" y="3043310"/>
+                  </a:lnTo>
+                  <a:lnTo>
+                    <a:pt x="3644538" y="2973947"/>
+                  </a:lnTo>
+                  <a:lnTo>
+                    <a:pt x="3566904" y="2893659"/>
+                  </a:lnTo>
+                  <a:lnTo>
+                    <a:pt x="3489270" y="2800727"/>
+                  </a:lnTo>
+                  <a:lnTo>
+                    <a:pt x="3411636" y="2693159"/>
+                  </a:lnTo>
+                  <a:lnTo>
+                    <a:pt x="3334002" y="2657868"/>
+                  </a:lnTo>
+                  <a:lnTo>
+                    <a:pt x="3256368" y="2663175"/>
+                  </a:lnTo>
+                  <a:lnTo>
+                    <a:pt x="3178734" y="2668448"/>
+                  </a:lnTo>
+                  <a:lnTo>
+                    <a:pt x="3101100" y="2673688"/>
+                  </a:lnTo>
+                  <a:lnTo>
+                    <a:pt x="3023466" y="2678894"/>
+                  </a:lnTo>
+                  <a:lnTo>
+                    <a:pt x="2945832" y="2684066"/>
+                  </a:lnTo>
+                  <a:lnTo>
+                    <a:pt x="2868198" y="2689205"/>
+                  </a:lnTo>
+                  <a:lnTo>
+                    <a:pt x="2790564" y="2694311"/>
+                  </a:lnTo>
+                  <a:lnTo>
+                    <a:pt x="2712930" y="2699384"/>
+                  </a:lnTo>
+                  <a:lnTo>
+                    <a:pt x="2635295" y="2704425"/>
+                  </a:lnTo>
+                  <a:lnTo>
+                    <a:pt x="2557661" y="2709433"/>
+                  </a:lnTo>
+                  <a:lnTo>
+                    <a:pt x="2480027" y="2714409"/>
+                  </a:lnTo>
+                  <a:lnTo>
+                    <a:pt x="2402393" y="2719354"/>
+                  </a:lnTo>
+                  <a:lnTo>
+                    <a:pt x="2324759" y="2724266"/>
+                  </a:lnTo>
+                  <a:lnTo>
+                    <a:pt x="2247125" y="2729147"/>
+                  </a:lnTo>
+                  <a:lnTo>
+                    <a:pt x="2169491" y="2733996"/>
+                  </a:lnTo>
+                  <a:lnTo>
+                    <a:pt x="2091857" y="2738814"/>
+                  </a:lnTo>
+                  <a:lnTo>
+                    <a:pt x="2014223" y="2743601"/>
+                  </a:lnTo>
+                  <a:lnTo>
+                    <a:pt x="1936589" y="2748358"/>
+                  </a:lnTo>
+                  <a:lnTo>
+                    <a:pt x="1858955" y="2753084"/>
+                  </a:lnTo>
+                  <a:lnTo>
+                    <a:pt x="1781321" y="2757779"/>
+                  </a:lnTo>
+                  <a:lnTo>
+                    <a:pt x="1703687" y="2762445"/>
+                  </a:lnTo>
+                  <a:lnTo>
+                    <a:pt x="1626053" y="2767080"/>
+                  </a:lnTo>
+                  <a:lnTo>
+                    <a:pt x="1548419" y="2771686"/>
+                  </a:lnTo>
+                  <a:lnTo>
+                    <a:pt x="1470785" y="2776262"/>
+                  </a:lnTo>
+                  <a:lnTo>
+                    <a:pt x="1393151" y="2780808"/>
+                  </a:lnTo>
+                  <a:lnTo>
+                    <a:pt x="1315517" y="2785326"/>
+                  </a:lnTo>
+                  <a:lnTo>
+                    <a:pt x="1237883" y="2789814"/>
+                  </a:lnTo>
+                  <a:lnTo>
+                    <a:pt x="1160249" y="2794274"/>
+                  </a:lnTo>
+                  <a:lnTo>
+                    <a:pt x="1082615" y="2798705"/>
+                  </a:lnTo>
+                  <a:lnTo>
+                    <a:pt x="1004981" y="2803107"/>
+                  </a:lnTo>
+                  <a:lnTo>
+                    <a:pt x="927346" y="2807481"/>
+                  </a:lnTo>
+                  <a:lnTo>
+                    <a:pt x="849712" y="2811827"/>
+                  </a:lnTo>
+                  <a:lnTo>
+                    <a:pt x="772078" y="2816145"/>
+                  </a:lnTo>
+                  <a:lnTo>
+                    <a:pt x="694444" y="2820435"/>
+                  </a:lnTo>
+                  <a:lnTo>
+                    <a:pt x="616810" y="2824698"/>
+                  </a:lnTo>
+                  <a:lnTo>
+                    <a:pt x="539176" y="2828933"/>
+                  </a:lnTo>
+                  <a:lnTo>
+                    <a:pt x="461542" y="2833142"/>
+                  </a:lnTo>
+                  <a:lnTo>
+                    <a:pt x="383908" y="2837323"/>
+                  </a:lnTo>
+                  <a:lnTo>
+                    <a:pt x="306274" y="2841477"/>
+                  </a:lnTo>
+                  <a:lnTo>
+                    <a:pt x="228640" y="2845604"/>
+                  </a:lnTo>
+                  <a:lnTo>
+                    <a:pt x="151006" y="2849705"/>
+                  </a:lnTo>
+                  <a:lnTo>
+                    <a:pt x="73372" y="2853780"/>
+                  </a:lnTo>
+                  <a:lnTo>
+                    <a:pt x="0" y="2857606"/>
                   </a:lnTo>
                   <a:close/>
                 </a:path>
@@ -3510,201 +3510,201 @@
           </p:nvSpPr>
           <p:spPr>
             <a:xfrm>
-              <a:off x="3442573" y="1896563"/>
-              <a:ext cx="4745917" cy="2781124"/>
+              <a:off x="3442573" y="2073503"/>
+              <a:ext cx="4745917" cy="2652526"/>
             </a:xfrm>
             <a:custGeom>
               <a:avLst/>
               <a:pathLst>
-                <a:path w="4745917" h="2781124">
+                <a:path w="4745917" h="2652526">
                   <a:moveTo>
                     <a:pt x="0" y="0"/>
                   </a:moveTo>
                   <a:lnTo>
-                    <a:pt x="10240" y="74334"/>
-                  </a:lnTo>
-                  <a:lnTo>
-                    <a:pt x="87874" y="561201"/>
-                  </a:lnTo>
-                  <a:lnTo>
-                    <a:pt x="165508" y="981825"/>
-                  </a:lnTo>
-                  <a:lnTo>
-                    <a:pt x="243142" y="1345218"/>
-                  </a:lnTo>
-                  <a:lnTo>
-                    <a:pt x="320776" y="1659168"/>
-                  </a:lnTo>
-                  <a:lnTo>
-                    <a:pt x="398410" y="1930401"/>
-                  </a:lnTo>
-                  <a:lnTo>
-                    <a:pt x="476044" y="2164731"/>
-                  </a:lnTo>
-                  <a:lnTo>
-                    <a:pt x="553678" y="2367177"/>
-                  </a:lnTo>
-                  <a:lnTo>
-                    <a:pt x="631312" y="2542078"/>
-                  </a:lnTo>
-                  <a:lnTo>
-                    <a:pt x="708946" y="2693182"/>
-                  </a:lnTo>
-                  <a:lnTo>
-                    <a:pt x="786580" y="2781124"/>
-                  </a:lnTo>
-                  <a:lnTo>
-                    <a:pt x="864214" y="2775487"/>
-                  </a:lnTo>
-                  <a:lnTo>
-                    <a:pt x="941848" y="2769813"/>
-                  </a:lnTo>
-                  <a:lnTo>
-                    <a:pt x="1019483" y="2764103"/>
-                  </a:lnTo>
-                  <a:lnTo>
-                    <a:pt x="1097117" y="2758356"/>
-                  </a:lnTo>
-                  <a:lnTo>
-                    <a:pt x="1174751" y="2752572"/>
-                  </a:lnTo>
-                  <a:lnTo>
-                    <a:pt x="1252385" y="2746750"/>
-                  </a:lnTo>
-                  <a:lnTo>
-                    <a:pt x="1330019" y="2740891"/>
-                  </a:lnTo>
-                  <a:lnTo>
-                    <a:pt x="1407653" y="2734994"/>
-                  </a:lnTo>
-                  <a:lnTo>
-                    <a:pt x="1485287" y="2729058"/>
-                  </a:lnTo>
-                  <a:lnTo>
-                    <a:pt x="1562921" y="2723085"/>
-                  </a:lnTo>
-                  <a:lnTo>
-                    <a:pt x="1640555" y="2717072"/>
-                  </a:lnTo>
-                  <a:lnTo>
-                    <a:pt x="1718189" y="2711021"/>
-                  </a:lnTo>
-                  <a:lnTo>
-                    <a:pt x="1795823" y="2704931"/>
-                  </a:lnTo>
-                  <a:lnTo>
-                    <a:pt x="1873457" y="2698801"/>
-                  </a:lnTo>
-                  <a:lnTo>
-                    <a:pt x="1951091" y="2692631"/>
-                  </a:lnTo>
-                  <a:lnTo>
-                    <a:pt x="2028725" y="2686422"/>
-                  </a:lnTo>
-                  <a:lnTo>
-                    <a:pt x="2106359" y="2680172"/>
-                  </a:lnTo>
-                  <a:lnTo>
-                    <a:pt x="2183993" y="2673882"/>
-                  </a:lnTo>
-                  <a:lnTo>
-                    <a:pt x="2261627" y="2667552"/>
-                  </a:lnTo>
-                  <a:lnTo>
-                    <a:pt x="2339261" y="2661180"/>
-                  </a:lnTo>
-                  <a:lnTo>
-                    <a:pt x="2416895" y="2654767"/>
-                  </a:lnTo>
-                  <a:lnTo>
-                    <a:pt x="2494529" y="2648313"/>
-                  </a:lnTo>
-                  <a:lnTo>
-                    <a:pt x="2572163" y="2641817"/>
-                  </a:lnTo>
-                  <a:lnTo>
-                    <a:pt x="2649797" y="2635279"/>
-                  </a:lnTo>
-                  <a:lnTo>
-                    <a:pt x="2727431" y="2628699"/>
-                  </a:lnTo>
-                  <a:lnTo>
-                    <a:pt x="2805066" y="2622076"/>
-                  </a:lnTo>
-                  <a:lnTo>
-                    <a:pt x="2882700" y="2615410"/>
-                  </a:lnTo>
-                  <a:lnTo>
-                    <a:pt x="2960334" y="2608701"/>
-                  </a:lnTo>
-                  <a:lnTo>
-                    <a:pt x="3037968" y="2601949"/>
-                  </a:lnTo>
-                  <a:lnTo>
-                    <a:pt x="3115602" y="2595153"/>
-                  </a:lnTo>
-                  <a:lnTo>
-                    <a:pt x="3193236" y="2588313"/>
-                  </a:lnTo>
-                  <a:lnTo>
-                    <a:pt x="3270870" y="2581429"/>
-                  </a:lnTo>
-                  <a:lnTo>
-                    <a:pt x="3348504" y="2574501"/>
-                  </a:lnTo>
-                  <a:lnTo>
-                    <a:pt x="3426138" y="2567527"/>
-                  </a:lnTo>
-                  <a:lnTo>
-                    <a:pt x="3503772" y="2560509"/>
-                  </a:lnTo>
-                  <a:lnTo>
-                    <a:pt x="3581406" y="2553445"/>
-                  </a:lnTo>
-                  <a:lnTo>
-                    <a:pt x="3659040" y="2546335"/>
-                  </a:lnTo>
-                  <a:lnTo>
-                    <a:pt x="3736674" y="2539180"/>
-                  </a:lnTo>
-                  <a:lnTo>
-                    <a:pt x="3814308" y="2531978"/>
-                  </a:lnTo>
-                  <a:lnTo>
-                    <a:pt x="3891942" y="2524729"/>
-                  </a:lnTo>
-                  <a:lnTo>
-                    <a:pt x="3969576" y="2517434"/>
-                  </a:lnTo>
-                  <a:lnTo>
-                    <a:pt x="4047210" y="2510091"/>
-                  </a:lnTo>
-                  <a:lnTo>
-                    <a:pt x="4124844" y="2502701"/>
-                  </a:lnTo>
-                  <a:lnTo>
-                    <a:pt x="4202478" y="2495263"/>
-                  </a:lnTo>
-                  <a:lnTo>
-                    <a:pt x="4280112" y="2487778"/>
-                  </a:lnTo>
-                  <a:lnTo>
-                    <a:pt x="4357746" y="2480243"/>
-                  </a:lnTo>
-                  <a:lnTo>
-                    <a:pt x="4435380" y="2472660"/>
-                  </a:lnTo>
-                  <a:lnTo>
-                    <a:pt x="4513015" y="2465028"/>
-                  </a:lnTo>
-                  <a:lnTo>
-                    <a:pt x="4590649" y="2457346"/>
-                  </a:lnTo>
-                  <a:lnTo>
-                    <a:pt x="4668283" y="2449615"/>
-                  </a:lnTo>
-                  <a:lnTo>
-                    <a:pt x="4745917" y="2441834"/>
+                    <a:pt x="10240" y="70897"/>
+                  </a:lnTo>
+                  <a:lnTo>
+                    <a:pt x="87874" y="535252"/>
+                  </a:lnTo>
+                  <a:lnTo>
+                    <a:pt x="165508" y="936426"/>
+                  </a:lnTo>
+                  <a:lnTo>
+                    <a:pt x="243142" y="1283016"/>
+                  </a:lnTo>
+                  <a:lnTo>
+                    <a:pt x="320776" y="1582448"/>
+                  </a:lnTo>
+                  <a:lnTo>
+                    <a:pt x="398410" y="1841140"/>
+                  </a:lnTo>
+                  <a:lnTo>
+                    <a:pt x="476044" y="2064634"/>
+                  </a:lnTo>
+                  <a:lnTo>
+                    <a:pt x="553678" y="2257720"/>
+                  </a:lnTo>
+                  <a:lnTo>
+                    <a:pt x="631312" y="2424534"/>
+                  </a:lnTo>
+                  <a:lnTo>
+                    <a:pt x="708946" y="2568651"/>
+                  </a:lnTo>
+                  <a:lnTo>
+                    <a:pt x="786580" y="2652526"/>
+                  </a:lnTo>
+                  <a:lnTo>
+                    <a:pt x="864214" y="2647149"/>
+                  </a:lnTo>
+                  <a:lnTo>
+                    <a:pt x="941848" y="2641738"/>
+                  </a:lnTo>
+                  <a:lnTo>
+                    <a:pt x="1019483" y="2636292"/>
+                  </a:lnTo>
+                  <a:lnTo>
+                    <a:pt x="1097117" y="2630811"/>
+                  </a:lnTo>
+                  <a:lnTo>
+                    <a:pt x="1174751" y="2625294"/>
+                  </a:lnTo>
+                  <a:lnTo>
+                    <a:pt x="1252385" y="2619742"/>
+                  </a:lnTo>
+                  <a:lnTo>
+                    <a:pt x="1330019" y="2614153"/>
+                  </a:lnTo>
+                  <a:lnTo>
+                    <a:pt x="1407653" y="2608529"/>
+                  </a:lnTo>
+                  <a:lnTo>
+                    <a:pt x="1485287" y="2602868"/>
+                  </a:lnTo>
+                  <a:lnTo>
+                    <a:pt x="1562921" y="2597170"/>
+                  </a:lnTo>
+                  <a:lnTo>
+                    <a:pt x="1640555" y="2591436"/>
+                  </a:lnTo>
+                  <a:lnTo>
+                    <a:pt x="1718189" y="2585664"/>
+                  </a:lnTo>
+                  <a:lnTo>
+                    <a:pt x="1795823" y="2579856"/>
+                  </a:lnTo>
+                  <a:lnTo>
+                    <a:pt x="1873457" y="2574009"/>
+                  </a:lnTo>
+                  <a:lnTo>
+                    <a:pt x="1951091" y="2568125"/>
+                  </a:lnTo>
+                  <a:lnTo>
+                    <a:pt x="2028725" y="2562203"/>
+                  </a:lnTo>
+                  <a:lnTo>
+                    <a:pt x="2106359" y="2556242"/>
+                  </a:lnTo>
+                  <a:lnTo>
+                    <a:pt x="2183993" y="2550243"/>
+                  </a:lnTo>
+                  <a:lnTo>
+                    <a:pt x="2261627" y="2544205"/>
+                  </a:lnTo>
+                  <a:lnTo>
+                    <a:pt x="2339261" y="2538128"/>
+                  </a:lnTo>
+                  <a:lnTo>
+                    <a:pt x="2416895" y="2532012"/>
+                  </a:lnTo>
+                  <a:lnTo>
+                    <a:pt x="2494529" y="2525856"/>
+                  </a:lnTo>
+                  <a:lnTo>
+                    <a:pt x="2572163" y="2519661"/>
+                  </a:lnTo>
+                  <a:lnTo>
+                    <a:pt x="2649797" y="2513425"/>
+                  </a:lnTo>
+                  <a:lnTo>
+                    <a:pt x="2727431" y="2507149"/>
+                  </a:lnTo>
+                  <a:lnTo>
+                    <a:pt x="2805066" y="2500832"/>
+                  </a:lnTo>
+                  <a:lnTo>
+                    <a:pt x="2882700" y="2494475"/>
+                  </a:lnTo>
+                  <a:lnTo>
+                    <a:pt x="2960334" y="2488076"/>
+                  </a:lnTo>
+                  <a:lnTo>
+                    <a:pt x="3037968" y="2481636"/>
+                  </a:lnTo>
+                  <a:lnTo>
+                    <a:pt x="3115602" y="2475154"/>
+                  </a:lnTo>
+                  <a:lnTo>
+                    <a:pt x="3193236" y="2468631"/>
+                  </a:lnTo>
+                  <a:lnTo>
+                    <a:pt x="3270870" y="2462065"/>
+                  </a:lnTo>
+                  <a:lnTo>
+                    <a:pt x="3348504" y="2455457"/>
+                  </a:lnTo>
+                  <a:lnTo>
+                    <a:pt x="3426138" y="2448806"/>
+                  </a:lnTo>
+                  <a:lnTo>
+                    <a:pt x="3503772" y="2442112"/>
+                  </a:lnTo>
+                  <a:lnTo>
+                    <a:pt x="3581406" y="2435374"/>
+                  </a:lnTo>
+                  <a:lnTo>
+                    <a:pt x="3659040" y="2428594"/>
+                  </a:lnTo>
+                  <a:lnTo>
+                    <a:pt x="3736674" y="2421769"/>
+                  </a:lnTo>
+                  <a:lnTo>
+                    <a:pt x="3814308" y="2414900"/>
+                  </a:lnTo>
+                  <a:lnTo>
+                    <a:pt x="3891942" y="2407987"/>
+                  </a:lnTo>
+                  <a:lnTo>
+                    <a:pt x="3969576" y="2401029"/>
+                  </a:lnTo>
+                  <a:lnTo>
+                    <a:pt x="4047210" y="2394026"/>
+                  </a:lnTo>
+                  <a:lnTo>
+                    <a:pt x="4124844" y="2386977"/>
+                  </a:lnTo>
+                  <a:lnTo>
+                    <a:pt x="4202478" y="2379883"/>
+                  </a:lnTo>
+                  <a:lnTo>
+                    <a:pt x="4280112" y="2372744"/>
+                  </a:lnTo>
+                  <a:lnTo>
+                    <a:pt x="4357746" y="2365558"/>
+                  </a:lnTo>
+                  <a:lnTo>
+                    <a:pt x="4435380" y="2358325"/>
+                  </a:lnTo>
+                  <a:lnTo>
+                    <a:pt x="4513015" y="2351046"/>
+                  </a:lnTo>
+                  <a:lnTo>
+                    <a:pt x="4590649" y="2343720"/>
+                  </a:lnTo>
+                  <a:lnTo>
+                    <a:pt x="4668283" y="2336346"/>
+                  </a:lnTo>
+                  <a:lnTo>
+                    <a:pt x="4745917" y="2328925"/>
                   </a:lnTo>
                 </a:path>
               </a:pathLst>
@@ -3724,300 +3724,300 @@
           </p:nvSpPr>
           <p:spPr>
             <a:xfrm>
-              <a:off x="817517" y="4683288"/>
-              <a:ext cx="7370972" cy="865440"/>
+              <a:off x="817517" y="4731371"/>
+              <a:ext cx="7370972" cy="825423"/>
             </a:xfrm>
             <a:custGeom>
               <a:avLst/>
               <a:pathLst>
-                <a:path w="7370972" h="865440">
+                <a:path w="7370972" h="825423">
                   <a:moveTo>
-                    <a:pt x="7370972" y="865440"/>
+                    <a:pt x="7370972" y="825423"/>
                   </a:moveTo>
                   <a:lnTo>
-                    <a:pt x="7293338" y="865365"/>
-                  </a:lnTo>
-                  <a:lnTo>
-                    <a:pt x="7215704" y="865278"/>
-                  </a:lnTo>
-                  <a:lnTo>
-                    <a:pt x="7138070" y="865177"/>
-                  </a:lnTo>
-                  <a:lnTo>
-                    <a:pt x="7060436" y="865061"/>
-                  </a:lnTo>
-                  <a:lnTo>
-                    <a:pt x="6982802" y="864926"/>
-                  </a:lnTo>
-                  <a:lnTo>
-                    <a:pt x="6905168" y="864769"/>
-                  </a:lnTo>
-                  <a:lnTo>
-                    <a:pt x="6827534" y="864588"/>
-                  </a:lnTo>
-                  <a:lnTo>
-                    <a:pt x="6749900" y="864379"/>
-                  </a:lnTo>
-                  <a:lnTo>
-                    <a:pt x="6672266" y="864137"/>
-                  </a:lnTo>
-                  <a:lnTo>
-                    <a:pt x="6594632" y="863856"/>
-                  </a:lnTo>
-                  <a:lnTo>
-                    <a:pt x="6516998" y="863531"/>
-                  </a:lnTo>
-                  <a:lnTo>
-                    <a:pt x="6439364" y="863155"/>
-                  </a:lnTo>
-                  <a:lnTo>
-                    <a:pt x="6361730" y="862720"/>
-                  </a:lnTo>
-                  <a:lnTo>
-                    <a:pt x="6284096" y="862216"/>
-                  </a:lnTo>
-                  <a:lnTo>
-                    <a:pt x="6206462" y="861634"/>
-                  </a:lnTo>
-                  <a:lnTo>
-                    <a:pt x="6128827" y="860959"/>
-                  </a:lnTo>
-                  <a:lnTo>
-                    <a:pt x="6051193" y="860178"/>
-                  </a:lnTo>
-                  <a:lnTo>
-                    <a:pt x="5973559" y="859274"/>
-                  </a:lnTo>
-                  <a:lnTo>
-                    <a:pt x="5895925" y="858227"/>
-                  </a:lnTo>
-                  <a:lnTo>
-                    <a:pt x="5818291" y="857016"/>
-                  </a:lnTo>
-                  <a:lnTo>
-                    <a:pt x="5740657" y="855614"/>
-                  </a:lnTo>
-                  <a:lnTo>
-                    <a:pt x="5663023" y="853991"/>
-                  </a:lnTo>
-                  <a:lnTo>
-                    <a:pt x="5585389" y="852113"/>
-                  </a:lnTo>
-                  <a:lnTo>
-                    <a:pt x="5507755" y="849939"/>
-                  </a:lnTo>
-                  <a:lnTo>
-                    <a:pt x="5430121" y="847422"/>
-                  </a:lnTo>
-                  <a:lnTo>
-                    <a:pt x="5352487" y="844509"/>
-                  </a:lnTo>
-                  <a:lnTo>
-                    <a:pt x="5274853" y="841138"/>
-                  </a:lnTo>
-                  <a:lnTo>
-                    <a:pt x="5197219" y="837235"/>
-                  </a:lnTo>
-                  <a:lnTo>
-                    <a:pt x="5119585" y="832718"/>
-                  </a:lnTo>
-                  <a:lnTo>
-                    <a:pt x="5041951" y="827489"/>
-                  </a:lnTo>
-                  <a:lnTo>
-                    <a:pt x="4964317" y="821437"/>
-                  </a:lnTo>
-                  <a:lnTo>
-                    <a:pt x="4886683" y="814432"/>
-                  </a:lnTo>
-                  <a:lnTo>
-                    <a:pt x="4809049" y="806323"/>
-                  </a:lnTo>
-                  <a:lnTo>
-                    <a:pt x="4731415" y="796938"/>
-                  </a:lnTo>
-                  <a:lnTo>
-                    <a:pt x="4653781" y="786074"/>
-                  </a:lnTo>
-                  <a:lnTo>
-                    <a:pt x="4576147" y="773499"/>
-                  </a:lnTo>
-                  <a:lnTo>
-                    <a:pt x="4498513" y="758945"/>
-                  </a:lnTo>
-                  <a:lnTo>
-                    <a:pt x="4420879" y="742097"/>
-                  </a:lnTo>
-                  <a:lnTo>
-                    <a:pt x="4343244" y="722597"/>
-                  </a:lnTo>
-                  <a:lnTo>
-                    <a:pt x="4265610" y="700026"/>
-                  </a:lnTo>
-                  <a:lnTo>
-                    <a:pt x="4187976" y="673900"/>
-                  </a:lnTo>
-                  <a:lnTo>
-                    <a:pt x="4110342" y="643659"/>
-                  </a:lnTo>
-                  <a:lnTo>
-                    <a:pt x="4032708" y="608655"/>
-                  </a:lnTo>
-                  <a:lnTo>
-                    <a:pt x="3955074" y="568140"/>
-                  </a:lnTo>
-                  <a:lnTo>
-                    <a:pt x="3877440" y="521243"/>
-                  </a:lnTo>
-                  <a:lnTo>
-                    <a:pt x="3799806" y="466960"/>
-                  </a:lnTo>
-                  <a:lnTo>
-                    <a:pt x="3722172" y="404129"/>
-                  </a:lnTo>
-                  <a:lnTo>
-                    <a:pt x="3644538" y="331403"/>
-                  </a:lnTo>
-                  <a:lnTo>
-                    <a:pt x="3566904" y="247222"/>
-                  </a:lnTo>
-                  <a:lnTo>
-                    <a:pt x="3489270" y="149785"/>
-                  </a:lnTo>
-                  <a:lnTo>
-                    <a:pt x="3411636" y="37002"/>
+                    <a:pt x="7293338" y="825351"/>
+                  </a:lnTo>
+                  <a:lnTo>
+                    <a:pt x="7215704" y="825268"/>
+                  </a:lnTo>
+                  <a:lnTo>
+                    <a:pt x="7138070" y="825172"/>
+                  </a:lnTo>
+                  <a:lnTo>
+                    <a:pt x="7060436" y="825061"/>
+                  </a:lnTo>
+                  <a:lnTo>
+                    <a:pt x="6982802" y="824932"/>
+                  </a:lnTo>
+                  <a:lnTo>
+                    <a:pt x="6905168" y="824783"/>
+                  </a:lnTo>
+                  <a:lnTo>
+                    <a:pt x="6827534" y="824610"/>
+                  </a:lnTo>
+                  <a:lnTo>
+                    <a:pt x="6749900" y="824410"/>
+                  </a:lnTo>
+                  <a:lnTo>
+                    <a:pt x="6672266" y="824179"/>
+                  </a:lnTo>
+                  <a:lnTo>
+                    <a:pt x="6594632" y="823912"/>
+                  </a:lnTo>
+                  <a:lnTo>
+                    <a:pt x="6516998" y="823602"/>
+                  </a:lnTo>
+                  <a:lnTo>
+                    <a:pt x="6439364" y="823243"/>
+                  </a:lnTo>
+                  <a:lnTo>
+                    <a:pt x="6361730" y="822828"/>
+                  </a:lnTo>
+                  <a:lnTo>
+                    <a:pt x="6284096" y="822348"/>
+                  </a:lnTo>
+                  <a:lnTo>
+                    <a:pt x="6206462" y="821792"/>
+                  </a:lnTo>
+                  <a:lnTo>
+                    <a:pt x="6128827" y="821148"/>
+                  </a:lnTo>
+                  <a:lnTo>
+                    <a:pt x="6051193" y="820403"/>
+                  </a:lnTo>
+                  <a:lnTo>
+                    <a:pt x="5973559" y="819541"/>
+                  </a:lnTo>
+                  <a:lnTo>
+                    <a:pt x="5895925" y="818543"/>
+                  </a:lnTo>
+                  <a:lnTo>
+                    <a:pt x="5818291" y="817388"/>
+                  </a:lnTo>
+                  <a:lnTo>
+                    <a:pt x="5740657" y="816051"/>
+                  </a:lnTo>
+                  <a:lnTo>
+                    <a:pt x="5663023" y="814503"/>
+                  </a:lnTo>
+                  <a:lnTo>
+                    <a:pt x="5585389" y="812712"/>
+                  </a:lnTo>
+                  <a:lnTo>
+                    <a:pt x="5507755" y="810638"/>
+                  </a:lnTo>
+                  <a:lnTo>
+                    <a:pt x="5430121" y="808238"/>
+                  </a:lnTo>
+                  <a:lnTo>
+                    <a:pt x="5352487" y="805459"/>
+                  </a:lnTo>
+                  <a:lnTo>
+                    <a:pt x="5274853" y="802244"/>
+                  </a:lnTo>
+                  <a:lnTo>
+                    <a:pt x="5197219" y="798522"/>
+                  </a:lnTo>
+                  <a:lnTo>
+                    <a:pt x="5119585" y="794213"/>
+                  </a:lnTo>
+                  <a:lnTo>
+                    <a:pt x="5041951" y="789226"/>
+                  </a:lnTo>
+                  <a:lnTo>
+                    <a:pt x="4964317" y="783454"/>
+                  </a:lnTo>
+                  <a:lnTo>
+                    <a:pt x="4886683" y="776773"/>
+                  </a:lnTo>
+                  <a:lnTo>
+                    <a:pt x="4809049" y="769039"/>
+                  </a:lnTo>
+                  <a:lnTo>
+                    <a:pt x="4731415" y="760088"/>
+                  </a:lnTo>
+                  <a:lnTo>
+                    <a:pt x="4653781" y="749726"/>
+                  </a:lnTo>
+                  <a:lnTo>
+                    <a:pt x="4576147" y="737733"/>
+                  </a:lnTo>
+                  <a:lnTo>
+                    <a:pt x="4498513" y="723851"/>
+                  </a:lnTo>
+                  <a:lnTo>
+                    <a:pt x="4420879" y="707783"/>
+                  </a:lnTo>
+                  <a:lnTo>
+                    <a:pt x="4343244" y="689184"/>
+                  </a:lnTo>
+                  <a:lnTo>
+                    <a:pt x="4265610" y="667657"/>
+                  </a:lnTo>
+                  <a:lnTo>
+                    <a:pt x="4187976" y="642739"/>
+                  </a:lnTo>
+                  <a:lnTo>
+                    <a:pt x="4110342" y="613896"/>
+                  </a:lnTo>
+                  <a:lnTo>
+                    <a:pt x="4032708" y="580511"/>
+                  </a:lnTo>
+                  <a:lnTo>
+                    <a:pt x="3955074" y="541869"/>
+                  </a:lnTo>
+                  <a:lnTo>
+                    <a:pt x="3877440" y="497141"/>
+                  </a:lnTo>
+                  <a:lnTo>
+                    <a:pt x="3799806" y="445368"/>
+                  </a:lnTo>
+                  <a:lnTo>
+                    <a:pt x="3722172" y="385442"/>
+                  </a:lnTo>
+                  <a:lnTo>
+                    <a:pt x="3644538" y="316079"/>
+                  </a:lnTo>
+                  <a:lnTo>
+                    <a:pt x="3566904" y="235791"/>
+                  </a:lnTo>
+                  <a:lnTo>
+                    <a:pt x="3489270" y="142859"/>
+                  </a:lnTo>
+                  <a:lnTo>
+                    <a:pt x="3411636" y="35291"/>
                   </a:lnTo>
                   <a:lnTo>
                     <a:pt x="3334002" y="0"/>
                   </a:lnTo>
                   <a:lnTo>
-                    <a:pt x="3256368" y="5564"/>
-                  </a:lnTo>
-                  <a:lnTo>
-                    <a:pt x="3178734" y="11093"/>
-                  </a:lnTo>
-                  <a:lnTo>
-                    <a:pt x="3101100" y="16587"/>
-                  </a:lnTo>
-                  <a:lnTo>
-                    <a:pt x="3023466" y="22045"/>
-                  </a:lnTo>
-                  <a:lnTo>
-                    <a:pt x="2945832" y="27468"/>
-                  </a:lnTo>
-                  <a:lnTo>
-                    <a:pt x="2868198" y="32856"/>
-                  </a:lnTo>
-                  <a:lnTo>
-                    <a:pt x="2790564" y="38210"/>
-                  </a:lnTo>
-                  <a:lnTo>
-                    <a:pt x="2712930" y="43529"/>
-                  </a:lnTo>
-                  <a:lnTo>
-                    <a:pt x="2635295" y="48814"/>
-                  </a:lnTo>
-                  <a:lnTo>
-                    <a:pt x="2557661" y="54065"/>
-                  </a:lnTo>
-                  <a:lnTo>
-                    <a:pt x="2480027" y="59283"/>
-                  </a:lnTo>
-                  <a:lnTo>
-                    <a:pt x="2402393" y="64466"/>
-                  </a:lnTo>
-                  <a:lnTo>
-                    <a:pt x="2324759" y="69617"/>
-                  </a:lnTo>
-                  <a:lnTo>
-                    <a:pt x="2247125" y="74734"/>
-                  </a:lnTo>
-                  <a:lnTo>
-                    <a:pt x="2169491" y="79819"/>
-                  </a:lnTo>
-                  <a:lnTo>
-                    <a:pt x="2091857" y="84871"/>
-                  </a:lnTo>
-                  <a:lnTo>
-                    <a:pt x="2014223" y="89890"/>
-                  </a:lnTo>
-                  <a:lnTo>
-                    <a:pt x="1936589" y="94877"/>
-                  </a:lnTo>
-                  <a:lnTo>
-                    <a:pt x="1858955" y="99832"/>
-                  </a:lnTo>
-                  <a:lnTo>
-                    <a:pt x="1781321" y="104755"/>
-                  </a:lnTo>
-                  <a:lnTo>
-                    <a:pt x="1703687" y="109647"/>
-                  </a:lnTo>
-                  <a:lnTo>
-                    <a:pt x="1626053" y="114507"/>
-                  </a:lnTo>
-                  <a:lnTo>
-                    <a:pt x="1548419" y="119336"/>
-                  </a:lnTo>
-                  <a:lnTo>
-                    <a:pt x="1470785" y="124134"/>
-                  </a:lnTo>
-                  <a:lnTo>
-                    <a:pt x="1393151" y="128901"/>
-                  </a:lnTo>
-                  <a:lnTo>
-                    <a:pt x="1315517" y="133637"/>
-                  </a:lnTo>
-                  <a:lnTo>
-                    <a:pt x="1237883" y="138343"/>
-                  </a:lnTo>
-                  <a:lnTo>
-                    <a:pt x="1160249" y="143019"/>
-                  </a:lnTo>
-                  <a:lnTo>
-                    <a:pt x="1082615" y="147665"/>
-                  </a:lnTo>
-                  <a:lnTo>
-                    <a:pt x="1004981" y="152280"/>
-                  </a:lnTo>
-                  <a:lnTo>
-                    <a:pt x="927346" y="156866"/>
-                  </a:lnTo>
-                  <a:lnTo>
-                    <a:pt x="849712" y="161423"/>
-                  </a:lnTo>
-                  <a:lnTo>
-                    <a:pt x="772078" y="165951"/>
-                  </a:lnTo>
-                  <a:lnTo>
-                    <a:pt x="694444" y="170449"/>
-                  </a:lnTo>
-                  <a:lnTo>
-                    <a:pt x="616810" y="174918"/>
-                  </a:lnTo>
-                  <a:lnTo>
-                    <a:pt x="539176" y="179359"/>
-                  </a:lnTo>
-                  <a:lnTo>
-                    <a:pt x="461542" y="183771"/>
-                  </a:lnTo>
-                  <a:lnTo>
-                    <a:pt x="383908" y="188155"/>
-                  </a:lnTo>
-                  <a:lnTo>
-                    <a:pt x="306274" y="192510"/>
-                  </a:lnTo>
-                  <a:lnTo>
-                    <a:pt x="228640" y="196838"/>
-                  </a:lnTo>
-                  <a:lnTo>
-                    <a:pt x="151006" y="201138"/>
-                  </a:lnTo>
-                  <a:lnTo>
-                    <a:pt x="73372" y="205410"/>
-                  </a:lnTo>
-                  <a:lnTo>
-                    <a:pt x="0" y="209422"/>
+                    <a:pt x="3256368" y="5307"/>
+                  </a:lnTo>
+                  <a:lnTo>
+                    <a:pt x="3178734" y="10580"/>
+                  </a:lnTo>
+                  <a:lnTo>
+                    <a:pt x="3101100" y="15820"/>
+                  </a:lnTo>
+                  <a:lnTo>
+                    <a:pt x="3023466" y="21026"/>
+                  </a:lnTo>
+                  <a:lnTo>
+                    <a:pt x="2945832" y="26198"/>
+                  </a:lnTo>
+                  <a:lnTo>
+                    <a:pt x="2868198" y="31337"/>
+                  </a:lnTo>
+                  <a:lnTo>
+                    <a:pt x="2790564" y="36443"/>
+                  </a:lnTo>
+                  <a:lnTo>
+                    <a:pt x="2712930" y="41516"/>
+                  </a:lnTo>
+                  <a:lnTo>
+                    <a:pt x="2635295" y="46557"/>
+                  </a:lnTo>
+                  <a:lnTo>
+                    <a:pt x="2557661" y="51565"/>
+                  </a:lnTo>
+                  <a:lnTo>
+                    <a:pt x="2480027" y="56541"/>
+                  </a:lnTo>
+                  <a:lnTo>
+                    <a:pt x="2402393" y="61485"/>
+                  </a:lnTo>
+                  <a:lnTo>
+                    <a:pt x="2324759" y="66398"/>
+                  </a:lnTo>
+                  <a:lnTo>
+                    <a:pt x="2247125" y="71279"/>
+                  </a:lnTo>
+                  <a:lnTo>
+                    <a:pt x="2169491" y="76128"/>
+                  </a:lnTo>
+                  <a:lnTo>
+                    <a:pt x="2091857" y="80946"/>
+                  </a:lnTo>
+                  <a:lnTo>
+                    <a:pt x="2014223" y="85733"/>
+                  </a:lnTo>
+                  <a:lnTo>
+                    <a:pt x="1936589" y="90490"/>
+                  </a:lnTo>
+                  <a:lnTo>
+                    <a:pt x="1858955" y="95216"/>
+                  </a:lnTo>
+                  <a:lnTo>
+                    <a:pt x="1781321" y="99911"/>
+                  </a:lnTo>
+                  <a:lnTo>
+                    <a:pt x="1703687" y="104577"/>
+                  </a:lnTo>
+                  <a:lnTo>
+                    <a:pt x="1626053" y="109212"/>
+                  </a:lnTo>
+                  <a:lnTo>
+                    <a:pt x="1548419" y="113818"/>
+                  </a:lnTo>
+                  <a:lnTo>
+                    <a:pt x="1470785" y="118394"/>
+                  </a:lnTo>
+                  <a:lnTo>
+                    <a:pt x="1393151" y="122940"/>
+                  </a:lnTo>
+                  <a:lnTo>
+                    <a:pt x="1315517" y="127458"/>
+                  </a:lnTo>
+                  <a:lnTo>
+                    <a:pt x="1237883" y="131946"/>
+                  </a:lnTo>
+                  <a:lnTo>
+                    <a:pt x="1160249" y="136406"/>
+                  </a:lnTo>
+                  <a:lnTo>
+                    <a:pt x="1082615" y="140837"/>
+                  </a:lnTo>
+                  <a:lnTo>
+                    <a:pt x="1004981" y="145239"/>
+                  </a:lnTo>
+                  <a:lnTo>
+                    <a:pt x="927346" y="149613"/>
+                  </a:lnTo>
+                  <a:lnTo>
+                    <a:pt x="849712" y="153959"/>
+                  </a:lnTo>
+                  <a:lnTo>
+                    <a:pt x="772078" y="158277"/>
+                  </a:lnTo>
+                  <a:lnTo>
+                    <a:pt x="694444" y="162567"/>
+                  </a:lnTo>
+                  <a:lnTo>
+                    <a:pt x="616810" y="166830"/>
+                  </a:lnTo>
+                  <a:lnTo>
+                    <a:pt x="539176" y="171065"/>
+                  </a:lnTo>
+                  <a:lnTo>
+                    <a:pt x="461542" y="175274"/>
+                  </a:lnTo>
+                  <a:lnTo>
+                    <a:pt x="383908" y="179455"/>
+                  </a:lnTo>
+                  <a:lnTo>
+                    <a:pt x="306274" y="183609"/>
+                  </a:lnTo>
+                  <a:lnTo>
+                    <a:pt x="228640" y="187736"/>
+                  </a:lnTo>
+                  <a:lnTo>
+                    <a:pt x="151006" y="191837"/>
+                  </a:lnTo>
+                  <a:lnTo>
+                    <a:pt x="73372" y="195912"/>
+                  </a:lnTo>
+                  <a:lnTo>
+                    <a:pt x="0" y="199738"/>
                   </a:lnTo>
                 </a:path>
               </a:pathLst>
@@ -4037,231 +4037,231 @@
           </p:nvSpPr>
           <p:spPr>
             <a:xfrm>
-              <a:off x="2610200" y="1896563"/>
-              <a:ext cx="5578289" cy="3628593"/>
+              <a:off x="2610200" y="2073503"/>
+              <a:ext cx="5578289" cy="3460808"/>
             </a:xfrm>
             <a:custGeom>
               <a:avLst/>
               <a:pathLst>
-                <a:path w="5578289" h="3628593">
+                <a:path w="5578289" h="3460808">
                   <a:moveTo>
                     <a:pt x="0" y="0"/>
                   </a:moveTo>
                   <a:lnTo>
-                    <a:pt x="66272" y="212620"/>
-                  </a:lnTo>
-                  <a:lnTo>
-                    <a:pt x="143906" y="444875"/>
-                  </a:lnTo>
-                  <a:lnTo>
-                    <a:pt x="221540" y="661449"/>
-                  </a:lnTo>
-                  <a:lnTo>
-                    <a:pt x="299174" y="863401"/>
-                  </a:lnTo>
-                  <a:lnTo>
-                    <a:pt x="376808" y="1051718"/>
-                  </a:lnTo>
-                  <a:lnTo>
-                    <a:pt x="454442" y="1227321"/>
-                  </a:lnTo>
-                  <a:lnTo>
-                    <a:pt x="532076" y="1391068"/>
-                  </a:lnTo>
-                  <a:lnTo>
-                    <a:pt x="609711" y="1543759"/>
-                  </a:lnTo>
-                  <a:lnTo>
-                    <a:pt x="687345" y="1686142"/>
-                  </a:lnTo>
-                  <a:lnTo>
-                    <a:pt x="764979" y="1818911"/>
-                  </a:lnTo>
-                  <a:lnTo>
-                    <a:pt x="842613" y="1942716"/>
-                  </a:lnTo>
-                  <a:lnTo>
-                    <a:pt x="920247" y="2058163"/>
-                  </a:lnTo>
-                  <a:lnTo>
-                    <a:pt x="997881" y="2165815"/>
-                  </a:lnTo>
-                  <a:lnTo>
-                    <a:pt x="1075515" y="2266199"/>
-                  </a:lnTo>
-                  <a:lnTo>
-                    <a:pt x="1153149" y="2359805"/>
-                  </a:lnTo>
-                  <a:lnTo>
-                    <a:pt x="1230783" y="2447092"/>
-                  </a:lnTo>
-                  <a:lnTo>
-                    <a:pt x="1308417" y="2528485"/>
-                  </a:lnTo>
-                  <a:lnTo>
-                    <a:pt x="1386051" y="2604384"/>
-                  </a:lnTo>
-                  <a:lnTo>
-                    <a:pt x="1463685" y="2675157"/>
-                  </a:lnTo>
-                  <a:lnTo>
-                    <a:pt x="1541319" y="2741153"/>
-                  </a:lnTo>
-                  <a:lnTo>
-                    <a:pt x="1618953" y="2802693"/>
-                  </a:lnTo>
-                  <a:lnTo>
-                    <a:pt x="1696587" y="2860077"/>
-                  </a:lnTo>
-                  <a:lnTo>
-                    <a:pt x="1774221" y="2913588"/>
-                  </a:lnTo>
-                  <a:lnTo>
-                    <a:pt x="1851855" y="2963486"/>
-                  </a:lnTo>
-                  <a:lnTo>
-                    <a:pt x="1929489" y="3010014"/>
-                  </a:lnTo>
-                  <a:lnTo>
-                    <a:pt x="2007123" y="3053402"/>
-                  </a:lnTo>
-                  <a:lnTo>
-                    <a:pt x="2084757" y="3093860"/>
-                  </a:lnTo>
-                  <a:lnTo>
-                    <a:pt x="2162391" y="3131586"/>
-                  </a:lnTo>
-                  <a:lnTo>
-                    <a:pt x="2240025" y="3166766"/>
-                  </a:lnTo>
-                  <a:lnTo>
-                    <a:pt x="2317660" y="3199570"/>
-                  </a:lnTo>
-                  <a:lnTo>
-                    <a:pt x="2395294" y="3230160"/>
-                  </a:lnTo>
-                  <a:lnTo>
-                    <a:pt x="2472928" y="3258684"/>
-                  </a:lnTo>
-                  <a:lnTo>
-                    <a:pt x="2550562" y="3285282"/>
-                  </a:lnTo>
-                  <a:lnTo>
-                    <a:pt x="2628196" y="3310085"/>
-                  </a:lnTo>
-                  <a:lnTo>
-                    <a:pt x="2705830" y="3333213"/>
-                  </a:lnTo>
-                  <a:lnTo>
-                    <a:pt x="2783464" y="3354779"/>
-                  </a:lnTo>
-                  <a:lnTo>
-                    <a:pt x="2861098" y="3374890"/>
-                  </a:lnTo>
-                  <a:lnTo>
-                    <a:pt x="2938732" y="3393642"/>
-                  </a:lnTo>
-                  <a:lnTo>
-                    <a:pt x="3016366" y="3411129"/>
-                  </a:lnTo>
-                  <a:lnTo>
-                    <a:pt x="3094000" y="3427435"/>
-                  </a:lnTo>
-                  <a:lnTo>
-                    <a:pt x="3171634" y="3442640"/>
-                  </a:lnTo>
-                  <a:lnTo>
-                    <a:pt x="3249268" y="3456818"/>
-                  </a:lnTo>
-                  <a:lnTo>
-                    <a:pt x="3326902" y="3470040"/>
-                  </a:lnTo>
-                  <a:lnTo>
-                    <a:pt x="3404536" y="3482368"/>
-                  </a:lnTo>
-                  <a:lnTo>
-                    <a:pt x="3482170" y="3493864"/>
-                  </a:lnTo>
-                  <a:lnTo>
-                    <a:pt x="3559804" y="3504584"/>
-                  </a:lnTo>
-                  <a:lnTo>
-                    <a:pt x="3637438" y="3514581"/>
-                  </a:lnTo>
-                  <a:lnTo>
-                    <a:pt x="3715072" y="3523902"/>
-                  </a:lnTo>
-                  <a:lnTo>
-                    <a:pt x="3792706" y="3532594"/>
-                  </a:lnTo>
-                  <a:lnTo>
-                    <a:pt x="3870340" y="3540699"/>
-                  </a:lnTo>
-                  <a:lnTo>
-                    <a:pt x="3947974" y="3548257"/>
-                  </a:lnTo>
-                  <a:lnTo>
-                    <a:pt x="4025609" y="3555305"/>
-                  </a:lnTo>
-                  <a:lnTo>
-                    <a:pt x="4103243" y="3561877"/>
-                  </a:lnTo>
-                  <a:lnTo>
-                    <a:pt x="4180877" y="3568005"/>
-                  </a:lnTo>
-                  <a:lnTo>
-                    <a:pt x="4258511" y="3573719"/>
-                  </a:lnTo>
-                  <a:lnTo>
-                    <a:pt x="4336145" y="3579048"/>
-                  </a:lnTo>
-                  <a:lnTo>
-                    <a:pt x="4413779" y="3584017"/>
-                  </a:lnTo>
-                  <a:lnTo>
-                    <a:pt x="4491413" y="3588650"/>
-                  </a:lnTo>
-                  <a:lnTo>
-                    <a:pt x="4569047" y="3592971"/>
-                  </a:lnTo>
-                  <a:lnTo>
-                    <a:pt x="4646681" y="3596999"/>
-                  </a:lnTo>
-                  <a:lnTo>
-                    <a:pt x="4724315" y="3600756"/>
-                  </a:lnTo>
-                  <a:lnTo>
-                    <a:pt x="4801949" y="3604259"/>
-                  </a:lnTo>
-                  <a:lnTo>
-                    <a:pt x="4879583" y="3607526"/>
-                  </a:lnTo>
-                  <a:lnTo>
-                    <a:pt x="4957217" y="3610572"/>
-                  </a:lnTo>
-                  <a:lnTo>
-                    <a:pt x="5034851" y="3613413"/>
-                  </a:lnTo>
-                  <a:lnTo>
-                    <a:pt x="5112485" y="3616061"/>
-                  </a:lnTo>
-                  <a:lnTo>
-                    <a:pt x="5190119" y="3618531"/>
-                  </a:lnTo>
-                  <a:lnTo>
-                    <a:pt x="5267753" y="3620834"/>
-                  </a:lnTo>
-                  <a:lnTo>
-                    <a:pt x="5345387" y="3622982"/>
-                  </a:lnTo>
-                  <a:lnTo>
-                    <a:pt x="5423021" y="3624985"/>
-                  </a:lnTo>
-                  <a:lnTo>
-                    <a:pt x="5500655" y="3626852"/>
-                  </a:lnTo>
-                  <a:lnTo>
-                    <a:pt x="5578289" y="3628593"/>
+                    <a:pt x="66272" y="202789"/>
+                  </a:lnTo>
+                  <a:lnTo>
+                    <a:pt x="143906" y="424304"/>
+                  </a:lnTo>
+                  <a:lnTo>
+                    <a:pt x="221540" y="630864"/>
+                  </a:lnTo>
+                  <a:lnTo>
+                    <a:pt x="299174" y="823478"/>
+                  </a:lnTo>
+                  <a:lnTo>
+                    <a:pt x="376808" y="1003087"/>
+                  </a:lnTo>
+                  <a:lnTo>
+                    <a:pt x="454442" y="1170570"/>
+                  </a:lnTo>
+                  <a:lnTo>
+                    <a:pt x="532076" y="1326745"/>
+                  </a:lnTo>
+                  <a:lnTo>
+                    <a:pt x="609711" y="1472376"/>
+                  </a:lnTo>
+                  <a:lnTo>
+                    <a:pt x="687345" y="1608175"/>
+                  </a:lnTo>
+                  <a:lnTo>
+                    <a:pt x="764979" y="1734805"/>
+                  </a:lnTo>
+                  <a:lnTo>
+                    <a:pt x="842613" y="1852886"/>
+                  </a:lnTo>
+                  <a:lnTo>
+                    <a:pt x="920247" y="1962994"/>
+                  </a:lnTo>
+                  <a:lnTo>
+                    <a:pt x="997881" y="2065669"/>
+                  </a:lnTo>
+                  <a:lnTo>
+                    <a:pt x="1075515" y="2161411"/>
+                  </a:lnTo>
+                  <a:lnTo>
+                    <a:pt x="1153149" y="2250689"/>
+                  </a:lnTo>
+                  <a:lnTo>
+                    <a:pt x="1230783" y="2333939"/>
+                  </a:lnTo>
+                  <a:lnTo>
+                    <a:pt x="1308417" y="2411569"/>
+                  </a:lnTo>
+                  <a:lnTo>
+                    <a:pt x="1386051" y="2483958"/>
+                  </a:lnTo>
+                  <a:lnTo>
+                    <a:pt x="1463685" y="2551459"/>
+                  </a:lnTo>
+                  <a:lnTo>
+                    <a:pt x="1541319" y="2614403"/>
+                  </a:lnTo>
+                  <a:lnTo>
+                    <a:pt x="1618953" y="2673097"/>
+                  </a:lnTo>
+                  <a:lnTo>
+                    <a:pt x="1696587" y="2727828"/>
+                  </a:lnTo>
+                  <a:lnTo>
+                    <a:pt x="1774221" y="2778865"/>
+                  </a:lnTo>
+                  <a:lnTo>
+                    <a:pt x="1851855" y="2826455"/>
+                  </a:lnTo>
+                  <a:lnTo>
+                    <a:pt x="1929489" y="2870832"/>
+                  </a:lnTo>
+                  <a:lnTo>
+                    <a:pt x="2007123" y="2912214"/>
+                  </a:lnTo>
+                  <a:lnTo>
+                    <a:pt x="2084757" y="2950801"/>
+                  </a:lnTo>
+                  <a:lnTo>
+                    <a:pt x="2162391" y="2986783"/>
+                  </a:lnTo>
+                  <a:lnTo>
+                    <a:pt x="2240025" y="3020336"/>
+                  </a:lnTo>
+                  <a:lnTo>
+                    <a:pt x="2317660" y="3051623"/>
+                  </a:lnTo>
+                  <a:lnTo>
+                    <a:pt x="2395294" y="3080798"/>
+                  </a:lnTo>
+                  <a:lnTo>
+                    <a:pt x="2472928" y="3108003"/>
+                  </a:lnTo>
+                  <a:lnTo>
+                    <a:pt x="2550562" y="3133372"/>
+                  </a:lnTo>
+                  <a:lnTo>
+                    <a:pt x="2628196" y="3157028"/>
+                  </a:lnTo>
+                  <a:lnTo>
+                    <a:pt x="2705830" y="3179086"/>
+                  </a:lnTo>
+                  <a:lnTo>
+                    <a:pt x="2783464" y="3199655"/>
+                  </a:lnTo>
+                  <a:lnTo>
+                    <a:pt x="2861098" y="3218836"/>
+                  </a:lnTo>
+                  <a:lnTo>
+                    <a:pt x="2938732" y="3236722"/>
+                  </a:lnTo>
+                  <a:lnTo>
+                    <a:pt x="3016366" y="3253400"/>
+                  </a:lnTo>
+                  <a:lnTo>
+                    <a:pt x="3094000" y="3268952"/>
+                  </a:lnTo>
+                  <a:lnTo>
+                    <a:pt x="3171634" y="3283454"/>
+                  </a:lnTo>
+                  <a:lnTo>
+                    <a:pt x="3249268" y="3296976"/>
+                  </a:lnTo>
+                  <a:lnTo>
+                    <a:pt x="3326902" y="3309586"/>
+                  </a:lnTo>
+                  <a:lnTo>
+                    <a:pt x="3404536" y="3321345"/>
+                  </a:lnTo>
+                  <a:lnTo>
+                    <a:pt x="3482170" y="3332309"/>
+                  </a:lnTo>
+                  <a:lnTo>
+                    <a:pt x="3559804" y="3342534"/>
+                  </a:lnTo>
+                  <a:lnTo>
+                    <a:pt x="3637438" y="3352068"/>
+                  </a:lnTo>
+                  <a:lnTo>
+                    <a:pt x="3715072" y="3360958"/>
+                  </a:lnTo>
+                  <a:lnTo>
+                    <a:pt x="3792706" y="3369248"/>
+                  </a:lnTo>
+                  <a:lnTo>
+                    <a:pt x="3870340" y="3376979"/>
+                  </a:lnTo>
+                  <a:lnTo>
+                    <a:pt x="3947974" y="3384187"/>
+                  </a:lnTo>
+                  <a:lnTo>
+                    <a:pt x="4025609" y="3390909"/>
+                  </a:lnTo>
+                  <a:lnTo>
+                    <a:pt x="4103243" y="3397177"/>
+                  </a:lnTo>
+                  <a:lnTo>
+                    <a:pt x="4180877" y="3403022"/>
+                  </a:lnTo>
+                  <a:lnTo>
+                    <a:pt x="4258511" y="3408472"/>
+                  </a:lnTo>
+                  <a:lnTo>
+                    <a:pt x="4336145" y="3413554"/>
+                  </a:lnTo>
+                  <a:lnTo>
+                    <a:pt x="4413779" y="3418293"/>
+                  </a:lnTo>
+                  <a:lnTo>
+                    <a:pt x="4491413" y="3422712"/>
+                  </a:lnTo>
+                  <a:lnTo>
+                    <a:pt x="4569047" y="3426833"/>
+                  </a:lnTo>
+                  <a:lnTo>
+                    <a:pt x="4646681" y="3430676"/>
+                  </a:lnTo>
+                  <a:lnTo>
+                    <a:pt x="4724315" y="3434259"/>
+                  </a:lnTo>
+                  <a:lnTo>
+                    <a:pt x="4801949" y="3437600"/>
+                  </a:lnTo>
+                  <a:lnTo>
+                    <a:pt x="4879583" y="3440715"/>
+                  </a:lnTo>
+                  <a:lnTo>
+                    <a:pt x="4957217" y="3443621"/>
+                  </a:lnTo>
+                  <a:lnTo>
+                    <a:pt x="5034851" y="3446330"/>
+                  </a:lnTo>
+                  <a:lnTo>
+                    <a:pt x="5112485" y="3448856"/>
+                  </a:lnTo>
+                  <a:lnTo>
+                    <a:pt x="5190119" y="3451212"/>
+                  </a:lnTo>
+                  <a:lnTo>
+                    <a:pt x="5267753" y="3453408"/>
+                  </a:lnTo>
+                  <a:lnTo>
+                    <a:pt x="5345387" y="3455457"/>
+                  </a:lnTo>
+                  <a:lnTo>
+                    <a:pt x="5423021" y="3457367"/>
+                  </a:lnTo>
+                  <a:lnTo>
+                    <a:pt x="5500655" y="3459148"/>
+                  </a:lnTo>
+                  <a:lnTo>
+                    <a:pt x="5578289" y="3460808"/>
                   </a:lnTo>
                 </a:path>
               </a:pathLst>
@@ -4290,7 +4290,7 @@
           </p:nvSpPr>
           <p:spPr>
             <a:xfrm>
-              <a:off x="817517" y="4679530"/>
+              <a:off x="817517" y="4727786"/>
               <a:ext cx="7799693" cy="0"/>
             </a:xfrm>
             <a:custGeom>
@@ -4333,15 +4333,15 @@
           </p:nvSpPr>
           <p:spPr>
             <a:xfrm>
-              <a:off x="4203673" y="1896563"/>
-              <a:ext cx="0" cy="3826579"/>
+              <a:off x="4203673" y="2073503"/>
+              <a:ext cx="0" cy="3649639"/>
             </a:xfrm>
             <a:custGeom>
               <a:avLst/>
               <a:pathLst>
-                <a:path w="0" h="3826579">
+                <a:path w="0" h="3649639">
                   <a:moveTo>
-                    <a:pt x="0" y="3826579"/>
+                    <a:pt x="0" y="3649639"/>
                   </a:moveTo>
                   <a:lnTo>
                     <a:pt x="0" y="0"/>
@@ -4376,7 +4376,7 @@
           </p:nvSpPr>
           <p:spPr>
             <a:xfrm>
-              <a:off x="692708" y="5509156"/>
+              <a:off x="692708" y="5517199"/>
               <a:ext cx="62179" cy="80101"/>
             </a:xfrm>
             <a:prstGeom prst="rect">
@@ -4422,7 +4422,7 @@
           </p:nvSpPr>
           <p:spPr>
             <a:xfrm>
-              <a:off x="692708" y="4639479"/>
+              <a:off x="692708" y="4687735"/>
               <a:ext cx="62179" cy="80101"/>
             </a:xfrm>
             <a:prstGeom prst="rect">
@@ -4468,7 +4468,7 @@
           </p:nvSpPr>
           <p:spPr>
             <a:xfrm>
-              <a:off x="692708" y="3769802"/>
+              <a:off x="692708" y="3858272"/>
               <a:ext cx="62179" cy="80101"/>
             </a:xfrm>
             <a:prstGeom prst="rect">
@@ -4514,7 +4514,7 @@
           </p:nvSpPr>
           <p:spPr>
             <a:xfrm>
-              <a:off x="692708" y="2900125"/>
+              <a:off x="692708" y="3028808"/>
               <a:ext cx="62179" cy="80101"/>
             </a:xfrm>
             <a:prstGeom prst="rect">
@@ -4560,7 +4560,7 @@
           </p:nvSpPr>
           <p:spPr>
             <a:xfrm>
-              <a:off x="692708" y="2030448"/>
+              <a:off x="692708" y="2199345"/>
               <a:ext cx="62179" cy="80101"/>
             </a:xfrm>
             <a:prstGeom prst="rect">
@@ -4836,7 +4836,7 @@
           </p:nvSpPr>
           <p:spPr>
             <a:xfrm rot="-5400000">
-              <a:off x="68446" y="3759743"/>
+              <a:off x="68446" y="3848213"/>
               <a:ext cx="1016904" cy="100218"/>
             </a:xfrm>
             <a:prstGeom prst="rect">
@@ -4877,6 +4877,52 @@
         <p:sp>
           <p:nvSpPr>
             <p:cNvPr id="38" name="tx38"/>
+            <p:cNvSpPr/>
+            <p:nvPr/>
+          </p:nvSpPr>
+          <p:spPr>
+            <a:xfrm>
+              <a:off x="817517" y="1896563"/>
+              <a:ext cx="4166463" cy="82021"/>
+            </a:xfrm>
+            <a:prstGeom prst="rect">
+              <a:avLst/>
+            </a:prstGeom>
+            <a:noFill/>
+          </p:spPr>
+          <p:txBody>
+            <a:bodyPr lIns="0" rIns="0" tIns="0" bIns="0" anchorCtr="1" anchor="ctr" wrap="none"/>
+            <a:lstStyle/>
+            <a:p>
+              <a:pPr algn="l" marL="0" marR="0" indent="0">
+                <a:lnSpc>
+                  <a:spcPts val="900"/>
+                </a:lnSpc>
+                <a:spcBef>
+                  <a:spcPts val="0"/>
+                </a:spcBef>
+                <a:spcAft>
+                  <a:spcPts val="0"/>
+                </a:spcAft>
+              </a:pPr>
+              <a:r>
+                <a:rPr sz="900">
+                  <a:solidFill>
+                    <a:srgbClr val="404040">
+                      <a:alpha val="100000"/>
+                    </a:srgbClr>
+                  </a:solidFill>
+                  <a:latin typeface="Helvetica"/>
+                  <a:cs typeface="Helvetica"/>
+                </a:rPr>
+                <a:t>subHR = 0.45 (95% CI 0.19-1.08), p = 0.073   (per 0.1-unit increase in eGFR ratio)</a:t>
+              </a:r>
+            </a:p>
+          </p:txBody>
+        </p:sp>
+        <p:sp>
+          <p:nvSpPr>
+            <p:cNvPr id="39" name="tx39"/>
             <p:cNvSpPr/>
             <p:nvPr/>
           </p:nvSpPr>

--- a/docs/plots/carbo/jx_carbo_linsubhr_ratio_hosp5.pptx
+++ b/docs/plots/carbo/jx_carbo_linsubhr_ratio_hosp5.pptx
@@ -2271,26 +2271,26 @@
           </p:nvSpPr>
           <p:spPr>
             <a:xfrm>
-              <a:off x="817517" y="5142518"/>
-              <a:ext cx="7799693" cy="0"/>
+              <a:off x="915645" y="5071743"/>
+              <a:ext cx="7682587" cy="0"/>
             </a:xfrm>
             <a:custGeom>
               <a:avLst/>
               <a:pathLst>
-                <a:path w="7799693" h="0">
+                <a:path w="7682587" h="0">
                   <a:moveTo>
                     <a:pt x="0" y="0"/>
                   </a:moveTo>
                   <a:lnTo>
-                    <a:pt x="7799693" y="0"/>
-                  </a:lnTo>
-                  <a:lnTo>
-                    <a:pt x="7799693" y="0"/>
+                    <a:pt x="7682587" y="0"/>
+                  </a:lnTo>
+                  <a:lnTo>
+                    <a:pt x="7682587" y="0"/>
                   </a:lnTo>
                 </a:path>
               </a:pathLst>
             </a:custGeom>
-            <a:ln w="6775" cap="flat">
+            <a:ln w="8623" cap="flat">
               <a:solidFill>
                 <a:srgbClr val="EBEBEB">
                   <a:alpha val="100000"/>
@@ -2314,26 +2314,26 @@
           </p:nvSpPr>
           <p:spPr>
             <a:xfrm>
-              <a:off x="817517" y="4313054"/>
-              <a:ext cx="7799693" cy="0"/>
+              <a:off x="915645" y="4298074"/>
+              <a:ext cx="7682587" cy="0"/>
             </a:xfrm>
             <a:custGeom>
               <a:avLst/>
               <a:pathLst>
-                <a:path w="7799693" h="0">
+                <a:path w="7682587" h="0">
                   <a:moveTo>
                     <a:pt x="0" y="0"/>
                   </a:moveTo>
                   <a:lnTo>
-                    <a:pt x="7799693" y="0"/>
-                  </a:lnTo>
-                  <a:lnTo>
-                    <a:pt x="7799693" y="0"/>
+                    <a:pt x="7682587" y="0"/>
+                  </a:lnTo>
+                  <a:lnTo>
+                    <a:pt x="7682587" y="0"/>
                   </a:lnTo>
                 </a:path>
               </a:pathLst>
             </a:custGeom>
-            <a:ln w="6775" cap="flat">
+            <a:ln w="8623" cap="flat">
               <a:solidFill>
                 <a:srgbClr val="EBEBEB">
                   <a:alpha val="100000"/>
@@ -2357,26 +2357,26 @@
           </p:nvSpPr>
           <p:spPr>
             <a:xfrm>
-              <a:off x="817517" y="3483591"/>
-              <a:ext cx="7799693" cy="0"/>
+              <a:off x="915645" y="3524405"/>
+              <a:ext cx="7682587" cy="0"/>
             </a:xfrm>
             <a:custGeom>
               <a:avLst/>
               <a:pathLst>
-                <a:path w="7799693" h="0">
+                <a:path w="7682587" h="0">
                   <a:moveTo>
                     <a:pt x="0" y="0"/>
                   </a:moveTo>
                   <a:lnTo>
-                    <a:pt x="7799693" y="0"/>
-                  </a:lnTo>
-                  <a:lnTo>
-                    <a:pt x="7799693" y="0"/>
+                    <a:pt x="7682587" y="0"/>
+                  </a:lnTo>
+                  <a:lnTo>
+                    <a:pt x="7682587" y="0"/>
                   </a:lnTo>
                 </a:path>
               </a:pathLst>
             </a:custGeom>
-            <a:ln w="6775" cap="flat">
+            <a:ln w="8623" cap="flat">
               <a:solidFill>
                 <a:srgbClr val="EBEBEB">
                   <a:alpha val="100000"/>
@@ -2400,26 +2400,26 @@
           </p:nvSpPr>
           <p:spPr>
             <a:xfrm>
-              <a:off x="817517" y="2654127"/>
-              <a:ext cx="7799693" cy="0"/>
+              <a:off x="915645" y="2750737"/>
+              <a:ext cx="7682587" cy="0"/>
             </a:xfrm>
             <a:custGeom>
               <a:avLst/>
               <a:pathLst>
-                <a:path w="7799693" h="0">
+                <a:path w="7682587" h="0">
                   <a:moveTo>
                     <a:pt x="0" y="0"/>
                   </a:moveTo>
                   <a:lnTo>
-                    <a:pt x="7799693" y="0"/>
-                  </a:lnTo>
-                  <a:lnTo>
-                    <a:pt x="7799693" y="0"/>
+                    <a:pt x="7682587" y="0"/>
+                  </a:lnTo>
+                  <a:lnTo>
+                    <a:pt x="7682587" y="0"/>
                   </a:lnTo>
                 </a:path>
               </a:pathLst>
             </a:custGeom>
-            <a:ln w="6775" cap="flat">
+            <a:ln w="8623" cap="flat">
               <a:solidFill>
                 <a:srgbClr val="EBEBEB">
                   <a:alpha val="100000"/>
@@ -2443,15 +2443,15 @@
           </p:nvSpPr>
           <p:spPr>
             <a:xfrm>
-              <a:off x="1615213" y="2073503"/>
-              <a:ext cx="0" cy="3649639"/>
+              <a:off x="1701364" y="2209169"/>
+              <a:ext cx="0" cy="3404141"/>
             </a:xfrm>
             <a:custGeom>
               <a:avLst/>
               <a:pathLst>
-                <a:path w="0" h="3649639">
+                <a:path w="0" h="3404141">
                   <a:moveTo>
-                    <a:pt x="0" y="3649639"/>
+                    <a:pt x="0" y="3404141"/>
                   </a:moveTo>
                   <a:lnTo>
                     <a:pt x="0" y="0"/>
@@ -2462,7 +2462,7 @@
                 </a:path>
               </a:pathLst>
             </a:custGeom>
-            <a:ln w="6775" cap="flat">
+            <a:ln w="8623" cap="flat">
               <a:solidFill>
                 <a:srgbClr val="EBEBEB">
                   <a:alpha val="100000"/>
@@ -2486,15 +2486,15 @@
           </p:nvSpPr>
           <p:spPr>
             <a:xfrm>
-              <a:off x="3387871" y="2073503"/>
-              <a:ext cx="0" cy="3649639"/>
+              <a:off x="3447406" y="2209169"/>
+              <a:ext cx="0" cy="3404141"/>
             </a:xfrm>
             <a:custGeom>
               <a:avLst/>
               <a:pathLst>
-                <a:path w="0" h="3649639">
+                <a:path w="0" h="3404141">
                   <a:moveTo>
-                    <a:pt x="0" y="3649639"/>
+                    <a:pt x="0" y="3404141"/>
                   </a:moveTo>
                   <a:lnTo>
                     <a:pt x="0" y="0"/>
@@ -2505,7 +2505,7 @@
                 </a:path>
               </a:pathLst>
             </a:custGeom>
-            <a:ln w="6775" cap="flat">
+            <a:ln w="8623" cap="flat">
               <a:solidFill>
                 <a:srgbClr val="EBEBEB">
                   <a:alpha val="100000"/>
@@ -2529,15 +2529,15 @@
           </p:nvSpPr>
           <p:spPr>
             <a:xfrm>
-              <a:off x="5160528" y="2073503"/>
-              <a:ext cx="0" cy="3649639"/>
+              <a:off x="5193449" y="2209169"/>
+              <a:ext cx="0" cy="3404141"/>
             </a:xfrm>
             <a:custGeom>
               <a:avLst/>
               <a:pathLst>
-                <a:path w="0" h="3649639">
+                <a:path w="0" h="3404141">
                   <a:moveTo>
-                    <a:pt x="0" y="3649639"/>
+                    <a:pt x="0" y="3404141"/>
                   </a:moveTo>
                   <a:lnTo>
                     <a:pt x="0" y="0"/>
@@ -2548,7 +2548,7 @@
                 </a:path>
               </a:pathLst>
             </a:custGeom>
-            <a:ln w="6775" cap="flat">
+            <a:ln w="8623" cap="flat">
               <a:solidFill>
                 <a:srgbClr val="EBEBEB">
                   <a:alpha val="100000"/>
@@ -2572,15 +2572,15 @@
           </p:nvSpPr>
           <p:spPr>
             <a:xfrm>
-              <a:off x="6933186" y="2073503"/>
-              <a:ext cx="0" cy="3649639"/>
+              <a:off x="6939491" y="2209169"/>
+              <a:ext cx="0" cy="3404141"/>
             </a:xfrm>
             <a:custGeom>
               <a:avLst/>
               <a:pathLst>
-                <a:path w="0" h="3649639">
+                <a:path w="0" h="3404141">
                   <a:moveTo>
-                    <a:pt x="0" y="3649639"/>
+                    <a:pt x="0" y="3404141"/>
                   </a:moveTo>
                   <a:lnTo>
                     <a:pt x="0" y="0"/>
@@ -2591,7 +2591,7 @@
                 </a:path>
               </a:pathLst>
             </a:custGeom>
-            <a:ln w="6775" cap="flat">
+            <a:ln w="8623" cap="flat">
               <a:solidFill>
                 <a:srgbClr val="EBEBEB">
                   <a:alpha val="100000"/>
@@ -2615,26 +2615,26 @@
           </p:nvSpPr>
           <p:spPr>
             <a:xfrm>
-              <a:off x="817517" y="5557249"/>
-              <a:ext cx="7799693" cy="0"/>
+              <a:off x="915645" y="5458577"/>
+              <a:ext cx="7682587" cy="0"/>
             </a:xfrm>
             <a:custGeom>
               <a:avLst/>
               <a:pathLst>
-                <a:path w="7799693" h="0">
+                <a:path w="7682587" h="0">
                   <a:moveTo>
                     <a:pt x="0" y="0"/>
                   </a:moveTo>
                   <a:lnTo>
-                    <a:pt x="7799693" y="0"/>
-                  </a:lnTo>
-                  <a:lnTo>
-                    <a:pt x="7799693" y="0"/>
+                    <a:pt x="7682587" y="0"/>
+                  </a:lnTo>
+                  <a:lnTo>
+                    <a:pt x="7682587" y="0"/>
                   </a:lnTo>
                 </a:path>
               </a:pathLst>
             </a:custGeom>
-            <a:ln w="13550" cap="flat">
+            <a:ln w="17246" cap="flat">
               <a:solidFill>
                 <a:srgbClr val="EBEBEB">
                   <a:alpha val="100000"/>
@@ -2658,26 +2658,26 @@
           </p:nvSpPr>
           <p:spPr>
             <a:xfrm>
-              <a:off x="817517" y="4727786"/>
-              <a:ext cx="7799693" cy="0"/>
+              <a:off x="915645" y="4684908"/>
+              <a:ext cx="7682587" cy="0"/>
             </a:xfrm>
             <a:custGeom>
               <a:avLst/>
               <a:pathLst>
-                <a:path w="7799693" h="0">
+                <a:path w="7682587" h="0">
                   <a:moveTo>
                     <a:pt x="0" y="0"/>
                   </a:moveTo>
                   <a:lnTo>
-                    <a:pt x="7799693" y="0"/>
-                  </a:lnTo>
-                  <a:lnTo>
-                    <a:pt x="7799693" y="0"/>
+                    <a:pt x="7682587" y="0"/>
+                  </a:lnTo>
+                  <a:lnTo>
+                    <a:pt x="7682587" y="0"/>
                   </a:lnTo>
                 </a:path>
               </a:pathLst>
             </a:custGeom>
-            <a:ln w="13550" cap="flat">
+            <a:ln w="17246" cap="flat">
               <a:solidFill>
                 <a:srgbClr val="EBEBEB">
                   <a:alpha val="100000"/>
@@ -2701,26 +2701,26 @@
           </p:nvSpPr>
           <p:spPr>
             <a:xfrm>
-              <a:off x="817517" y="3898322"/>
-              <a:ext cx="7799693" cy="0"/>
+              <a:off x="915645" y="3911240"/>
+              <a:ext cx="7682587" cy="0"/>
             </a:xfrm>
             <a:custGeom>
               <a:avLst/>
               <a:pathLst>
-                <a:path w="7799693" h="0">
+                <a:path w="7682587" h="0">
                   <a:moveTo>
                     <a:pt x="0" y="0"/>
                   </a:moveTo>
                   <a:lnTo>
-                    <a:pt x="7799693" y="0"/>
-                  </a:lnTo>
-                  <a:lnTo>
-                    <a:pt x="7799693" y="0"/>
+                    <a:pt x="7682587" y="0"/>
+                  </a:lnTo>
+                  <a:lnTo>
+                    <a:pt x="7682587" y="0"/>
                   </a:lnTo>
                 </a:path>
               </a:pathLst>
             </a:custGeom>
-            <a:ln w="13550" cap="flat">
+            <a:ln w="17246" cap="flat">
               <a:solidFill>
                 <a:srgbClr val="EBEBEB">
                   <a:alpha val="100000"/>
@@ -2744,26 +2744,26 @@
           </p:nvSpPr>
           <p:spPr>
             <a:xfrm>
-              <a:off x="817517" y="3068859"/>
-              <a:ext cx="7799693" cy="0"/>
+              <a:off x="915645" y="3137571"/>
+              <a:ext cx="7682587" cy="0"/>
             </a:xfrm>
             <a:custGeom>
               <a:avLst/>
               <a:pathLst>
-                <a:path w="7799693" h="0">
+                <a:path w="7682587" h="0">
                   <a:moveTo>
                     <a:pt x="0" y="0"/>
                   </a:moveTo>
                   <a:lnTo>
-                    <a:pt x="7799693" y="0"/>
-                  </a:lnTo>
-                  <a:lnTo>
-                    <a:pt x="7799693" y="0"/>
+                    <a:pt x="7682587" y="0"/>
+                  </a:lnTo>
+                  <a:lnTo>
+                    <a:pt x="7682587" y="0"/>
                   </a:lnTo>
                 </a:path>
               </a:pathLst>
             </a:custGeom>
-            <a:ln w="13550" cap="flat">
+            <a:ln w="17246" cap="flat">
               <a:solidFill>
                 <a:srgbClr val="EBEBEB">
                   <a:alpha val="100000"/>
@@ -2787,26 +2787,26 @@
           </p:nvSpPr>
           <p:spPr>
             <a:xfrm>
-              <a:off x="817517" y="2239395"/>
-              <a:ext cx="7799693" cy="0"/>
+              <a:off x="915645" y="2363903"/>
+              <a:ext cx="7682587" cy="0"/>
             </a:xfrm>
             <a:custGeom>
               <a:avLst/>
               <a:pathLst>
-                <a:path w="7799693" h="0">
+                <a:path w="7682587" h="0">
                   <a:moveTo>
                     <a:pt x="0" y="0"/>
                   </a:moveTo>
                   <a:lnTo>
-                    <a:pt x="7799693" y="0"/>
-                  </a:lnTo>
-                  <a:lnTo>
-                    <a:pt x="7799693" y="0"/>
+                    <a:pt x="7682587" y="0"/>
+                  </a:lnTo>
+                  <a:lnTo>
+                    <a:pt x="7682587" y="0"/>
                   </a:lnTo>
                 </a:path>
               </a:pathLst>
             </a:custGeom>
-            <a:ln w="13550" cap="flat">
+            <a:ln w="17246" cap="flat">
               <a:solidFill>
                 <a:srgbClr val="EBEBEB">
                   <a:alpha val="100000"/>
@@ -2830,15 +2830,15 @@
           </p:nvSpPr>
           <p:spPr>
             <a:xfrm>
-              <a:off x="2501542" y="2073503"/>
-              <a:ext cx="0" cy="3649639"/>
+              <a:off x="2574385" y="2209169"/>
+              <a:ext cx="0" cy="3404141"/>
             </a:xfrm>
             <a:custGeom>
               <a:avLst/>
               <a:pathLst>
-                <a:path w="0" h="3649639">
+                <a:path w="0" h="3404141">
                   <a:moveTo>
-                    <a:pt x="0" y="3649639"/>
+                    <a:pt x="0" y="3404141"/>
                   </a:moveTo>
                   <a:lnTo>
                     <a:pt x="0" y="0"/>
@@ -2849,7 +2849,7 @@
                 </a:path>
               </a:pathLst>
             </a:custGeom>
-            <a:ln w="13550" cap="flat">
+            <a:ln w="17246" cap="flat">
               <a:solidFill>
                 <a:srgbClr val="EBEBEB">
                   <a:alpha val="100000"/>
@@ -2873,15 +2873,15 @@
           </p:nvSpPr>
           <p:spPr>
             <a:xfrm>
-              <a:off x="4274200" y="2073503"/>
-              <a:ext cx="0" cy="3649639"/>
+              <a:off x="4320427" y="2209169"/>
+              <a:ext cx="0" cy="3404141"/>
             </a:xfrm>
             <a:custGeom>
               <a:avLst/>
               <a:pathLst>
-                <a:path w="0" h="3649639">
+                <a:path w="0" h="3404141">
                   <a:moveTo>
-                    <a:pt x="0" y="3649639"/>
+                    <a:pt x="0" y="3404141"/>
                   </a:moveTo>
                   <a:lnTo>
                     <a:pt x="0" y="0"/>
@@ -2892,7 +2892,7 @@
                 </a:path>
               </a:pathLst>
             </a:custGeom>
-            <a:ln w="13550" cap="flat">
+            <a:ln w="17246" cap="flat">
               <a:solidFill>
                 <a:srgbClr val="EBEBEB">
                   <a:alpha val="100000"/>
@@ -2916,15 +2916,15 @@
           </p:nvSpPr>
           <p:spPr>
             <a:xfrm>
-              <a:off x="6046857" y="2073503"/>
-              <a:ext cx="0" cy="3649639"/>
+              <a:off x="6066470" y="2209169"/>
+              <a:ext cx="0" cy="3404141"/>
             </a:xfrm>
             <a:custGeom>
               <a:avLst/>
               <a:pathLst>
-                <a:path w="0" h="3649639">
+                <a:path w="0" h="3404141">
                   <a:moveTo>
-                    <a:pt x="0" y="3649639"/>
+                    <a:pt x="0" y="3404141"/>
                   </a:moveTo>
                   <a:lnTo>
                     <a:pt x="0" y="0"/>
@@ -2935,7 +2935,7 @@
                 </a:path>
               </a:pathLst>
             </a:custGeom>
-            <a:ln w="13550" cap="flat">
+            <a:ln w="17246" cap="flat">
               <a:solidFill>
                 <a:srgbClr val="EBEBEB">
                   <a:alpha val="100000"/>
@@ -2959,15 +2959,15 @@
           </p:nvSpPr>
           <p:spPr>
             <a:xfrm>
-              <a:off x="7819515" y="2073503"/>
-              <a:ext cx="0" cy="3649639"/>
+              <a:off x="7812512" y="2209169"/>
+              <a:ext cx="0" cy="3404141"/>
             </a:xfrm>
             <a:custGeom>
               <a:avLst/>
               <a:pathLst>
-                <a:path w="0" h="3649639">
+                <a:path w="0" h="3404141">
                   <a:moveTo>
-                    <a:pt x="0" y="3649639"/>
+                    <a:pt x="0" y="3404141"/>
                   </a:moveTo>
                   <a:lnTo>
                     <a:pt x="0" y="0"/>
@@ -2978,7 +2978,7 @@
                 </a:path>
               </a:pathLst>
             </a:custGeom>
-            <a:ln w="13550" cap="flat">
+            <a:ln w="17246" cap="flat">
               <a:solidFill>
                 <a:srgbClr val="EBEBEB">
                   <a:alpha val="100000"/>
@@ -3002,489 +3002,489 @@
           </p:nvSpPr>
           <p:spPr>
             <a:xfrm>
-              <a:off x="817517" y="2073503"/>
-              <a:ext cx="7370972" cy="3483291"/>
+              <a:off x="915645" y="2209169"/>
+              <a:ext cx="7260303" cy="3248983"/>
             </a:xfrm>
             <a:custGeom>
               <a:avLst/>
               <a:pathLst>
-                <a:path w="7370972" h="3483291">
+                <a:path w="7260303" h="3248983">
                   <a:moveTo>
-                    <a:pt x="2625055" y="0"/>
+                    <a:pt x="2585642" y="0"/>
                   </a:moveTo>
                   <a:lnTo>
-                    <a:pt x="2635295" y="70897"/>
-                  </a:lnTo>
-                  <a:lnTo>
-                    <a:pt x="2712930" y="535252"/>
-                  </a:lnTo>
-                  <a:lnTo>
-                    <a:pt x="2790564" y="936426"/>
-                  </a:lnTo>
-                  <a:lnTo>
-                    <a:pt x="2868198" y="1283016"/>
-                  </a:lnTo>
-                  <a:lnTo>
-                    <a:pt x="2945832" y="1582448"/>
-                  </a:lnTo>
-                  <a:lnTo>
-                    <a:pt x="3023466" y="1841140"/>
-                  </a:lnTo>
-                  <a:lnTo>
-                    <a:pt x="3101100" y="2064634"/>
-                  </a:lnTo>
-                  <a:lnTo>
-                    <a:pt x="3178734" y="2257720"/>
-                  </a:lnTo>
-                  <a:lnTo>
-                    <a:pt x="3256368" y="2424534"/>
-                  </a:lnTo>
-                  <a:lnTo>
-                    <a:pt x="3334002" y="2568651"/>
-                  </a:lnTo>
-                  <a:lnTo>
-                    <a:pt x="3411636" y="2652526"/>
-                  </a:lnTo>
-                  <a:lnTo>
-                    <a:pt x="3489270" y="2647149"/>
-                  </a:lnTo>
-                  <a:lnTo>
-                    <a:pt x="3566904" y="2641738"/>
-                  </a:lnTo>
-                  <a:lnTo>
-                    <a:pt x="3644538" y="2636292"/>
-                  </a:lnTo>
-                  <a:lnTo>
-                    <a:pt x="3722172" y="2630811"/>
-                  </a:lnTo>
-                  <a:lnTo>
-                    <a:pt x="3799806" y="2625294"/>
-                  </a:lnTo>
-                  <a:lnTo>
-                    <a:pt x="3877440" y="2619742"/>
-                  </a:lnTo>
-                  <a:lnTo>
-                    <a:pt x="3955074" y="2614153"/>
-                  </a:lnTo>
-                  <a:lnTo>
-                    <a:pt x="4032708" y="2608529"/>
-                  </a:lnTo>
-                  <a:lnTo>
-                    <a:pt x="4110342" y="2602868"/>
-                  </a:lnTo>
-                  <a:lnTo>
-                    <a:pt x="4187976" y="2597170"/>
-                  </a:lnTo>
-                  <a:lnTo>
-                    <a:pt x="4265610" y="2591436"/>
-                  </a:lnTo>
-                  <a:lnTo>
-                    <a:pt x="4343244" y="2585664"/>
-                  </a:lnTo>
-                  <a:lnTo>
-                    <a:pt x="4420879" y="2579856"/>
-                  </a:lnTo>
-                  <a:lnTo>
-                    <a:pt x="4498513" y="2574009"/>
-                  </a:lnTo>
-                  <a:lnTo>
-                    <a:pt x="4576147" y="2568125"/>
-                  </a:lnTo>
-                  <a:lnTo>
-                    <a:pt x="4653781" y="2562203"/>
-                  </a:lnTo>
-                  <a:lnTo>
-                    <a:pt x="4731415" y="2556242"/>
-                  </a:lnTo>
-                  <a:lnTo>
-                    <a:pt x="4809049" y="2550243"/>
-                  </a:lnTo>
-                  <a:lnTo>
-                    <a:pt x="4886683" y="2544205"/>
-                  </a:lnTo>
-                  <a:lnTo>
-                    <a:pt x="4964317" y="2538128"/>
-                  </a:lnTo>
-                  <a:lnTo>
-                    <a:pt x="5041951" y="2532012"/>
-                  </a:lnTo>
-                  <a:lnTo>
-                    <a:pt x="5119585" y="2525856"/>
-                  </a:lnTo>
-                  <a:lnTo>
-                    <a:pt x="5197219" y="2519661"/>
-                  </a:lnTo>
-                  <a:lnTo>
-                    <a:pt x="5274853" y="2513425"/>
-                  </a:lnTo>
-                  <a:lnTo>
-                    <a:pt x="5352487" y="2507149"/>
-                  </a:lnTo>
-                  <a:lnTo>
-                    <a:pt x="5430121" y="2500832"/>
-                  </a:lnTo>
-                  <a:lnTo>
-                    <a:pt x="5507755" y="2494475"/>
-                  </a:lnTo>
-                  <a:lnTo>
-                    <a:pt x="5585389" y="2488076"/>
-                  </a:lnTo>
-                  <a:lnTo>
-                    <a:pt x="5663023" y="2481636"/>
-                  </a:lnTo>
-                  <a:lnTo>
-                    <a:pt x="5740657" y="2475154"/>
-                  </a:lnTo>
-                  <a:lnTo>
-                    <a:pt x="5818291" y="2468631"/>
-                  </a:lnTo>
-                  <a:lnTo>
-                    <a:pt x="5895925" y="2462065"/>
-                  </a:lnTo>
-                  <a:lnTo>
-                    <a:pt x="5973559" y="2455457"/>
-                  </a:lnTo>
-                  <a:lnTo>
-                    <a:pt x="6051193" y="2448806"/>
-                  </a:lnTo>
-                  <a:lnTo>
-                    <a:pt x="6128827" y="2442112"/>
-                  </a:lnTo>
-                  <a:lnTo>
-                    <a:pt x="6206462" y="2435374"/>
-                  </a:lnTo>
-                  <a:lnTo>
-                    <a:pt x="6284096" y="2428594"/>
-                  </a:lnTo>
-                  <a:lnTo>
-                    <a:pt x="6361730" y="2421769"/>
-                  </a:lnTo>
-                  <a:lnTo>
-                    <a:pt x="6439364" y="2414900"/>
-                  </a:lnTo>
-                  <a:lnTo>
-                    <a:pt x="6516998" y="2407987"/>
-                  </a:lnTo>
-                  <a:lnTo>
-                    <a:pt x="6594632" y="2401029"/>
-                  </a:lnTo>
-                  <a:lnTo>
-                    <a:pt x="6672266" y="2394026"/>
-                  </a:lnTo>
-                  <a:lnTo>
-                    <a:pt x="6749900" y="2386977"/>
-                  </a:lnTo>
-                  <a:lnTo>
-                    <a:pt x="6827534" y="2379883"/>
-                  </a:lnTo>
-                  <a:lnTo>
-                    <a:pt x="6905168" y="2372744"/>
-                  </a:lnTo>
-                  <a:lnTo>
-                    <a:pt x="6982802" y="2365558"/>
-                  </a:lnTo>
-                  <a:lnTo>
-                    <a:pt x="7060436" y="2358325"/>
-                  </a:lnTo>
-                  <a:lnTo>
-                    <a:pt x="7138070" y="2351046"/>
-                  </a:lnTo>
-                  <a:lnTo>
-                    <a:pt x="7215704" y="2343720"/>
-                  </a:lnTo>
-                  <a:lnTo>
-                    <a:pt x="7293338" y="2336346"/>
-                  </a:lnTo>
-                  <a:lnTo>
-                    <a:pt x="7370972" y="2328925"/>
-                  </a:lnTo>
-                  <a:lnTo>
-                    <a:pt x="7370972" y="3483291"/>
-                  </a:lnTo>
-                  <a:lnTo>
-                    <a:pt x="7293338" y="3483219"/>
-                  </a:lnTo>
-                  <a:lnTo>
-                    <a:pt x="7215704" y="3483136"/>
-                  </a:lnTo>
-                  <a:lnTo>
-                    <a:pt x="7138070" y="3483040"/>
-                  </a:lnTo>
-                  <a:lnTo>
-                    <a:pt x="7060436" y="3482929"/>
-                  </a:lnTo>
-                  <a:lnTo>
-                    <a:pt x="6982802" y="3482800"/>
-                  </a:lnTo>
-                  <a:lnTo>
-                    <a:pt x="6905168" y="3482651"/>
-                  </a:lnTo>
-                  <a:lnTo>
-                    <a:pt x="6827534" y="3482478"/>
-                  </a:lnTo>
-                  <a:lnTo>
-                    <a:pt x="6749900" y="3482278"/>
-                  </a:lnTo>
-                  <a:lnTo>
-                    <a:pt x="6672266" y="3482047"/>
-                  </a:lnTo>
-                  <a:lnTo>
-                    <a:pt x="6594632" y="3481780"/>
-                  </a:lnTo>
-                  <a:lnTo>
-                    <a:pt x="6516998" y="3481470"/>
-                  </a:lnTo>
-                  <a:lnTo>
-                    <a:pt x="6439364" y="3481111"/>
-                  </a:lnTo>
-                  <a:lnTo>
-                    <a:pt x="6361730" y="3480696"/>
-                  </a:lnTo>
-                  <a:lnTo>
-                    <a:pt x="6284096" y="3480216"/>
-                  </a:lnTo>
-                  <a:lnTo>
-                    <a:pt x="6206462" y="3479660"/>
-                  </a:lnTo>
-                  <a:lnTo>
-                    <a:pt x="6128827" y="3479016"/>
-                  </a:lnTo>
-                  <a:lnTo>
-                    <a:pt x="6051193" y="3478271"/>
-                  </a:lnTo>
-                  <a:lnTo>
-                    <a:pt x="5973559" y="3477409"/>
-                  </a:lnTo>
-                  <a:lnTo>
-                    <a:pt x="5895925" y="3476411"/>
-                  </a:lnTo>
-                  <a:lnTo>
-                    <a:pt x="5818291" y="3475256"/>
-                  </a:lnTo>
-                  <a:lnTo>
-                    <a:pt x="5740657" y="3473919"/>
-                  </a:lnTo>
-                  <a:lnTo>
-                    <a:pt x="5663023" y="3472371"/>
-                  </a:lnTo>
-                  <a:lnTo>
-                    <a:pt x="5585389" y="3470580"/>
-                  </a:lnTo>
-                  <a:lnTo>
-                    <a:pt x="5507755" y="3468506"/>
-                  </a:lnTo>
-                  <a:lnTo>
-                    <a:pt x="5430121" y="3466106"/>
-                  </a:lnTo>
-                  <a:lnTo>
-                    <a:pt x="5352487" y="3463328"/>
-                  </a:lnTo>
-                  <a:lnTo>
-                    <a:pt x="5274853" y="3460112"/>
-                  </a:lnTo>
-                  <a:lnTo>
-                    <a:pt x="5197219" y="3456390"/>
-                  </a:lnTo>
-                  <a:lnTo>
-                    <a:pt x="5119585" y="3452081"/>
-                  </a:lnTo>
-                  <a:lnTo>
-                    <a:pt x="5041951" y="3447094"/>
-                  </a:lnTo>
-                  <a:lnTo>
-                    <a:pt x="4964317" y="3441322"/>
-                  </a:lnTo>
-                  <a:lnTo>
-                    <a:pt x="4886683" y="3434641"/>
-                  </a:lnTo>
-                  <a:lnTo>
-                    <a:pt x="4809049" y="3426907"/>
-                  </a:lnTo>
-                  <a:lnTo>
-                    <a:pt x="4731415" y="3417956"/>
-                  </a:lnTo>
-                  <a:lnTo>
-                    <a:pt x="4653781" y="3407594"/>
-                  </a:lnTo>
-                  <a:lnTo>
-                    <a:pt x="4576147" y="3395601"/>
-                  </a:lnTo>
-                  <a:lnTo>
-                    <a:pt x="4498513" y="3381719"/>
-                  </a:lnTo>
-                  <a:lnTo>
-                    <a:pt x="4420879" y="3365651"/>
-                  </a:lnTo>
-                  <a:lnTo>
-                    <a:pt x="4343244" y="3347053"/>
-                  </a:lnTo>
-                  <a:lnTo>
-                    <a:pt x="4265610" y="3325525"/>
-                  </a:lnTo>
-                  <a:lnTo>
-                    <a:pt x="4187976" y="3300607"/>
-                  </a:lnTo>
-                  <a:lnTo>
-                    <a:pt x="4110342" y="3271764"/>
-                  </a:lnTo>
-                  <a:lnTo>
-                    <a:pt x="4032708" y="3238380"/>
-                  </a:lnTo>
-                  <a:lnTo>
-                    <a:pt x="3955074" y="3199737"/>
-                  </a:lnTo>
-                  <a:lnTo>
-                    <a:pt x="3877440" y="3155009"/>
-                  </a:lnTo>
-                  <a:lnTo>
-                    <a:pt x="3799806" y="3103236"/>
-                  </a:lnTo>
-                  <a:lnTo>
-                    <a:pt x="3722172" y="3043310"/>
-                  </a:lnTo>
-                  <a:lnTo>
-                    <a:pt x="3644538" y="2973947"/>
-                  </a:lnTo>
-                  <a:lnTo>
-                    <a:pt x="3566904" y="2893659"/>
-                  </a:lnTo>
-                  <a:lnTo>
-                    <a:pt x="3489270" y="2800727"/>
-                  </a:lnTo>
-                  <a:lnTo>
-                    <a:pt x="3411636" y="2693159"/>
-                  </a:lnTo>
-                  <a:lnTo>
-                    <a:pt x="3334002" y="2657868"/>
-                  </a:lnTo>
-                  <a:lnTo>
-                    <a:pt x="3256368" y="2663175"/>
-                  </a:lnTo>
-                  <a:lnTo>
-                    <a:pt x="3178734" y="2668448"/>
-                  </a:lnTo>
-                  <a:lnTo>
-                    <a:pt x="3101100" y="2673688"/>
-                  </a:lnTo>
-                  <a:lnTo>
-                    <a:pt x="3023466" y="2678894"/>
-                  </a:lnTo>
-                  <a:lnTo>
-                    <a:pt x="2945832" y="2684066"/>
-                  </a:lnTo>
-                  <a:lnTo>
-                    <a:pt x="2868198" y="2689205"/>
-                  </a:lnTo>
-                  <a:lnTo>
-                    <a:pt x="2790564" y="2694311"/>
-                  </a:lnTo>
-                  <a:lnTo>
-                    <a:pt x="2712930" y="2699384"/>
-                  </a:lnTo>
-                  <a:lnTo>
-                    <a:pt x="2635295" y="2704425"/>
-                  </a:lnTo>
-                  <a:lnTo>
-                    <a:pt x="2557661" y="2709433"/>
-                  </a:lnTo>
-                  <a:lnTo>
-                    <a:pt x="2480027" y="2714409"/>
-                  </a:lnTo>
-                  <a:lnTo>
-                    <a:pt x="2402393" y="2719354"/>
-                  </a:lnTo>
-                  <a:lnTo>
-                    <a:pt x="2324759" y="2724266"/>
-                  </a:lnTo>
-                  <a:lnTo>
-                    <a:pt x="2247125" y="2729147"/>
-                  </a:lnTo>
-                  <a:lnTo>
-                    <a:pt x="2169491" y="2733996"/>
-                  </a:lnTo>
-                  <a:lnTo>
-                    <a:pt x="2091857" y="2738814"/>
-                  </a:lnTo>
-                  <a:lnTo>
-                    <a:pt x="2014223" y="2743601"/>
-                  </a:lnTo>
-                  <a:lnTo>
-                    <a:pt x="1936589" y="2748358"/>
-                  </a:lnTo>
-                  <a:lnTo>
-                    <a:pt x="1858955" y="2753084"/>
-                  </a:lnTo>
-                  <a:lnTo>
-                    <a:pt x="1781321" y="2757779"/>
-                  </a:lnTo>
-                  <a:lnTo>
-                    <a:pt x="1703687" y="2762445"/>
-                  </a:lnTo>
-                  <a:lnTo>
-                    <a:pt x="1626053" y="2767080"/>
-                  </a:lnTo>
-                  <a:lnTo>
-                    <a:pt x="1548419" y="2771686"/>
-                  </a:lnTo>
-                  <a:lnTo>
-                    <a:pt x="1470785" y="2776262"/>
-                  </a:lnTo>
-                  <a:lnTo>
-                    <a:pt x="1393151" y="2780808"/>
-                  </a:lnTo>
-                  <a:lnTo>
-                    <a:pt x="1315517" y="2785326"/>
-                  </a:lnTo>
-                  <a:lnTo>
-                    <a:pt x="1237883" y="2789814"/>
-                  </a:lnTo>
-                  <a:lnTo>
-                    <a:pt x="1160249" y="2794274"/>
-                  </a:lnTo>
-                  <a:lnTo>
-                    <a:pt x="1082615" y="2798705"/>
-                  </a:lnTo>
-                  <a:lnTo>
-                    <a:pt x="1004981" y="2803107"/>
-                  </a:lnTo>
-                  <a:lnTo>
-                    <a:pt x="927346" y="2807481"/>
-                  </a:lnTo>
-                  <a:lnTo>
-                    <a:pt x="849712" y="2811827"/>
-                  </a:lnTo>
-                  <a:lnTo>
-                    <a:pt x="772078" y="2816145"/>
-                  </a:lnTo>
-                  <a:lnTo>
-                    <a:pt x="694444" y="2820435"/>
-                  </a:lnTo>
-                  <a:lnTo>
-                    <a:pt x="616810" y="2824698"/>
-                  </a:lnTo>
-                  <a:lnTo>
-                    <a:pt x="539176" y="2828933"/>
-                  </a:lnTo>
-                  <a:lnTo>
-                    <a:pt x="461542" y="2833142"/>
-                  </a:lnTo>
-                  <a:lnTo>
-                    <a:pt x="383908" y="2837323"/>
-                  </a:lnTo>
-                  <a:lnTo>
-                    <a:pt x="306274" y="2841477"/>
-                  </a:lnTo>
-                  <a:lnTo>
-                    <a:pt x="228640" y="2845604"/>
-                  </a:lnTo>
-                  <a:lnTo>
-                    <a:pt x="151006" y="2849705"/>
-                  </a:lnTo>
-                  <a:lnTo>
-                    <a:pt x="73372" y="2853780"/>
-                  </a:lnTo>
-                  <a:lnTo>
-                    <a:pt x="0" y="2857606"/>
+                    <a:pt x="2595729" y="66128"/>
+                  </a:lnTo>
+                  <a:lnTo>
+                    <a:pt x="2672197" y="499247"/>
+                  </a:lnTo>
+                  <a:lnTo>
+                    <a:pt x="2748666" y="873436"/>
+                  </a:lnTo>
+                  <a:lnTo>
+                    <a:pt x="2825134" y="1196712"/>
+                  </a:lnTo>
+                  <a:lnTo>
+                    <a:pt x="2901602" y="1476003"/>
+                  </a:lnTo>
+                  <a:lnTo>
+                    <a:pt x="2978071" y="1717293"/>
+                  </a:lnTo>
+                  <a:lnTo>
+                    <a:pt x="3054539" y="1925754"/>
+                  </a:lnTo>
+                  <a:lnTo>
+                    <a:pt x="3131008" y="2105851"/>
+                  </a:lnTo>
+                  <a:lnTo>
+                    <a:pt x="3207476" y="2261444"/>
+                  </a:lnTo>
+                  <a:lnTo>
+                    <a:pt x="3283945" y="2395867"/>
+                  </a:lnTo>
+                  <a:lnTo>
+                    <a:pt x="3360413" y="2474100"/>
+                  </a:lnTo>
+                  <a:lnTo>
+                    <a:pt x="3436881" y="2469085"/>
+                  </a:lnTo>
+                  <a:lnTo>
+                    <a:pt x="3513350" y="2464038"/>
+                  </a:lnTo>
+                  <a:lnTo>
+                    <a:pt x="3589818" y="2458958"/>
+                  </a:lnTo>
+                  <a:lnTo>
+                    <a:pt x="3666287" y="2453846"/>
+                  </a:lnTo>
+                  <a:lnTo>
+                    <a:pt x="3742755" y="2448700"/>
+                  </a:lnTo>
+                  <a:lnTo>
+                    <a:pt x="3819224" y="2443521"/>
+                  </a:lnTo>
+                  <a:lnTo>
+                    <a:pt x="3895692" y="2438309"/>
+                  </a:lnTo>
+                  <a:lnTo>
+                    <a:pt x="3972160" y="2433063"/>
+                  </a:lnTo>
+                  <a:lnTo>
+                    <a:pt x="4048629" y="2427782"/>
+                  </a:lnTo>
+                  <a:lnTo>
+                    <a:pt x="4125097" y="2422468"/>
+                  </a:lnTo>
+                  <a:lnTo>
+                    <a:pt x="4201566" y="2417119"/>
+                  </a:lnTo>
+                  <a:lnTo>
+                    <a:pt x="4278034" y="2411736"/>
+                  </a:lnTo>
+                  <a:lnTo>
+                    <a:pt x="4354503" y="2406318"/>
+                  </a:lnTo>
+                  <a:lnTo>
+                    <a:pt x="4430971" y="2400865"/>
+                  </a:lnTo>
+                  <a:lnTo>
+                    <a:pt x="4507439" y="2395377"/>
+                  </a:lnTo>
+                  <a:lnTo>
+                    <a:pt x="4583908" y="2389853"/>
+                  </a:lnTo>
+                  <a:lnTo>
+                    <a:pt x="4660376" y="2384293"/>
+                  </a:lnTo>
+                  <a:lnTo>
+                    <a:pt x="4736845" y="2378698"/>
+                  </a:lnTo>
+                  <a:lnTo>
+                    <a:pt x="4813313" y="2373066"/>
+                  </a:lnTo>
+                  <a:lnTo>
+                    <a:pt x="4889782" y="2367398"/>
+                  </a:lnTo>
+                  <a:lnTo>
+                    <a:pt x="4966250" y="2361693"/>
+                  </a:lnTo>
+                  <a:lnTo>
+                    <a:pt x="5042719" y="2355951"/>
+                  </a:lnTo>
+                  <a:lnTo>
+                    <a:pt x="5119187" y="2350172"/>
+                  </a:lnTo>
+                  <a:lnTo>
+                    <a:pt x="5195655" y="2344356"/>
+                  </a:lnTo>
+                  <a:lnTo>
+                    <a:pt x="5272124" y="2338502"/>
+                  </a:lnTo>
+                  <a:lnTo>
+                    <a:pt x="5348592" y="2332610"/>
+                  </a:lnTo>
+                  <a:lnTo>
+                    <a:pt x="5425061" y="2326680"/>
+                  </a:lnTo>
+                  <a:lnTo>
+                    <a:pt x="5501529" y="2320712"/>
+                  </a:lnTo>
+                  <a:lnTo>
+                    <a:pt x="5577998" y="2314705"/>
+                  </a:lnTo>
+                  <a:lnTo>
+                    <a:pt x="5654466" y="2308660"/>
+                  </a:lnTo>
+                  <a:lnTo>
+                    <a:pt x="5730934" y="2302575"/>
+                  </a:lnTo>
+                  <a:lnTo>
+                    <a:pt x="5807403" y="2296451"/>
+                  </a:lnTo>
+                  <a:lnTo>
+                    <a:pt x="5883871" y="2290287"/>
+                  </a:lnTo>
+                  <a:lnTo>
+                    <a:pt x="5960340" y="2284084"/>
+                  </a:lnTo>
+                  <a:lnTo>
+                    <a:pt x="6036808" y="2277840"/>
+                  </a:lnTo>
+                  <a:lnTo>
+                    <a:pt x="6113277" y="2271556"/>
+                  </a:lnTo>
+                  <a:lnTo>
+                    <a:pt x="6189745" y="2265231"/>
+                  </a:lnTo>
+                  <a:lnTo>
+                    <a:pt x="6266213" y="2258865"/>
+                  </a:lnTo>
+                  <a:lnTo>
+                    <a:pt x="6342682" y="2252458"/>
+                  </a:lnTo>
+                  <a:lnTo>
+                    <a:pt x="6419150" y="2246010"/>
+                  </a:lnTo>
+                  <a:lnTo>
+                    <a:pt x="6495619" y="2239520"/>
+                  </a:lnTo>
+                  <a:lnTo>
+                    <a:pt x="6572087" y="2232988"/>
+                  </a:lnTo>
+                  <a:lnTo>
+                    <a:pt x="6648556" y="2226414"/>
+                  </a:lnTo>
+                  <a:lnTo>
+                    <a:pt x="6725024" y="2219797"/>
+                  </a:lnTo>
+                  <a:lnTo>
+                    <a:pt x="6801492" y="2213138"/>
+                  </a:lnTo>
+                  <a:lnTo>
+                    <a:pt x="6877961" y="2206435"/>
+                  </a:lnTo>
+                  <a:lnTo>
+                    <a:pt x="6954429" y="2199689"/>
+                  </a:lnTo>
+                  <a:lnTo>
+                    <a:pt x="7030898" y="2192900"/>
+                  </a:lnTo>
+                  <a:lnTo>
+                    <a:pt x="7107366" y="2186066"/>
+                  </a:lnTo>
+                  <a:lnTo>
+                    <a:pt x="7183835" y="2179188"/>
+                  </a:lnTo>
+                  <a:lnTo>
+                    <a:pt x="7260303" y="2172266"/>
+                  </a:lnTo>
+                  <a:lnTo>
+                    <a:pt x="7260303" y="3248983"/>
+                  </a:lnTo>
+                  <a:lnTo>
+                    <a:pt x="7183835" y="3248916"/>
+                  </a:lnTo>
+                  <a:lnTo>
+                    <a:pt x="7107366" y="3248838"/>
+                  </a:lnTo>
+                  <a:lnTo>
+                    <a:pt x="7030898" y="3248749"/>
+                  </a:lnTo>
+                  <a:lnTo>
+                    <a:pt x="6954429" y="3248645"/>
+                  </a:lnTo>
+                  <a:lnTo>
+                    <a:pt x="6877961" y="3248525"/>
+                  </a:lnTo>
+                  <a:lnTo>
+                    <a:pt x="6801492" y="3248386"/>
+                  </a:lnTo>
+                  <a:lnTo>
+                    <a:pt x="6725024" y="3248225"/>
+                  </a:lnTo>
+                  <a:lnTo>
+                    <a:pt x="6648556" y="3248038"/>
+                  </a:lnTo>
+                  <a:lnTo>
+                    <a:pt x="6572087" y="3247823"/>
+                  </a:lnTo>
+                  <a:lnTo>
+                    <a:pt x="6495619" y="3247573"/>
+                  </a:lnTo>
+                  <a:lnTo>
+                    <a:pt x="6419150" y="3247284"/>
+                  </a:lnTo>
+                  <a:lnTo>
+                    <a:pt x="6342682" y="3246950"/>
+                  </a:lnTo>
+                  <a:lnTo>
+                    <a:pt x="6266213" y="3246563"/>
+                  </a:lnTo>
+                  <a:lnTo>
+                    <a:pt x="6189745" y="3246115"/>
+                  </a:lnTo>
+                  <a:lnTo>
+                    <a:pt x="6113277" y="3245596"/>
+                  </a:lnTo>
+                  <a:lnTo>
+                    <a:pt x="6036808" y="3244996"/>
+                  </a:lnTo>
+                  <a:lnTo>
+                    <a:pt x="5960340" y="3244301"/>
+                  </a:lnTo>
+                  <a:lnTo>
+                    <a:pt x="5883871" y="3243497"/>
+                  </a:lnTo>
+                  <a:lnTo>
+                    <a:pt x="5807403" y="3242566"/>
+                  </a:lnTo>
+                  <a:lnTo>
+                    <a:pt x="5730934" y="3241488"/>
+                  </a:lnTo>
+                  <a:lnTo>
+                    <a:pt x="5654466" y="3240241"/>
+                  </a:lnTo>
+                  <a:lnTo>
+                    <a:pt x="5577998" y="3238797"/>
+                  </a:lnTo>
+                  <a:lnTo>
+                    <a:pt x="5501529" y="3237126"/>
+                  </a:lnTo>
+                  <a:lnTo>
+                    <a:pt x="5425061" y="3235192"/>
+                  </a:lnTo>
+                  <a:lnTo>
+                    <a:pt x="5348592" y="3232954"/>
+                  </a:lnTo>
+                  <a:lnTo>
+                    <a:pt x="5272124" y="3230362"/>
+                  </a:lnTo>
+                  <a:lnTo>
+                    <a:pt x="5195655" y="3227363"/>
+                  </a:lnTo>
+                  <a:lnTo>
+                    <a:pt x="5119187" y="3223891"/>
+                  </a:lnTo>
+                  <a:lnTo>
+                    <a:pt x="5042719" y="3219872"/>
+                  </a:lnTo>
+                  <a:lnTo>
+                    <a:pt x="4966250" y="3215221"/>
+                  </a:lnTo>
+                  <a:lnTo>
+                    <a:pt x="4889782" y="3209837"/>
+                  </a:lnTo>
+                  <a:lnTo>
+                    <a:pt x="4813313" y="3203605"/>
+                  </a:lnTo>
+                  <a:lnTo>
+                    <a:pt x="4736845" y="3196392"/>
+                  </a:lnTo>
+                  <a:lnTo>
+                    <a:pt x="4660376" y="3188042"/>
+                  </a:lnTo>
+                  <a:lnTo>
+                    <a:pt x="4583908" y="3178378"/>
+                  </a:lnTo>
+                  <a:lnTo>
+                    <a:pt x="4507439" y="3167192"/>
+                  </a:lnTo>
+                  <a:lnTo>
+                    <a:pt x="4430971" y="3154243"/>
+                  </a:lnTo>
+                  <a:lnTo>
+                    <a:pt x="4354503" y="3139256"/>
+                  </a:lnTo>
+                  <a:lnTo>
+                    <a:pt x="4278034" y="3121909"/>
+                  </a:lnTo>
+                  <a:lnTo>
+                    <a:pt x="4201566" y="3101829"/>
+                  </a:lnTo>
+                  <a:lnTo>
+                    <a:pt x="4125097" y="3078587"/>
+                  </a:lnTo>
+                  <a:lnTo>
+                    <a:pt x="4048629" y="3051685"/>
+                  </a:lnTo>
+                  <a:lnTo>
+                    <a:pt x="3972160" y="3020546"/>
+                  </a:lnTo>
+                  <a:lnTo>
+                    <a:pt x="3895692" y="2984502"/>
+                  </a:lnTo>
+                  <a:lnTo>
+                    <a:pt x="3819224" y="2942783"/>
+                  </a:lnTo>
+                  <a:lnTo>
+                    <a:pt x="3742755" y="2894493"/>
+                  </a:lnTo>
+                  <a:lnTo>
+                    <a:pt x="3666287" y="2838598"/>
+                  </a:lnTo>
+                  <a:lnTo>
+                    <a:pt x="3589818" y="2773900"/>
+                  </a:lnTo>
+                  <a:lnTo>
+                    <a:pt x="3513350" y="2699013"/>
+                  </a:lnTo>
+                  <a:lnTo>
+                    <a:pt x="3436881" y="2612332"/>
+                  </a:lnTo>
+                  <a:lnTo>
+                    <a:pt x="3360413" y="2512000"/>
+                  </a:lnTo>
+                  <a:lnTo>
+                    <a:pt x="3283945" y="2479083"/>
+                  </a:lnTo>
+                  <a:lnTo>
+                    <a:pt x="3207476" y="2484033"/>
+                  </a:lnTo>
+                  <a:lnTo>
+                    <a:pt x="3131008" y="2488952"/>
+                  </a:lnTo>
+                  <a:lnTo>
+                    <a:pt x="3054539" y="2493839"/>
+                  </a:lnTo>
+                  <a:lnTo>
+                    <a:pt x="2978071" y="2498694"/>
+                  </a:lnTo>
+                  <a:lnTo>
+                    <a:pt x="2901602" y="2503519"/>
+                  </a:lnTo>
+                  <a:lnTo>
+                    <a:pt x="2825134" y="2508312"/>
+                  </a:lnTo>
+                  <a:lnTo>
+                    <a:pt x="2748666" y="2513075"/>
+                  </a:lnTo>
+                  <a:lnTo>
+                    <a:pt x="2672197" y="2517807"/>
+                  </a:lnTo>
+                  <a:lnTo>
+                    <a:pt x="2595729" y="2522508"/>
+                  </a:lnTo>
+                  <a:lnTo>
+                    <a:pt x="2519260" y="2527180"/>
+                  </a:lnTo>
+                  <a:lnTo>
+                    <a:pt x="2442792" y="2531821"/>
+                  </a:lnTo>
+                  <a:lnTo>
+                    <a:pt x="2366323" y="2536433"/>
+                  </a:lnTo>
+                  <a:lnTo>
+                    <a:pt x="2289855" y="2541014"/>
+                  </a:lnTo>
+                  <a:lnTo>
+                    <a:pt x="2213386" y="2545567"/>
+                  </a:lnTo>
+                  <a:lnTo>
+                    <a:pt x="2136918" y="2550090"/>
+                  </a:lnTo>
+                  <a:lnTo>
+                    <a:pt x="2060450" y="2554584"/>
+                  </a:lnTo>
+                  <a:lnTo>
+                    <a:pt x="1983981" y="2559049"/>
+                  </a:lnTo>
+                  <a:lnTo>
+                    <a:pt x="1907513" y="2563486"/>
+                  </a:lnTo>
+                  <a:lnTo>
+                    <a:pt x="1831044" y="2567894"/>
+                  </a:lnTo>
+                  <a:lnTo>
+                    <a:pt x="1754576" y="2572274"/>
+                  </a:lnTo>
+                  <a:lnTo>
+                    <a:pt x="1678107" y="2576625"/>
+                  </a:lnTo>
+                  <a:lnTo>
+                    <a:pt x="1601639" y="2580949"/>
+                  </a:lnTo>
+                  <a:lnTo>
+                    <a:pt x="1525171" y="2585245"/>
+                  </a:lnTo>
+                  <a:lnTo>
+                    <a:pt x="1448702" y="2589513"/>
+                  </a:lnTo>
+                  <a:lnTo>
+                    <a:pt x="1372234" y="2593754"/>
+                  </a:lnTo>
+                  <a:lnTo>
+                    <a:pt x="1295765" y="2597967"/>
+                  </a:lnTo>
+                  <a:lnTo>
+                    <a:pt x="1219297" y="2602154"/>
+                  </a:lnTo>
+                  <a:lnTo>
+                    <a:pt x="1142828" y="2606313"/>
+                  </a:lnTo>
+                  <a:lnTo>
+                    <a:pt x="1066360" y="2610446"/>
+                  </a:lnTo>
+                  <a:lnTo>
+                    <a:pt x="989892" y="2614552"/>
+                  </a:lnTo>
+                  <a:lnTo>
+                    <a:pt x="913423" y="2618632"/>
+                  </a:lnTo>
+                  <a:lnTo>
+                    <a:pt x="836955" y="2622686"/>
+                  </a:lnTo>
+                  <a:lnTo>
+                    <a:pt x="760486" y="2626713"/>
+                  </a:lnTo>
+                  <a:lnTo>
+                    <a:pt x="684018" y="2630715"/>
+                  </a:lnTo>
+                  <a:lnTo>
+                    <a:pt x="607549" y="2634691"/>
+                  </a:lnTo>
+                  <a:lnTo>
+                    <a:pt x="531081" y="2638641"/>
+                  </a:lnTo>
+                  <a:lnTo>
+                    <a:pt x="454613" y="2642567"/>
+                  </a:lnTo>
+                  <a:lnTo>
+                    <a:pt x="378144" y="2646466"/>
+                  </a:lnTo>
+                  <a:lnTo>
+                    <a:pt x="301676" y="2650341"/>
+                  </a:lnTo>
+                  <a:lnTo>
+                    <a:pt x="225207" y="2654191"/>
+                  </a:lnTo>
+                  <a:lnTo>
+                    <a:pt x="148739" y="2658016"/>
+                  </a:lnTo>
+                  <a:lnTo>
+                    <a:pt x="72270" y="2661817"/>
+                  </a:lnTo>
+                  <a:lnTo>
+                    <a:pt x="0" y="2665385"/>
                   </a:lnTo>
                   <a:close/>
                 </a:path>
@@ -3510,201 +3510,201 @@
           </p:nvSpPr>
           <p:spPr>
             <a:xfrm>
-              <a:off x="3442573" y="2073503"/>
-              <a:ext cx="4745917" cy="2652526"/>
+              <a:off x="3501287" y="2209169"/>
+              <a:ext cx="4674661" cy="2474100"/>
             </a:xfrm>
             <a:custGeom>
               <a:avLst/>
               <a:pathLst>
-                <a:path w="4745917" h="2652526">
+                <a:path w="4674661" h="2474100">
                   <a:moveTo>
                     <a:pt x="0" y="0"/>
                   </a:moveTo>
                   <a:lnTo>
-                    <a:pt x="10240" y="70897"/>
-                  </a:lnTo>
-                  <a:lnTo>
-                    <a:pt x="87874" y="535252"/>
-                  </a:lnTo>
-                  <a:lnTo>
-                    <a:pt x="165508" y="936426"/>
-                  </a:lnTo>
-                  <a:lnTo>
-                    <a:pt x="243142" y="1283016"/>
-                  </a:lnTo>
-                  <a:lnTo>
-                    <a:pt x="320776" y="1582448"/>
-                  </a:lnTo>
-                  <a:lnTo>
-                    <a:pt x="398410" y="1841140"/>
-                  </a:lnTo>
-                  <a:lnTo>
-                    <a:pt x="476044" y="2064634"/>
-                  </a:lnTo>
-                  <a:lnTo>
-                    <a:pt x="553678" y="2257720"/>
-                  </a:lnTo>
-                  <a:lnTo>
-                    <a:pt x="631312" y="2424534"/>
-                  </a:lnTo>
-                  <a:lnTo>
-                    <a:pt x="708946" y="2568651"/>
-                  </a:lnTo>
-                  <a:lnTo>
-                    <a:pt x="786580" y="2652526"/>
-                  </a:lnTo>
-                  <a:lnTo>
-                    <a:pt x="864214" y="2647149"/>
-                  </a:lnTo>
-                  <a:lnTo>
-                    <a:pt x="941848" y="2641738"/>
-                  </a:lnTo>
-                  <a:lnTo>
-                    <a:pt x="1019483" y="2636292"/>
-                  </a:lnTo>
-                  <a:lnTo>
-                    <a:pt x="1097117" y="2630811"/>
-                  </a:lnTo>
-                  <a:lnTo>
-                    <a:pt x="1174751" y="2625294"/>
-                  </a:lnTo>
-                  <a:lnTo>
-                    <a:pt x="1252385" y="2619742"/>
-                  </a:lnTo>
-                  <a:lnTo>
-                    <a:pt x="1330019" y="2614153"/>
-                  </a:lnTo>
-                  <a:lnTo>
-                    <a:pt x="1407653" y="2608529"/>
-                  </a:lnTo>
-                  <a:lnTo>
-                    <a:pt x="1485287" y="2602868"/>
-                  </a:lnTo>
-                  <a:lnTo>
-                    <a:pt x="1562921" y="2597170"/>
-                  </a:lnTo>
-                  <a:lnTo>
-                    <a:pt x="1640555" y="2591436"/>
-                  </a:lnTo>
-                  <a:lnTo>
-                    <a:pt x="1718189" y="2585664"/>
-                  </a:lnTo>
-                  <a:lnTo>
-                    <a:pt x="1795823" y="2579856"/>
-                  </a:lnTo>
-                  <a:lnTo>
-                    <a:pt x="1873457" y="2574009"/>
-                  </a:lnTo>
-                  <a:lnTo>
-                    <a:pt x="1951091" y="2568125"/>
-                  </a:lnTo>
-                  <a:lnTo>
-                    <a:pt x="2028725" y="2562203"/>
-                  </a:lnTo>
-                  <a:lnTo>
-                    <a:pt x="2106359" y="2556242"/>
-                  </a:lnTo>
-                  <a:lnTo>
-                    <a:pt x="2183993" y="2550243"/>
-                  </a:lnTo>
-                  <a:lnTo>
-                    <a:pt x="2261627" y="2544205"/>
-                  </a:lnTo>
-                  <a:lnTo>
-                    <a:pt x="2339261" y="2538128"/>
-                  </a:lnTo>
-                  <a:lnTo>
-                    <a:pt x="2416895" y="2532012"/>
-                  </a:lnTo>
-                  <a:lnTo>
-                    <a:pt x="2494529" y="2525856"/>
-                  </a:lnTo>
-                  <a:lnTo>
-                    <a:pt x="2572163" y="2519661"/>
-                  </a:lnTo>
-                  <a:lnTo>
-                    <a:pt x="2649797" y="2513425"/>
-                  </a:lnTo>
-                  <a:lnTo>
-                    <a:pt x="2727431" y="2507149"/>
-                  </a:lnTo>
-                  <a:lnTo>
-                    <a:pt x="2805066" y="2500832"/>
-                  </a:lnTo>
-                  <a:lnTo>
-                    <a:pt x="2882700" y="2494475"/>
-                  </a:lnTo>
-                  <a:lnTo>
-                    <a:pt x="2960334" y="2488076"/>
-                  </a:lnTo>
-                  <a:lnTo>
-                    <a:pt x="3037968" y="2481636"/>
-                  </a:lnTo>
-                  <a:lnTo>
-                    <a:pt x="3115602" y="2475154"/>
-                  </a:lnTo>
-                  <a:lnTo>
-                    <a:pt x="3193236" y="2468631"/>
-                  </a:lnTo>
-                  <a:lnTo>
-                    <a:pt x="3270870" y="2462065"/>
-                  </a:lnTo>
-                  <a:lnTo>
-                    <a:pt x="3348504" y="2455457"/>
-                  </a:lnTo>
-                  <a:lnTo>
-                    <a:pt x="3426138" y="2448806"/>
-                  </a:lnTo>
-                  <a:lnTo>
-                    <a:pt x="3503772" y="2442112"/>
-                  </a:lnTo>
-                  <a:lnTo>
-                    <a:pt x="3581406" y="2435374"/>
-                  </a:lnTo>
-                  <a:lnTo>
-                    <a:pt x="3659040" y="2428594"/>
-                  </a:lnTo>
-                  <a:lnTo>
-                    <a:pt x="3736674" y="2421769"/>
-                  </a:lnTo>
-                  <a:lnTo>
-                    <a:pt x="3814308" y="2414900"/>
-                  </a:lnTo>
-                  <a:lnTo>
-                    <a:pt x="3891942" y="2407987"/>
-                  </a:lnTo>
-                  <a:lnTo>
-                    <a:pt x="3969576" y="2401029"/>
-                  </a:lnTo>
-                  <a:lnTo>
-                    <a:pt x="4047210" y="2394026"/>
-                  </a:lnTo>
-                  <a:lnTo>
-                    <a:pt x="4124844" y="2386977"/>
-                  </a:lnTo>
-                  <a:lnTo>
-                    <a:pt x="4202478" y="2379883"/>
-                  </a:lnTo>
-                  <a:lnTo>
-                    <a:pt x="4280112" y="2372744"/>
-                  </a:lnTo>
-                  <a:lnTo>
-                    <a:pt x="4357746" y="2365558"/>
-                  </a:lnTo>
-                  <a:lnTo>
-                    <a:pt x="4435380" y="2358325"/>
-                  </a:lnTo>
-                  <a:lnTo>
-                    <a:pt x="4513015" y="2351046"/>
-                  </a:lnTo>
-                  <a:lnTo>
-                    <a:pt x="4590649" y="2343720"/>
-                  </a:lnTo>
-                  <a:lnTo>
-                    <a:pt x="4668283" y="2336346"/>
-                  </a:lnTo>
-                  <a:lnTo>
-                    <a:pt x="4745917" y="2328925"/>
+                    <a:pt x="10086" y="66128"/>
+                  </a:lnTo>
+                  <a:lnTo>
+                    <a:pt x="86555" y="499247"/>
+                  </a:lnTo>
+                  <a:lnTo>
+                    <a:pt x="163023" y="873436"/>
+                  </a:lnTo>
+                  <a:lnTo>
+                    <a:pt x="239491" y="1196712"/>
+                  </a:lnTo>
+                  <a:lnTo>
+                    <a:pt x="315960" y="1476003"/>
+                  </a:lnTo>
+                  <a:lnTo>
+                    <a:pt x="392428" y="1717293"/>
+                  </a:lnTo>
+                  <a:lnTo>
+                    <a:pt x="468897" y="1925754"/>
+                  </a:lnTo>
+                  <a:lnTo>
+                    <a:pt x="545365" y="2105851"/>
+                  </a:lnTo>
+                  <a:lnTo>
+                    <a:pt x="621834" y="2261444"/>
+                  </a:lnTo>
+                  <a:lnTo>
+                    <a:pt x="698302" y="2395867"/>
+                  </a:lnTo>
+                  <a:lnTo>
+                    <a:pt x="774771" y="2474100"/>
+                  </a:lnTo>
+                  <a:lnTo>
+                    <a:pt x="851239" y="2469085"/>
+                  </a:lnTo>
+                  <a:lnTo>
+                    <a:pt x="927707" y="2464038"/>
+                  </a:lnTo>
+                  <a:lnTo>
+                    <a:pt x="1004176" y="2458958"/>
+                  </a:lnTo>
+                  <a:lnTo>
+                    <a:pt x="1080644" y="2453846"/>
+                  </a:lnTo>
+                  <a:lnTo>
+                    <a:pt x="1157113" y="2448700"/>
+                  </a:lnTo>
+                  <a:lnTo>
+                    <a:pt x="1233581" y="2443521"/>
+                  </a:lnTo>
+                  <a:lnTo>
+                    <a:pt x="1310050" y="2438309"/>
+                  </a:lnTo>
+                  <a:lnTo>
+                    <a:pt x="1386518" y="2433063"/>
+                  </a:lnTo>
+                  <a:lnTo>
+                    <a:pt x="1462986" y="2427782"/>
+                  </a:lnTo>
+                  <a:lnTo>
+                    <a:pt x="1539455" y="2422468"/>
+                  </a:lnTo>
+                  <a:lnTo>
+                    <a:pt x="1615923" y="2417119"/>
+                  </a:lnTo>
+                  <a:lnTo>
+                    <a:pt x="1692392" y="2411736"/>
+                  </a:lnTo>
+                  <a:lnTo>
+                    <a:pt x="1768860" y="2406318"/>
+                  </a:lnTo>
+                  <a:lnTo>
+                    <a:pt x="1845329" y="2400865"/>
+                  </a:lnTo>
+                  <a:lnTo>
+                    <a:pt x="1921797" y="2395377"/>
+                  </a:lnTo>
+                  <a:lnTo>
+                    <a:pt x="1998265" y="2389853"/>
+                  </a:lnTo>
+                  <a:lnTo>
+                    <a:pt x="2074734" y="2384293"/>
+                  </a:lnTo>
+                  <a:lnTo>
+                    <a:pt x="2151202" y="2378698"/>
+                  </a:lnTo>
+                  <a:lnTo>
+                    <a:pt x="2227671" y="2373066"/>
+                  </a:lnTo>
+                  <a:lnTo>
+                    <a:pt x="2304139" y="2367398"/>
+                  </a:lnTo>
+                  <a:lnTo>
+                    <a:pt x="2380608" y="2361693"/>
+                  </a:lnTo>
+                  <a:lnTo>
+                    <a:pt x="2457076" y="2355951"/>
+                  </a:lnTo>
+                  <a:lnTo>
+                    <a:pt x="2533544" y="2350172"/>
+                  </a:lnTo>
+                  <a:lnTo>
+                    <a:pt x="2610013" y="2344356"/>
+                  </a:lnTo>
+                  <a:lnTo>
+                    <a:pt x="2686481" y="2338502"/>
+                  </a:lnTo>
+                  <a:lnTo>
+                    <a:pt x="2762950" y="2332610"/>
+                  </a:lnTo>
+                  <a:lnTo>
+                    <a:pt x="2839418" y="2326680"/>
+                  </a:lnTo>
+                  <a:lnTo>
+                    <a:pt x="2915887" y="2320712"/>
+                  </a:lnTo>
+                  <a:lnTo>
+                    <a:pt x="2992355" y="2314705"/>
+                  </a:lnTo>
+                  <a:lnTo>
+                    <a:pt x="3068824" y="2308660"/>
+                  </a:lnTo>
+                  <a:lnTo>
+                    <a:pt x="3145292" y="2302575"/>
+                  </a:lnTo>
+                  <a:lnTo>
+                    <a:pt x="3221760" y="2296451"/>
+                  </a:lnTo>
+                  <a:lnTo>
+                    <a:pt x="3298229" y="2290287"/>
+                  </a:lnTo>
+                  <a:lnTo>
+                    <a:pt x="3374697" y="2284084"/>
+                  </a:lnTo>
+                  <a:lnTo>
+                    <a:pt x="3451166" y="2277840"/>
+                  </a:lnTo>
+                  <a:lnTo>
+                    <a:pt x="3527634" y="2271556"/>
+                  </a:lnTo>
+                  <a:lnTo>
+                    <a:pt x="3604103" y="2265231"/>
+                  </a:lnTo>
+                  <a:lnTo>
+                    <a:pt x="3680571" y="2258865"/>
+                  </a:lnTo>
+                  <a:lnTo>
+                    <a:pt x="3757039" y="2252458"/>
+                  </a:lnTo>
+                  <a:lnTo>
+                    <a:pt x="3833508" y="2246010"/>
+                  </a:lnTo>
+                  <a:lnTo>
+                    <a:pt x="3909976" y="2239520"/>
+                  </a:lnTo>
+                  <a:lnTo>
+                    <a:pt x="3986445" y="2232988"/>
+                  </a:lnTo>
+                  <a:lnTo>
+                    <a:pt x="4062913" y="2226414"/>
+                  </a:lnTo>
+                  <a:lnTo>
+                    <a:pt x="4139382" y="2219797"/>
+                  </a:lnTo>
+                  <a:lnTo>
+                    <a:pt x="4215850" y="2213138"/>
+                  </a:lnTo>
+                  <a:lnTo>
+                    <a:pt x="4292318" y="2206435"/>
+                  </a:lnTo>
+                  <a:lnTo>
+                    <a:pt x="4368787" y="2199689"/>
+                  </a:lnTo>
+                  <a:lnTo>
+                    <a:pt x="4445255" y="2192900"/>
+                  </a:lnTo>
+                  <a:lnTo>
+                    <a:pt x="4521724" y="2186066"/>
+                  </a:lnTo>
+                  <a:lnTo>
+                    <a:pt x="4598192" y="2179188"/>
+                  </a:lnTo>
+                  <a:lnTo>
+                    <a:pt x="4674661" y="2172266"/>
                   </a:lnTo>
                 </a:path>
               </a:pathLst>
@@ -3724,300 +3724,300 @@
           </p:nvSpPr>
           <p:spPr>
             <a:xfrm>
-              <a:off x="817517" y="4731371"/>
-              <a:ext cx="7370972" cy="825423"/>
+              <a:off x="915645" y="4688252"/>
+              <a:ext cx="7260303" cy="769900"/>
             </a:xfrm>
             <a:custGeom>
               <a:avLst/>
               <a:pathLst>
-                <a:path w="7370972" h="825423">
+                <a:path w="7260303" h="769900">
                   <a:moveTo>
-                    <a:pt x="7370972" y="825423"/>
+                    <a:pt x="7260303" y="769900"/>
                   </a:moveTo>
                   <a:lnTo>
-                    <a:pt x="7293338" y="825351"/>
-                  </a:lnTo>
-                  <a:lnTo>
-                    <a:pt x="7215704" y="825268"/>
-                  </a:lnTo>
-                  <a:lnTo>
-                    <a:pt x="7138070" y="825172"/>
-                  </a:lnTo>
-                  <a:lnTo>
-                    <a:pt x="7060436" y="825061"/>
-                  </a:lnTo>
-                  <a:lnTo>
-                    <a:pt x="6982802" y="824932"/>
-                  </a:lnTo>
-                  <a:lnTo>
-                    <a:pt x="6905168" y="824783"/>
-                  </a:lnTo>
-                  <a:lnTo>
-                    <a:pt x="6827534" y="824610"/>
-                  </a:lnTo>
-                  <a:lnTo>
-                    <a:pt x="6749900" y="824410"/>
-                  </a:lnTo>
-                  <a:lnTo>
-                    <a:pt x="6672266" y="824179"/>
-                  </a:lnTo>
-                  <a:lnTo>
-                    <a:pt x="6594632" y="823912"/>
-                  </a:lnTo>
-                  <a:lnTo>
-                    <a:pt x="6516998" y="823602"/>
-                  </a:lnTo>
-                  <a:lnTo>
-                    <a:pt x="6439364" y="823243"/>
-                  </a:lnTo>
-                  <a:lnTo>
-                    <a:pt x="6361730" y="822828"/>
-                  </a:lnTo>
-                  <a:lnTo>
-                    <a:pt x="6284096" y="822348"/>
-                  </a:lnTo>
-                  <a:lnTo>
-                    <a:pt x="6206462" y="821792"/>
-                  </a:lnTo>
-                  <a:lnTo>
-                    <a:pt x="6128827" y="821148"/>
-                  </a:lnTo>
-                  <a:lnTo>
-                    <a:pt x="6051193" y="820403"/>
-                  </a:lnTo>
-                  <a:lnTo>
-                    <a:pt x="5973559" y="819541"/>
-                  </a:lnTo>
-                  <a:lnTo>
-                    <a:pt x="5895925" y="818543"/>
-                  </a:lnTo>
-                  <a:lnTo>
-                    <a:pt x="5818291" y="817388"/>
-                  </a:lnTo>
-                  <a:lnTo>
-                    <a:pt x="5740657" y="816051"/>
-                  </a:lnTo>
-                  <a:lnTo>
-                    <a:pt x="5663023" y="814503"/>
-                  </a:lnTo>
-                  <a:lnTo>
-                    <a:pt x="5585389" y="812712"/>
-                  </a:lnTo>
-                  <a:lnTo>
-                    <a:pt x="5507755" y="810638"/>
-                  </a:lnTo>
-                  <a:lnTo>
-                    <a:pt x="5430121" y="808238"/>
-                  </a:lnTo>
-                  <a:lnTo>
-                    <a:pt x="5352487" y="805459"/>
-                  </a:lnTo>
-                  <a:lnTo>
-                    <a:pt x="5274853" y="802244"/>
-                  </a:lnTo>
-                  <a:lnTo>
-                    <a:pt x="5197219" y="798522"/>
-                  </a:lnTo>
-                  <a:lnTo>
-                    <a:pt x="5119585" y="794213"/>
-                  </a:lnTo>
-                  <a:lnTo>
-                    <a:pt x="5041951" y="789226"/>
-                  </a:lnTo>
-                  <a:lnTo>
-                    <a:pt x="4964317" y="783454"/>
-                  </a:lnTo>
-                  <a:lnTo>
-                    <a:pt x="4886683" y="776773"/>
-                  </a:lnTo>
-                  <a:lnTo>
-                    <a:pt x="4809049" y="769039"/>
-                  </a:lnTo>
-                  <a:lnTo>
-                    <a:pt x="4731415" y="760088"/>
-                  </a:lnTo>
-                  <a:lnTo>
-                    <a:pt x="4653781" y="749726"/>
-                  </a:lnTo>
-                  <a:lnTo>
-                    <a:pt x="4576147" y="737733"/>
-                  </a:lnTo>
-                  <a:lnTo>
-                    <a:pt x="4498513" y="723851"/>
-                  </a:lnTo>
-                  <a:lnTo>
-                    <a:pt x="4420879" y="707783"/>
-                  </a:lnTo>
-                  <a:lnTo>
-                    <a:pt x="4343244" y="689184"/>
-                  </a:lnTo>
-                  <a:lnTo>
-                    <a:pt x="4265610" y="667657"/>
-                  </a:lnTo>
-                  <a:lnTo>
-                    <a:pt x="4187976" y="642739"/>
-                  </a:lnTo>
-                  <a:lnTo>
-                    <a:pt x="4110342" y="613896"/>
-                  </a:lnTo>
-                  <a:lnTo>
-                    <a:pt x="4032708" y="580511"/>
-                  </a:lnTo>
-                  <a:lnTo>
-                    <a:pt x="3955074" y="541869"/>
-                  </a:lnTo>
-                  <a:lnTo>
-                    <a:pt x="3877440" y="497141"/>
-                  </a:lnTo>
-                  <a:lnTo>
-                    <a:pt x="3799806" y="445368"/>
-                  </a:lnTo>
-                  <a:lnTo>
-                    <a:pt x="3722172" y="385442"/>
-                  </a:lnTo>
-                  <a:lnTo>
-                    <a:pt x="3644538" y="316079"/>
-                  </a:lnTo>
-                  <a:lnTo>
-                    <a:pt x="3566904" y="235791"/>
-                  </a:lnTo>
-                  <a:lnTo>
-                    <a:pt x="3489270" y="142859"/>
-                  </a:lnTo>
-                  <a:lnTo>
-                    <a:pt x="3411636" y="35291"/>
-                  </a:lnTo>
-                  <a:lnTo>
-                    <a:pt x="3334002" y="0"/>
-                  </a:lnTo>
-                  <a:lnTo>
-                    <a:pt x="3256368" y="5307"/>
-                  </a:lnTo>
-                  <a:lnTo>
-                    <a:pt x="3178734" y="10580"/>
-                  </a:lnTo>
-                  <a:lnTo>
-                    <a:pt x="3101100" y="15820"/>
-                  </a:lnTo>
-                  <a:lnTo>
-                    <a:pt x="3023466" y="21026"/>
-                  </a:lnTo>
-                  <a:lnTo>
-                    <a:pt x="2945832" y="26198"/>
-                  </a:lnTo>
-                  <a:lnTo>
-                    <a:pt x="2868198" y="31337"/>
-                  </a:lnTo>
-                  <a:lnTo>
-                    <a:pt x="2790564" y="36443"/>
-                  </a:lnTo>
-                  <a:lnTo>
-                    <a:pt x="2712930" y="41516"/>
-                  </a:lnTo>
-                  <a:lnTo>
-                    <a:pt x="2635295" y="46557"/>
-                  </a:lnTo>
-                  <a:lnTo>
-                    <a:pt x="2557661" y="51565"/>
-                  </a:lnTo>
-                  <a:lnTo>
-                    <a:pt x="2480027" y="56541"/>
-                  </a:lnTo>
-                  <a:lnTo>
-                    <a:pt x="2402393" y="61485"/>
-                  </a:lnTo>
-                  <a:lnTo>
-                    <a:pt x="2324759" y="66398"/>
-                  </a:lnTo>
-                  <a:lnTo>
-                    <a:pt x="2247125" y="71279"/>
-                  </a:lnTo>
-                  <a:lnTo>
-                    <a:pt x="2169491" y="76128"/>
-                  </a:lnTo>
-                  <a:lnTo>
-                    <a:pt x="2091857" y="80946"/>
-                  </a:lnTo>
-                  <a:lnTo>
-                    <a:pt x="2014223" y="85733"/>
-                  </a:lnTo>
-                  <a:lnTo>
-                    <a:pt x="1936589" y="90490"/>
-                  </a:lnTo>
-                  <a:lnTo>
-                    <a:pt x="1858955" y="95216"/>
-                  </a:lnTo>
-                  <a:lnTo>
-                    <a:pt x="1781321" y="99911"/>
-                  </a:lnTo>
-                  <a:lnTo>
-                    <a:pt x="1703687" y="104577"/>
-                  </a:lnTo>
-                  <a:lnTo>
-                    <a:pt x="1626053" y="109212"/>
-                  </a:lnTo>
-                  <a:lnTo>
-                    <a:pt x="1548419" y="113818"/>
-                  </a:lnTo>
-                  <a:lnTo>
-                    <a:pt x="1470785" y="118394"/>
-                  </a:lnTo>
-                  <a:lnTo>
-                    <a:pt x="1393151" y="122940"/>
-                  </a:lnTo>
-                  <a:lnTo>
-                    <a:pt x="1315517" y="127458"/>
-                  </a:lnTo>
-                  <a:lnTo>
-                    <a:pt x="1237883" y="131946"/>
-                  </a:lnTo>
-                  <a:lnTo>
-                    <a:pt x="1160249" y="136406"/>
-                  </a:lnTo>
-                  <a:lnTo>
-                    <a:pt x="1082615" y="140837"/>
-                  </a:lnTo>
-                  <a:lnTo>
-                    <a:pt x="1004981" y="145239"/>
-                  </a:lnTo>
-                  <a:lnTo>
-                    <a:pt x="927346" y="149613"/>
-                  </a:lnTo>
-                  <a:lnTo>
-                    <a:pt x="849712" y="153959"/>
-                  </a:lnTo>
-                  <a:lnTo>
-                    <a:pt x="772078" y="158277"/>
-                  </a:lnTo>
-                  <a:lnTo>
-                    <a:pt x="694444" y="162567"/>
-                  </a:lnTo>
-                  <a:lnTo>
-                    <a:pt x="616810" y="166830"/>
-                  </a:lnTo>
-                  <a:lnTo>
-                    <a:pt x="539176" y="171065"/>
-                  </a:lnTo>
-                  <a:lnTo>
-                    <a:pt x="461542" y="175274"/>
-                  </a:lnTo>
-                  <a:lnTo>
-                    <a:pt x="383908" y="179455"/>
-                  </a:lnTo>
-                  <a:lnTo>
-                    <a:pt x="306274" y="183609"/>
-                  </a:lnTo>
-                  <a:lnTo>
-                    <a:pt x="228640" y="187736"/>
-                  </a:lnTo>
-                  <a:lnTo>
-                    <a:pt x="151006" y="191837"/>
-                  </a:lnTo>
-                  <a:lnTo>
-                    <a:pt x="73372" y="195912"/>
-                  </a:lnTo>
-                  <a:lnTo>
-                    <a:pt x="0" y="199738"/>
+                    <a:pt x="7183835" y="769833"/>
+                  </a:lnTo>
+                  <a:lnTo>
+                    <a:pt x="7107366" y="769755"/>
+                  </a:lnTo>
+                  <a:lnTo>
+                    <a:pt x="7030898" y="769665"/>
+                  </a:lnTo>
+                  <a:lnTo>
+                    <a:pt x="6954429" y="769562"/>
+                  </a:lnTo>
+                  <a:lnTo>
+                    <a:pt x="6877961" y="769442"/>
+                  </a:lnTo>
+                  <a:lnTo>
+                    <a:pt x="6801492" y="769303"/>
+                  </a:lnTo>
+                  <a:lnTo>
+                    <a:pt x="6725024" y="769142"/>
+                  </a:lnTo>
+                  <a:lnTo>
+                    <a:pt x="6648556" y="768955"/>
+                  </a:lnTo>
+                  <a:lnTo>
+                    <a:pt x="6572087" y="768740"/>
+                  </a:lnTo>
+                  <a:lnTo>
+                    <a:pt x="6495619" y="768490"/>
+                  </a:lnTo>
+                  <a:lnTo>
+                    <a:pt x="6419150" y="768201"/>
+                  </a:lnTo>
+                  <a:lnTo>
+                    <a:pt x="6342682" y="767867"/>
+                  </a:lnTo>
+                  <a:lnTo>
+                    <a:pt x="6266213" y="767480"/>
+                  </a:lnTo>
+                  <a:lnTo>
+                    <a:pt x="6189745" y="767032"/>
+                  </a:lnTo>
+                  <a:lnTo>
+                    <a:pt x="6113277" y="766513"/>
+                  </a:lnTo>
+                  <a:lnTo>
+                    <a:pt x="6036808" y="765913"/>
+                  </a:lnTo>
+                  <a:lnTo>
+                    <a:pt x="5960340" y="765218"/>
+                  </a:lnTo>
+                  <a:lnTo>
+                    <a:pt x="5883871" y="764414"/>
+                  </a:lnTo>
+                  <a:lnTo>
+                    <a:pt x="5807403" y="763483"/>
+                  </a:lnTo>
+                  <a:lnTo>
+                    <a:pt x="5730934" y="762405"/>
+                  </a:lnTo>
+                  <a:lnTo>
+                    <a:pt x="5654466" y="761158"/>
+                  </a:lnTo>
+                  <a:lnTo>
+                    <a:pt x="5577998" y="759714"/>
+                  </a:lnTo>
+                  <a:lnTo>
+                    <a:pt x="5501529" y="758043"/>
+                  </a:lnTo>
+                  <a:lnTo>
+                    <a:pt x="5425061" y="756109"/>
+                  </a:lnTo>
+                  <a:lnTo>
+                    <a:pt x="5348592" y="753870"/>
+                  </a:lnTo>
+                  <a:lnTo>
+                    <a:pt x="5272124" y="751279"/>
+                  </a:lnTo>
+                  <a:lnTo>
+                    <a:pt x="5195655" y="748280"/>
+                  </a:lnTo>
+                  <a:lnTo>
+                    <a:pt x="5119187" y="744808"/>
+                  </a:lnTo>
+                  <a:lnTo>
+                    <a:pt x="5042719" y="740789"/>
+                  </a:lnTo>
+                  <a:lnTo>
+                    <a:pt x="4966250" y="736138"/>
+                  </a:lnTo>
+                  <a:lnTo>
+                    <a:pt x="4889782" y="730754"/>
+                  </a:lnTo>
+                  <a:lnTo>
+                    <a:pt x="4813313" y="724522"/>
+                  </a:lnTo>
+                  <a:lnTo>
+                    <a:pt x="4736845" y="717309"/>
+                  </a:lnTo>
+                  <a:lnTo>
+                    <a:pt x="4660376" y="708959"/>
+                  </a:lnTo>
+                  <a:lnTo>
+                    <a:pt x="4583908" y="699295"/>
+                  </a:lnTo>
+                  <a:lnTo>
+                    <a:pt x="4507439" y="688108"/>
+                  </a:lnTo>
+                  <a:lnTo>
+                    <a:pt x="4430971" y="675160"/>
+                  </a:lnTo>
+                  <a:lnTo>
+                    <a:pt x="4354503" y="660173"/>
+                  </a:lnTo>
+                  <a:lnTo>
+                    <a:pt x="4278034" y="642826"/>
+                  </a:lnTo>
+                  <a:lnTo>
+                    <a:pt x="4201566" y="622746"/>
+                  </a:lnTo>
+                  <a:lnTo>
+                    <a:pt x="4125097" y="599504"/>
+                  </a:lnTo>
+                  <a:lnTo>
+                    <a:pt x="4048629" y="572602"/>
+                  </a:lnTo>
+                  <a:lnTo>
+                    <a:pt x="3972160" y="541463"/>
+                  </a:lnTo>
+                  <a:lnTo>
+                    <a:pt x="3895692" y="505419"/>
+                  </a:lnTo>
+                  <a:lnTo>
+                    <a:pt x="3819224" y="463700"/>
+                  </a:lnTo>
+                  <a:lnTo>
+                    <a:pt x="3742755" y="415410"/>
+                  </a:lnTo>
+                  <a:lnTo>
+                    <a:pt x="3666287" y="359515"/>
+                  </a:lnTo>
+                  <a:lnTo>
+                    <a:pt x="3589818" y="294817"/>
+                  </a:lnTo>
+                  <a:lnTo>
+                    <a:pt x="3513350" y="219930"/>
+                  </a:lnTo>
+                  <a:lnTo>
+                    <a:pt x="3436881" y="133249"/>
+                  </a:lnTo>
+                  <a:lnTo>
+                    <a:pt x="3360413" y="32917"/>
+                  </a:lnTo>
+                  <a:lnTo>
+                    <a:pt x="3283945" y="0"/>
+                  </a:lnTo>
+                  <a:lnTo>
+                    <a:pt x="3207476" y="4950"/>
+                  </a:lnTo>
+                  <a:lnTo>
+                    <a:pt x="3131008" y="9869"/>
+                  </a:lnTo>
+                  <a:lnTo>
+                    <a:pt x="3054539" y="14756"/>
+                  </a:lnTo>
+                  <a:lnTo>
+                    <a:pt x="2978071" y="19611"/>
+                  </a:lnTo>
+                  <a:lnTo>
+                    <a:pt x="2901602" y="24436"/>
+                  </a:lnTo>
+                  <a:lnTo>
+                    <a:pt x="2825134" y="29229"/>
+                  </a:lnTo>
+                  <a:lnTo>
+                    <a:pt x="2748666" y="33992"/>
+                  </a:lnTo>
+                  <a:lnTo>
+                    <a:pt x="2672197" y="38724"/>
+                  </a:lnTo>
+                  <a:lnTo>
+                    <a:pt x="2595729" y="43425"/>
+                  </a:lnTo>
+                  <a:lnTo>
+                    <a:pt x="2519260" y="48097"/>
+                  </a:lnTo>
+                  <a:lnTo>
+                    <a:pt x="2442792" y="52738"/>
+                  </a:lnTo>
+                  <a:lnTo>
+                    <a:pt x="2366323" y="57350"/>
+                  </a:lnTo>
+                  <a:lnTo>
+                    <a:pt x="2289855" y="61931"/>
+                  </a:lnTo>
+                  <a:lnTo>
+                    <a:pt x="2213386" y="66484"/>
+                  </a:lnTo>
+                  <a:lnTo>
+                    <a:pt x="2136918" y="71007"/>
+                  </a:lnTo>
+                  <a:lnTo>
+                    <a:pt x="2060450" y="75501"/>
+                  </a:lnTo>
+                  <a:lnTo>
+                    <a:pt x="1983981" y="79966"/>
+                  </a:lnTo>
+                  <a:lnTo>
+                    <a:pt x="1907513" y="84403"/>
+                  </a:lnTo>
+                  <a:lnTo>
+                    <a:pt x="1831044" y="88811"/>
+                  </a:lnTo>
+                  <a:lnTo>
+                    <a:pt x="1754576" y="93191"/>
+                  </a:lnTo>
+                  <a:lnTo>
+                    <a:pt x="1678107" y="97542"/>
+                  </a:lnTo>
+                  <a:lnTo>
+                    <a:pt x="1601639" y="101866"/>
+                  </a:lnTo>
+                  <a:lnTo>
+                    <a:pt x="1525171" y="106162"/>
+                  </a:lnTo>
+                  <a:lnTo>
+                    <a:pt x="1448702" y="110430"/>
+                  </a:lnTo>
+                  <a:lnTo>
+                    <a:pt x="1372234" y="114671"/>
+                  </a:lnTo>
+                  <a:lnTo>
+                    <a:pt x="1295765" y="118884"/>
+                  </a:lnTo>
+                  <a:lnTo>
+                    <a:pt x="1219297" y="123071"/>
+                  </a:lnTo>
+                  <a:lnTo>
+                    <a:pt x="1142828" y="127230"/>
+                  </a:lnTo>
+                  <a:lnTo>
+                    <a:pt x="1066360" y="131363"/>
+                  </a:lnTo>
+                  <a:lnTo>
+                    <a:pt x="989892" y="135469"/>
+                  </a:lnTo>
+                  <a:lnTo>
+                    <a:pt x="913423" y="139549"/>
+                  </a:lnTo>
+                  <a:lnTo>
+                    <a:pt x="836955" y="143603"/>
+                  </a:lnTo>
+                  <a:lnTo>
+                    <a:pt x="760486" y="147630"/>
+                  </a:lnTo>
+                  <a:lnTo>
+                    <a:pt x="684018" y="151632"/>
+                  </a:lnTo>
+                  <a:lnTo>
+                    <a:pt x="607549" y="155608"/>
+                  </a:lnTo>
+                  <a:lnTo>
+                    <a:pt x="531081" y="159558"/>
+                  </a:lnTo>
+                  <a:lnTo>
+                    <a:pt x="454613" y="163483"/>
+                  </a:lnTo>
+                  <a:lnTo>
+                    <a:pt x="378144" y="167383"/>
+                  </a:lnTo>
+                  <a:lnTo>
+                    <a:pt x="301676" y="171258"/>
+                  </a:lnTo>
+                  <a:lnTo>
+                    <a:pt x="225207" y="175108"/>
+                  </a:lnTo>
+                  <a:lnTo>
+                    <a:pt x="148739" y="178933"/>
+                  </a:lnTo>
+                  <a:lnTo>
+                    <a:pt x="72270" y="182734"/>
+                  </a:lnTo>
+                  <a:lnTo>
+                    <a:pt x="0" y="186302"/>
                   </a:lnTo>
                 </a:path>
               </a:pathLst>
@@ -4037,231 +4037,231 @@
           </p:nvSpPr>
           <p:spPr>
             <a:xfrm>
-              <a:off x="2610200" y="2073503"/>
-              <a:ext cx="5578289" cy="3460808"/>
+              <a:off x="2681412" y="2209169"/>
+              <a:ext cx="5494536" cy="3228013"/>
             </a:xfrm>
             <a:custGeom>
               <a:avLst/>
               <a:pathLst>
-                <a:path w="5578289" h="3460808">
+                <a:path w="5494536" h="3228013">
                   <a:moveTo>
                     <a:pt x="0" y="0"/>
                   </a:moveTo>
                   <a:lnTo>
-                    <a:pt x="66272" y="202789"/>
-                  </a:lnTo>
-                  <a:lnTo>
-                    <a:pt x="143906" y="424304"/>
-                  </a:lnTo>
-                  <a:lnTo>
-                    <a:pt x="221540" y="630864"/>
-                  </a:lnTo>
-                  <a:lnTo>
-                    <a:pt x="299174" y="823478"/>
-                  </a:lnTo>
-                  <a:lnTo>
-                    <a:pt x="376808" y="1003087"/>
-                  </a:lnTo>
-                  <a:lnTo>
-                    <a:pt x="454442" y="1170570"/>
-                  </a:lnTo>
-                  <a:lnTo>
-                    <a:pt x="532076" y="1326745"/>
-                  </a:lnTo>
-                  <a:lnTo>
-                    <a:pt x="609711" y="1472376"/>
-                  </a:lnTo>
-                  <a:lnTo>
-                    <a:pt x="687345" y="1608175"/>
-                  </a:lnTo>
-                  <a:lnTo>
-                    <a:pt x="764979" y="1734805"/>
-                  </a:lnTo>
-                  <a:lnTo>
-                    <a:pt x="842613" y="1852886"/>
-                  </a:lnTo>
-                  <a:lnTo>
-                    <a:pt x="920247" y="1962994"/>
-                  </a:lnTo>
-                  <a:lnTo>
-                    <a:pt x="997881" y="2065669"/>
-                  </a:lnTo>
-                  <a:lnTo>
-                    <a:pt x="1075515" y="2161411"/>
-                  </a:lnTo>
-                  <a:lnTo>
-                    <a:pt x="1153149" y="2250689"/>
-                  </a:lnTo>
-                  <a:lnTo>
-                    <a:pt x="1230783" y="2333939"/>
-                  </a:lnTo>
-                  <a:lnTo>
-                    <a:pt x="1308417" y="2411569"/>
-                  </a:lnTo>
-                  <a:lnTo>
-                    <a:pt x="1386051" y="2483958"/>
-                  </a:lnTo>
-                  <a:lnTo>
-                    <a:pt x="1463685" y="2551459"/>
-                  </a:lnTo>
-                  <a:lnTo>
-                    <a:pt x="1541319" y="2614403"/>
-                  </a:lnTo>
-                  <a:lnTo>
-                    <a:pt x="1618953" y="2673097"/>
-                  </a:lnTo>
-                  <a:lnTo>
-                    <a:pt x="1696587" y="2727828"/>
-                  </a:lnTo>
-                  <a:lnTo>
-                    <a:pt x="1774221" y="2778865"/>
-                  </a:lnTo>
-                  <a:lnTo>
-                    <a:pt x="1851855" y="2826455"/>
-                  </a:lnTo>
-                  <a:lnTo>
-                    <a:pt x="1929489" y="2870832"/>
-                  </a:lnTo>
-                  <a:lnTo>
-                    <a:pt x="2007123" y="2912214"/>
-                  </a:lnTo>
-                  <a:lnTo>
-                    <a:pt x="2084757" y="2950801"/>
-                  </a:lnTo>
-                  <a:lnTo>
-                    <a:pt x="2162391" y="2986783"/>
-                  </a:lnTo>
-                  <a:lnTo>
-                    <a:pt x="2240025" y="3020336"/>
-                  </a:lnTo>
-                  <a:lnTo>
-                    <a:pt x="2317660" y="3051623"/>
-                  </a:lnTo>
-                  <a:lnTo>
-                    <a:pt x="2395294" y="3080798"/>
-                  </a:lnTo>
-                  <a:lnTo>
-                    <a:pt x="2472928" y="3108003"/>
-                  </a:lnTo>
-                  <a:lnTo>
-                    <a:pt x="2550562" y="3133372"/>
-                  </a:lnTo>
-                  <a:lnTo>
-                    <a:pt x="2628196" y="3157028"/>
-                  </a:lnTo>
-                  <a:lnTo>
-                    <a:pt x="2705830" y="3179086"/>
-                  </a:lnTo>
-                  <a:lnTo>
-                    <a:pt x="2783464" y="3199655"/>
-                  </a:lnTo>
-                  <a:lnTo>
-                    <a:pt x="2861098" y="3218836"/>
-                  </a:lnTo>
-                  <a:lnTo>
-                    <a:pt x="2938732" y="3236722"/>
-                  </a:lnTo>
-                  <a:lnTo>
-                    <a:pt x="3016366" y="3253400"/>
-                  </a:lnTo>
-                  <a:lnTo>
-                    <a:pt x="3094000" y="3268952"/>
-                  </a:lnTo>
-                  <a:lnTo>
-                    <a:pt x="3171634" y="3283454"/>
-                  </a:lnTo>
-                  <a:lnTo>
-                    <a:pt x="3249268" y="3296976"/>
-                  </a:lnTo>
-                  <a:lnTo>
-                    <a:pt x="3326902" y="3309586"/>
-                  </a:lnTo>
-                  <a:lnTo>
-                    <a:pt x="3404536" y="3321345"/>
-                  </a:lnTo>
-                  <a:lnTo>
-                    <a:pt x="3482170" y="3332309"/>
-                  </a:lnTo>
-                  <a:lnTo>
-                    <a:pt x="3559804" y="3342534"/>
-                  </a:lnTo>
-                  <a:lnTo>
-                    <a:pt x="3637438" y="3352068"/>
-                  </a:lnTo>
-                  <a:lnTo>
-                    <a:pt x="3715072" y="3360958"/>
-                  </a:lnTo>
-                  <a:lnTo>
-                    <a:pt x="3792706" y="3369248"/>
-                  </a:lnTo>
-                  <a:lnTo>
-                    <a:pt x="3870340" y="3376979"/>
-                  </a:lnTo>
-                  <a:lnTo>
-                    <a:pt x="3947974" y="3384187"/>
-                  </a:lnTo>
-                  <a:lnTo>
-                    <a:pt x="4025609" y="3390909"/>
-                  </a:lnTo>
-                  <a:lnTo>
-                    <a:pt x="4103243" y="3397177"/>
-                  </a:lnTo>
-                  <a:lnTo>
-                    <a:pt x="4180877" y="3403022"/>
-                  </a:lnTo>
-                  <a:lnTo>
-                    <a:pt x="4258511" y="3408472"/>
-                  </a:lnTo>
-                  <a:lnTo>
-                    <a:pt x="4336145" y="3413554"/>
-                  </a:lnTo>
-                  <a:lnTo>
-                    <a:pt x="4413779" y="3418293"/>
-                  </a:lnTo>
-                  <a:lnTo>
-                    <a:pt x="4491413" y="3422712"/>
-                  </a:lnTo>
-                  <a:lnTo>
-                    <a:pt x="4569047" y="3426833"/>
-                  </a:lnTo>
-                  <a:lnTo>
-                    <a:pt x="4646681" y="3430676"/>
-                  </a:lnTo>
-                  <a:lnTo>
-                    <a:pt x="4724315" y="3434259"/>
-                  </a:lnTo>
-                  <a:lnTo>
-                    <a:pt x="4801949" y="3437600"/>
-                  </a:lnTo>
-                  <a:lnTo>
-                    <a:pt x="4879583" y="3440715"/>
-                  </a:lnTo>
-                  <a:lnTo>
-                    <a:pt x="4957217" y="3443621"/>
-                  </a:lnTo>
-                  <a:lnTo>
-                    <a:pt x="5034851" y="3446330"/>
-                  </a:lnTo>
-                  <a:lnTo>
-                    <a:pt x="5112485" y="3448856"/>
-                  </a:lnTo>
-                  <a:lnTo>
-                    <a:pt x="5190119" y="3451212"/>
-                  </a:lnTo>
-                  <a:lnTo>
-                    <a:pt x="5267753" y="3453408"/>
-                  </a:lnTo>
-                  <a:lnTo>
-                    <a:pt x="5345387" y="3455457"/>
-                  </a:lnTo>
-                  <a:lnTo>
-                    <a:pt x="5423021" y="3457367"/>
-                  </a:lnTo>
-                  <a:lnTo>
-                    <a:pt x="5500655" y="3459148"/>
-                  </a:lnTo>
-                  <a:lnTo>
-                    <a:pt x="5578289" y="3460808"/>
+                    <a:pt x="65277" y="189148"/>
+                  </a:lnTo>
+                  <a:lnTo>
+                    <a:pt x="141746" y="395763"/>
+                  </a:lnTo>
+                  <a:lnTo>
+                    <a:pt x="218214" y="588428"/>
+                  </a:lnTo>
+                  <a:lnTo>
+                    <a:pt x="294682" y="768085"/>
+                  </a:lnTo>
+                  <a:lnTo>
+                    <a:pt x="371151" y="935613"/>
+                  </a:lnTo>
+                  <a:lnTo>
+                    <a:pt x="447619" y="1091830"/>
+                  </a:lnTo>
+                  <a:lnTo>
+                    <a:pt x="524088" y="1237500"/>
+                  </a:lnTo>
+                  <a:lnTo>
+                    <a:pt x="600556" y="1373335"/>
+                  </a:lnTo>
+                  <a:lnTo>
+                    <a:pt x="677025" y="1499999"/>
+                  </a:lnTo>
+                  <a:lnTo>
+                    <a:pt x="753493" y="1618111"/>
+                  </a:lnTo>
+                  <a:lnTo>
+                    <a:pt x="829962" y="1728249"/>
+                  </a:lnTo>
+                  <a:lnTo>
+                    <a:pt x="906430" y="1830951"/>
+                  </a:lnTo>
+                  <a:lnTo>
+                    <a:pt x="982898" y="1926719"/>
+                  </a:lnTo>
+                  <a:lnTo>
+                    <a:pt x="1059367" y="2016021"/>
+                  </a:lnTo>
+                  <a:lnTo>
+                    <a:pt x="1135835" y="2099293"/>
+                  </a:lnTo>
+                  <a:lnTo>
+                    <a:pt x="1212304" y="2176944"/>
+                  </a:lnTo>
+                  <a:lnTo>
+                    <a:pt x="1288772" y="2249352"/>
+                  </a:lnTo>
+                  <a:lnTo>
+                    <a:pt x="1365241" y="2316871"/>
+                  </a:lnTo>
+                  <a:lnTo>
+                    <a:pt x="1441709" y="2379832"/>
+                  </a:lnTo>
+                  <a:lnTo>
+                    <a:pt x="1518177" y="2438542"/>
+                  </a:lnTo>
+                  <a:lnTo>
+                    <a:pt x="1594646" y="2493288"/>
+                  </a:lnTo>
+                  <a:lnTo>
+                    <a:pt x="1671114" y="2544337"/>
+                  </a:lnTo>
+                  <a:lnTo>
+                    <a:pt x="1747583" y="2591941"/>
+                  </a:lnTo>
+                  <a:lnTo>
+                    <a:pt x="1824051" y="2636330"/>
+                  </a:lnTo>
+                  <a:lnTo>
+                    <a:pt x="1900520" y="2677722"/>
+                  </a:lnTo>
+                  <a:lnTo>
+                    <a:pt x="1976988" y="2716320"/>
+                  </a:lnTo>
+                  <a:lnTo>
+                    <a:pt x="2053456" y="2752311"/>
+                  </a:lnTo>
+                  <a:lnTo>
+                    <a:pt x="2129925" y="2785873"/>
+                  </a:lnTo>
+                  <a:lnTo>
+                    <a:pt x="2206393" y="2817169"/>
+                  </a:lnTo>
+                  <a:lnTo>
+                    <a:pt x="2282862" y="2846352"/>
+                  </a:lnTo>
+                  <a:lnTo>
+                    <a:pt x="2359330" y="2873564"/>
+                  </a:lnTo>
+                  <a:lnTo>
+                    <a:pt x="2435799" y="2898939"/>
+                  </a:lnTo>
+                  <a:lnTo>
+                    <a:pt x="2512267" y="2922601"/>
+                  </a:lnTo>
+                  <a:lnTo>
+                    <a:pt x="2588735" y="2944666"/>
+                  </a:lnTo>
+                  <a:lnTo>
+                    <a:pt x="2665204" y="2965241"/>
+                  </a:lnTo>
+                  <a:lnTo>
+                    <a:pt x="2741672" y="2984426"/>
+                  </a:lnTo>
+                  <a:lnTo>
+                    <a:pt x="2818141" y="3002317"/>
+                  </a:lnTo>
+                  <a:lnTo>
+                    <a:pt x="2894609" y="3018999"/>
+                  </a:lnTo>
+                  <a:lnTo>
+                    <a:pt x="2971078" y="3034555"/>
+                  </a:lnTo>
+                  <a:lnTo>
+                    <a:pt x="3047546" y="3049061"/>
+                  </a:lnTo>
+                  <a:lnTo>
+                    <a:pt x="3124015" y="3062588"/>
+                  </a:lnTo>
+                  <a:lnTo>
+                    <a:pt x="3200483" y="3075201"/>
+                  </a:lnTo>
+                  <a:lnTo>
+                    <a:pt x="3276951" y="3086963"/>
+                  </a:lnTo>
+                  <a:lnTo>
+                    <a:pt x="3353420" y="3097930"/>
+                  </a:lnTo>
+                  <a:lnTo>
+                    <a:pt x="3429888" y="3108157"/>
+                  </a:lnTo>
+                  <a:lnTo>
+                    <a:pt x="3506357" y="3117694"/>
+                  </a:lnTo>
+                  <a:lnTo>
+                    <a:pt x="3582825" y="3126586"/>
+                  </a:lnTo>
+                  <a:lnTo>
+                    <a:pt x="3659294" y="3134879"/>
+                  </a:lnTo>
+                  <a:lnTo>
+                    <a:pt x="3735762" y="3142611"/>
+                  </a:lnTo>
+                  <a:lnTo>
+                    <a:pt x="3812230" y="3149822"/>
+                  </a:lnTo>
+                  <a:lnTo>
+                    <a:pt x="3888699" y="3156545"/>
+                  </a:lnTo>
+                  <a:lnTo>
+                    <a:pt x="3965167" y="3162815"/>
+                  </a:lnTo>
+                  <a:lnTo>
+                    <a:pt x="4041636" y="3168661"/>
+                  </a:lnTo>
+                  <a:lnTo>
+                    <a:pt x="4118104" y="3174113"/>
+                  </a:lnTo>
+                  <a:lnTo>
+                    <a:pt x="4194573" y="3179196"/>
+                  </a:lnTo>
+                  <a:lnTo>
+                    <a:pt x="4271041" y="3183937"/>
+                  </a:lnTo>
+                  <a:lnTo>
+                    <a:pt x="4347509" y="3188357"/>
+                  </a:lnTo>
+                  <a:lnTo>
+                    <a:pt x="4423978" y="3192479"/>
+                  </a:lnTo>
+                  <a:lnTo>
+                    <a:pt x="4500446" y="3196322"/>
+                  </a:lnTo>
+                  <a:lnTo>
+                    <a:pt x="4576915" y="3199907"/>
+                  </a:lnTo>
+                  <a:lnTo>
+                    <a:pt x="4653383" y="3203249"/>
+                  </a:lnTo>
+                  <a:lnTo>
+                    <a:pt x="4729852" y="3206365"/>
+                  </a:lnTo>
+                  <a:lnTo>
+                    <a:pt x="4806320" y="3209271"/>
+                  </a:lnTo>
+                  <a:lnTo>
+                    <a:pt x="4882788" y="3211981"/>
+                  </a:lnTo>
+                  <a:lnTo>
+                    <a:pt x="4959257" y="3214508"/>
+                  </a:lnTo>
+                  <a:lnTo>
+                    <a:pt x="5035725" y="3216864"/>
+                  </a:lnTo>
+                  <a:lnTo>
+                    <a:pt x="5112194" y="3219061"/>
+                  </a:lnTo>
+                  <a:lnTo>
+                    <a:pt x="5188662" y="3221110"/>
+                  </a:lnTo>
+                  <a:lnTo>
+                    <a:pt x="5265131" y="3223021"/>
+                  </a:lnTo>
+                  <a:lnTo>
+                    <a:pt x="5341599" y="3224802"/>
+                  </a:lnTo>
+                  <a:lnTo>
+                    <a:pt x="5418068" y="3226463"/>
+                  </a:lnTo>
+                  <a:lnTo>
+                    <a:pt x="5494536" y="3228013"/>
                   </a:lnTo>
                 </a:path>
               </a:pathLst>
@@ -4290,21 +4290,21 @@
           </p:nvSpPr>
           <p:spPr>
             <a:xfrm>
-              <a:off x="817517" y="4727786"/>
-              <a:ext cx="7799693" cy="0"/>
+              <a:off x="915645" y="4684908"/>
+              <a:ext cx="7682587" cy="0"/>
             </a:xfrm>
             <a:custGeom>
               <a:avLst/>
               <a:pathLst>
-                <a:path w="7799693" h="0">
+                <a:path w="7682587" h="0">
                   <a:moveTo>
                     <a:pt x="0" y="0"/>
                   </a:moveTo>
                   <a:lnTo>
-                    <a:pt x="7799693" y="0"/>
-                  </a:lnTo>
-                  <a:lnTo>
-                    <a:pt x="7799693" y="0"/>
+                    <a:pt x="7682587" y="0"/>
+                  </a:lnTo>
+                  <a:lnTo>
+                    <a:pt x="7682587" y="0"/>
                   </a:lnTo>
                 </a:path>
               </a:pathLst>
@@ -4333,15 +4333,15 @@
           </p:nvSpPr>
           <p:spPr>
             <a:xfrm>
-              <a:off x="4203673" y="2073503"/>
-              <a:ext cx="0" cy="3649639"/>
+              <a:off x="4250960" y="2209169"/>
+              <a:ext cx="0" cy="3404141"/>
             </a:xfrm>
             <a:custGeom>
               <a:avLst/>
               <a:pathLst>
-                <a:path w="0" h="3649639">
+                <a:path w="0" h="3404141">
                   <a:moveTo>
-                    <a:pt x="0" y="3649639"/>
+                    <a:pt x="0" y="3404141"/>
                   </a:moveTo>
                   <a:lnTo>
                     <a:pt x="0" y="0"/>
@@ -4376,8 +4376,8 @@
           </p:nvSpPr>
           <p:spPr>
             <a:xfrm>
-              <a:off x="692708" y="5517199"/>
-              <a:ext cx="62179" cy="80101"/>
+              <a:off x="756929" y="5407599"/>
+              <a:ext cx="79004" cy="101955"/>
             </a:xfrm>
             <a:prstGeom prst="rect">
               <a:avLst/>
@@ -4390,7 +4390,7 @@
             <a:p>
               <a:pPr algn="l" marL="0" marR="0" indent="0">
                 <a:lnSpc>
-                  <a:spcPts val="880"/>
+                  <a:spcPts val="1120"/>
                 </a:lnSpc>
                 <a:spcBef>
                   <a:spcPts val="0"/>
@@ -4400,7 +4400,7 @@
                 </a:spcAft>
               </a:pPr>
               <a:r>
-                <a:rPr sz="880">
+                <a:rPr sz="1120">
                   <a:solidFill>
                     <a:srgbClr val="4D4D4D">
                       <a:alpha val="100000"/>
@@ -4422,8 +4422,8 @@
           </p:nvSpPr>
           <p:spPr>
             <a:xfrm>
-              <a:off x="692708" y="4687735"/>
-              <a:ext cx="62179" cy="80101"/>
+              <a:off x="756929" y="4633931"/>
+              <a:ext cx="79004" cy="101955"/>
             </a:xfrm>
             <a:prstGeom prst="rect">
               <a:avLst/>
@@ -4436,7 +4436,7 @@
             <a:p>
               <a:pPr algn="l" marL="0" marR="0" indent="0">
                 <a:lnSpc>
-                  <a:spcPts val="880"/>
+                  <a:spcPts val="1120"/>
                 </a:lnSpc>
                 <a:spcBef>
                   <a:spcPts val="0"/>
@@ -4446,7 +4446,7 @@
                 </a:spcAft>
               </a:pPr>
               <a:r>
-                <a:rPr sz="880">
+                <a:rPr sz="1120">
                   <a:solidFill>
                     <a:srgbClr val="4D4D4D">
                       <a:alpha val="100000"/>
@@ -4468,8 +4468,8 @@
           </p:nvSpPr>
           <p:spPr>
             <a:xfrm>
-              <a:off x="692708" y="3858272"/>
-              <a:ext cx="62179" cy="80101"/>
+              <a:off x="756929" y="3860262"/>
+              <a:ext cx="79004" cy="101955"/>
             </a:xfrm>
             <a:prstGeom prst="rect">
               <a:avLst/>
@@ -4482,7 +4482,7 @@
             <a:p>
               <a:pPr algn="l" marL="0" marR="0" indent="0">
                 <a:lnSpc>
-                  <a:spcPts val="880"/>
+                  <a:spcPts val="1120"/>
                 </a:lnSpc>
                 <a:spcBef>
                   <a:spcPts val="0"/>
@@ -4492,7 +4492,7 @@
                 </a:spcAft>
               </a:pPr>
               <a:r>
-                <a:rPr sz="880">
+                <a:rPr sz="1120">
                   <a:solidFill>
                     <a:srgbClr val="4D4D4D">
                       <a:alpha val="100000"/>
@@ -4514,8 +4514,8 @@
           </p:nvSpPr>
           <p:spPr>
             <a:xfrm>
-              <a:off x="692708" y="3028808"/>
-              <a:ext cx="62179" cy="80101"/>
+              <a:off x="756929" y="3086593"/>
+              <a:ext cx="79004" cy="101955"/>
             </a:xfrm>
             <a:prstGeom prst="rect">
               <a:avLst/>
@@ -4528,7 +4528,7 @@
             <a:p>
               <a:pPr algn="l" marL="0" marR="0" indent="0">
                 <a:lnSpc>
-                  <a:spcPts val="880"/>
+                  <a:spcPts val="1120"/>
                 </a:lnSpc>
                 <a:spcBef>
                   <a:spcPts val="0"/>
@@ -4538,7 +4538,7 @@
                 </a:spcAft>
               </a:pPr>
               <a:r>
-                <a:rPr sz="880">
+                <a:rPr sz="1120">
                   <a:solidFill>
                     <a:srgbClr val="4D4D4D">
                       <a:alpha val="100000"/>
@@ -4560,8 +4560,8 @@
           </p:nvSpPr>
           <p:spPr>
             <a:xfrm>
-              <a:off x="692708" y="2199345"/>
-              <a:ext cx="62179" cy="80101"/>
+              <a:off x="756929" y="2312925"/>
+              <a:ext cx="79004" cy="101955"/>
             </a:xfrm>
             <a:prstGeom prst="rect">
               <a:avLst/>
@@ -4574,7 +4574,7 @@
             <a:p>
               <a:pPr algn="l" marL="0" marR="0" indent="0">
                 <a:lnSpc>
-                  <a:spcPts val="880"/>
+                  <a:spcPts val="1120"/>
                 </a:lnSpc>
                 <a:spcBef>
                   <a:spcPts val="0"/>
@@ -4584,7 +4584,7 @@
                 </a:spcAft>
               </a:pPr>
               <a:r>
-                <a:rPr sz="880">
+                <a:rPr sz="1120">
                   <a:solidFill>
                     <a:srgbClr val="4D4D4D">
                       <a:alpha val="100000"/>
@@ -4606,8 +4606,8 @@
           </p:nvSpPr>
           <p:spPr>
             <a:xfrm>
-              <a:off x="2423864" y="5785772"/>
-              <a:ext cx="155356" cy="80101"/>
+              <a:off x="2475630" y="5693022"/>
+              <a:ext cx="197510" cy="101955"/>
             </a:xfrm>
             <a:prstGeom prst="rect">
               <a:avLst/>
@@ -4620,7 +4620,7 @@
             <a:p>
               <a:pPr algn="l" marL="0" marR="0" indent="0">
                 <a:lnSpc>
-                  <a:spcPts val="880"/>
+                  <a:spcPts val="1120"/>
                 </a:lnSpc>
                 <a:spcBef>
                   <a:spcPts val="0"/>
@@ -4630,7 +4630,7 @@
                 </a:spcAft>
               </a:pPr>
               <a:r>
-                <a:rPr sz="880">
+                <a:rPr sz="1120">
                   <a:solidFill>
                     <a:srgbClr val="4D4D4D">
                       <a:alpha val="100000"/>
@@ -4652,8 +4652,8 @@
           </p:nvSpPr>
           <p:spPr>
             <a:xfrm>
-              <a:off x="4196521" y="5785772"/>
-              <a:ext cx="155356" cy="80101"/>
+              <a:off x="4221672" y="5693022"/>
+              <a:ext cx="197510" cy="101955"/>
             </a:xfrm>
             <a:prstGeom prst="rect">
               <a:avLst/>
@@ -4666,7 +4666,7 @@
             <a:p>
               <a:pPr algn="l" marL="0" marR="0" indent="0">
                 <a:lnSpc>
-                  <a:spcPts val="880"/>
+                  <a:spcPts val="1120"/>
                 </a:lnSpc>
                 <a:spcBef>
                   <a:spcPts val="0"/>
@@ -4676,7 +4676,7 @@
                 </a:spcAft>
               </a:pPr>
               <a:r>
-                <a:rPr sz="880">
+                <a:rPr sz="1120">
                   <a:solidFill>
                     <a:srgbClr val="4D4D4D">
                       <a:alpha val="100000"/>
@@ -4698,8 +4698,8 @@
           </p:nvSpPr>
           <p:spPr>
             <a:xfrm>
-              <a:off x="5969179" y="5785772"/>
-              <a:ext cx="155356" cy="80101"/>
+              <a:off x="5967715" y="5693022"/>
+              <a:ext cx="197510" cy="101955"/>
             </a:xfrm>
             <a:prstGeom prst="rect">
               <a:avLst/>
@@ -4712,7 +4712,7 @@
             <a:p>
               <a:pPr algn="l" marL="0" marR="0" indent="0">
                 <a:lnSpc>
-                  <a:spcPts val="880"/>
+                  <a:spcPts val="1120"/>
                 </a:lnSpc>
                 <a:spcBef>
                   <a:spcPts val="0"/>
@@ -4722,7 +4722,7 @@
                 </a:spcAft>
               </a:pPr>
               <a:r>
-                <a:rPr sz="880">
+                <a:rPr sz="1120">
                   <a:solidFill>
                     <a:srgbClr val="4D4D4D">
                       <a:alpha val="100000"/>
@@ -4744,8 +4744,8 @@
           </p:nvSpPr>
           <p:spPr>
             <a:xfrm>
-              <a:off x="7741836" y="5785772"/>
-              <a:ext cx="155356" cy="80101"/>
+              <a:off x="7713757" y="5693022"/>
+              <a:ext cx="197510" cy="101955"/>
             </a:xfrm>
             <a:prstGeom prst="rect">
               <a:avLst/>
@@ -4758,7 +4758,7 @@
             <a:p>
               <a:pPr algn="l" marL="0" marR="0" indent="0">
                 <a:lnSpc>
-                  <a:spcPts val="880"/>
+                  <a:spcPts val="1120"/>
                 </a:lnSpc>
                 <a:spcBef>
                   <a:spcPts val="0"/>
@@ -4768,7 +4768,7 @@
                 </a:spcAft>
               </a:pPr>
               <a:r>
-                <a:rPr sz="880">
+                <a:rPr sz="1120">
                   <a:solidFill>
                     <a:srgbClr val="4D4D4D">
                       <a:alpha val="100000"/>
@@ -4790,8 +4790,8 @@
           </p:nvSpPr>
           <p:spPr>
             <a:xfrm>
-              <a:off x="3879271" y="5925448"/>
-              <a:ext cx="1676186" cy="100218"/>
+              <a:off x="3690153" y="5870717"/>
+              <a:ext cx="2133569" cy="127558"/>
             </a:xfrm>
             <a:prstGeom prst="rect">
               <a:avLst/>
@@ -4804,7 +4804,7 @@
             <a:p>
               <a:pPr algn="l" marL="0" marR="0" indent="0">
                 <a:lnSpc>
-                  <a:spcPts val="1100"/>
+                  <a:spcPts val="1400"/>
                 </a:lnSpc>
                 <a:spcBef>
                   <a:spcPts val="0"/>
@@ -4814,7 +4814,7 @@
                 </a:spcAft>
               </a:pPr>
               <a:r>
-                <a:rPr sz="1100">
+                <a:rPr sz="1400">
                   <a:solidFill>
                     <a:srgbClr val="000000">
                       <a:alpha val="100000"/>
@@ -4836,8 +4836,8 @@
           </p:nvSpPr>
           <p:spPr>
             <a:xfrm rot="-5400000">
-              <a:off x="68446" y="3848213"/>
-              <a:ext cx="1016904" cy="100218"/>
+              <a:off x="-37527" y="3847460"/>
+              <a:ext cx="1294150" cy="127558"/>
             </a:xfrm>
             <a:prstGeom prst="rect">
               <a:avLst/>
@@ -4850,7 +4850,7 @@
             <a:p>
               <a:pPr algn="l" marL="0" marR="0" indent="0">
                 <a:lnSpc>
-                  <a:spcPts val="1100"/>
+                  <a:spcPts val="1400"/>
                 </a:lnSpc>
                 <a:spcBef>
                   <a:spcPts val="0"/>
@@ -4860,7 +4860,7 @@
                 </a:spcAft>
               </a:pPr>
               <a:r>
-                <a:rPr sz="1100">
+                <a:rPr sz="1400">
                   <a:solidFill>
                     <a:srgbClr val="000000">
                       <a:alpha val="100000"/>
@@ -4882,8 +4882,8 @@
           </p:nvSpPr>
           <p:spPr>
             <a:xfrm>
-              <a:off x="817517" y="1896563"/>
-              <a:ext cx="4166463" cy="82021"/>
+              <a:off x="915645" y="1977589"/>
+              <a:ext cx="5556900" cy="109362"/>
             </a:xfrm>
             <a:prstGeom prst="rect">
               <a:avLst/>
@@ -4896,7 +4896,7 @@
             <a:p>
               <a:pPr algn="l" marL="0" marR="0" indent="0">
                 <a:lnSpc>
-                  <a:spcPts val="900"/>
+                  <a:spcPts val="1200"/>
                 </a:lnSpc>
                 <a:spcBef>
                   <a:spcPts val="0"/>
@@ -4906,7 +4906,7 @@
                 </a:spcAft>
               </a:pPr>
               <a:r>
-                <a:rPr sz="900">
+                <a:rPr sz="1200">
                   <a:solidFill>
                     <a:srgbClr val="404040">
                       <a:alpha val="100000"/>
@@ -4928,8 +4928,8 @@
           </p:nvSpPr>
           <p:spPr>
             <a:xfrm>
-              <a:off x="817517" y="1669789"/>
-              <a:ext cx="1769272" cy="120152"/>
+              <a:off x="915645" y="1688767"/>
+              <a:ext cx="2252350" cy="153070"/>
             </a:xfrm>
             <a:prstGeom prst="rect">
               <a:avLst/>
@@ -4942,7 +4942,7 @@
             <a:p>
               <a:pPr algn="l" marL="0" marR="0" indent="0">
                 <a:lnSpc>
-                  <a:spcPts val="1320"/>
+                  <a:spcPts val="1680"/>
                 </a:lnSpc>
                 <a:spcBef>
                   <a:spcPts val="0"/>
@@ -4952,7 +4952,7 @@
                 </a:spcAft>
               </a:pPr>
               <a:r>
-                <a:rPr sz="1320">
+                <a:rPr sz="1680">
                   <a:solidFill>
                     <a:srgbClr val="000000">
                       <a:alpha val="100000"/>
